--- a/docs/Balcao-das-Sucessoes-Apresentacao.pptx
+++ b/docs/Balcao-das-Sucessoes-Apresentacao.pptx
@@ -25,9 +25,13 @@
     <p:sldId id="273" r:id="rId19"/>
     <p:sldId id="274" r:id="rId20"/>
     <p:sldId id="275" r:id="rId21"/>
+    <p:sldId id="276" r:id="rId22"/>
+    <p:sldId id="277" r:id="rId23"/>
+    <p:sldId id="278" r:id="rId24"/>
+    <p:sldId id="279" r:id="rId25"/>
   </p:sldIdLst>
   <p:notesMasterIdLst>
-    <p:notesMasterId r:id="rId22"/>
+    <p:notesMasterId r:id="rId26"/>
   </p:notesMasterIdLst>
   <p:sldSz cx="9144000" cy="5143500"/>
   <p:notesSz cx="5143500" cy="9144000"/>
@@ -961,7 +965,7 @@
           <a:p>
             <a:r>
               <a:rPr lang="en-US" dirty="0"/>
-              <a:t>A mesma aplicação em todos os dispositivos. Os dados de cada dispositivo transferem-se por cópia de segurança.</a:t>
+              <a:t>Os relatórios usam sempre os dados atuais do dossier. O ponto de situação para o cliente existe em três línguas.</a:t>
             </a:r>
             <a:endParaRPr lang="en-US" dirty="0"/>
           </a:p>
@@ -1049,7 +1053,7 @@
           <a:p>
             <a:r>
               <a:rPr lang="en-US" dirty="0"/>
-              <a:t>Privacidade por natureza: nada sai do dispositivo. A responsabilidade pelo tratamento de dados é do escritório, com as ferramentas certas para a cumprir.</a:t>
+              <a:t>A paleta e o quadro Kanban aceleram o dia a dia; os modelos de dossier evitam responder de raiz a casos típicos.</a:t>
             </a:r>
             <a:endParaRPr lang="en-US" dirty="0"/>
           </a:p>
@@ -1137,7 +1141,7 @@
           <a:p>
             <a:r>
               <a:rPr lang="en-US" dirty="0"/>
-              <a:t>24 perguntas, 55 regras, 72 modelos de tarefa, 10 fases, 11 minutas em três línguas, 35 campos automáticos, 13 feriados nacionais mais o municipal, 55 testes automáticos executados em cada publicação.</a:t>
+              <a:t>Ponto de partida fundamentado para a conversa com o colega local; nunca substitui a validação caso a caso.</a:t>
             </a:r>
             <a:endParaRPr lang="en-US" dirty="0"/>
           </a:p>
@@ -1225,7 +1229,7 @@
           <a:p>
             <a:r>
               <a:rPr lang="en-US" dirty="0"/>
-              <a:t>Stack moderna e aberta. A publicação é automática e só acontece com os testes a passar.</a:t>
+              <a:t>O PIN protege contra acessos casuais; a cifra protege as cópias em trânsito e em repouso. Nada sai do dispositivo.</a:t>
             </a:r>
             <a:endParaRPr lang="en-US" dirty="0"/>
           </a:p>
@@ -1313,7 +1317,7 @@
           <a:p>
             <a:r>
               <a:rPr lang="en-US" dirty="0"/>
-              <a:t>Os quatro primeiros ciclos estão entregues. Os seguintes acrescentam relatórios, produtividade, segurança, módulo internacional, qualidade e entrega final.</a:t>
+              <a:t>A mesma aplicação em todos os dispositivos. Os dados de cada dispositivo transferem-se por cópia de segurança.</a:t>
             </a:r>
             <a:endParaRPr lang="en-US" dirty="0"/>
           </a:p>
@@ -1401,7 +1405,7 @@
           <a:p>
             <a:r>
               <a:rPr lang="en-US" dirty="0"/>
-              <a:t>Convite a experimentar: abrir, instalar, explorar com dados fictícios. O manual acompanha a apresentação.</a:t>
+              <a:t>Privacidade por natureza: nada sai do dispositivo. A responsabilidade pelo tratamento de dados é do escritório, com as ferramentas certas para a cumprir.</a:t>
             </a:r>
             <a:endParaRPr lang="en-US" dirty="0"/>
           </a:p>
@@ -1577,7 +1581,7 @@
           <a:p>
             <a:r>
               <a:rPr lang="en-US" dirty="0"/>
-              <a:t>Fecho e convite às perguntas.</a:t>
+              <a:t>24 perguntas, 55 regras, 72 modelos de tarefa, 13 minutas em três línguas, prazos de referência em 16 países, 94 testes unitários e 10 passos ponta a ponta em cada publicação, 0 violações de acessibilidade (axe-core, WCAG 2.2 AA) em 16 ecrãs.</a:t>
             </a:r>
             <a:endParaRPr lang="en-US" dirty="0"/>
           </a:p>
@@ -1601,6 +1605,358 @@
             <a:fld id="{F7021451-1387-4CA6-816F-3879F97B5CBC}" type="slidenum">
               <a:rPr lang="en-US"/>
               <a:t>20</a:t>
+            </a:fld>
+            <a:endParaRPr lang="en-US"/>
+          </a:p>
+        </p:txBody>
+      </p:sp>
+    </p:spTree>
+    <p:extLst>
+      <p:ext uri="{BB962C8B-B14F-4D97-AF65-F5344CB8AC3E}">
+        <p14:creationId xmlns:p14="http://schemas.microsoft.com/office/powerpoint/2010/main" val="1024086991"/>
+      </p:ext>
+    </p:extLst>
+  </p:cSld>
+  <p:clrMapOvr>
+    <a:masterClrMapping/>
+  </p:clrMapOvr>
+</p:notes>
+</file>
+
+<file path=ppt/notesSlides/notesSlide21.xml><?xml version="1.0" encoding="utf-8"?>
+<p:notes xmlns:a="http://schemas.openxmlformats.org/drawingml/2006/main" xmlns:r="http://schemas.openxmlformats.org/officeDocument/2006/relationships" xmlns:p="http://schemas.openxmlformats.org/presentationml/2006/main">
+  <p:cSld>
+    <p:spTree>
+      <p:nvGrpSpPr>
+        <p:cNvPr id="1" name=""/>
+        <p:cNvGrpSpPr/>
+        <p:nvPr/>
+      </p:nvGrpSpPr>
+      <p:grpSpPr>
+        <a:xfrm>
+          <a:off x="0" y="0"/>
+          <a:ext cx="0" cy="0"/>
+          <a:chOff x="0" y="0"/>
+          <a:chExt cx="0" cy="0"/>
+        </a:xfrm>
+      </p:grpSpPr>
+      <p:sp>
+        <p:nvSpPr>
+          <p:cNvPr id="2" name="Slide Image Placeholder 1"/>
+          <p:cNvSpPr>
+            <a:spLocks noGrp="1" noRot="1" noChangeAspect="1"/>
+          </p:cNvSpPr>
+          <p:nvPr>
+            <p:ph type="sldImg"/>
+          </p:nvPr>
+        </p:nvSpPr>
+        <p:spPr/>
+      </p:sp>
+      <p:sp>
+        <p:nvSpPr>
+          <p:cNvPr id="3" name="Notes Placeholder 2"/>
+          <p:cNvSpPr>
+            <a:spLocks noGrp="1"/>
+          </p:cNvSpPr>
+          <p:nvPr>
+            <p:ph type="body" idx="1"/>
+          </p:nvPr>
+        </p:nvSpPr>
+        <p:spPr/>
+        <p:txBody>
+          <a:bodyPr/>
+          <a:lstStyle/>
+          <a:p>
+            <a:r>
+              <a:rPr lang="en-US" dirty="0"/>
+              <a:t>Stack moderna e aberta. A publicação é automática e só acontece com os testes a passar.</a:t>
+            </a:r>
+            <a:endParaRPr lang="en-US" dirty="0"/>
+          </a:p>
+        </p:txBody>
+      </p:sp>
+      <p:sp>
+        <p:nvSpPr>
+          <p:cNvPr id="4" name="Slide Number Placeholder 3"/>
+          <p:cNvSpPr>
+            <a:spLocks noGrp="1"/>
+          </p:cNvSpPr>
+          <p:nvPr>
+            <p:ph type="sldNum" sz="quarter" idx="10"/>
+          </p:nvPr>
+        </p:nvSpPr>
+        <p:spPr/>
+        <p:txBody>
+          <a:bodyPr/>
+          <a:lstStyle/>
+          <a:p>
+            <a:fld id="{F7021451-1387-4CA6-816F-3879F97B5CBC}" type="slidenum">
+              <a:rPr lang="en-US"/>
+              <a:t>21</a:t>
+            </a:fld>
+            <a:endParaRPr lang="en-US"/>
+          </a:p>
+        </p:txBody>
+      </p:sp>
+    </p:spTree>
+    <p:extLst>
+      <p:ext uri="{BB962C8B-B14F-4D97-AF65-F5344CB8AC3E}">
+        <p14:creationId xmlns:p14="http://schemas.microsoft.com/office/powerpoint/2010/main" val="1024086991"/>
+      </p:ext>
+    </p:extLst>
+  </p:cSld>
+  <p:clrMapOvr>
+    <a:masterClrMapping/>
+  </p:clrMapOvr>
+</p:notes>
+</file>
+
+<file path=ppt/notesSlides/notesSlide22.xml><?xml version="1.0" encoding="utf-8"?>
+<p:notes xmlns:a="http://schemas.openxmlformats.org/drawingml/2006/main" xmlns:r="http://schemas.openxmlformats.org/officeDocument/2006/relationships" xmlns:p="http://schemas.openxmlformats.org/presentationml/2006/main">
+  <p:cSld>
+    <p:spTree>
+      <p:nvGrpSpPr>
+        <p:cNvPr id="1" name=""/>
+        <p:cNvGrpSpPr/>
+        <p:nvPr/>
+      </p:nvGrpSpPr>
+      <p:grpSpPr>
+        <a:xfrm>
+          <a:off x="0" y="0"/>
+          <a:ext cx="0" cy="0"/>
+          <a:chOff x="0" y="0"/>
+          <a:chExt cx="0" cy="0"/>
+        </a:xfrm>
+      </p:grpSpPr>
+      <p:sp>
+        <p:nvSpPr>
+          <p:cNvPr id="2" name="Slide Image Placeholder 1"/>
+          <p:cNvSpPr>
+            <a:spLocks noGrp="1" noRot="1" noChangeAspect="1"/>
+          </p:cNvSpPr>
+          <p:nvPr>
+            <p:ph type="sldImg"/>
+          </p:nvPr>
+        </p:nvSpPr>
+        <p:spPr/>
+      </p:sp>
+      <p:sp>
+        <p:nvSpPr>
+          <p:cNvPr id="3" name="Notes Placeholder 2"/>
+          <p:cNvSpPr>
+            <a:spLocks noGrp="1"/>
+          </p:cNvSpPr>
+          <p:nvPr>
+            <p:ph type="body" idx="1"/>
+          </p:nvPr>
+        </p:nvSpPr>
+        <p:spPr/>
+        <p:txBody>
+          <a:bodyPr/>
+          <a:lstStyle/>
+          <a:p>
+            <a:r>
+              <a:rPr lang="en-US" dirty="0"/>
+              <a:t>Dez ciclos entregues em sequência, cada um publicado com testes a passar.</a:t>
+            </a:r>
+            <a:endParaRPr lang="en-US" dirty="0"/>
+          </a:p>
+        </p:txBody>
+      </p:sp>
+      <p:sp>
+        <p:nvSpPr>
+          <p:cNvPr id="4" name="Slide Number Placeholder 3"/>
+          <p:cNvSpPr>
+            <a:spLocks noGrp="1"/>
+          </p:cNvSpPr>
+          <p:nvPr>
+            <p:ph type="sldNum" sz="quarter" idx="10"/>
+          </p:nvPr>
+        </p:nvSpPr>
+        <p:spPr/>
+        <p:txBody>
+          <a:bodyPr/>
+          <a:lstStyle/>
+          <a:p>
+            <a:fld id="{F7021451-1387-4CA6-816F-3879F97B5CBC}" type="slidenum">
+              <a:rPr lang="en-US"/>
+              <a:t>22</a:t>
+            </a:fld>
+            <a:endParaRPr lang="en-US"/>
+          </a:p>
+        </p:txBody>
+      </p:sp>
+    </p:spTree>
+    <p:extLst>
+      <p:ext uri="{BB962C8B-B14F-4D97-AF65-F5344CB8AC3E}">
+        <p14:creationId xmlns:p14="http://schemas.microsoft.com/office/powerpoint/2010/main" val="1024086991"/>
+      </p:ext>
+    </p:extLst>
+  </p:cSld>
+  <p:clrMapOvr>
+    <a:masterClrMapping/>
+  </p:clrMapOvr>
+</p:notes>
+</file>
+
+<file path=ppt/notesSlides/notesSlide23.xml><?xml version="1.0" encoding="utf-8"?>
+<p:notes xmlns:a="http://schemas.openxmlformats.org/drawingml/2006/main" xmlns:r="http://schemas.openxmlformats.org/officeDocument/2006/relationships" xmlns:p="http://schemas.openxmlformats.org/presentationml/2006/main">
+  <p:cSld>
+    <p:spTree>
+      <p:nvGrpSpPr>
+        <p:cNvPr id="1" name=""/>
+        <p:cNvGrpSpPr/>
+        <p:nvPr/>
+      </p:nvGrpSpPr>
+      <p:grpSpPr>
+        <a:xfrm>
+          <a:off x="0" y="0"/>
+          <a:ext cx="0" cy="0"/>
+          <a:chOff x="0" y="0"/>
+          <a:chExt cx="0" cy="0"/>
+        </a:xfrm>
+      </p:grpSpPr>
+      <p:sp>
+        <p:nvSpPr>
+          <p:cNvPr id="2" name="Slide Image Placeholder 1"/>
+          <p:cNvSpPr>
+            <a:spLocks noGrp="1" noRot="1" noChangeAspect="1"/>
+          </p:cNvSpPr>
+          <p:nvPr>
+            <p:ph type="sldImg"/>
+          </p:nvPr>
+        </p:nvSpPr>
+        <p:spPr/>
+      </p:sp>
+      <p:sp>
+        <p:nvSpPr>
+          <p:cNvPr id="3" name="Notes Placeholder 2"/>
+          <p:cNvSpPr>
+            <a:spLocks noGrp="1"/>
+          </p:cNvSpPr>
+          <p:nvPr>
+            <p:ph type="body" idx="1"/>
+          </p:nvPr>
+        </p:nvSpPr>
+        <p:spPr/>
+        <p:txBody>
+          <a:bodyPr/>
+          <a:lstStyle/>
+          <a:p>
+            <a:r>
+              <a:rPr lang="en-US" dirty="0"/>
+              <a:t>Convite a experimentar: abrir, instalar, explorar com dados fictícios. O manual acompanha a apresentação.</a:t>
+            </a:r>
+            <a:endParaRPr lang="en-US" dirty="0"/>
+          </a:p>
+        </p:txBody>
+      </p:sp>
+      <p:sp>
+        <p:nvSpPr>
+          <p:cNvPr id="4" name="Slide Number Placeholder 3"/>
+          <p:cNvSpPr>
+            <a:spLocks noGrp="1"/>
+          </p:cNvSpPr>
+          <p:nvPr>
+            <p:ph type="sldNum" sz="quarter" idx="10"/>
+          </p:nvPr>
+        </p:nvSpPr>
+        <p:spPr/>
+        <p:txBody>
+          <a:bodyPr/>
+          <a:lstStyle/>
+          <a:p>
+            <a:fld id="{F7021451-1387-4CA6-816F-3879F97B5CBC}" type="slidenum">
+              <a:rPr lang="en-US"/>
+              <a:t>23</a:t>
+            </a:fld>
+            <a:endParaRPr lang="en-US"/>
+          </a:p>
+        </p:txBody>
+      </p:sp>
+    </p:spTree>
+    <p:extLst>
+      <p:ext uri="{BB962C8B-B14F-4D97-AF65-F5344CB8AC3E}">
+        <p14:creationId xmlns:p14="http://schemas.microsoft.com/office/powerpoint/2010/main" val="1024086991"/>
+      </p:ext>
+    </p:extLst>
+  </p:cSld>
+  <p:clrMapOvr>
+    <a:masterClrMapping/>
+  </p:clrMapOvr>
+</p:notes>
+</file>
+
+<file path=ppt/notesSlides/notesSlide24.xml><?xml version="1.0" encoding="utf-8"?>
+<p:notes xmlns:a="http://schemas.openxmlformats.org/drawingml/2006/main" xmlns:r="http://schemas.openxmlformats.org/officeDocument/2006/relationships" xmlns:p="http://schemas.openxmlformats.org/presentationml/2006/main">
+  <p:cSld>
+    <p:spTree>
+      <p:nvGrpSpPr>
+        <p:cNvPr id="1" name=""/>
+        <p:cNvGrpSpPr/>
+        <p:nvPr/>
+      </p:nvGrpSpPr>
+      <p:grpSpPr>
+        <a:xfrm>
+          <a:off x="0" y="0"/>
+          <a:ext cx="0" cy="0"/>
+          <a:chOff x="0" y="0"/>
+          <a:chExt cx="0" cy="0"/>
+        </a:xfrm>
+      </p:grpSpPr>
+      <p:sp>
+        <p:nvSpPr>
+          <p:cNvPr id="2" name="Slide Image Placeholder 1"/>
+          <p:cNvSpPr>
+            <a:spLocks noGrp="1" noRot="1" noChangeAspect="1"/>
+          </p:cNvSpPr>
+          <p:nvPr>
+            <p:ph type="sldImg"/>
+          </p:nvPr>
+        </p:nvSpPr>
+        <p:spPr/>
+      </p:sp>
+      <p:sp>
+        <p:nvSpPr>
+          <p:cNvPr id="3" name="Notes Placeholder 2"/>
+          <p:cNvSpPr>
+            <a:spLocks noGrp="1"/>
+          </p:cNvSpPr>
+          <p:nvPr>
+            <p:ph type="body" idx="1"/>
+          </p:nvPr>
+        </p:nvSpPr>
+        <p:spPr/>
+        <p:txBody>
+          <a:bodyPr/>
+          <a:lstStyle/>
+          <a:p>
+            <a:r>
+              <a:rPr lang="en-US" dirty="0"/>
+              <a:t>Fecho e convite às perguntas.</a:t>
+            </a:r>
+            <a:endParaRPr lang="en-US" dirty="0"/>
+          </a:p>
+        </p:txBody>
+      </p:sp>
+      <p:sp>
+        <p:nvSpPr>
+          <p:cNvPr id="4" name="Slide Number Placeholder 3"/>
+          <p:cNvSpPr>
+            <a:spLocks noGrp="1"/>
+          </p:cNvSpPr>
+          <p:nvPr>
+            <p:ph type="sldNum" sz="quarter" idx="10"/>
+          </p:nvPr>
+        </p:nvSpPr>
+        <p:spPr/>
+        <p:txBody>
+          <a:bodyPr/>
+          <a:lstStyle/>
+          <a:p>
+            <a:fld id="{F7021451-1387-4CA6-816F-3879F97B5CBC}" type="slidenum">
+              <a:rPr lang="en-US"/>
+              <a:t>24</a:t>
             </a:fld>
             <a:endParaRPr lang="en-US"/>
           </a:p>
@@ -2791,7 +3147,7 @@
                 <a:ea typeface="Calibri" pitchFamily="34" charset="-122"/>
                 <a:cs typeface="Calibri" pitchFamily="34" charset="-120"/>
               </a:rPr>
-              <a:t>Apresentação · 17 de setembro de 2026</a:t>
+              <a:t>Apresentação · versão completa · 17 de setembro de 2026</a:t>
             </a:r>
             <a:endParaRPr lang="en-US" sz="1000" dirty="0"/>
           </a:p>
@@ -2891,7 +3247,7 @@
       </p:sp>
       <p:pic>
         <p:nvPicPr>
-          <p:cNvPr id="11" name="Image 1" descr="img/40-movel-visao-geral.jpg">    </p:cNvPr>
+          <p:cNvPr id="11" name="Image 1" descr="img/50-movel-visao-geral.jpg">    </p:cNvPr>
           <p:cNvPicPr>
             <a:picLocks noChangeAspect="1"/>
           </p:cNvPicPr>
@@ -4611,7 +4967,7 @@
                 <a:ea typeface="Calibri" pitchFamily="34" charset="-122"/>
                 <a:cs typeface="Calibri" pitchFamily="34" charset="-120"/>
               </a:rPr>
-              <a:t>11 minutas-base </a:t>
+              <a:t>13 minutas-base </a:t>
             </a:r>
             <a:pPr indent="0" marL="0">
               <a:spcAft>
@@ -4628,7 +4984,7 @@
                 <a:ea typeface="Calibri" pitchFamily="34" charset="-122"/>
                 <a:cs typeface="Calibri" pitchFamily="34" charset="-120"/>
               </a:rPr>
-              <a:t>em português, francês e inglês: cliente, bancos, Banco de Portugal, testamento, procuração, notaire.</a:t>
+              <a:t>em português, francês e inglês: cliente, bancos, Banco de Portugal, testamento, procuração, notaire, ponto de situação.</a:t>
             </a:r>
             <a:endParaRPr lang="en-US" sz="1150" dirty="0"/>
           </a:p>
@@ -4804,7 +5160,7 @@
                 <a:ea typeface="Calibri" pitchFamily="34" charset="-122"/>
                 <a:cs typeface="Calibri" pitchFamily="34" charset="-120"/>
               </a:rPr>
-              <a:t>SEMPRE À MÃO</a:t>
+              <a:t>RELATÓRIOS</a:t>
             </a:r>
             <a:endParaRPr lang="en-US" sz="1000" dirty="0"/>
           </a:p>
@@ -4843,7 +5199,7 @@
                 <a:ea typeface="Cambria" pitchFamily="34" charset="-122"/>
                 <a:cs typeface="Cambria" pitchFamily="34" charset="-120"/>
               </a:rPr>
-              <a:t>Instalável, offline, no computador e no telemóvel</a:t>
+              <a:t>Quatro documentos gerados a partir do dossier</a:t>
             </a:r>
             <a:endParaRPr lang="en-US" sz="2800" dirty="0"/>
           </a:p>
@@ -4936,19 +5292,19 @@
         <p:spPr>
           <a:xfrm>
             <a:off x="457200" y="1097280"/>
-            <a:ext cx="1463040" cy="3163824"/>
+            <a:ext cx="5394960" cy="3374136"/>
           </a:xfrm>
           <a:prstGeom prst="roundRect">
             <a:avLst>
-              <a:gd name="adj" fmla="val 6250"/>
+              <a:gd name="adj" fmla="val 2710"/>
             </a:avLst>
           </a:prstGeom>
           <a:solidFill>
-            <a:srgbClr val="121A36"/>
+            <a:srgbClr val="FFFFFF"/>
           </a:solidFill>
           <a:ln w="9525">
             <a:solidFill>
-              <a:srgbClr val="121A36"/>
+              <a:srgbClr val="D9DCE8"/>
             </a:solidFill>
             <a:prstDash val="solid"/>
           </a:ln>
@@ -4963,7 +5319,7 @@
       </p:sp>
       <p:pic>
         <p:nvPicPr>
-          <p:cNvPr id="7" name="Image 0" descr="img/40-movel-visao-geral.jpg">    </p:cNvPr>
+          <p:cNvPr id="7" name="Image 0" descr="img/27-relatorio-interno.jpg">    </p:cNvPr>
           <p:cNvPicPr>
             <a:picLocks noChangeAspect="1"/>
           </p:cNvPicPr>
@@ -4978,7 +5334,7 @@
         <p:spPr>
           <a:xfrm>
             <a:off x="521208" y="1161288"/>
-            <a:ext cx="1335024" cy="3035808"/>
+            <a:ext cx="5266944" cy="3246120"/>
           </a:xfrm>
           <a:prstGeom prst="rect">
             <a:avLst/>
@@ -4987,188 +5343,14 @@
       </p:pic>
       <p:sp>
         <p:nvSpPr>
-          <p:cNvPr id="8" name="Shape 5"/>
-          <p:cNvSpPr/>
-          <p:nvPr/>
-        </p:nvSpPr>
-        <p:spPr>
-          <a:xfrm>
-            <a:off x="2029968" y="1097280"/>
-            <a:ext cx="1463040" cy="3163824"/>
-          </a:xfrm>
-          <a:prstGeom prst="roundRect">
-            <a:avLst>
-              <a:gd name="adj" fmla="val 6250"/>
-            </a:avLst>
-          </a:prstGeom>
-          <a:solidFill>
-            <a:srgbClr val="121A36"/>
-          </a:solidFill>
-          <a:ln w="9525">
-            <a:solidFill>
-              <a:srgbClr val="121A36"/>
-            </a:solidFill>
-            <a:prstDash val="solid"/>
-          </a:ln>
-          <a:effectLst>
-            <a:outerShdw sx="100000" sy="100000" kx="0" ky="0" algn="bl" rotWithShape="0" blurRad="101600" dist="25400" dir="5400000">
-              <a:srgbClr val="000000">
-                <a:alpha val="16000"/>
-              </a:srgbClr>
-            </a:outerShdw>
-          </a:effectLst>
-        </p:spPr>
-      </p:sp>
-      <p:pic>
-        <p:nvPicPr>
-          <p:cNvPr id="9" name="Image 1" descr="img/41-movel-dossier.jpg">    </p:cNvPr>
-          <p:cNvPicPr>
-            <a:picLocks noChangeAspect="1"/>
-          </p:cNvPicPr>
-          <p:nvPr/>
-        </p:nvPicPr>
-        <p:blipFill>
-          <a:blip r:embed="rId2"/>
-          <a:stretch>
-            <a:fillRect/>
-          </a:stretch>
-        </p:blipFill>
-        <p:spPr>
-          <a:xfrm>
-            <a:off x="2093976" y="1161288"/>
-            <a:ext cx="1335024" cy="3035808"/>
-          </a:xfrm>
-          <a:prstGeom prst="rect">
-            <a:avLst/>
-          </a:prstGeom>
-        </p:spPr>
-      </p:pic>
-      <p:sp>
-        <p:nvSpPr>
-          <p:cNvPr id="10" name="Shape 6"/>
-          <p:cNvSpPr/>
-          <p:nvPr/>
-        </p:nvSpPr>
-        <p:spPr>
-          <a:xfrm>
-            <a:off x="3602736" y="1097280"/>
-            <a:ext cx="1463040" cy="3163824"/>
-          </a:xfrm>
-          <a:prstGeom prst="roundRect">
-            <a:avLst>
-              <a:gd name="adj" fmla="val 6250"/>
-            </a:avLst>
-          </a:prstGeom>
-          <a:solidFill>
-            <a:srgbClr val="121A36"/>
-          </a:solidFill>
-          <a:ln w="9525">
-            <a:solidFill>
-              <a:srgbClr val="121A36"/>
-            </a:solidFill>
-            <a:prstDash val="solid"/>
-          </a:ln>
-          <a:effectLst>
-            <a:outerShdw sx="100000" sy="100000" kx="0" ky="0" algn="bl" rotWithShape="0" blurRad="101600" dist="25400" dir="5400000">
-              <a:srgbClr val="000000">
-                <a:alpha val="16000"/>
-              </a:srgbClr>
-            </a:outerShdw>
-          </a:effectLst>
-        </p:spPr>
-      </p:sp>
-      <p:pic>
-        <p:nvPicPr>
-          <p:cNvPr id="11" name="Image 2" descr="img/42-movel-agenda.jpg">    </p:cNvPr>
-          <p:cNvPicPr>
-            <a:picLocks noChangeAspect="1"/>
-          </p:cNvPicPr>
-          <p:nvPr/>
-        </p:nvPicPr>
-        <p:blipFill>
-          <a:blip r:embed="rId3"/>
-          <a:stretch>
-            <a:fillRect/>
-          </a:stretch>
-        </p:blipFill>
-        <p:spPr>
-          <a:xfrm>
-            <a:off x="3666744" y="1161288"/>
-            <a:ext cx="1335024" cy="3035808"/>
-          </a:xfrm>
-          <a:prstGeom prst="rect">
-            <a:avLst/>
-          </a:prstGeom>
-        </p:spPr>
-      </p:pic>
-      <p:sp>
-        <p:nvSpPr>
-          <p:cNvPr id="12" name="Shape 7"/>
-          <p:cNvSpPr/>
-          <p:nvPr/>
-        </p:nvSpPr>
-        <p:spPr>
-          <a:xfrm>
-            <a:off x="5257800" y="1097280"/>
-            <a:ext cx="3429000" cy="2139696"/>
-          </a:xfrm>
-          <a:prstGeom prst="roundRect">
-            <a:avLst>
-              <a:gd name="adj" fmla="val 4274"/>
-            </a:avLst>
-          </a:prstGeom>
-          <a:solidFill>
-            <a:srgbClr val="121A36"/>
-          </a:solidFill>
-          <a:ln w="9525">
-            <a:solidFill>
-              <a:srgbClr val="121A36"/>
-            </a:solidFill>
-            <a:prstDash val="solid"/>
-          </a:ln>
-          <a:effectLst>
-            <a:outerShdw sx="100000" sy="100000" kx="0" ky="0" algn="bl" rotWithShape="0" blurRad="101600" dist="25400" dir="5400000">
-              <a:srgbClr val="000000">
-                <a:alpha val="16000"/>
-              </a:srgbClr>
-            </a:outerShdw>
-          </a:effectLst>
-        </p:spPr>
-      </p:sp>
-      <p:pic>
-        <p:nvPicPr>
-          <p:cNvPr id="13" name="Image 3" descr="img/30-escuro-visao-geral.jpg">    </p:cNvPr>
-          <p:cNvPicPr>
-            <a:picLocks noChangeAspect="1"/>
-          </p:cNvPicPr>
-          <p:nvPr/>
-        </p:nvPicPr>
-        <p:blipFill>
-          <a:blip r:embed="rId4"/>
-          <a:stretch>
-            <a:fillRect/>
-          </a:stretch>
-        </p:blipFill>
-        <p:spPr>
-          <a:xfrm>
-            <a:off x="5321808" y="1161288"/>
-            <a:ext cx="3300984" cy="2011680"/>
-          </a:xfrm>
-          <a:prstGeom prst="rect">
-            <a:avLst/>
-          </a:prstGeom>
-        </p:spPr>
-      </p:pic>
-      <p:sp>
-        <p:nvSpPr>
-          <p:cNvPr id="14" name="Text 8"/>
-          <p:cNvSpPr txBox="1"/>
-          <p:nvPr/>
-        </p:nvSpPr>
-        <p:spPr>
-          <a:xfrm>
-            <a:off x="5257800" y="3383280"/>
-            <a:ext cx="3429000" cy="1280160"/>
+          <p:cNvPr id="8" name="Text 5"/>
+          <p:cNvSpPr txBox="1"/>
+          <p:nvPr/>
+        </p:nvSpPr>
+        <p:spPr>
+          <a:xfrm>
+            <a:off x="6080760" y="1143000"/>
+            <a:ext cx="2651760" cy="3291840"/>
           </a:xfrm>
           <a:prstGeom prst="rect">
             <a:avLst/>
@@ -5185,7 +5367,7 @@
               <a:buChar char="•"/>
             </a:pPr>
             <a:r>
-              <a:rPr lang="en-US" sz="1100" b="1" dirty="0">
+              <a:rPr lang="en-US" sz="1150" b="1" dirty="0">
                 <a:solidFill>
                   <a:srgbClr val="1B1F3B"/>
                 </a:solidFill>
@@ -5193,16 +5375,16 @@
                 <a:ea typeface="Calibri" pitchFamily="34" charset="-122"/>
                 <a:cs typeface="Calibri" pitchFamily="34" charset="-120"/>
               </a:rPr>
-              <a:t>PWA: </a:t>
+              <a:t>Relatório interno: </a:t>
             </a:r>
             <a:pPr indent="0" marL="0">
               <a:spcAft>
-                <a:spcPts val="400"/>
+                <a:spcPts val="800"/>
               </a:spcAft>
               <a:buNone/>
             </a:pPr>
             <a:r>
-              <a:rPr lang="en-US" sz="1100" dirty="0">
+              <a:rPr lang="en-US" sz="1150" dirty="0">
                 <a:solidFill>
                   <a:srgbClr val="1B1F3B"/>
                 </a:solidFill>
@@ -5210,9 +5392,9 @@
                 <a:ea typeface="Calibri" pitchFamily="34" charset="-122"/>
                 <a:cs typeface="Calibri" pitchFamily="34" charset="-120"/>
               </a:rPr>
-              <a:t>instala-se em Windows, macOS, Android e iOS; abre em janela própria.</a:t>
-            </a:r>
-            <a:endParaRPr lang="en-US" sz="1100" dirty="0"/>
+              <a:t>estado, bloqueios, checklist por fase, interessados, património, documentos, agenda e contactos.</a:t>
+            </a:r>
+            <a:endParaRPr lang="en-US" sz="1150" dirty="0"/>
           </a:p>
           <a:p>
             <a:pPr marL="177800" indent="-177800">
@@ -5220,7 +5402,7 @@
               <a:buChar char="•"/>
             </a:pPr>
             <a:r>
-              <a:rPr lang="en-US" sz="1100" b="1" dirty="0">
+              <a:rPr lang="en-US" sz="1150" b="1" dirty="0">
                 <a:solidFill>
                   <a:srgbClr val="1B1F3B"/>
                 </a:solidFill>
@@ -5228,16 +5410,16 @@
                 <a:ea typeface="Calibri" pitchFamily="34" charset="-122"/>
                 <a:cs typeface="Calibri" pitchFamily="34" charset="-120"/>
               </a:rPr>
-              <a:t>Offline: </a:t>
+              <a:t>Ponto de situação para o cliente </a:t>
             </a:r>
             <a:pPr indent="0" marL="0">
               <a:spcAft>
-                <a:spcPts val="400"/>
+                <a:spcPts val="800"/>
               </a:spcAft>
               <a:buNone/>
             </a:pPr>
             <a:r>
-              <a:rPr lang="en-US" sz="1100" dirty="0">
+              <a:rPr lang="en-US" sz="1150" dirty="0">
                 <a:solidFill>
                   <a:srgbClr val="1B1F3B"/>
                 </a:solidFill>
@@ -5245,9 +5427,9 @@
                 <a:ea typeface="Calibri" pitchFamily="34" charset="-122"/>
                 <a:cs typeface="Calibri" pitchFamily="34" charset="-120"/>
               </a:rPr>
-              <a:t>tudo funciona sem ligação; atualizações quando escolher.</a:t>
-            </a:r>
-            <a:endParaRPr lang="en-US" sz="1100" dirty="0"/>
+              <a:t>em português, francês ou inglês, sem notas internas.</a:t>
+            </a:r>
+            <a:endParaRPr lang="en-US" sz="1150" dirty="0"/>
           </a:p>
           <a:p>
             <a:pPr marL="177800" indent="-177800">
@@ -5255,7 +5437,7 @@
               <a:buChar char="•"/>
             </a:pPr>
             <a:r>
-              <a:rPr lang="en-US" sz="1100" b="1" dirty="0">
+              <a:rPr lang="en-US" sz="1150" b="1" dirty="0">
                 <a:solidFill>
                   <a:srgbClr val="1B1F3B"/>
                 </a:solidFill>
@@ -5263,16 +5445,44 @@
                 <a:ea typeface="Calibri" pitchFamily="34" charset="-122"/>
                 <a:cs typeface="Calibri" pitchFamily="34" charset="-120"/>
               </a:rPr>
-              <a:t>Tema escuro, </a:t>
+              <a:t>Relação de bens </a:t>
+            </a:r>
+            <a:pPr indent="0" marL="0">
+              <a:buNone/>
+            </a:pPr>
+            <a:r>
+              <a:rPr lang="en-US" sz="1150" dirty="0">
+                <a:solidFill>
+                  <a:srgbClr val="1B1F3B"/>
+                </a:solidFill>
+                <a:latin typeface="Calibri" pitchFamily="34" charset="0"/>
+                <a:ea typeface="Calibri" pitchFamily="34" charset="-122"/>
+                <a:cs typeface="Calibri" pitchFamily="34" charset="-120"/>
+              </a:rPr>
+              <a:t>com verbas numeradas e elementos de identificação; </a:t>
+            </a:r>
+            <a:pPr indent="0" marL="0">
+              <a:buNone/>
+            </a:pPr>
+            <a:r>
+              <a:rPr lang="en-US" sz="1150" b="1" dirty="0">
+                <a:solidFill>
+                  <a:srgbClr val="1B1F3B"/>
+                </a:solidFill>
+                <a:latin typeface="Calibri" pitchFamily="34" charset="0"/>
+                <a:ea typeface="Calibri" pitchFamily="34" charset="-122"/>
+                <a:cs typeface="Calibri" pitchFamily="34" charset="-120"/>
+              </a:rPr>
+              <a:t>mapa de partilha </a:t>
             </a:r>
             <a:pPr indent="0" marL="0">
               <a:spcAft>
-                <a:spcPts val="400"/>
+                <a:spcPts val="800"/>
               </a:spcAft>
               <a:buNone/>
             </a:pPr>
             <a:r>
-              <a:rPr lang="en-US" sz="1100" dirty="0">
+              <a:rPr lang="en-US" sz="1150" dirty="0">
                 <a:solidFill>
                   <a:srgbClr val="1B1F3B"/>
                 </a:solidFill>
@@ -5280,9 +5490,30 @@
                 <a:ea typeface="Calibri" pitchFamily="34" charset="-122"/>
                 <a:cs typeface="Calibri" pitchFamily="34" charset="-120"/>
               </a:rPr>
-              <a:t>notificações e contador de pendentes no ícone.</a:t>
-            </a:r>
-            <a:endParaRPr lang="en-US" sz="1100" dirty="0"/>
+              <a:t>com tornas.</a:t>
+            </a:r>
+            <a:endParaRPr lang="en-US" sz="1150" dirty="0"/>
+          </a:p>
+          <a:p>
+            <a:pPr marL="177800" indent="-177800">
+              <a:spcAft>
+                <a:spcPts val="800"/>
+              </a:spcAft>
+              <a:buSzPct val="100000"/>
+              <a:buChar char="•"/>
+            </a:pPr>
+            <a:r>
+              <a:rPr lang="en-US" sz="1150" dirty="0">
+                <a:solidFill>
+                  <a:srgbClr val="1B1F3B"/>
+                </a:solidFill>
+                <a:latin typeface="Calibri" pitchFamily="34" charset="0"/>
+                <a:ea typeface="Calibri" pitchFamily="34" charset="-122"/>
+                <a:cs typeface="Calibri" pitchFamily="34" charset="-120"/>
+              </a:rPr>
+              <a:t>Word com tabelas reais, PDF, arquivo no dossier e CSV para Excel.</a:t>
+            </a:r>
+            <a:endParaRPr lang="en-US" sz="1150" dirty="0"/>
           </a:p>
         </p:txBody>
       </p:sp>
@@ -5351,7 +5582,7 @@
                 <a:ea typeface="Calibri" pitchFamily="34" charset="-122"/>
                 <a:cs typeface="Calibri" pitchFamily="34" charset="-120"/>
               </a:rPr>
-              <a:t>PRIVACIDADE E SEGURANÇA</a:t>
+              <a:t>PRODUTIVIDADE</a:t>
             </a:r>
             <a:endParaRPr lang="en-US" sz="1000" dirty="0"/>
           </a:p>
@@ -5390,7 +5621,7 @@
                 <a:ea typeface="Cambria" pitchFamily="34" charset="-122"/>
                 <a:cs typeface="Cambria" pitchFamily="34" charset="-120"/>
               </a:rPr>
-              <a:t>Os dados ficam no dispositivo do escritório</a:t>
+              <a:t>Menos cliques, mais foco</a:t>
             </a:r>
             <a:endParaRPr lang="en-US" sz="2800" dirty="0"/>
           </a:p>
@@ -5482,166 +5713,12 @@
         </p:nvSpPr>
         <p:spPr>
           <a:xfrm>
-            <a:off x="457200" y="1143000"/>
-            <a:ext cx="8229600" cy="749808"/>
+            <a:off x="457200" y="1097280"/>
+            <a:ext cx="4023360" cy="2514600"/>
           </a:xfrm>
           <a:prstGeom prst="roundRect">
             <a:avLst>
-              <a:gd name="adj" fmla="val 9756"/>
-            </a:avLst>
-          </a:prstGeom>
-          <a:solidFill>
-            <a:srgbClr val="F7F8FC"/>
-          </a:solidFill>
-          <a:ln w="9525">
-            <a:solidFill>
-              <a:srgbClr val="D9DCE8"/>
-            </a:solidFill>
-            <a:prstDash val="solid"/>
-          </a:ln>
-        </p:spPr>
-      </p:sp>
-      <p:sp>
-        <p:nvSpPr>
-          <p:cNvPr id="7" name="Shape 5"/>
-          <p:cNvSpPr/>
-          <p:nvPr/>
-        </p:nvSpPr>
-        <p:spPr>
-          <a:xfrm>
-            <a:off x="640080" y="1289304"/>
-            <a:ext cx="457200" cy="457200"/>
-          </a:xfrm>
-          <a:prstGeom prst="ellipse">
-            <a:avLst/>
-          </a:prstGeom>
-          <a:solidFill>
-            <a:srgbClr val="2D39B9"/>
-          </a:solidFill>
-          <a:ln w="12700">
-            <a:solidFill>
-              <a:srgbClr val="2D39B9"/>
-            </a:solidFill>
-            <a:prstDash val="solid"/>
-          </a:ln>
-        </p:spPr>
-      </p:sp>
-      <p:pic>
-        <p:nvPicPr>
-          <p:cNvPr id="8" name="Image 0" descr="icons/hard-drive-white.png">    </p:cNvPr>
-          <p:cNvPicPr>
-            <a:picLocks noChangeAspect="1"/>
-          </p:cNvPicPr>
-          <p:nvPr/>
-        </p:nvPicPr>
-        <p:blipFill>
-          <a:blip r:embed="rId1"/>
-          <a:stretch>
-            <a:fillRect/>
-          </a:stretch>
-        </p:blipFill>
-        <p:spPr>
-          <a:xfrm>
-            <a:off x="749808" y="1399032"/>
-            <a:ext cx="237744" cy="237744"/>
-          </a:xfrm>
-          <a:prstGeom prst="rect">
-            <a:avLst/>
-          </a:prstGeom>
-        </p:spPr>
-      </p:pic>
-      <p:sp>
-        <p:nvSpPr>
-          <p:cNvPr id="9" name="Text 6"/>
-          <p:cNvSpPr txBox="1"/>
-          <p:nvPr/>
-        </p:nvSpPr>
-        <p:spPr>
-          <a:xfrm>
-            <a:off x="1280160" y="1252728"/>
-            <a:ext cx="2377440" cy="320040"/>
-          </a:xfrm>
-          <a:prstGeom prst="rect">
-            <a:avLst/>
-          </a:prstGeom>
-          <a:noFill/>
-          <a:ln/>
-        </p:spPr>
-        <p:txBody>
-          <a:bodyPr wrap="square" lIns="0" tIns="0" rIns="0" bIns="0" rtlCol="0" anchor="t"/>
-          <a:lstStyle/>
-          <a:p>
-            <a:pPr indent="0" marL="0">
-              <a:buNone/>
-            </a:pPr>
-            <a:r>
-              <a:rPr lang="en-US" sz="1300" b="1" dirty="0">
-                <a:solidFill>
-                  <a:srgbClr val="1B1F3B"/>
-                </a:solidFill>
-                <a:latin typeface="Calibri" pitchFamily="34" charset="0"/>
-                <a:ea typeface="Calibri" pitchFamily="34" charset="-122"/>
-                <a:cs typeface="Calibri" pitchFamily="34" charset="-120"/>
-              </a:rPr>
-              <a:t>Armazenamento local</a:t>
-            </a:r>
-            <a:endParaRPr lang="en-US" sz="1300" dirty="0"/>
-          </a:p>
-        </p:txBody>
-      </p:sp>
-      <p:sp>
-        <p:nvSpPr>
-          <p:cNvPr id="10" name="Text 7"/>
-          <p:cNvSpPr txBox="1"/>
-          <p:nvPr/>
-        </p:nvSpPr>
-        <p:spPr>
-          <a:xfrm>
-            <a:off x="3657600" y="1252728"/>
-            <a:ext cx="4846320" cy="566928"/>
-          </a:xfrm>
-          <a:prstGeom prst="rect">
-            <a:avLst/>
-          </a:prstGeom>
-          <a:noFill/>
-          <a:ln/>
-        </p:spPr>
-        <p:txBody>
-          <a:bodyPr wrap="square" lIns="0" tIns="0" rIns="0" bIns="0" rtlCol="0" anchor="t"/>
-          <a:lstStyle/>
-          <a:p>
-            <a:pPr indent="0" marL="0">
-              <a:buNone/>
-            </a:pPr>
-            <a:r>
-              <a:rPr lang="en-US" sz="1100" dirty="0">
-                <a:solidFill>
-                  <a:srgbClr val="5B6180"/>
-                </a:solidFill>
-                <a:latin typeface="Calibri" pitchFamily="34" charset="0"/>
-                <a:ea typeface="Calibri" pitchFamily="34" charset="-122"/>
-                <a:cs typeface="Calibri" pitchFamily="34" charset="-120"/>
-              </a:rPr>
-              <a:t>IndexedDB no navegador, incluindo anexos. Sem contas, sem servidores, sem telemetria.</a:t>
-            </a:r>
-            <a:endParaRPr lang="en-US" sz="1100" dirty="0"/>
-          </a:p>
-        </p:txBody>
-      </p:sp>
-      <p:sp>
-        <p:nvSpPr>
-          <p:cNvPr id="11" name="Shape 8"/>
-          <p:cNvSpPr/>
-          <p:nvPr/>
-        </p:nvSpPr>
-        <p:spPr>
-          <a:xfrm>
-            <a:off x="457200" y="2011680"/>
-            <a:ext cx="8229600" cy="749808"/>
-          </a:xfrm>
-          <a:prstGeom prst="roundRect">
-            <a:avLst>
-              <a:gd name="adj" fmla="val 9756"/>
+              <a:gd name="adj" fmla="val 3636"/>
             </a:avLst>
           </a:prstGeom>
           <a:solidFill>
@@ -5653,51 +5730,33 @@
             </a:solidFill>
             <a:prstDash val="solid"/>
           </a:ln>
-        </p:spPr>
-      </p:sp>
-      <p:sp>
-        <p:nvSpPr>
-          <p:cNvPr id="12" name="Shape 9"/>
-          <p:cNvSpPr/>
-          <p:nvPr/>
-        </p:nvSpPr>
-        <p:spPr>
-          <a:xfrm>
-            <a:off x="640080" y="2157984"/>
-            <a:ext cx="457200" cy="457200"/>
-          </a:xfrm>
-          <a:prstGeom prst="ellipse">
-            <a:avLst/>
-          </a:prstGeom>
-          <a:solidFill>
-            <a:srgbClr val="2D39B9"/>
-          </a:solidFill>
-          <a:ln w="12700">
-            <a:solidFill>
-              <a:srgbClr val="2D39B9"/>
-            </a:solidFill>
-            <a:prstDash val="solid"/>
-          </a:ln>
+          <a:effectLst>
+            <a:outerShdw sx="100000" sy="100000" kx="0" ky="0" algn="bl" rotWithShape="0" blurRad="101600" dist="25400" dir="5400000">
+              <a:srgbClr val="000000">
+                <a:alpha val="16000"/>
+              </a:srgbClr>
+            </a:outerShdw>
+          </a:effectLst>
         </p:spPr>
       </p:sp>
       <p:pic>
         <p:nvPicPr>
-          <p:cNvPr id="13" name="Image 1" descr="icons/database-white.png">    </p:cNvPr>
+          <p:cNvPr id="7" name="Image 0" descr="img/33-paleta-pesquisa.jpg">    </p:cNvPr>
           <p:cNvPicPr>
             <a:picLocks noChangeAspect="1"/>
           </p:cNvPicPr>
           <p:nvPr/>
         </p:nvPicPr>
         <p:blipFill>
-          <a:blip r:embed="rId2"/>
+          <a:blip r:embed="rId1"/>
           <a:stretch>
             <a:fillRect/>
           </a:stretch>
         </p:blipFill>
         <p:spPr>
           <a:xfrm>
-            <a:off x="749808" y="2267712"/>
-            <a:ext cx="237744" cy="237744"/>
+            <a:off x="521208" y="1161288"/>
+            <a:ext cx="3895344" cy="2386584"/>
           </a:xfrm>
           <a:prstGeom prst="rect">
             <a:avLst/>
@@ -5706,250 +5765,18 @@
       </p:pic>
       <p:sp>
         <p:nvSpPr>
-          <p:cNvPr id="14" name="Text 10"/>
-          <p:cNvSpPr txBox="1"/>
-          <p:nvPr/>
-        </p:nvSpPr>
-        <p:spPr>
-          <a:xfrm>
-            <a:off x="1280160" y="2121408"/>
-            <a:ext cx="2377440" cy="320040"/>
-          </a:xfrm>
-          <a:prstGeom prst="rect">
-            <a:avLst/>
-          </a:prstGeom>
-          <a:noFill/>
-          <a:ln/>
-        </p:spPr>
-        <p:txBody>
-          <a:bodyPr wrap="square" lIns="0" tIns="0" rIns="0" bIns="0" rtlCol="0" anchor="t"/>
-          <a:lstStyle/>
-          <a:p>
-            <a:pPr indent="0" marL="0">
-              <a:buNone/>
-            </a:pPr>
-            <a:r>
-              <a:rPr lang="en-US" sz="1300" b="1" dirty="0">
-                <a:solidFill>
-                  <a:srgbClr val="1B1F3B"/>
-                </a:solidFill>
-                <a:latin typeface="Calibri" pitchFamily="34" charset="0"/>
-                <a:ea typeface="Calibri" pitchFamily="34" charset="-122"/>
-                <a:cs typeface="Calibri" pitchFamily="34" charset="-120"/>
-              </a:rPr>
-              <a:t>Cópias de segurança</a:t>
-            </a:r>
-            <a:endParaRPr lang="en-US" sz="1300" dirty="0"/>
-          </a:p>
-        </p:txBody>
-      </p:sp>
-      <p:sp>
-        <p:nvSpPr>
-          <p:cNvPr id="15" name="Text 11"/>
-          <p:cNvSpPr txBox="1"/>
-          <p:nvPr/>
-        </p:nvSpPr>
-        <p:spPr>
-          <a:xfrm>
-            <a:off x="3657600" y="2121408"/>
-            <a:ext cx="4846320" cy="566928"/>
-          </a:xfrm>
-          <a:prstGeom prst="rect">
-            <a:avLst/>
-          </a:prstGeom>
-          <a:noFill/>
-          <a:ln/>
-        </p:spPr>
-        <p:txBody>
-          <a:bodyPr wrap="square" lIns="0" tIns="0" rIns="0" bIns="0" rtlCol="0" anchor="t"/>
-          <a:lstStyle/>
-          <a:p>
-            <a:pPr indent="0" marL="0">
-              <a:buNone/>
-            </a:pPr>
-            <a:r>
-              <a:rPr lang="en-US" sz="1100" dirty="0">
-                <a:solidFill>
-                  <a:srgbClr val="5B6180"/>
-                </a:solidFill>
-                <a:latin typeface="Calibri" pitchFamily="34" charset="0"/>
-                <a:ea typeface="Calibri" pitchFamily="34" charset="-122"/>
-                <a:cs typeface="Calibri" pitchFamily="34" charset="-120"/>
-              </a:rPr>
-              <a:t>Ficheiro .json (com ou sem anexos) para guardar, transferir e restaurar — substituir ou juntar.</a:t>
-            </a:r>
-            <a:endParaRPr lang="en-US" sz="1100" dirty="0"/>
-          </a:p>
-        </p:txBody>
-      </p:sp>
-      <p:sp>
-        <p:nvSpPr>
-          <p:cNvPr id="16" name="Shape 12"/>
+          <p:cNvPr id="8" name="Shape 5"/>
           <p:cNvSpPr/>
           <p:nvPr/>
         </p:nvSpPr>
         <p:spPr>
           <a:xfrm>
-            <a:off x="457200" y="2880360"/>
-            <a:ext cx="8229600" cy="749808"/>
+            <a:off x="4663440" y="1097280"/>
+            <a:ext cx="4023360" cy="2514600"/>
           </a:xfrm>
           <a:prstGeom prst="roundRect">
             <a:avLst>
-              <a:gd name="adj" fmla="val 9756"/>
-            </a:avLst>
-          </a:prstGeom>
-          <a:solidFill>
-            <a:srgbClr val="F7F8FC"/>
-          </a:solidFill>
-          <a:ln w="9525">
-            <a:solidFill>
-              <a:srgbClr val="D9DCE8"/>
-            </a:solidFill>
-            <a:prstDash val="solid"/>
-          </a:ln>
-        </p:spPr>
-      </p:sp>
-      <p:sp>
-        <p:nvSpPr>
-          <p:cNvPr id="17" name="Shape 13"/>
-          <p:cNvSpPr/>
-          <p:nvPr/>
-        </p:nvSpPr>
-        <p:spPr>
-          <a:xfrm>
-            <a:off x="640080" y="3026664"/>
-            <a:ext cx="457200" cy="457200"/>
-          </a:xfrm>
-          <a:prstGeom prst="ellipse">
-            <a:avLst/>
-          </a:prstGeom>
-          <a:solidFill>
-            <a:srgbClr val="2D39B9"/>
-          </a:solidFill>
-          <a:ln w="12700">
-            <a:solidFill>
-              <a:srgbClr val="2D39B9"/>
-            </a:solidFill>
-            <a:prstDash val="solid"/>
-          </a:ln>
-        </p:spPr>
-      </p:sp>
-      <p:pic>
-        <p:nvPicPr>
-          <p:cNvPr id="18" name="Image 2" descr="icons/eye-off-white.png">    </p:cNvPr>
-          <p:cNvPicPr>
-            <a:picLocks noChangeAspect="1"/>
-          </p:cNvPicPr>
-          <p:nvPr/>
-        </p:nvPicPr>
-        <p:blipFill>
-          <a:blip r:embed="rId3"/>
-          <a:stretch>
-            <a:fillRect/>
-          </a:stretch>
-        </p:blipFill>
-        <p:spPr>
-          <a:xfrm>
-            <a:off x="749808" y="3136392"/>
-            <a:ext cx="237744" cy="237744"/>
-          </a:xfrm>
-          <a:prstGeom prst="rect">
-            <a:avLst/>
-          </a:prstGeom>
-        </p:spPr>
-      </p:pic>
-      <p:sp>
-        <p:nvSpPr>
-          <p:cNvPr id="19" name="Text 14"/>
-          <p:cNvSpPr txBox="1"/>
-          <p:nvPr/>
-        </p:nvSpPr>
-        <p:spPr>
-          <a:xfrm>
-            <a:off x="1280160" y="2990088"/>
-            <a:ext cx="2377440" cy="320040"/>
-          </a:xfrm>
-          <a:prstGeom prst="rect">
-            <a:avLst/>
-          </a:prstGeom>
-          <a:noFill/>
-          <a:ln/>
-        </p:spPr>
-        <p:txBody>
-          <a:bodyPr wrap="square" lIns="0" tIns="0" rIns="0" bIns="0" rtlCol="0" anchor="t"/>
-          <a:lstStyle/>
-          <a:p>
-            <a:pPr indent="0" marL="0">
-              <a:buNone/>
-            </a:pPr>
-            <a:r>
-              <a:rPr lang="en-US" sz="1300" b="1" dirty="0">
-                <a:solidFill>
-                  <a:srgbClr val="1B1F3B"/>
-                </a:solidFill>
-                <a:latin typeface="Calibri" pitchFamily="34" charset="0"/>
-                <a:ea typeface="Calibri" pitchFamily="34" charset="-122"/>
-                <a:cs typeface="Calibri" pitchFamily="34" charset="-120"/>
-              </a:rPr>
-              <a:t>Eliminação controlada</a:t>
-            </a:r>
-            <a:endParaRPr lang="en-US" sz="1300" dirty="0"/>
-          </a:p>
-        </p:txBody>
-      </p:sp>
-      <p:sp>
-        <p:nvSpPr>
-          <p:cNvPr id="20" name="Text 15"/>
-          <p:cNvSpPr txBox="1"/>
-          <p:nvPr/>
-        </p:nvSpPr>
-        <p:spPr>
-          <a:xfrm>
-            <a:off x="3657600" y="2990088"/>
-            <a:ext cx="4846320" cy="566928"/>
-          </a:xfrm>
-          <a:prstGeom prst="rect">
-            <a:avLst/>
-          </a:prstGeom>
-          <a:noFill/>
-          <a:ln/>
-        </p:spPr>
-        <p:txBody>
-          <a:bodyPr wrap="square" lIns="0" tIns="0" rIns="0" bIns="0" rtlCol="0" anchor="t"/>
-          <a:lstStyle/>
-          <a:p>
-            <a:pPr indent="0" marL="0">
-              <a:buNone/>
-            </a:pPr>
-            <a:r>
-              <a:rPr lang="en-US" sz="1100" dirty="0">
-                <a:solidFill>
-                  <a:srgbClr val="5B6180"/>
-                </a:solidFill>
-                <a:latin typeface="Calibri" pitchFamily="34" charset="0"/>
-                <a:ea typeface="Calibri" pitchFamily="34" charset="-122"/>
-                <a:cs typeface="Calibri" pitchFamily="34" charset="-120"/>
-              </a:rPr>
-              <a:t>Eliminar um dossier apaga tudo o que lhe pertence; «apagar todos os dados» limpa o dispositivo.</a:t>
-            </a:r>
-            <a:endParaRPr lang="en-US" sz="1100" dirty="0"/>
-          </a:p>
-        </p:txBody>
-      </p:sp>
-      <p:sp>
-        <p:nvSpPr>
-          <p:cNvPr id="21" name="Shape 16"/>
-          <p:cNvSpPr/>
-          <p:nvPr/>
-        </p:nvSpPr>
-        <p:spPr>
-          <a:xfrm>
-            <a:off x="457200" y="3749040"/>
-            <a:ext cx="8229600" cy="749808"/>
-          </a:xfrm>
-          <a:prstGeom prst="roundRect">
-            <a:avLst>
-              <a:gd name="adj" fmla="val 9756"/>
+              <a:gd name="adj" fmla="val 3636"/>
             </a:avLst>
           </a:prstGeom>
           <a:solidFill>
@@ -5961,51 +5788,33 @@
             </a:solidFill>
             <a:prstDash val="solid"/>
           </a:ln>
-        </p:spPr>
-      </p:sp>
-      <p:sp>
-        <p:nvSpPr>
-          <p:cNvPr id="22" name="Shape 17"/>
-          <p:cNvSpPr/>
-          <p:nvPr/>
-        </p:nvSpPr>
-        <p:spPr>
-          <a:xfrm>
-            <a:off x="640080" y="3895344"/>
-            <a:ext cx="457200" cy="457200"/>
-          </a:xfrm>
-          <a:prstGeom prst="ellipse">
-            <a:avLst/>
-          </a:prstGeom>
-          <a:solidFill>
-            <a:srgbClr val="2D39B9"/>
-          </a:solidFill>
-          <a:ln w="12700">
-            <a:solidFill>
-              <a:srgbClr val="2D39B9"/>
-            </a:solidFill>
-            <a:prstDash val="solid"/>
-          </a:ln>
+          <a:effectLst>
+            <a:outerShdw sx="100000" sy="100000" kx="0" ky="0" algn="bl" rotWithShape="0" blurRad="101600" dist="25400" dir="5400000">
+              <a:srgbClr val="000000">
+                <a:alpha val="16000"/>
+              </a:srgbClr>
+            </a:outerShdw>
+          </a:effectLst>
         </p:spPr>
       </p:sp>
       <p:pic>
         <p:nvPicPr>
-          <p:cNvPr id="23" name="Image 3" descr="icons/lock-white.png">    </p:cNvPr>
+          <p:cNvPr id="9" name="Image 1" descr="img/31-checklist-quadro.jpg">    </p:cNvPr>
           <p:cNvPicPr>
             <a:picLocks noChangeAspect="1"/>
           </p:cNvPicPr>
           <p:nvPr/>
         </p:nvPicPr>
         <p:blipFill>
-          <a:blip r:embed="rId4"/>
+          <a:blip r:embed="rId2"/>
           <a:stretch>
             <a:fillRect/>
           </a:stretch>
         </p:blipFill>
         <p:spPr>
           <a:xfrm>
-            <a:off x="749808" y="4005072"/>
-            <a:ext cx="237744" cy="237744"/>
+            <a:off x="4727448" y="1161288"/>
+            <a:ext cx="3895344" cy="2386584"/>
           </a:xfrm>
           <a:prstGeom prst="rect">
             <a:avLst/>
@@ -6014,14 +5823,14 @@
       </p:pic>
       <p:sp>
         <p:nvSpPr>
-          <p:cNvPr id="24" name="Text 18"/>
-          <p:cNvSpPr txBox="1"/>
-          <p:nvPr/>
-        </p:nvSpPr>
-        <p:spPr>
-          <a:xfrm>
-            <a:off x="1280160" y="3858768"/>
-            <a:ext cx="2377440" cy="320040"/>
+          <p:cNvPr id="10" name="Text 6"/>
+          <p:cNvSpPr txBox="1"/>
+          <p:nvPr/>
+        </p:nvSpPr>
+        <p:spPr>
+          <a:xfrm>
+            <a:off x="457200" y="3749040"/>
+            <a:ext cx="8229600" cy="914400"/>
           </a:xfrm>
           <a:prstGeom prst="rect">
             <a:avLst/>
@@ -6033,11 +5842,12 @@
           <a:bodyPr wrap="square" lIns="0" tIns="0" rIns="0" bIns="0" rtlCol="0" anchor="t"/>
           <a:lstStyle/>
           <a:p>
-            <a:pPr indent="0" marL="0">
-              <a:buNone/>
-            </a:pPr>
-            <a:r>
-              <a:rPr lang="en-US" sz="1300" b="1" dirty="0">
+            <a:pPr marL="177800" indent="-177800">
+              <a:buSzPct val="100000"/>
+              <a:buChar char="•"/>
+            </a:pPr>
+            <a:r>
+              <a:rPr lang="en-US" sz="1150" b="1" dirty="0">
                 <a:solidFill>
                   <a:srgbClr val="1B1F3B"/>
                 </a:solidFill>
@@ -6045,48 +5855,47 @@
                 <a:ea typeface="Calibri" pitchFamily="34" charset="-122"/>
                 <a:cs typeface="Calibri" pitchFamily="34" charset="-120"/>
               </a:rPr>
-              <a:t>Próximos passos</a:t>
-            </a:r>
-            <a:endParaRPr lang="en-US" sz="1300" dirty="0"/>
-          </a:p>
-        </p:txBody>
-      </p:sp>
-      <p:sp>
-        <p:nvSpPr>
-          <p:cNvPr id="25" name="Text 19"/>
-          <p:cNvSpPr txBox="1"/>
-          <p:nvPr/>
-        </p:nvSpPr>
-        <p:spPr>
-          <a:xfrm>
-            <a:off x="3657600" y="3858768"/>
-            <a:ext cx="4846320" cy="566928"/>
-          </a:xfrm>
-          <a:prstGeom prst="rect">
-            <a:avLst/>
-          </a:prstGeom>
-          <a:noFill/>
-          <a:ln/>
-        </p:spPr>
-        <p:txBody>
-          <a:bodyPr wrap="square" lIns="0" tIns="0" rIns="0" bIns="0" rtlCol="0" anchor="t"/>
-          <a:lstStyle/>
-          <a:p>
-            <a:pPr indent="0" marL="0">
-              <a:buNone/>
-            </a:pPr>
-            <a:r>
-              <a:rPr lang="en-US" sz="1100" dirty="0">
-                <a:solidFill>
-                  <a:srgbClr val="5B6180"/>
-                </a:solidFill>
-                <a:latin typeface="Calibri" pitchFamily="34" charset="0"/>
-                <a:ea typeface="Calibri" pitchFamily="34" charset="-122"/>
-                <a:cs typeface="Calibri" pitchFamily="34" charset="-120"/>
-              </a:rPr>
-              <a:t>Bloqueio por PIN, auto-bloqueio e cópias cifradas (AES-GCM) previstos no roadmap.</a:t>
-            </a:r>
-            <a:endParaRPr lang="en-US" sz="1100" dirty="0"/>
+              <a:t>Paleta de comandos (⌘K): </a:t>
+            </a:r>
+            <a:pPr indent="0" marL="0">
+              <a:spcAft>
+                <a:spcPts val="400"/>
+              </a:spcAft>
+              <a:buNone/>
+            </a:pPr>
+            <a:r>
+              <a:rPr lang="en-US" sz="1150" dirty="0">
+                <a:solidFill>
+                  <a:srgbClr val="1B1F3B"/>
+                </a:solidFill>
+                <a:latin typeface="Calibri" pitchFamily="34" charset="0"/>
+                <a:ea typeface="Calibri" pitchFamily="34" charset="-122"/>
+                <a:cs typeface="Calibri" pitchFamily="34" charset="-120"/>
+              </a:rPr>
+              <a:t>ir para qualquer sítio, abrir dossiers, tarefas e minutas, executar ações — sem acentos, por iniciais.</a:t>
+            </a:r>
+            <a:endParaRPr lang="en-US" sz="1150" dirty="0"/>
+          </a:p>
+          <a:p>
+            <a:pPr marL="177800" indent="-177800">
+              <a:spcAft>
+                <a:spcPts val="400"/>
+              </a:spcAft>
+              <a:buSzPct val="100000"/>
+              <a:buChar char="•"/>
+            </a:pPr>
+            <a:r>
+              <a:rPr lang="en-US" sz="1150" dirty="0">
+                <a:solidFill>
+                  <a:srgbClr val="1B1F3B"/>
+                </a:solidFill>
+                <a:latin typeface="Calibri" pitchFamily="34" charset="0"/>
+                <a:ea typeface="Calibri" pitchFamily="34" charset="-122"/>
+                <a:cs typeface="Calibri" pitchFamily="34" charset="-120"/>
+              </a:rPr>
+              <a:t>Quadro Kanban, ações em massa, «As minhas tarefas» por urgência, modelos de dossier e quadro de dossiers por fase.</a:t>
+            </a:r>
+            <a:endParaRPr lang="en-US" sz="1150" dirty="0"/>
           </a:p>
         </p:txBody>
       </p:sp>
@@ -6155,7 +5964,7 @@
                 <a:ea typeface="Calibri" pitchFamily="34" charset="-122"/>
                 <a:cs typeface="Calibri" pitchFamily="34" charset="-120"/>
               </a:rPr>
-              <a:t>EM NÚMEROS</a:t>
+              <a:t>INTERNACIONAL</a:t>
             </a:r>
             <a:endParaRPr lang="en-US" sz="1000" dirty="0"/>
           </a:p>
@@ -6194,7 +6003,7 @@
                 <a:ea typeface="Cambria" pitchFamily="34" charset="-122"/>
                 <a:cs typeface="Cambria" pitchFamily="34" charset="-120"/>
               </a:rPr>
-              <a:t>O que já está construído</a:t>
+              <a:t>Sucessões com ligação a outro país</a:t>
             </a:r>
             <a:endParaRPr lang="en-US" sz="2800" dirty="0"/>
           </a:p>
@@ -6286,16 +6095,16 @@
         </p:nvSpPr>
         <p:spPr>
           <a:xfrm>
-            <a:off x="457200" y="1188720"/>
-            <a:ext cx="1920240" cy="1417320"/>
+            <a:off x="457200" y="1097280"/>
+            <a:ext cx="5394960" cy="3374136"/>
           </a:xfrm>
           <a:prstGeom prst="roundRect">
             <a:avLst>
-              <a:gd name="adj" fmla="val 5161"/>
+              <a:gd name="adj" fmla="val 2710"/>
             </a:avLst>
           </a:prstGeom>
           <a:solidFill>
-            <a:srgbClr val="F7F8FC"/>
+            <a:srgbClr val="FFFFFF"/>
           </a:solidFill>
           <a:ln w="9525">
             <a:solidFill>
@@ -6303,818 +6112,198 @@
             </a:solidFill>
             <a:prstDash val="solid"/>
           </a:ln>
-        </p:spPr>
-      </p:sp>
-      <p:sp>
-        <p:nvSpPr>
-          <p:cNvPr id="7" name="Text 5"/>
-          <p:cNvSpPr txBox="1"/>
-          <p:nvPr/>
-        </p:nvSpPr>
-        <p:spPr>
-          <a:xfrm>
-            <a:off x="457200" y="1325880"/>
-            <a:ext cx="1920240" cy="731520"/>
-          </a:xfrm>
-          <a:prstGeom prst="rect">
-            <a:avLst/>
-          </a:prstGeom>
-          <a:noFill/>
-          <a:ln/>
-        </p:spPr>
-        <p:txBody>
-          <a:bodyPr wrap="square" lIns="0" tIns="0" rIns="0" bIns="0" rtlCol="0" anchor="ctr"/>
-          <a:lstStyle/>
-          <a:p>
-            <a:pPr algn="ctr" indent="0" marL="0">
-              <a:buNone/>
-            </a:pPr>
-            <a:r>
-              <a:rPr lang="en-US" sz="4400" b="1" dirty="0">
-                <a:solidFill>
-                  <a:srgbClr val="2D39B9"/>
-                </a:solidFill>
-                <a:latin typeface="Cambria" pitchFamily="34" charset="0"/>
-                <a:ea typeface="Cambria" pitchFamily="34" charset="-122"/>
-                <a:cs typeface="Cambria" pitchFamily="34" charset="-120"/>
-              </a:rPr>
-              <a:t>24</a:t>
-            </a:r>
-            <a:endParaRPr lang="en-US" sz="4400" dirty="0"/>
-          </a:p>
-        </p:txBody>
-      </p:sp>
-      <p:sp>
-        <p:nvSpPr>
-          <p:cNvPr id="8" name="Text 6"/>
-          <p:cNvSpPr txBox="1"/>
-          <p:nvPr/>
-        </p:nvSpPr>
-        <p:spPr>
-          <a:xfrm>
-            <a:off x="457200" y="2057400"/>
-            <a:ext cx="1920240" cy="365760"/>
-          </a:xfrm>
-          <a:prstGeom prst="rect">
-            <a:avLst/>
-          </a:prstGeom>
-          <a:noFill/>
-          <a:ln/>
-        </p:spPr>
-        <p:txBody>
-          <a:bodyPr wrap="square" lIns="0" tIns="0" rIns="0" bIns="0" rtlCol="0" anchor="ctr"/>
-          <a:lstStyle/>
-          <a:p>
-            <a:pPr algn="ctr" indent="0" marL="0">
-              <a:buNone/>
-            </a:pPr>
-            <a:r>
-              <a:rPr lang="en-US" sz="1200" dirty="0">
-                <a:solidFill>
-                  <a:srgbClr val="5B6180"/>
-                </a:solidFill>
-                <a:latin typeface="Calibri" pitchFamily="34" charset="0"/>
-                <a:ea typeface="Calibri" pitchFamily="34" charset="-122"/>
-                <a:cs typeface="Calibri" pitchFamily="34" charset="-120"/>
-              </a:rPr>
-              <a:t>perguntas</a:t>
-            </a:r>
-            <a:endParaRPr lang="en-US" sz="1200" dirty="0"/>
-          </a:p>
-        </p:txBody>
-      </p:sp>
-      <p:sp>
-        <p:nvSpPr>
-          <p:cNvPr id="9" name="Shape 7"/>
-          <p:cNvSpPr/>
-          <p:nvPr/>
-        </p:nvSpPr>
-        <p:spPr>
-          <a:xfrm>
-            <a:off x="2560320" y="1188720"/>
-            <a:ext cx="1920240" cy="1417320"/>
-          </a:xfrm>
-          <a:prstGeom prst="roundRect">
-            <a:avLst>
-              <a:gd name="adj" fmla="val 5161"/>
-            </a:avLst>
-          </a:prstGeom>
-          <a:solidFill>
-            <a:srgbClr val="F7F8FC"/>
-          </a:solidFill>
-          <a:ln w="9525">
-            <a:solidFill>
-              <a:srgbClr val="D9DCE8"/>
-            </a:solidFill>
-            <a:prstDash val="solid"/>
-          </a:ln>
-        </p:spPr>
-      </p:sp>
-      <p:sp>
-        <p:nvSpPr>
-          <p:cNvPr id="10" name="Text 8"/>
-          <p:cNvSpPr txBox="1"/>
-          <p:nvPr/>
-        </p:nvSpPr>
-        <p:spPr>
-          <a:xfrm>
-            <a:off x="2560320" y="1325880"/>
-            <a:ext cx="1920240" cy="731520"/>
-          </a:xfrm>
-          <a:prstGeom prst="rect">
-            <a:avLst/>
-          </a:prstGeom>
-          <a:noFill/>
-          <a:ln/>
-        </p:spPr>
-        <p:txBody>
-          <a:bodyPr wrap="square" lIns="0" tIns="0" rIns="0" bIns="0" rtlCol="0" anchor="ctr"/>
-          <a:lstStyle/>
-          <a:p>
-            <a:pPr algn="ctr" indent="0" marL="0">
-              <a:buNone/>
-            </a:pPr>
-            <a:r>
-              <a:rPr lang="en-US" sz="4400" b="1" dirty="0">
-                <a:solidFill>
-                  <a:srgbClr val="2D39B9"/>
-                </a:solidFill>
-                <a:latin typeface="Cambria" pitchFamily="34" charset="0"/>
-                <a:ea typeface="Cambria" pitchFamily="34" charset="-122"/>
-                <a:cs typeface="Cambria" pitchFamily="34" charset="-120"/>
-              </a:rPr>
-              <a:t>55</a:t>
-            </a:r>
-            <a:endParaRPr lang="en-US" sz="4400" dirty="0"/>
-          </a:p>
-        </p:txBody>
-      </p:sp>
-      <p:sp>
-        <p:nvSpPr>
-          <p:cNvPr id="11" name="Text 9"/>
-          <p:cNvSpPr txBox="1"/>
-          <p:nvPr/>
-        </p:nvSpPr>
-        <p:spPr>
-          <a:xfrm>
-            <a:off x="2560320" y="2057400"/>
-            <a:ext cx="1920240" cy="365760"/>
-          </a:xfrm>
-          <a:prstGeom prst="rect">
-            <a:avLst/>
-          </a:prstGeom>
-          <a:noFill/>
-          <a:ln/>
-        </p:spPr>
-        <p:txBody>
-          <a:bodyPr wrap="square" lIns="0" tIns="0" rIns="0" bIns="0" rtlCol="0" anchor="ctr"/>
-          <a:lstStyle/>
-          <a:p>
-            <a:pPr algn="ctr" indent="0" marL="0">
-              <a:buNone/>
-            </a:pPr>
-            <a:r>
-              <a:rPr lang="en-US" sz="1200" dirty="0">
-                <a:solidFill>
-                  <a:srgbClr val="5B6180"/>
-                </a:solidFill>
-                <a:latin typeface="Calibri" pitchFamily="34" charset="0"/>
-                <a:ea typeface="Calibri" pitchFamily="34" charset="-122"/>
-                <a:cs typeface="Calibri" pitchFamily="34" charset="-120"/>
-              </a:rPr>
-              <a:t>regras</a:t>
-            </a:r>
-            <a:endParaRPr lang="en-US" sz="1200" dirty="0"/>
-          </a:p>
-        </p:txBody>
-      </p:sp>
-      <p:sp>
-        <p:nvSpPr>
-          <p:cNvPr id="12" name="Shape 10"/>
-          <p:cNvSpPr/>
-          <p:nvPr/>
-        </p:nvSpPr>
-        <p:spPr>
-          <a:xfrm>
-            <a:off x="4663440" y="1188720"/>
-            <a:ext cx="1920240" cy="1417320"/>
-          </a:xfrm>
-          <a:prstGeom prst="roundRect">
-            <a:avLst>
-              <a:gd name="adj" fmla="val 5161"/>
-            </a:avLst>
-          </a:prstGeom>
-          <a:solidFill>
-            <a:srgbClr val="F7F8FC"/>
-          </a:solidFill>
-          <a:ln w="9525">
-            <a:solidFill>
-              <a:srgbClr val="D9DCE8"/>
-            </a:solidFill>
-            <a:prstDash val="solid"/>
-          </a:ln>
-        </p:spPr>
-      </p:sp>
-      <p:sp>
-        <p:nvSpPr>
-          <p:cNvPr id="13" name="Text 11"/>
-          <p:cNvSpPr txBox="1"/>
-          <p:nvPr/>
-        </p:nvSpPr>
-        <p:spPr>
-          <a:xfrm>
-            <a:off x="4663440" y="1325880"/>
-            <a:ext cx="1920240" cy="731520"/>
-          </a:xfrm>
-          <a:prstGeom prst="rect">
-            <a:avLst/>
-          </a:prstGeom>
-          <a:noFill/>
-          <a:ln/>
-        </p:spPr>
-        <p:txBody>
-          <a:bodyPr wrap="square" lIns="0" tIns="0" rIns="0" bIns="0" rtlCol="0" anchor="ctr"/>
-          <a:lstStyle/>
-          <a:p>
-            <a:pPr algn="ctr" indent="0" marL="0">
-              <a:buNone/>
-            </a:pPr>
-            <a:r>
-              <a:rPr lang="en-US" sz="4400" b="1" dirty="0">
-                <a:solidFill>
-                  <a:srgbClr val="2D39B9"/>
-                </a:solidFill>
-                <a:latin typeface="Cambria" pitchFamily="34" charset="0"/>
-                <a:ea typeface="Cambria" pitchFamily="34" charset="-122"/>
-                <a:cs typeface="Cambria" pitchFamily="34" charset="-120"/>
-              </a:rPr>
-              <a:t>72</a:t>
-            </a:r>
-            <a:endParaRPr lang="en-US" sz="4400" dirty="0"/>
-          </a:p>
-        </p:txBody>
-      </p:sp>
-      <p:sp>
-        <p:nvSpPr>
-          <p:cNvPr id="14" name="Text 12"/>
-          <p:cNvSpPr txBox="1"/>
-          <p:nvPr/>
-        </p:nvSpPr>
-        <p:spPr>
-          <a:xfrm>
-            <a:off x="4663440" y="2057400"/>
-            <a:ext cx="1920240" cy="365760"/>
-          </a:xfrm>
-          <a:prstGeom prst="rect">
-            <a:avLst/>
-          </a:prstGeom>
-          <a:noFill/>
-          <a:ln/>
-        </p:spPr>
-        <p:txBody>
-          <a:bodyPr wrap="square" lIns="0" tIns="0" rIns="0" bIns="0" rtlCol="0" anchor="ctr"/>
-          <a:lstStyle/>
-          <a:p>
-            <a:pPr algn="ctr" indent="0" marL="0">
-              <a:buNone/>
-            </a:pPr>
-            <a:r>
-              <a:rPr lang="en-US" sz="1200" dirty="0">
-                <a:solidFill>
-                  <a:srgbClr val="5B6180"/>
-                </a:solidFill>
-                <a:latin typeface="Calibri" pitchFamily="34" charset="0"/>
-                <a:ea typeface="Calibri" pitchFamily="34" charset="-122"/>
-                <a:cs typeface="Calibri" pitchFamily="34" charset="-120"/>
-              </a:rPr>
-              <a:t>tarefas</a:t>
-            </a:r>
-            <a:endParaRPr lang="en-US" sz="1200" dirty="0"/>
-          </a:p>
-        </p:txBody>
-      </p:sp>
-      <p:sp>
-        <p:nvSpPr>
-          <p:cNvPr id="15" name="Shape 13"/>
-          <p:cNvSpPr/>
-          <p:nvPr/>
-        </p:nvSpPr>
-        <p:spPr>
-          <a:xfrm>
-            <a:off x="6766560" y="1188720"/>
-            <a:ext cx="1920240" cy="1417320"/>
-          </a:xfrm>
-          <a:prstGeom prst="roundRect">
-            <a:avLst>
-              <a:gd name="adj" fmla="val 5161"/>
-            </a:avLst>
-          </a:prstGeom>
-          <a:solidFill>
-            <a:srgbClr val="F7F8FC"/>
-          </a:solidFill>
-          <a:ln w="9525">
-            <a:solidFill>
-              <a:srgbClr val="D9DCE8"/>
-            </a:solidFill>
-            <a:prstDash val="solid"/>
-          </a:ln>
-        </p:spPr>
-      </p:sp>
-      <p:sp>
-        <p:nvSpPr>
-          <p:cNvPr id="16" name="Text 14"/>
-          <p:cNvSpPr txBox="1"/>
-          <p:nvPr/>
-        </p:nvSpPr>
-        <p:spPr>
-          <a:xfrm>
-            <a:off x="6766560" y="1325880"/>
-            <a:ext cx="1920240" cy="731520"/>
-          </a:xfrm>
-          <a:prstGeom prst="rect">
-            <a:avLst/>
-          </a:prstGeom>
-          <a:noFill/>
-          <a:ln/>
-        </p:spPr>
-        <p:txBody>
-          <a:bodyPr wrap="square" lIns="0" tIns="0" rIns="0" bIns="0" rtlCol="0" anchor="ctr"/>
-          <a:lstStyle/>
-          <a:p>
-            <a:pPr algn="ctr" indent="0" marL="0">
-              <a:buNone/>
-            </a:pPr>
-            <a:r>
-              <a:rPr lang="en-US" sz="4400" b="1" dirty="0">
-                <a:solidFill>
-                  <a:srgbClr val="2D39B9"/>
-                </a:solidFill>
-                <a:latin typeface="Cambria" pitchFamily="34" charset="0"/>
-                <a:ea typeface="Cambria" pitchFamily="34" charset="-122"/>
-                <a:cs typeface="Cambria" pitchFamily="34" charset="-120"/>
-              </a:rPr>
-              <a:t>10</a:t>
-            </a:r>
-            <a:endParaRPr lang="en-US" sz="4400" dirty="0"/>
-          </a:p>
-        </p:txBody>
-      </p:sp>
-      <p:sp>
-        <p:nvSpPr>
-          <p:cNvPr id="17" name="Text 15"/>
-          <p:cNvSpPr txBox="1"/>
-          <p:nvPr/>
-        </p:nvSpPr>
-        <p:spPr>
-          <a:xfrm>
-            <a:off x="6766560" y="2057400"/>
-            <a:ext cx="1920240" cy="365760"/>
-          </a:xfrm>
-          <a:prstGeom prst="rect">
-            <a:avLst/>
-          </a:prstGeom>
-          <a:noFill/>
-          <a:ln/>
-        </p:spPr>
-        <p:txBody>
-          <a:bodyPr wrap="square" lIns="0" tIns="0" rIns="0" bIns="0" rtlCol="0" anchor="ctr"/>
-          <a:lstStyle/>
-          <a:p>
-            <a:pPr algn="ctr" indent="0" marL="0">
-              <a:buNone/>
-            </a:pPr>
-            <a:r>
-              <a:rPr lang="en-US" sz="1200" dirty="0">
-                <a:solidFill>
-                  <a:srgbClr val="5B6180"/>
-                </a:solidFill>
-                <a:latin typeface="Calibri" pitchFamily="34" charset="0"/>
-                <a:ea typeface="Calibri" pitchFamily="34" charset="-122"/>
-                <a:cs typeface="Calibri" pitchFamily="34" charset="-120"/>
-              </a:rPr>
-              <a:t>fases</a:t>
-            </a:r>
-            <a:endParaRPr lang="en-US" sz="1200" dirty="0"/>
-          </a:p>
-        </p:txBody>
-      </p:sp>
-      <p:sp>
-        <p:nvSpPr>
-          <p:cNvPr id="18" name="Shape 16"/>
-          <p:cNvSpPr/>
-          <p:nvPr/>
-        </p:nvSpPr>
-        <p:spPr>
-          <a:xfrm>
-            <a:off x="457200" y="2834640"/>
-            <a:ext cx="1920240" cy="1417320"/>
-          </a:xfrm>
-          <a:prstGeom prst="roundRect">
-            <a:avLst>
-              <a:gd name="adj" fmla="val 5161"/>
-            </a:avLst>
-          </a:prstGeom>
-          <a:solidFill>
-            <a:srgbClr val="F7F8FC"/>
-          </a:solidFill>
-          <a:ln w="9525">
-            <a:solidFill>
-              <a:srgbClr val="D9DCE8"/>
-            </a:solidFill>
-            <a:prstDash val="solid"/>
-          </a:ln>
-        </p:spPr>
-      </p:sp>
-      <p:sp>
-        <p:nvSpPr>
-          <p:cNvPr id="19" name="Text 17"/>
-          <p:cNvSpPr txBox="1"/>
-          <p:nvPr/>
-        </p:nvSpPr>
-        <p:spPr>
-          <a:xfrm>
-            <a:off x="457200" y="2971800"/>
-            <a:ext cx="1920240" cy="731520"/>
-          </a:xfrm>
-          <a:prstGeom prst="rect">
-            <a:avLst/>
-          </a:prstGeom>
-          <a:noFill/>
-          <a:ln/>
-        </p:spPr>
-        <p:txBody>
-          <a:bodyPr wrap="square" lIns="0" tIns="0" rIns="0" bIns="0" rtlCol="0" anchor="ctr"/>
-          <a:lstStyle/>
-          <a:p>
-            <a:pPr algn="ctr" indent="0" marL="0">
-              <a:buNone/>
-            </a:pPr>
-            <a:r>
-              <a:rPr lang="en-US" sz="4400" b="1" dirty="0">
-                <a:solidFill>
-                  <a:srgbClr val="2D39B9"/>
-                </a:solidFill>
-                <a:latin typeface="Cambria" pitchFamily="34" charset="0"/>
-                <a:ea typeface="Cambria" pitchFamily="34" charset="-122"/>
-                <a:cs typeface="Cambria" pitchFamily="34" charset="-120"/>
-              </a:rPr>
-              <a:t>11</a:t>
-            </a:r>
-            <a:endParaRPr lang="en-US" sz="4400" dirty="0"/>
-          </a:p>
-        </p:txBody>
-      </p:sp>
-      <p:sp>
-        <p:nvSpPr>
-          <p:cNvPr id="20" name="Text 18"/>
-          <p:cNvSpPr txBox="1"/>
-          <p:nvPr/>
-        </p:nvSpPr>
-        <p:spPr>
-          <a:xfrm>
-            <a:off x="457200" y="3703320"/>
-            <a:ext cx="1920240" cy="365760"/>
-          </a:xfrm>
-          <a:prstGeom prst="rect">
-            <a:avLst/>
-          </a:prstGeom>
-          <a:noFill/>
-          <a:ln/>
-        </p:spPr>
-        <p:txBody>
-          <a:bodyPr wrap="square" lIns="0" tIns="0" rIns="0" bIns="0" rtlCol="0" anchor="ctr"/>
-          <a:lstStyle/>
-          <a:p>
-            <a:pPr algn="ctr" indent="0" marL="0">
-              <a:buNone/>
-            </a:pPr>
-            <a:r>
-              <a:rPr lang="en-US" sz="1200" dirty="0">
-                <a:solidFill>
-                  <a:srgbClr val="5B6180"/>
-                </a:solidFill>
-                <a:latin typeface="Calibri" pitchFamily="34" charset="0"/>
-                <a:ea typeface="Calibri" pitchFamily="34" charset="-122"/>
-                <a:cs typeface="Calibri" pitchFamily="34" charset="-120"/>
-              </a:rPr>
-              <a:t>minutas</a:t>
-            </a:r>
-            <a:endParaRPr lang="en-US" sz="1200" dirty="0"/>
-          </a:p>
-        </p:txBody>
-      </p:sp>
-      <p:sp>
-        <p:nvSpPr>
-          <p:cNvPr id="21" name="Shape 19"/>
-          <p:cNvSpPr/>
-          <p:nvPr/>
-        </p:nvSpPr>
-        <p:spPr>
-          <a:xfrm>
-            <a:off x="2560320" y="2834640"/>
-            <a:ext cx="1920240" cy="1417320"/>
-          </a:xfrm>
-          <a:prstGeom prst="roundRect">
-            <a:avLst>
-              <a:gd name="adj" fmla="val 5161"/>
-            </a:avLst>
-          </a:prstGeom>
-          <a:solidFill>
-            <a:srgbClr val="F7F8FC"/>
-          </a:solidFill>
-          <a:ln w="9525">
-            <a:solidFill>
-              <a:srgbClr val="D9DCE8"/>
-            </a:solidFill>
-            <a:prstDash val="solid"/>
-          </a:ln>
-        </p:spPr>
-      </p:sp>
-      <p:sp>
-        <p:nvSpPr>
-          <p:cNvPr id="22" name="Text 20"/>
-          <p:cNvSpPr txBox="1"/>
-          <p:nvPr/>
-        </p:nvSpPr>
-        <p:spPr>
-          <a:xfrm>
-            <a:off x="2560320" y="2971800"/>
-            <a:ext cx="1920240" cy="731520"/>
-          </a:xfrm>
-          <a:prstGeom prst="rect">
-            <a:avLst/>
-          </a:prstGeom>
-          <a:noFill/>
-          <a:ln/>
-        </p:spPr>
-        <p:txBody>
-          <a:bodyPr wrap="square" lIns="0" tIns="0" rIns="0" bIns="0" rtlCol="0" anchor="ctr"/>
-          <a:lstStyle/>
-          <a:p>
-            <a:pPr algn="ctr" indent="0" marL="0">
-              <a:buNone/>
-            </a:pPr>
-            <a:r>
-              <a:rPr lang="en-US" sz="4400" b="1" dirty="0">
-                <a:solidFill>
-                  <a:srgbClr val="2D39B9"/>
-                </a:solidFill>
-                <a:latin typeface="Cambria" pitchFamily="34" charset="0"/>
-                <a:ea typeface="Cambria" pitchFamily="34" charset="-122"/>
-                <a:cs typeface="Cambria" pitchFamily="34" charset="-120"/>
-              </a:rPr>
-              <a:t>35</a:t>
-            </a:r>
-            <a:endParaRPr lang="en-US" sz="4400" dirty="0"/>
-          </a:p>
-        </p:txBody>
-      </p:sp>
-      <p:sp>
-        <p:nvSpPr>
-          <p:cNvPr id="23" name="Text 21"/>
-          <p:cNvSpPr txBox="1"/>
-          <p:nvPr/>
-        </p:nvSpPr>
-        <p:spPr>
-          <a:xfrm>
-            <a:off x="2560320" y="3703320"/>
-            <a:ext cx="1920240" cy="365760"/>
-          </a:xfrm>
-          <a:prstGeom prst="rect">
-            <a:avLst/>
-          </a:prstGeom>
-          <a:noFill/>
-          <a:ln/>
-        </p:spPr>
-        <p:txBody>
-          <a:bodyPr wrap="square" lIns="0" tIns="0" rIns="0" bIns="0" rtlCol="0" anchor="ctr"/>
-          <a:lstStyle/>
-          <a:p>
-            <a:pPr algn="ctr" indent="0" marL="0">
-              <a:buNone/>
-            </a:pPr>
-            <a:r>
-              <a:rPr lang="en-US" sz="1200" dirty="0">
-                <a:solidFill>
-                  <a:srgbClr val="5B6180"/>
-                </a:solidFill>
-                <a:latin typeface="Calibri" pitchFamily="34" charset="0"/>
-                <a:ea typeface="Calibri" pitchFamily="34" charset="-122"/>
-                <a:cs typeface="Calibri" pitchFamily="34" charset="-120"/>
-              </a:rPr>
-              <a:t>campos</a:t>
-            </a:r>
-            <a:endParaRPr lang="en-US" sz="1200" dirty="0"/>
-          </a:p>
-        </p:txBody>
-      </p:sp>
-      <p:sp>
-        <p:nvSpPr>
-          <p:cNvPr id="24" name="Shape 22"/>
-          <p:cNvSpPr/>
-          <p:nvPr/>
-        </p:nvSpPr>
-        <p:spPr>
-          <a:xfrm>
-            <a:off x="4663440" y="2834640"/>
-            <a:ext cx="1920240" cy="1417320"/>
-          </a:xfrm>
-          <a:prstGeom prst="roundRect">
-            <a:avLst>
-              <a:gd name="adj" fmla="val 5161"/>
-            </a:avLst>
-          </a:prstGeom>
-          <a:solidFill>
-            <a:srgbClr val="F7F8FC"/>
-          </a:solidFill>
-          <a:ln w="9525">
-            <a:solidFill>
-              <a:srgbClr val="D9DCE8"/>
-            </a:solidFill>
-            <a:prstDash val="solid"/>
-          </a:ln>
-        </p:spPr>
-      </p:sp>
-      <p:sp>
-        <p:nvSpPr>
-          <p:cNvPr id="25" name="Text 23"/>
-          <p:cNvSpPr txBox="1"/>
-          <p:nvPr/>
-        </p:nvSpPr>
-        <p:spPr>
-          <a:xfrm>
-            <a:off x="4663440" y="2971800"/>
-            <a:ext cx="1920240" cy="731520"/>
-          </a:xfrm>
-          <a:prstGeom prst="rect">
-            <a:avLst/>
-          </a:prstGeom>
-          <a:noFill/>
-          <a:ln/>
-        </p:spPr>
-        <p:txBody>
-          <a:bodyPr wrap="square" lIns="0" tIns="0" rIns="0" bIns="0" rtlCol="0" anchor="ctr"/>
-          <a:lstStyle/>
-          <a:p>
-            <a:pPr algn="ctr" indent="0" marL="0">
-              <a:buNone/>
-            </a:pPr>
-            <a:r>
-              <a:rPr lang="en-US" sz="4400" b="1" dirty="0">
-                <a:solidFill>
-                  <a:srgbClr val="2D39B9"/>
-                </a:solidFill>
-                <a:latin typeface="Cambria" pitchFamily="34" charset="0"/>
-                <a:ea typeface="Cambria" pitchFamily="34" charset="-122"/>
-                <a:cs typeface="Cambria" pitchFamily="34" charset="-120"/>
-              </a:rPr>
-              <a:t>13</a:t>
-            </a:r>
-            <a:endParaRPr lang="en-US" sz="4400" dirty="0"/>
-          </a:p>
-        </p:txBody>
-      </p:sp>
-      <p:sp>
-        <p:nvSpPr>
-          <p:cNvPr id="26" name="Text 24"/>
-          <p:cNvSpPr txBox="1"/>
-          <p:nvPr/>
-        </p:nvSpPr>
-        <p:spPr>
-          <a:xfrm>
-            <a:off x="4663440" y="3703320"/>
-            <a:ext cx="1920240" cy="365760"/>
-          </a:xfrm>
-          <a:prstGeom prst="rect">
-            <a:avLst/>
-          </a:prstGeom>
-          <a:noFill/>
-          <a:ln/>
-        </p:spPr>
-        <p:txBody>
-          <a:bodyPr wrap="square" lIns="0" tIns="0" rIns="0" bIns="0" rtlCol="0" anchor="ctr"/>
-          <a:lstStyle/>
-          <a:p>
-            <a:pPr algn="ctr" indent="0" marL="0">
-              <a:buNone/>
-            </a:pPr>
-            <a:r>
-              <a:rPr lang="en-US" sz="1200" dirty="0">
-                <a:solidFill>
-                  <a:srgbClr val="5B6180"/>
-                </a:solidFill>
-                <a:latin typeface="Calibri" pitchFamily="34" charset="0"/>
-                <a:ea typeface="Calibri" pitchFamily="34" charset="-122"/>
-                <a:cs typeface="Calibri" pitchFamily="34" charset="-120"/>
-              </a:rPr>
-              <a:t>feriados</a:t>
-            </a:r>
-            <a:endParaRPr lang="en-US" sz="1200" dirty="0"/>
-          </a:p>
-        </p:txBody>
-      </p:sp>
-      <p:sp>
-        <p:nvSpPr>
-          <p:cNvPr id="27" name="Shape 25"/>
-          <p:cNvSpPr/>
-          <p:nvPr/>
-        </p:nvSpPr>
-        <p:spPr>
-          <a:xfrm>
-            <a:off x="6766560" y="2834640"/>
-            <a:ext cx="1920240" cy="1417320"/>
-          </a:xfrm>
-          <a:prstGeom prst="roundRect">
-            <a:avLst>
-              <a:gd name="adj" fmla="val 5161"/>
-            </a:avLst>
-          </a:prstGeom>
-          <a:solidFill>
-            <a:srgbClr val="F7F8FC"/>
-          </a:solidFill>
-          <a:ln w="9525">
-            <a:solidFill>
-              <a:srgbClr val="D9DCE8"/>
-            </a:solidFill>
-            <a:prstDash val="solid"/>
-          </a:ln>
-        </p:spPr>
-      </p:sp>
-      <p:sp>
-        <p:nvSpPr>
-          <p:cNvPr id="28" name="Text 26"/>
-          <p:cNvSpPr txBox="1"/>
-          <p:nvPr/>
-        </p:nvSpPr>
-        <p:spPr>
-          <a:xfrm>
-            <a:off x="6766560" y="2971800"/>
-            <a:ext cx="1920240" cy="731520"/>
-          </a:xfrm>
-          <a:prstGeom prst="rect">
-            <a:avLst/>
-          </a:prstGeom>
-          <a:noFill/>
-          <a:ln/>
-        </p:spPr>
-        <p:txBody>
-          <a:bodyPr wrap="square" lIns="0" tIns="0" rIns="0" bIns="0" rtlCol="0" anchor="ctr"/>
-          <a:lstStyle/>
-          <a:p>
-            <a:pPr algn="ctr" indent="0" marL="0">
-              <a:buNone/>
-            </a:pPr>
-            <a:r>
-              <a:rPr lang="en-US" sz="4400" b="1" dirty="0">
-                <a:solidFill>
-                  <a:srgbClr val="2D39B9"/>
-                </a:solidFill>
-                <a:latin typeface="Cambria" pitchFamily="34" charset="0"/>
-                <a:ea typeface="Cambria" pitchFamily="34" charset="-122"/>
-                <a:cs typeface="Cambria" pitchFamily="34" charset="-120"/>
-              </a:rPr>
-              <a:t>55</a:t>
-            </a:r>
-            <a:endParaRPr lang="en-US" sz="4400" dirty="0"/>
-          </a:p>
-        </p:txBody>
-      </p:sp>
-      <p:sp>
-        <p:nvSpPr>
-          <p:cNvPr id="29" name="Text 27"/>
-          <p:cNvSpPr txBox="1"/>
-          <p:nvPr/>
-        </p:nvSpPr>
-        <p:spPr>
-          <a:xfrm>
-            <a:off x="6766560" y="3703320"/>
-            <a:ext cx="1920240" cy="365760"/>
-          </a:xfrm>
-          <a:prstGeom prst="rect">
-            <a:avLst/>
-          </a:prstGeom>
-          <a:noFill/>
-          <a:ln/>
-        </p:spPr>
-        <p:txBody>
-          <a:bodyPr wrap="square" lIns="0" tIns="0" rIns="0" bIns="0" rtlCol="0" anchor="ctr"/>
-          <a:lstStyle/>
-          <a:p>
-            <a:pPr algn="ctr" indent="0" marL="0">
-              <a:buNone/>
-            </a:pPr>
-            <a:r>
-              <a:rPr lang="en-US" sz="1200" dirty="0">
-                <a:solidFill>
-                  <a:srgbClr val="5B6180"/>
-                </a:solidFill>
-                <a:latin typeface="Calibri" pitchFamily="34" charset="0"/>
-                <a:ea typeface="Calibri" pitchFamily="34" charset="-122"/>
-                <a:cs typeface="Calibri" pitchFamily="34" charset="-120"/>
-              </a:rPr>
-              <a:t>testes</a:t>
-            </a:r>
-            <a:endParaRPr lang="en-US" sz="1200" dirty="0"/>
+          <a:effectLst>
+            <a:outerShdw sx="100000" sy="100000" kx="0" ky="0" algn="bl" rotWithShape="0" blurRad="101600" dist="25400" dir="5400000">
+              <a:srgbClr val="000000">
+                <a:alpha val="16000"/>
+              </a:srgbClr>
+            </a:outerShdw>
+          </a:effectLst>
+        </p:spPr>
+      </p:sp>
+      <p:pic>
+        <p:nvPicPr>
+          <p:cNvPr id="7" name="Image 0" descr="img/30-internacional.jpg">    </p:cNvPr>
+          <p:cNvPicPr>
+            <a:picLocks noChangeAspect="1"/>
+          </p:cNvPicPr>
+          <p:nvPr/>
+        </p:nvPicPr>
+        <p:blipFill>
+          <a:blip r:embed="rId1"/>
+          <a:stretch>
+            <a:fillRect/>
+          </a:stretch>
+        </p:blipFill>
+        <p:spPr>
+          <a:xfrm>
+            <a:off x="521208" y="1161288"/>
+            <a:ext cx="5266944" cy="3246120"/>
+          </a:xfrm>
+          <a:prstGeom prst="rect">
+            <a:avLst/>
+          </a:prstGeom>
+        </p:spPr>
+      </p:pic>
+      <p:sp>
+        <p:nvSpPr>
+          <p:cNvPr id="8" name="Text 5"/>
+          <p:cNvSpPr txBox="1"/>
+          <p:nvPr/>
+        </p:nvSpPr>
+        <p:spPr>
+          <a:xfrm>
+            <a:off x="6080760" y="1143000"/>
+            <a:ext cx="2651760" cy="3291840"/>
+          </a:xfrm>
+          <a:prstGeom prst="rect">
+            <a:avLst/>
+          </a:prstGeom>
+          <a:noFill/>
+          <a:ln/>
+        </p:spPr>
+        <p:txBody>
+          <a:bodyPr wrap="square" lIns="0" tIns="0" rIns="0" bIns="0" rtlCol="0" anchor="t"/>
+          <a:lstStyle/>
+          <a:p>
+            <a:pPr marL="177800" indent="-177800">
+              <a:buSzPct val="100000"/>
+              <a:buChar char="•"/>
+            </a:pPr>
+            <a:r>
+              <a:rPr lang="en-US" sz="1150" b="1" dirty="0">
+                <a:solidFill>
+                  <a:srgbClr val="1B1F3B"/>
+                </a:solidFill>
+                <a:latin typeface="Calibri" pitchFamily="34" charset="0"/>
+                <a:ea typeface="Calibri" pitchFamily="34" charset="-122"/>
+                <a:cs typeface="Calibri" pitchFamily="34" charset="-120"/>
+              </a:rPr>
+              <a:t>Lei aplicável e competência </a:t>
+            </a:r>
+            <a:pPr indent="0" marL="0">
+              <a:spcAft>
+                <a:spcPts val="800"/>
+              </a:spcAft>
+              <a:buNone/>
+            </a:pPr>
+            <a:r>
+              <a:rPr lang="en-US" sz="1150" dirty="0">
+                <a:solidFill>
+                  <a:srgbClr val="1B1F3B"/>
+                </a:solidFill>
+                <a:latin typeface="Calibri" pitchFamily="34" charset="0"/>
+                <a:ea typeface="Calibri" pitchFamily="34" charset="-122"/>
+                <a:cs typeface="Calibri" pitchFamily="34" charset="-120"/>
+              </a:rPr>
+              <a:t>segundo o Regulamento (UE) 650/2012, explicadas passo a passo com os artigos.</a:t>
+            </a:r>
+            <a:endParaRPr lang="en-US" sz="1150" dirty="0"/>
+          </a:p>
+          <a:p>
+            <a:pPr marL="177800" indent="-177800">
+              <a:buSzPct val="100000"/>
+              <a:buChar char="•"/>
+            </a:pPr>
+            <a:r>
+              <a:rPr lang="en-US" sz="1150" b="1" dirty="0">
+                <a:solidFill>
+                  <a:srgbClr val="1B1F3B"/>
+                </a:solidFill>
+                <a:latin typeface="Calibri" pitchFamily="34" charset="0"/>
+                <a:ea typeface="Calibri" pitchFamily="34" charset="-122"/>
+                <a:cs typeface="Calibri" pitchFamily="34" charset="-120"/>
+              </a:rPr>
+              <a:t>Certificado Sucessório Europeu: </a:t>
+            </a:r>
+            <a:pPr indent="0" marL="0">
+              <a:spcAft>
+                <a:spcPts val="800"/>
+              </a:spcAft>
+              <a:buNone/>
+            </a:pPr>
+            <a:r>
+              <a:rPr lang="en-US" sz="1150" dirty="0">
+                <a:solidFill>
+                  <a:srgbClr val="1B1F3B"/>
+                </a:solidFill>
+                <a:latin typeface="Calibri" pitchFamily="34" charset="0"/>
+                <a:ea typeface="Calibri" pitchFamily="34" charset="-122"/>
+                <a:cs typeface="Calibri" pitchFamily="34" charset="-120"/>
+              </a:rPr>
+              <a:t>disponibilidade, finalidades, Estados, datas.</a:t>
+            </a:r>
+            <a:endParaRPr lang="en-US" sz="1150" dirty="0"/>
+          </a:p>
+          <a:p>
+            <a:pPr marL="177800" indent="-177800">
+              <a:buSzPct val="100000"/>
+              <a:buChar char="•"/>
+            </a:pPr>
+            <a:r>
+              <a:rPr lang="en-US" sz="1150" b="1" dirty="0">
+                <a:solidFill>
+                  <a:srgbClr val="1B1F3B"/>
+                </a:solidFill>
+                <a:latin typeface="Calibri" pitchFamily="34" charset="0"/>
+                <a:ea typeface="Calibri" pitchFamily="34" charset="-122"/>
+                <a:cs typeface="Calibri" pitchFamily="34" charset="-120"/>
+              </a:rPr>
+              <a:t>Documentos: </a:t>
+            </a:r>
+            <a:pPr indent="0" marL="0">
+              <a:spcAft>
+                <a:spcPts val="800"/>
+              </a:spcAft>
+              <a:buNone/>
+            </a:pPr>
+            <a:r>
+              <a:rPr lang="en-US" sz="1150" dirty="0">
+                <a:solidFill>
+                  <a:srgbClr val="1B1F3B"/>
+                </a:solidFill>
+                <a:latin typeface="Calibri" pitchFamily="34" charset="0"/>
+                <a:ea typeface="Calibri" pitchFamily="34" charset="-122"/>
+                <a:cs typeface="Calibri" pitchFamily="34" charset="-120"/>
+              </a:rPr>
+              <a:t>formulários multilingues, apostila ou legalização, por país.</a:t>
+            </a:r>
+            <a:endParaRPr lang="en-US" sz="1150" dirty="0"/>
+          </a:p>
+          <a:p>
+            <a:pPr marL="177800" indent="-177800">
+              <a:buSzPct val="100000"/>
+              <a:buChar char="•"/>
+            </a:pPr>
+            <a:r>
+              <a:rPr lang="en-US" sz="1150" b="1" dirty="0">
+                <a:solidFill>
+                  <a:srgbClr val="1B1F3B"/>
+                </a:solidFill>
+                <a:latin typeface="Calibri" pitchFamily="34" charset="0"/>
+                <a:ea typeface="Calibri" pitchFamily="34" charset="-122"/>
+                <a:cs typeface="Calibri" pitchFamily="34" charset="-120"/>
+              </a:rPr>
+              <a:t>Prazos de referência em 16 países </a:t>
+            </a:r>
+            <a:pPr indent="0" marL="0">
+              <a:spcAft>
+                <a:spcPts val="800"/>
+              </a:spcAft>
+              <a:buNone/>
+            </a:pPr>
+            <a:r>
+              <a:rPr lang="en-US" sz="1150" dirty="0">
+                <a:solidFill>
+                  <a:srgbClr val="1B1F3B"/>
+                </a:solidFill>
+                <a:latin typeface="Calibri" pitchFamily="34" charset="0"/>
+                <a:ea typeface="Calibri" pitchFamily="34" charset="-122"/>
+                <a:cs typeface="Calibri" pitchFamily="34" charset="-120"/>
+              </a:rPr>
+              <a:t>e entidades no estrangeiro (notaires, bancos, consulados).</a:t>
+            </a:r>
+            <a:endParaRPr lang="en-US" sz="1150" dirty="0"/>
           </a:p>
         </p:txBody>
       </p:sp>
@@ -7183,7 +6372,7 @@
                 <a:ea typeface="Calibri" pitchFamily="34" charset="-122"/>
                 <a:cs typeface="Calibri" pitchFamily="34" charset="-120"/>
               </a:rPr>
-              <a:t>TECNOLOGIA E PUBLICAÇÃO</a:t>
+              <a:t>SEGURANÇA</a:t>
             </a:r>
             <a:endParaRPr lang="en-US" sz="1000" dirty="0"/>
           </a:p>
@@ -7222,7 +6411,7 @@
                 <a:ea typeface="Cambria" pitchFamily="34" charset="-122"/>
                 <a:cs typeface="Cambria" pitchFamily="34" charset="-120"/>
               </a:rPr>
-              <a:t>Moderno, aberto e verificável</a:t>
+              <a:t>PIN, cópias cifradas e modo privacidade</a:t>
             </a:r>
             <a:endParaRPr lang="en-US" sz="2800" dirty="0"/>
           </a:p>
@@ -7314,12 +6503,70 @@
         </p:nvSpPr>
         <p:spPr>
           <a:xfrm>
-            <a:off x="457200" y="1143000"/>
-            <a:ext cx="4023360" cy="3429000"/>
+            <a:off x="457200" y="1097280"/>
+            <a:ext cx="4023360" cy="2514600"/>
           </a:xfrm>
           <a:prstGeom prst="roundRect">
             <a:avLst>
-              <a:gd name="adj" fmla="val 2133"/>
+              <a:gd name="adj" fmla="val 3636"/>
+            </a:avLst>
+          </a:prstGeom>
+          <a:solidFill>
+            <a:srgbClr val="121A36"/>
+          </a:solidFill>
+          <a:ln w="9525">
+            <a:solidFill>
+              <a:srgbClr val="121A36"/>
+            </a:solidFill>
+            <a:prstDash val="solid"/>
+          </a:ln>
+          <a:effectLst>
+            <a:outerShdw sx="100000" sy="100000" kx="0" ky="0" algn="bl" rotWithShape="0" blurRad="101600" dist="25400" dir="5400000">
+              <a:srgbClr val="000000">
+                <a:alpha val="16000"/>
+              </a:srgbClr>
+            </a:outerShdw>
+          </a:effectLst>
+        </p:spPr>
+      </p:sp>
+      <p:pic>
+        <p:nvPicPr>
+          <p:cNvPr id="7" name="Image 0" descr="img/39-bloqueio-pin.jpg">    </p:cNvPr>
+          <p:cNvPicPr>
+            <a:picLocks noChangeAspect="1"/>
+          </p:cNvPicPr>
+          <p:nvPr/>
+        </p:nvPicPr>
+        <p:blipFill>
+          <a:blip r:embed="rId1"/>
+          <a:stretch>
+            <a:fillRect/>
+          </a:stretch>
+        </p:blipFill>
+        <p:spPr>
+          <a:xfrm>
+            <a:off x="521208" y="1161288"/>
+            <a:ext cx="3895344" cy="2386584"/>
+          </a:xfrm>
+          <a:prstGeom prst="rect">
+            <a:avLst/>
+          </a:prstGeom>
+        </p:spPr>
+      </p:pic>
+      <p:sp>
+        <p:nvSpPr>
+          <p:cNvPr id="8" name="Shape 5"/>
+          <p:cNvSpPr/>
+          <p:nvPr/>
+        </p:nvSpPr>
+        <p:spPr>
+          <a:xfrm>
+            <a:off x="4663440" y="1097280"/>
+            <a:ext cx="4023360" cy="2514600"/>
+          </a:xfrm>
+          <a:prstGeom prst="roundRect">
+            <a:avLst>
+              <a:gd name="adj" fmla="val 3636"/>
             </a:avLst>
           </a:prstGeom>
           <a:solidFill>
@@ -7331,278 +6578,18 @@
             </a:solidFill>
             <a:prstDash val="solid"/>
           </a:ln>
-        </p:spPr>
-      </p:sp>
-      <p:sp>
-        <p:nvSpPr>
-          <p:cNvPr id="7" name="Shape 5"/>
-          <p:cNvSpPr/>
-          <p:nvPr/>
-        </p:nvSpPr>
-        <p:spPr>
-          <a:xfrm>
-            <a:off x="685800" y="1325880"/>
-            <a:ext cx="457200" cy="457200"/>
-          </a:xfrm>
-          <a:prstGeom prst="ellipse">
-            <a:avLst/>
-          </a:prstGeom>
-          <a:solidFill>
-            <a:srgbClr val="2D39B9"/>
-          </a:solidFill>
-          <a:ln w="12700">
-            <a:solidFill>
-              <a:srgbClr val="2D39B9"/>
-            </a:solidFill>
-            <a:prstDash val="solid"/>
-          </a:ln>
+          <a:effectLst>
+            <a:outerShdw sx="100000" sy="100000" kx="0" ky="0" algn="bl" rotWithShape="0" blurRad="101600" dist="25400" dir="5400000">
+              <a:srgbClr val="000000">
+                <a:alpha val="16000"/>
+              </a:srgbClr>
+            </a:outerShdw>
+          </a:effectLst>
         </p:spPr>
       </p:sp>
       <p:pic>
         <p:nvPicPr>
-          <p:cNvPr id="8" name="Image 0" descr="icons/cpu-white.png">    </p:cNvPr>
-          <p:cNvPicPr>
-            <a:picLocks noChangeAspect="1"/>
-          </p:cNvPicPr>
-          <p:nvPr/>
-        </p:nvPicPr>
-        <p:blipFill>
-          <a:blip r:embed="rId1"/>
-          <a:stretch>
-            <a:fillRect/>
-          </a:stretch>
-        </p:blipFill>
-        <p:spPr>
-          <a:xfrm>
-            <a:off x="795528" y="1435608"/>
-            <a:ext cx="237744" cy="237744"/>
-          </a:xfrm>
-          <a:prstGeom prst="rect">
-            <a:avLst/>
-          </a:prstGeom>
-        </p:spPr>
-      </p:pic>
-      <p:sp>
-        <p:nvSpPr>
-          <p:cNvPr id="9" name="Text 6"/>
-          <p:cNvSpPr txBox="1"/>
-          <p:nvPr/>
-        </p:nvSpPr>
-        <p:spPr>
-          <a:xfrm>
-            <a:off x="1280160" y="1371600"/>
-            <a:ext cx="2743200" cy="365760"/>
-          </a:xfrm>
-          <a:prstGeom prst="rect">
-            <a:avLst/>
-          </a:prstGeom>
-          <a:noFill/>
-          <a:ln/>
-        </p:spPr>
-        <p:txBody>
-          <a:bodyPr wrap="square" lIns="0" tIns="0" rIns="0" bIns="0" rtlCol="0" anchor="t"/>
-          <a:lstStyle/>
-          <a:p>
-            <a:pPr indent="0" marL="0">
-              <a:buNone/>
-            </a:pPr>
-            <a:r>
-              <a:rPr lang="en-US" sz="1400" b="1" dirty="0">
-                <a:solidFill>
-                  <a:srgbClr val="1B1F3B"/>
-                </a:solidFill>
-                <a:latin typeface="Calibri" pitchFamily="34" charset="0"/>
-                <a:ea typeface="Calibri" pitchFamily="34" charset="-122"/>
-                <a:cs typeface="Calibri" pitchFamily="34" charset="-120"/>
-              </a:rPr>
-              <a:t>Plataforma</a:t>
-            </a:r>
-            <a:endParaRPr lang="en-US" sz="1400" dirty="0"/>
-          </a:p>
-        </p:txBody>
-      </p:sp>
-      <p:sp>
-        <p:nvSpPr>
-          <p:cNvPr id="10" name="Text 7"/>
-          <p:cNvSpPr txBox="1"/>
-          <p:nvPr/>
-        </p:nvSpPr>
-        <p:spPr>
-          <a:xfrm>
-            <a:off x="685800" y="1920240"/>
-            <a:ext cx="3566160" cy="2560320"/>
-          </a:xfrm>
-          <a:prstGeom prst="rect">
-            <a:avLst/>
-          </a:prstGeom>
-          <a:noFill/>
-          <a:ln/>
-        </p:spPr>
-        <p:txBody>
-          <a:bodyPr wrap="square" lIns="0" tIns="0" rIns="0" bIns="0" rtlCol="0" anchor="t"/>
-          <a:lstStyle/>
-          <a:p>
-            <a:pPr marL="177800" indent="-177800">
-              <a:spcAft>
-                <a:spcPts val="500"/>
-              </a:spcAft>
-              <a:buSzPct val="100000"/>
-              <a:buChar char="•"/>
-            </a:pPr>
-            <a:r>
-              <a:rPr lang="en-US" sz="1150" dirty="0">
-                <a:solidFill>
-                  <a:srgbClr val="1B1F3B"/>
-                </a:solidFill>
-                <a:latin typeface="Calibri" pitchFamily="34" charset="0"/>
-                <a:ea typeface="Calibri" pitchFamily="34" charset="-122"/>
-                <a:cs typeface="Calibri" pitchFamily="34" charset="-120"/>
-              </a:rPr>
-              <a:t>React 19 e TypeScript em modo estrito</a:t>
-            </a:r>
-            <a:endParaRPr lang="en-US" sz="1150" dirty="0"/>
-          </a:p>
-          <a:p>
-            <a:pPr marL="177800" indent="-177800">
-              <a:spcAft>
-                <a:spcPts val="500"/>
-              </a:spcAft>
-              <a:buSzPct val="100000"/>
-              <a:buChar char="•"/>
-            </a:pPr>
-            <a:r>
-              <a:rPr lang="en-US" sz="1150" dirty="0">
-                <a:solidFill>
-                  <a:srgbClr val="1B1F3B"/>
-                </a:solidFill>
-                <a:latin typeface="Calibri" pitchFamily="34" charset="0"/>
-                <a:ea typeface="Calibri" pitchFamily="34" charset="-122"/>
-                <a:cs typeface="Calibri" pitchFamily="34" charset="-120"/>
-              </a:rPr>
-              <a:t>Vite e Workbox (service worker, precache)</a:t>
-            </a:r>
-            <a:endParaRPr lang="en-US" sz="1150" dirty="0"/>
-          </a:p>
-          <a:p>
-            <a:pPr marL="177800" indent="-177800">
-              <a:spcAft>
-                <a:spcPts val="500"/>
-              </a:spcAft>
-              <a:buSzPct val="100000"/>
-              <a:buChar char="•"/>
-            </a:pPr>
-            <a:r>
-              <a:rPr lang="en-US" sz="1150" dirty="0">
-                <a:solidFill>
-                  <a:srgbClr val="1B1F3B"/>
-                </a:solidFill>
-                <a:latin typeface="Calibri" pitchFamily="34" charset="0"/>
-                <a:ea typeface="Calibri" pitchFamily="34" charset="-122"/>
-                <a:cs typeface="Calibri" pitchFamily="34" charset="-120"/>
-              </a:rPr>
-              <a:t>Dexie sobre IndexedDB (dados e anexos)</a:t>
-            </a:r>
-            <a:endParaRPr lang="en-US" sz="1150" dirty="0"/>
-          </a:p>
-          <a:p>
-            <a:pPr marL="177800" indent="-177800">
-              <a:spcAft>
-                <a:spcPts val="500"/>
-              </a:spcAft>
-              <a:buSzPct val="100000"/>
-              <a:buChar char="•"/>
-            </a:pPr>
-            <a:r>
-              <a:rPr lang="en-US" sz="1150" dirty="0">
-                <a:solidFill>
-                  <a:srgbClr val="1B1F3B"/>
-                </a:solidFill>
-                <a:latin typeface="Calibri" pitchFamily="34" charset="0"/>
-                <a:ea typeface="Calibri" pitchFamily="34" charset="-122"/>
-                <a:cs typeface="Calibri" pitchFamily="34" charset="-120"/>
-              </a:rPr>
-              <a:t>Motor de regras, calendário e calculadora testados (Vitest)</a:t>
-            </a:r>
-            <a:endParaRPr lang="en-US" sz="1150" dirty="0"/>
-          </a:p>
-          <a:p>
-            <a:pPr marL="177800" indent="-177800">
-              <a:spcAft>
-                <a:spcPts val="500"/>
-              </a:spcAft>
-              <a:buSzPct val="100000"/>
-              <a:buChar char="•"/>
-            </a:pPr>
-            <a:r>
-              <a:rPr lang="en-US" sz="1150" dirty="0">
-                <a:solidFill>
-                  <a:srgbClr val="1B1F3B"/>
-                </a:solidFill>
-                <a:latin typeface="Calibri" pitchFamily="34" charset="0"/>
-                <a:ea typeface="Calibri" pitchFamily="34" charset="-122"/>
-                <a:cs typeface="Calibri" pitchFamily="34" charset="-120"/>
-              </a:rPr>
-              <a:t>Minutas em Office Open XML; iCalendar RFC 5545</a:t>
-            </a:r>
-            <a:endParaRPr lang="en-US" sz="1150" dirty="0"/>
-          </a:p>
-        </p:txBody>
-      </p:sp>
-      <p:sp>
-        <p:nvSpPr>
-          <p:cNvPr id="11" name="Shape 8"/>
-          <p:cNvSpPr/>
-          <p:nvPr/>
-        </p:nvSpPr>
-        <p:spPr>
-          <a:xfrm>
-            <a:off x="4663440" y="1143000"/>
-            <a:ext cx="4023360" cy="3429000"/>
-          </a:xfrm>
-          <a:prstGeom prst="roundRect">
-            <a:avLst>
-              <a:gd name="adj" fmla="val 2133"/>
-            </a:avLst>
-          </a:prstGeom>
-          <a:solidFill>
-            <a:srgbClr val="FFFFFF"/>
-          </a:solidFill>
-          <a:ln w="9525">
-            <a:solidFill>
-              <a:srgbClr val="D9DCE8"/>
-            </a:solidFill>
-            <a:prstDash val="solid"/>
-          </a:ln>
-        </p:spPr>
-      </p:sp>
-      <p:sp>
-        <p:nvSpPr>
-          <p:cNvPr id="12" name="Shape 9"/>
-          <p:cNvSpPr/>
-          <p:nvPr/>
-        </p:nvSpPr>
-        <p:spPr>
-          <a:xfrm>
-            <a:off x="4892040" y="1325880"/>
-            <a:ext cx="457200" cy="457200"/>
-          </a:xfrm>
-          <a:prstGeom prst="ellipse">
-            <a:avLst/>
-          </a:prstGeom>
-          <a:solidFill>
-            <a:srgbClr val="2D39B9"/>
-          </a:solidFill>
-          <a:ln w="12700">
-            <a:solidFill>
-              <a:srgbClr val="2D39B9"/>
-            </a:solidFill>
-            <a:prstDash val="solid"/>
-          </a:ln>
-        </p:spPr>
-      </p:sp>
-      <p:pic>
-        <p:nvPicPr>
-          <p:cNvPr id="13" name="Image 1" descr="icons/rocket-white.png">    </p:cNvPr>
+          <p:cNvPr id="9" name="Image 1" descr="img/38-copia-cifrada.jpg">    </p:cNvPr>
           <p:cNvPicPr>
             <a:picLocks noChangeAspect="1"/>
           </p:cNvPicPr>
@@ -7616,8 +6603,8 @@
         </p:blipFill>
         <p:spPr>
           <a:xfrm>
-            <a:off x="5001768" y="1435608"/>
-            <a:ext cx="237744" cy="237744"/>
+            <a:off x="4727448" y="1161288"/>
+            <a:ext cx="3895344" cy="2386584"/>
           </a:xfrm>
           <a:prstGeom prst="rect">
             <a:avLst/>
@@ -7626,14 +6613,14 @@
       </p:pic>
       <p:sp>
         <p:nvSpPr>
-          <p:cNvPr id="14" name="Text 10"/>
-          <p:cNvSpPr txBox="1"/>
-          <p:nvPr/>
-        </p:nvSpPr>
-        <p:spPr>
-          <a:xfrm>
-            <a:off x="5486400" y="1371600"/>
-            <a:ext cx="2743200" cy="365760"/>
+          <p:cNvPr id="10" name="Text 6"/>
+          <p:cNvSpPr txBox="1"/>
+          <p:nvPr/>
+        </p:nvSpPr>
+        <p:spPr>
+          <a:xfrm>
+            <a:off x="457200" y="3749040"/>
+            <a:ext cx="8229600" cy="914400"/>
           </a:xfrm>
           <a:prstGeom prst="rect">
             <a:avLst/>
@@ -7644,319 +6631,13 @@
         <p:txBody>
           <a:bodyPr wrap="square" lIns="0" tIns="0" rIns="0" bIns="0" rtlCol="0" anchor="t"/>
           <a:lstStyle/>
-          <a:p>
-            <a:pPr indent="0" marL="0">
-              <a:buNone/>
-            </a:pPr>
-            <a:r>
-              <a:rPr lang="en-US" sz="1400" b="1" dirty="0">
-                <a:solidFill>
-                  <a:srgbClr val="1B1F3B"/>
-                </a:solidFill>
-                <a:latin typeface="Calibri" pitchFamily="34" charset="0"/>
-                <a:ea typeface="Calibri" pitchFamily="34" charset="-122"/>
-                <a:cs typeface="Calibri" pitchFamily="34" charset="-120"/>
-              </a:rPr>
-              <a:t>Publicação contínua</a:t>
-            </a:r>
-            <a:endParaRPr lang="en-US" sz="1400" dirty="0"/>
-          </a:p>
-        </p:txBody>
-      </p:sp>
-      <p:sp>
-        <p:nvSpPr>
-          <p:cNvPr id="15" name="Shape 11"/>
-          <p:cNvSpPr/>
-          <p:nvPr/>
-        </p:nvSpPr>
-        <p:spPr>
-          <a:xfrm>
-            <a:off x="4892040" y="2011680"/>
-            <a:ext cx="1051560" cy="411480"/>
-          </a:xfrm>
-          <a:prstGeom prst="roundRect">
-            <a:avLst>
-              <a:gd name="adj" fmla="val 17778"/>
-            </a:avLst>
-          </a:prstGeom>
-          <a:solidFill>
-            <a:srgbClr val="EEF0FB"/>
-          </a:solidFill>
-          <a:ln w="12700">
-            <a:solidFill>
-              <a:srgbClr val="EEF0FB"/>
-            </a:solidFill>
-            <a:prstDash val="solid"/>
-          </a:ln>
-        </p:spPr>
-      </p:sp>
-      <p:sp>
-        <p:nvSpPr>
-          <p:cNvPr id="16" name="Text 12"/>
-          <p:cNvSpPr txBox="1"/>
-          <p:nvPr/>
-        </p:nvSpPr>
-        <p:spPr>
-          <a:xfrm>
-            <a:off x="4892040" y="2011680"/>
-            <a:ext cx="1051560" cy="411480"/>
-          </a:xfrm>
-          <a:prstGeom prst="rect">
-            <a:avLst/>
-          </a:prstGeom>
-          <a:noFill/>
-          <a:ln/>
-        </p:spPr>
-        <p:txBody>
-          <a:bodyPr wrap="square" lIns="0" tIns="0" rIns="0" bIns="0" rtlCol="0" anchor="ctr"/>
-          <a:lstStyle/>
-          <a:p>
-            <a:pPr algn="ctr" indent="0" marL="0">
-              <a:buNone/>
-            </a:pPr>
-            <a:r>
-              <a:rPr lang="en-US" sz="1050" b="1" dirty="0">
-                <a:solidFill>
-                  <a:srgbClr val="2D39B9"/>
-                </a:solidFill>
-                <a:latin typeface="Calibri" pitchFamily="34" charset="0"/>
-                <a:ea typeface="Calibri" pitchFamily="34" charset="-122"/>
-                <a:cs typeface="Calibri" pitchFamily="34" charset="-120"/>
-              </a:rPr>
-              <a:t>Testes</a:t>
-            </a:r>
-            <a:endParaRPr lang="en-US" sz="1050" dirty="0"/>
-          </a:p>
-        </p:txBody>
-      </p:sp>
-      <p:pic>
-        <p:nvPicPr>
-          <p:cNvPr id="17" name="Image 2" descr="icons/arrow-right-indigo.png">    </p:cNvPr>
-          <p:cNvPicPr>
-            <a:picLocks noChangeAspect="1"/>
-          </p:cNvPicPr>
-          <p:nvPr/>
-        </p:nvPicPr>
-        <p:blipFill>
-          <a:blip r:embed="rId3"/>
-          <a:stretch>
-            <a:fillRect/>
-          </a:stretch>
-        </p:blipFill>
-        <p:spPr>
-          <a:xfrm>
-            <a:off x="5961888" y="2121408"/>
-            <a:ext cx="182880" cy="182880"/>
-          </a:xfrm>
-          <a:prstGeom prst="rect">
-            <a:avLst/>
-          </a:prstGeom>
-        </p:spPr>
-      </p:pic>
-      <p:sp>
-        <p:nvSpPr>
-          <p:cNvPr id="18" name="Shape 13"/>
-          <p:cNvSpPr/>
-          <p:nvPr/>
-        </p:nvSpPr>
-        <p:spPr>
-          <a:xfrm>
-            <a:off x="6172200" y="2011680"/>
-            <a:ext cx="1051560" cy="411480"/>
-          </a:xfrm>
-          <a:prstGeom prst="roundRect">
-            <a:avLst>
-              <a:gd name="adj" fmla="val 17778"/>
-            </a:avLst>
-          </a:prstGeom>
-          <a:solidFill>
-            <a:srgbClr val="EEF0FB"/>
-          </a:solidFill>
-          <a:ln w="12700">
-            <a:solidFill>
-              <a:srgbClr val="EEF0FB"/>
-            </a:solidFill>
-            <a:prstDash val="solid"/>
-          </a:ln>
-        </p:spPr>
-      </p:sp>
-      <p:sp>
-        <p:nvSpPr>
-          <p:cNvPr id="19" name="Text 14"/>
-          <p:cNvSpPr txBox="1"/>
-          <p:nvPr/>
-        </p:nvSpPr>
-        <p:spPr>
-          <a:xfrm>
-            <a:off x="6172200" y="2011680"/>
-            <a:ext cx="1051560" cy="411480"/>
-          </a:xfrm>
-          <a:prstGeom prst="rect">
-            <a:avLst/>
-          </a:prstGeom>
-          <a:noFill/>
-          <a:ln/>
-        </p:spPr>
-        <p:txBody>
-          <a:bodyPr wrap="square" lIns="0" tIns="0" rIns="0" bIns="0" rtlCol="0" anchor="ctr"/>
-          <a:lstStyle/>
-          <a:p>
-            <a:pPr algn="ctr" indent="0" marL="0">
-              <a:buNone/>
-            </a:pPr>
-            <a:r>
-              <a:rPr lang="en-US" sz="1050" b="1" dirty="0">
-                <a:solidFill>
-                  <a:srgbClr val="2D39B9"/>
-                </a:solidFill>
-                <a:latin typeface="Calibri" pitchFamily="34" charset="0"/>
-                <a:ea typeface="Calibri" pitchFamily="34" charset="-122"/>
-                <a:cs typeface="Calibri" pitchFamily="34" charset="-120"/>
-              </a:rPr>
-              <a:t>Compilação</a:t>
-            </a:r>
-            <a:endParaRPr lang="en-US" sz="1050" dirty="0"/>
-          </a:p>
-        </p:txBody>
-      </p:sp>
-      <p:pic>
-        <p:nvPicPr>
-          <p:cNvPr id="20" name="Image 3" descr="icons/arrow-right-indigo.png">    </p:cNvPr>
-          <p:cNvPicPr>
-            <a:picLocks noChangeAspect="1"/>
-          </p:cNvPicPr>
-          <p:nvPr/>
-        </p:nvPicPr>
-        <p:blipFill>
-          <a:blip r:embed="rId4"/>
-          <a:stretch>
-            <a:fillRect/>
-          </a:stretch>
-        </p:blipFill>
-        <p:spPr>
-          <a:xfrm>
-            <a:off x="7242048" y="2121408"/>
-            <a:ext cx="182880" cy="182880"/>
-          </a:xfrm>
-          <a:prstGeom prst="rect">
-            <a:avLst/>
-          </a:prstGeom>
-        </p:spPr>
-      </p:pic>
-      <p:sp>
-        <p:nvSpPr>
-          <p:cNvPr id="21" name="Shape 15"/>
-          <p:cNvSpPr/>
-          <p:nvPr/>
-        </p:nvSpPr>
-        <p:spPr>
-          <a:xfrm>
-            <a:off x="7452360" y="2011680"/>
-            <a:ext cx="1051560" cy="411480"/>
-          </a:xfrm>
-          <a:prstGeom prst="roundRect">
-            <a:avLst>
-              <a:gd name="adj" fmla="val 17778"/>
-            </a:avLst>
-          </a:prstGeom>
-          <a:solidFill>
-            <a:srgbClr val="EEF0FB"/>
-          </a:solidFill>
-          <a:ln w="12700">
-            <a:solidFill>
-              <a:srgbClr val="EEF0FB"/>
-            </a:solidFill>
-            <a:prstDash val="solid"/>
-          </a:ln>
-        </p:spPr>
-      </p:sp>
-      <p:sp>
-        <p:nvSpPr>
-          <p:cNvPr id="22" name="Text 16"/>
-          <p:cNvSpPr txBox="1"/>
-          <p:nvPr/>
-        </p:nvSpPr>
-        <p:spPr>
-          <a:xfrm>
-            <a:off x="7452360" y="2011680"/>
-            <a:ext cx="1051560" cy="411480"/>
-          </a:xfrm>
-          <a:prstGeom prst="rect">
-            <a:avLst/>
-          </a:prstGeom>
-          <a:noFill/>
-          <a:ln/>
-        </p:spPr>
-        <p:txBody>
-          <a:bodyPr wrap="square" lIns="0" tIns="0" rIns="0" bIns="0" rtlCol="0" anchor="ctr"/>
-          <a:lstStyle/>
-          <a:p>
-            <a:pPr algn="ctr" indent="0" marL="0">
-              <a:buNone/>
-            </a:pPr>
-            <a:r>
-              <a:rPr lang="en-US" sz="1050" b="1" dirty="0">
-                <a:solidFill>
-                  <a:srgbClr val="2D39B9"/>
-                </a:solidFill>
-                <a:latin typeface="Calibri" pitchFamily="34" charset="0"/>
-                <a:ea typeface="Calibri" pitchFamily="34" charset="-122"/>
-                <a:cs typeface="Calibri" pitchFamily="34" charset="-120"/>
-              </a:rPr>
-              <a:t>GitHub Pages</a:t>
-            </a:r>
-            <a:endParaRPr lang="en-US" sz="1050" dirty="0"/>
-          </a:p>
-        </p:txBody>
-      </p:sp>
-      <p:sp>
-        <p:nvSpPr>
-          <p:cNvPr id="23" name="Text 17"/>
-          <p:cNvSpPr txBox="1"/>
-          <p:nvPr/>
-        </p:nvSpPr>
-        <p:spPr>
-          <a:xfrm>
-            <a:off x="4892040" y="2651760"/>
-            <a:ext cx="3611880" cy="1828800"/>
-          </a:xfrm>
-          <a:prstGeom prst="rect">
-            <a:avLst/>
-          </a:prstGeom>
-          <a:noFill/>
-          <a:ln/>
-        </p:spPr>
-        <p:txBody>
-          <a:bodyPr wrap="square" lIns="0" tIns="0" rIns="0" bIns="0" rtlCol="0" anchor="t"/>
-          <a:lstStyle/>
-          <a:p>
-            <a:pPr marL="177800" indent="-177800">
-              <a:spcAft>
-                <a:spcPts val="500"/>
-              </a:spcAft>
-              <a:buSzPct val="100000"/>
-              <a:buChar char="•"/>
-            </a:pPr>
-            <a:r>
-              <a:rPr lang="en-US" sz="1100" dirty="0">
-                <a:solidFill>
-                  <a:srgbClr val="1B1F3B"/>
-                </a:solidFill>
-                <a:latin typeface="Calibri" pitchFamily="34" charset="0"/>
-                <a:ea typeface="Calibri" pitchFamily="34" charset="-122"/>
-                <a:cs typeface="Calibri" pitchFamily="34" charset="-120"/>
-              </a:rPr>
-              <a:t>Cada alteração passa pelos 55 testes e pela compilação antes de ser publicada</a:t>
-            </a:r>
-            <a:endParaRPr lang="en-US" sz="1100" dirty="0"/>
-          </a:p>
           <a:p>
             <a:pPr marL="177800" indent="-177800">
               <a:buSzPct val="100000"/>
               <a:buChar char="•"/>
             </a:pPr>
             <a:r>
-              <a:rPr lang="en-US" sz="1100" dirty="0">
+              <a:rPr lang="en-US" sz="1150" b="1" dirty="0">
                 <a:solidFill>
                   <a:srgbClr val="1B1F3B"/>
                 </a:solidFill>
@@ -7964,16 +6645,16 @@
                 <a:ea typeface="Calibri" pitchFamily="34" charset="-122"/>
                 <a:cs typeface="Calibri" pitchFamily="34" charset="-120"/>
               </a:rPr>
-              <a:t>Aplicação: </a:t>
+              <a:t>Bloqueio por PIN </a:t>
             </a:r>
             <a:pPr indent="0" marL="0">
               <a:spcAft>
-                <a:spcPts val="500"/>
+                <a:spcPts val="400"/>
               </a:spcAft>
               <a:buNone/>
             </a:pPr>
             <a:r>
-              <a:rPr lang="en-US" sz="1100" b="1" dirty="0">
+              <a:rPr lang="en-US" sz="1150" dirty="0">
                 <a:solidFill>
                   <a:srgbClr val="1B1F3B"/>
                 </a:solidFill>
@@ -7981,9 +6662,9 @@
                 <a:ea typeface="Calibri" pitchFamily="34" charset="-122"/>
                 <a:cs typeface="Calibri" pitchFamily="34" charset="-120"/>
               </a:rPr>
-              <a:t>nelsonsous.github.io/balcao-sucessoes</a:t>
-            </a:r>
-            <a:endParaRPr lang="en-US" sz="1100" dirty="0"/>
+              <a:t>(PBKDF2, esperas após falhas), auto-bloqueio por inatividade e ao mudar de aplicação.</a:t>
+            </a:r>
+            <a:endParaRPr lang="en-US" sz="1150" dirty="0"/>
           </a:p>
           <a:p>
             <a:pPr marL="177800" indent="-177800">
@@ -7991,7 +6672,7 @@
               <a:buChar char="•"/>
             </a:pPr>
             <a:r>
-              <a:rPr lang="en-US" sz="1100" dirty="0">
+              <a:rPr lang="en-US" sz="1150" b="1" dirty="0">
                 <a:solidFill>
                   <a:srgbClr val="1B1F3B"/>
                 </a:solidFill>
@@ -7999,16 +6680,44 @@
                 <a:ea typeface="Calibri" pitchFamily="34" charset="-122"/>
                 <a:cs typeface="Calibri" pitchFamily="34" charset="-120"/>
               </a:rPr>
-              <a:t>Código-fonte: </a:t>
+              <a:t>Cópias de segurança cifradas </a:t>
+            </a:r>
+            <a:pPr indent="0" marL="0">
+              <a:buNone/>
+            </a:pPr>
+            <a:r>
+              <a:rPr lang="en-US" sz="1150" dirty="0">
+                <a:solidFill>
+                  <a:srgbClr val="1B1F3B"/>
+                </a:solidFill>
+                <a:latin typeface="Calibri" pitchFamily="34" charset="0"/>
+                <a:ea typeface="Calibri" pitchFamily="34" charset="-122"/>
+                <a:cs typeface="Calibri" pitchFamily="34" charset="-120"/>
+              </a:rPr>
+              <a:t>(AES-256-GCM) com lembrete semanal; </a:t>
+            </a:r>
+            <a:pPr indent="0" marL="0">
+              <a:buNone/>
+            </a:pPr>
+            <a:r>
+              <a:rPr lang="en-US" sz="1150" b="1" dirty="0">
+                <a:solidFill>
+                  <a:srgbClr val="1B1F3B"/>
+                </a:solidFill>
+                <a:latin typeface="Calibri" pitchFamily="34" charset="0"/>
+                <a:ea typeface="Calibri" pitchFamily="34" charset="-122"/>
+                <a:cs typeface="Calibri" pitchFamily="34" charset="-120"/>
+              </a:rPr>
+              <a:t>modo privacidade </a:t>
             </a:r>
             <a:pPr indent="0" marL="0">
               <a:spcAft>
-                <a:spcPts val="500"/>
+                <a:spcPts val="400"/>
               </a:spcAft>
               <a:buNone/>
             </a:pPr>
             <a:r>
-              <a:rPr lang="en-US" sz="1100" b="1" dirty="0">
+              <a:rPr lang="en-US" sz="1150" dirty="0">
                 <a:solidFill>
                   <a:srgbClr val="1B1F3B"/>
                 </a:solidFill>
@@ -8016,30 +6725,9 @@
                 <a:ea typeface="Calibri" pitchFamily="34" charset="-122"/>
                 <a:cs typeface="Calibri" pitchFamily="34" charset="-120"/>
               </a:rPr>
-              <a:t>github.com/nelsonsous/balcao-sucessoes</a:t>
-            </a:r>
-            <a:endParaRPr lang="en-US" sz="1100" dirty="0"/>
-          </a:p>
-          <a:p>
-            <a:pPr marL="177800" indent="-177800">
-              <a:spcAft>
-                <a:spcPts val="500"/>
-              </a:spcAft>
-              <a:buSzPct val="100000"/>
-              <a:buChar char="•"/>
-            </a:pPr>
-            <a:r>
-              <a:rPr lang="en-US" sz="1100" dirty="0">
-                <a:solidFill>
-                  <a:srgbClr val="1B1F3B"/>
-                </a:solidFill>
-                <a:latin typeface="Calibri" pitchFamily="34" charset="0"/>
-                <a:ea typeface="Calibri" pitchFamily="34" charset="-122"/>
-                <a:cs typeface="Calibri" pitchFamily="34" charset="-120"/>
-              </a:rPr>
-              <a:t>Atualizações entregues à aplicação instalada com aviso «Nova versão disponível»</a:t>
-            </a:r>
-            <a:endParaRPr lang="en-US" sz="1100" dirty="0"/>
+              <a:t>para partilhar o ecrã; importação do protótipo original; Content Security Policy.</a:t>
+            </a:r>
+            <a:endParaRPr lang="en-US" sz="1150" dirty="0"/>
           </a:p>
         </p:txBody>
       </p:sp>
@@ -8108,7 +6796,7 @@
                 <a:ea typeface="Calibri" pitchFamily="34" charset="-122"/>
                 <a:cs typeface="Calibri" pitchFamily="34" charset="-120"/>
               </a:rPr>
-              <a:t>ROADMAP</a:t>
+              <a:t>SEMPRE À MÃO</a:t>
             </a:r>
             <a:endParaRPr lang="en-US" sz="1000" dirty="0"/>
           </a:p>
@@ -8147,7 +6835,7 @@
                 <a:ea typeface="Cambria" pitchFamily="34" charset="-122"/>
                 <a:cs typeface="Cambria" pitchFamily="34" charset="-120"/>
               </a:rPr>
-              <a:t>Quatro ciclos entregues, seis previstos</a:t>
+              <a:t>Instalável, offline, no computador e no telemóvel</a:t>
             </a:r>
             <a:endParaRPr lang="en-US" sz="2800" dirty="0"/>
           </a:p>
@@ -8239,127 +6927,35 @@
         </p:nvSpPr>
         <p:spPr>
           <a:xfrm>
-            <a:off x="548640" y="1161288"/>
-            <a:ext cx="329184" cy="329184"/>
-          </a:xfrm>
-          <a:prstGeom prst="ellipse">
-            <a:avLst/>
+            <a:off x="457200" y="1097280"/>
+            <a:ext cx="1463040" cy="3163824"/>
+          </a:xfrm>
+          <a:prstGeom prst="roundRect">
+            <a:avLst>
+              <a:gd name="adj" fmla="val 6250"/>
+            </a:avLst>
           </a:prstGeom>
           <a:solidFill>
-            <a:srgbClr val="2D39B9"/>
+            <a:srgbClr val="121A36"/>
           </a:solidFill>
           <a:ln w="9525">
             <a:solidFill>
-              <a:srgbClr val="2D39B9"/>
+              <a:srgbClr val="121A36"/>
             </a:solidFill>
             <a:prstDash val="solid"/>
           </a:ln>
-        </p:spPr>
-      </p:sp>
-      <p:sp>
-        <p:nvSpPr>
-          <p:cNvPr id="7" name="Text 5"/>
-          <p:cNvSpPr txBox="1"/>
-          <p:nvPr/>
-        </p:nvSpPr>
-        <p:spPr>
-          <a:xfrm>
-            <a:off x="548640" y="1161288"/>
-            <a:ext cx="329184" cy="329184"/>
-          </a:xfrm>
-          <a:prstGeom prst="rect">
-            <a:avLst/>
-          </a:prstGeom>
-          <a:noFill/>
-          <a:ln/>
-        </p:spPr>
-        <p:txBody>
-          <a:bodyPr wrap="square" lIns="0" tIns="0" rIns="0" bIns="0" rtlCol="0" anchor="ctr"/>
-          <a:lstStyle/>
-          <a:p>
-            <a:pPr algn="ctr" indent="0" marL="0">
-              <a:buNone/>
-            </a:pPr>
-            <a:r>
-              <a:rPr lang="en-US" sz="900" b="1" dirty="0">
-                <a:solidFill>
-                  <a:srgbClr val="FFFFFF"/>
-                </a:solidFill>
-                <a:latin typeface="Calibri" pitchFamily="34" charset="0"/>
-                <a:ea typeface="Calibri" pitchFamily="34" charset="-122"/>
-                <a:cs typeface="Calibri" pitchFamily="34" charset="-120"/>
-              </a:rPr>
-              <a:t>1–4</a:t>
-            </a:r>
-            <a:endParaRPr lang="en-US" sz="900" dirty="0"/>
-          </a:p>
-        </p:txBody>
-      </p:sp>
-      <p:sp>
-        <p:nvSpPr>
-          <p:cNvPr id="8" name="Shape 6"/>
-          <p:cNvSpPr/>
-          <p:nvPr/>
-        </p:nvSpPr>
-        <p:spPr>
-          <a:xfrm>
-            <a:off x="713232" y="1490472"/>
-            <a:ext cx="0" cy="173736"/>
-          </a:xfrm>
-          <a:prstGeom prst="line">
-            <a:avLst/>
-          </a:prstGeom>
-          <a:noFill/>
-          <a:ln w="12700">
-            <a:solidFill>
-              <a:srgbClr val="D9DCE8"/>
-            </a:solidFill>
-            <a:prstDash val="solid"/>
-          </a:ln>
-        </p:spPr>
-      </p:sp>
-      <p:sp>
-        <p:nvSpPr>
-          <p:cNvPr id="9" name="Text 7"/>
-          <p:cNvSpPr txBox="1"/>
-          <p:nvPr/>
-        </p:nvSpPr>
-        <p:spPr>
-          <a:xfrm>
-            <a:off x="1097280" y="1170432"/>
-            <a:ext cx="7498080" cy="365760"/>
-          </a:xfrm>
-          <a:prstGeom prst="rect">
-            <a:avLst/>
-          </a:prstGeom>
-          <a:noFill/>
-          <a:ln/>
-        </p:spPr>
-        <p:txBody>
-          <a:bodyPr wrap="square" lIns="0" tIns="0" rIns="0" bIns="0" rtlCol="0" anchor="t"/>
-          <a:lstStyle/>
-          <a:p>
-            <a:pPr indent="0" marL="0">
-              <a:buNone/>
-            </a:pPr>
-            <a:r>
-              <a:rPr lang="en-US" sz="1250" b="1" dirty="0">
-                <a:solidFill>
-                  <a:srgbClr val="1B1F3B"/>
-                </a:solidFill>
-                <a:latin typeface="Calibri" pitchFamily="34" charset="0"/>
-                <a:ea typeface="Calibri" pitchFamily="34" charset="-122"/>
-                <a:cs typeface="Calibri" pitchFamily="34" charset="-120"/>
-              </a:rPr>
-              <a:t>Fundação · Agenda · Calculadora · Documentos e minutas</a:t>
-            </a:r>
-            <a:endParaRPr lang="en-US" sz="1250" dirty="0"/>
-          </a:p>
-        </p:txBody>
+          <a:effectLst>
+            <a:outerShdw sx="100000" sy="100000" kx="0" ky="0" algn="bl" rotWithShape="0" blurRad="101600" dist="25400" dir="5400000">
+              <a:srgbClr val="000000">
+                <a:alpha val="16000"/>
+              </a:srgbClr>
+            </a:outerShdw>
+          </a:effectLst>
+        </p:spPr>
       </p:sp>
       <p:pic>
         <p:nvPicPr>
-          <p:cNvPr id="10" name="Image 0" descr="icons/circle-check-indigo.png">    </p:cNvPr>
+          <p:cNvPr id="7" name="Image 0" descr="img/50-movel-visao-geral.jpg">    </p:cNvPr>
           <p:cNvPicPr>
             <a:picLocks noChangeAspect="1"/>
           </p:cNvPicPr>
@@ -8373,8 +6969,8 @@
         </p:blipFill>
         <p:spPr>
           <a:xfrm>
-            <a:off x="8321040" y="1207008"/>
-            <a:ext cx="237744" cy="237744"/>
+            <a:off x="521208" y="1161288"/>
+            <a:ext cx="1335024" cy="3035808"/>
           </a:xfrm>
           <a:prstGeom prst="rect">
             <a:avLst/>
@@ -8383,227 +6979,188 @@
       </p:pic>
       <p:sp>
         <p:nvSpPr>
-          <p:cNvPr id="11" name="Shape 8"/>
+          <p:cNvPr id="8" name="Shape 5"/>
           <p:cNvSpPr/>
           <p:nvPr/>
         </p:nvSpPr>
         <p:spPr>
           <a:xfrm>
-            <a:off x="548640" y="1664208"/>
-            <a:ext cx="329184" cy="329184"/>
-          </a:xfrm>
-          <a:prstGeom prst="ellipse">
-            <a:avLst/>
+            <a:off x="2029968" y="1097280"/>
+            <a:ext cx="1463040" cy="3163824"/>
+          </a:xfrm>
+          <a:prstGeom prst="roundRect">
+            <a:avLst>
+              <a:gd name="adj" fmla="val 6250"/>
+            </a:avLst>
           </a:prstGeom>
           <a:solidFill>
-            <a:srgbClr val="EEF0FB"/>
+            <a:srgbClr val="121A36"/>
           </a:solidFill>
           <a:ln w="9525">
             <a:solidFill>
-              <a:srgbClr val="D9DCE8"/>
+              <a:srgbClr val="121A36"/>
             </a:solidFill>
             <a:prstDash val="solid"/>
           </a:ln>
-        </p:spPr>
-      </p:sp>
-      <p:sp>
-        <p:nvSpPr>
-          <p:cNvPr id="12" name="Text 9"/>
-          <p:cNvSpPr txBox="1"/>
-          <p:nvPr/>
-        </p:nvSpPr>
-        <p:spPr>
-          <a:xfrm>
-            <a:off x="548640" y="1664208"/>
-            <a:ext cx="329184" cy="329184"/>
-          </a:xfrm>
-          <a:prstGeom prst="rect">
-            <a:avLst/>
-          </a:prstGeom>
-          <a:noFill/>
-          <a:ln/>
-        </p:spPr>
-        <p:txBody>
-          <a:bodyPr wrap="square" lIns="0" tIns="0" rIns="0" bIns="0" rtlCol="0" anchor="ctr"/>
-          <a:lstStyle/>
-          <a:p>
-            <a:pPr algn="ctr" indent="0" marL="0">
-              <a:buNone/>
-            </a:pPr>
-            <a:r>
-              <a:rPr lang="en-US" sz="900" b="1" dirty="0">
-                <a:solidFill>
-                  <a:srgbClr val="2D39B9"/>
-                </a:solidFill>
-                <a:latin typeface="Calibri" pitchFamily="34" charset="0"/>
-                <a:ea typeface="Calibri" pitchFamily="34" charset="-122"/>
-                <a:cs typeface="Calibri" pitchFamily="34" charset="-120"/>
-              </a:rPr>
-              <a:t>5</a:t>
-            </a:r>
-            <a:endParaRPr lang="en-US" sz="900" dirty="0"/>
-          </a:p>
-        </p:txBody>
-      </p:sp>
-      <p:sp>
-        <p:nvSpPr>
-          <p:cNvPr id="13" name="Shape 10"/>
+          <a:effectLst>
+            <a:outerShdw sx="100000" sy="100000" kx="0" ky="0" algn="bl" rotWithShape="0" blurRad="101600" dist="25400" dir="5400000">
+              <a:srgbClr val="000000">
+                <a:alpha val="16000"/>
+              </a:srgbClr>
+            </a:outerShdw>
+          </a:effectLst>
+        </p:spPr>
+      </p:sp>
+      <p:pic>
+        <p:nvPicPr>
+          <p:cNvPr id="9" name="Image 1" descr="img/51-movel-dossier.jpg">    </p:cNvPr>
+          <p:cNvPicPr>
+            <a:picLocks noChangeAspect="1"/>
+          </p:cNvPicPr>
+          <p:nvPr/>
+        </p:nvPicPr>
+        <p:blipFill>
+          <a:blip r:embed="rId2"/>
+          <a:stretch>
+            <a:fillRect/>
+          </a:stretch>
+        </p:blipFill>
+        <p:spPr>
+          <a:xfrm>
+            <a:off x="2093976" y="1161288"/>
+            <a:ext cx="1335024" cy="3035808"/>
+          </a:xfrm>
+          <a:prstGeom prst="rect">
+            <a:avLst/>
+          </a:prstGeom>
+        </p:spPr>
+      </p:pic>
+      <p:sp>
+        <p:nvSpPr>
+          <p:cNvPr id="10" name="Shape 6"/>
           <p:cNvSpPr/>
           <p:nvPr/>
         </p:nvSpPr>
         <p:spPr>
           <a:xfrm>
-            <a:off x="713232" y="1993392"/>
-            <a:ext cx="0" cy="173736"/>
-          </a:xfrm>
-          <a:prstGeom prst="line">
-            <a:avLst/>
-          </a:prstGeom>
-          <a:noFill/>
-          <a:ln w="12700">
+            <a:off x="3602736" y="1097280"/>
+            <a:ext cx="1463040" cy="3163824"/>
+          </a:xfrm>
+          <a:prstGeom prst="roundRect">
+            <a:avLst>
+              <a:gd name="adj" fmla="val 6250"/>
+            </a:avLst>
+          </a:prstGeom>
+          <a:solidFill>
+            <a:srgbClr val="121A36"/>
+          </a:solidFill>
+          <a:ln w="9525">
             <a:solidFill>
-              <a:srgbClr val="D9DCE8"/>
+              <a:srgbClr val="121A36"/>
             </a:solidFill>
             <a:prstDash val="solid"/>
           </a:ln>
-        </p:spPr>
-      </p:sp>
-      <p:sp>
-        <p:nvSpPr>
-          <p:cNvPr id="14" name="Text 11"/>
-          <p:cNvSpPr txBox="1"/>
-          <p:nvPr/>
-        </p:nvSpPr>
-        <p:spPr>
-          <a:xfrm>
-            <a:off x="1097280" y="1673352"/>
-            <a:ext cx="7498080" cy="365760"/>
-          </a:xfrm>
-          <a:prstGeom prst="rect">
-            <a:avLst/>
-          </a:prstGeom>
-          <a:noFill/>
-          <a:ln/>
-        </p:spPr>
-        <p:txBody>
-          <a:bodyPr wrap="square" lIns="0" tIns="0" rIns="0" bIns="0" rtlCol="0" anchor="t"/>
-          <a:lstStyle/>
-          <a:p>
-            <a:pPr indent="0" marL="0">
-              <a:buNone/>
-            </a:pPr>
-            <a:r>
-              <a:rPr lang="en-US" sz="1250" dirty="0">
-                <a:solidFill>
-                  <a:srgbClr val="1B1F3B"/>
-                </a:solidFill>
-                <a:latin typeface="Calibri" pitchFamily="34" charset="0"/>
-                <a:ea typeface="Calibri" pitchFamily="34" charset="-122"/>
-                <a:cs typeface="Calibri" pitchFamily="34" charset="-120"/>
-              </a:rPr>
-              <a:t>Relatórios do dossier, relação de bens, mapa de partilha, CSV</a:t>
-            </a:r>
-            <a:endParaRPr lang="en-US" sz="1250" dirty="0"/>
-          </a:p>
-        </p:txBody>
-      </p:sp>
-      <p:sp>
-        <p:nvSpPr>
-          <p:cNvPr id="15" name="Shape 12"/>
+          <a:effectLst>
+            <a:outerShdw sx="100000" sy="100000" kx="0" ky="0" algn="bl" rotWithShape="0" blurRad="101600" dist="25400" dir="5400000">
+              <a:srgbClr val="000000">
+                <a:alpha val="16000"/>
+              </a:srgbClr>
+            </a:outerShdw>
+          </a:effectLst>
+        </p:spPr>
+      </p:sp>
+      <p:pic>
+        <p:nvPicPr>
+          <p:cNvPr id="11" name="Image 2" descr="img/52-movel-agenda.jpg">    </p:cNvPr>
+          <p:cNvPicPr>
+            <a:picLocks noChangeAspect="1"/>
+          </p:cNvPicPr>
+          <p:nvPr/>
+        </p:nvPicPr>
+        <p:blipFill>
+          <a:blip r:embed="rId3"/>
+          <a:stretch>
+            <a:fillRect/>
+          </a:stretch>
+        </p:blipFill>
+        <p:spPr>
+          <a:xfrm>
+            <a:off x="3666744" y="1161288"/>
+            <a:ext cx="1335024" cy="3035808"/>
+          </a:xfrm>
+          <a:prstGeom prst="rect">
+            <a:avLst/>
+          </a:prstGeom>
+        </p:spPr>
+      </p:pic>
+      <p:sp>
+        <p:nvSpPr>
+          <p:cNvPr id="12" name="Shape 7"/>
           <p:cNvSpPr/>
           <p:nvPr/>
         </p:nvSpPr>
         <p:spPr>
           <a:xfrm>
-            <a:off x="548640" y="2167128"/>
-            <a:ext cx="329184" cy="329184"/>
-          </a:xfrm>
-          <a:prstGeom prst="ellipse">
-            <a:avLst/>
+            <a:off x="5257800" y="1097280"/>
+            <a:ext cx="3429000" cy="2139696"/>
+          </a:xfrm>
+          <a:prstGeom prst="roundRect">
+            <a:avLst>
+              <a:gd name="adj" fmla="val 4274"/>
+            </a:avLst>
           </a:prstGeom>
           <a:solidFill>
-            <a:srgbClr val="EEF0FB"/>
+            <a:srgbClr val="121A36"/>
           </a:solidFill>
           <a:ln w="9525">
             <a:solidFill>
-              <a:srgbClr val="D9DCE8"/>
+              <a:srgbClr val="121A36"/>
             </a:solidFill>
             <a:prstDash val="solid"/>
           </a:ln>
-        </p:spPr>
-      </p:sp>
-      <p:sp>
-        <p:nvSpPr>
-          <p:cNvPr id="16" name="Text 13"/>
-          <p:cNvSpPr txBox="1"/>
-          <p:nvPr/>
-        </p:nvSpPr>
-        <p:spPr>
-          <a:xfrm>
-            <a:off x="548640" y="2167128"/>
-            <a:ext cx="329184" cy="329184"/>
-          </a:xfrm>
-          <a:prstGeom prst="rect">
-            <a:avLst/>
-          </a:prstGeom>
-          <a:noFill/>
-          <a:ln/>
-        </p:spPr>
-        <p:txBody>
-          <a:bodyPr wrap="square" lIns="0" tIns="0" rIns="0" bIns="0" rtlCol="0" anchor="ctr"/>
-          <a:lstStyle/>
-          <a:p>
-            <a:pPr algn="ctr" indent="0" marL="0">
-              <a:buNone/>
-            </a:pPr>
-            <a:r>
-              <a:rPr lang="en-US" sz="900" b="1" dirty="0">
-                <a:solidFill>
-                  <a:srgbClr val="2D39B9"/>
-                </a:solidFill>
-                <a:latin typeface="Calibri" pitchFamily="34" charset="0"/>
-                <a:ea typeface="Calibri" pitchFamily="34" charset="-122"/>
-                <a:cs typeface="Calibri" pitchFamily="34" charset="-120"/>
-              </a:rPr>
-              <a:t>6</a:t>
-            </a:r>
-            <a:endParaRPr lang="en-US" sz="900" dirty="0"/>
-          </a:p>
-        </p:txBody>
-      </p:sp>
-      <p:sp>
-        <p:nvSpPr>
-          <p:cNvPr id="17" name="Shape 14"/>
-          <p:cNvSpPr/>
-          <p:nvPr/>
-        </p:nvSpPr>
-        <p:spPr>
-          <a:xfrm>
-            <a:off x="713232" y="2496312"/>
-            <a:ext cx="0" cy="173736"/>
-          </a:xfrm>
-          <a:prstGeom prst="line">
-            <a:avLst/>
-          </a:prstGeom>
-          <a:noFill/>
-          <a:ln w="12700">
-            <a:solidFill>
-              <a:srgbClr val="D9DCE8"/>
-            </a:solidFill>
-            <a:prstDash val="solid"/>
-          </a:ln>
-        </p:spPr>
-      </p:sp>
-      <p:sp>
-        <p:nvSpPr>
-          <p:cNvPr id="18" name="Text 15"/>
-          <p:cNvSpPr txBox="1"/>
-          <p:nvPr/>
-        </p:nvSpPr>
-        <p:spPr>
-          <a:xfrm>
-            <a:off x="1097280" y="2176272"/>
-            <a:ext cx="7498080" cy="365760"/>
+          <a:effectLst>
+            <a:outerShdw sx="100000" sy="100000" kx="0" ky="0" algn="bl" rotWithShape="0" blurRad="101600" dist="25400" dir="5400000">
+              <a:srgbClr val="000000">
+                <a:alpha val="16000"/>
+              </a:srgbClr>
+            </a:outerShdw>
+          </a:effectLst>
+        </p:spPr>
+      </p:sp>
+      <p:pic>
+        <p:nvPicPr>
+          <p:cNvPr id="13" name="Image 3" descr="img/30-escuro-visao-geral.jpg">    </p:cNvPr>
+          <p:cNvPicPr>
+            <a:picLocks noChangeAspect="1"/>
+          </p:cNvPicPr>
+          <p:nvPr/>
+        </p:nvPicPr>
+        <p:blipFill>
+          <a:blip r:embed="rId4"/>
+          <a:stretch>
+            <a:fillRect/>
+          </a:stretch>
+        </p:blipFill>
+        <p:spPr>
+          <a:xfrm>
+            <a:off x="5321808" y="1161288"/>
+            <a:ext cx="3300984" cy="2011680"/>
+          </a:xfrm>
+          <a:prstGeom prst="rect">
+            <a:avLst/>
+          </a:prstGeom>
+        </p:spPr>
+      </p:pic>
+      <p:sp>
+        <p:nvSpPr>
+          <p:cNvPr id="14" name="Text 8"/>
+          <p:cNvSpPr txBox="1"/>
+          <p:nvPr/>
+        </p:nvSpPr>
+        <p:spPr>
+          <a:xfrm>
+            <a:off x="5257800" y="3383280"/>
+            <a:ext cx="3429000" cy="1280160"/>
           </a:xfrm>
           <a:prstGeom prst="rect">
             <a:avLst/>
@@ -8615,11 +7172,12 @@
           <a:bodyPr wrap="square" lIns="0" tIns="0" rIns="0" bIns="0" rtlCol="0" anchor="t"/>
           <a:lstStyle/>
           <a:p>
-            <a:pPr indent="0" marL="0">
-              <a:buNone/>
-            </a:pPr>
-            <a:r>
-              <a:rPr lang="en-US" sz="1250" dirty="0">
+            <a:pPr marL="177800" indent="-177800">
+              <a:buSzPct val="100000"/>
+              <a:buChar char="•"/>
+            </a:pPr>
+            <a:r>
+              <a:rPr lang="en-US" sz="1100" b="1" dirty="0">
                 <a:solidFill>
                   <a:srgbClr val="1B1F3B"/>
                 </a:solidFill>
@@ -8627,125 +7185,16 @@
                 <a:ea typeface="Calibri" pitchFamily="34" charset="-122"/>
                 <a:cs typeface="Calibri" pitchFamily="34" charset="-120"/>
               </a:rPr>
-              <a:t>Paleta de comandos, Kanban por fase, ações em massa, modelos</a:t>
-            </a:r>
-            <a:endParaRPr lang="en-US" sz="1250" dirty="0"/>
-          </a:p>
-        </p:txBody>
-      </p:sp>
-      <p:sp>
-        <p:nvSpPr>
-          <p:cNvPr id="19" name="Shape 16"/>
-          <p:cNvSpPr/>
-          <p:nvPr/>
-        </p:nvSpPr>
-        <p:spPr>
-          <a:xfrm>
-            <a:off x="548640" y="2670048"/>
-            <a:ext cx="329184" cy="329184"/>
-          </a:xfrm>
-          <a:prstGeom prst="ellipse">
-            <a:avLst/>
-          </a:prstGeom>
-          <a:solidFill>
-            <a:srgbClr val="EEF0FB"/>
-          </a:solidFill>
-          <a:ln w="9525">
-            <a:solidFill>
-              <a:srgbClr val="D9DCE8"/>
-            </a:solidFill>
-            <a:prstDash val="solid"/>
-          </a:ln>
-        </p:spPr>
-      </p:sp>
-      <p:sp>
-        <p:nvSpPr>
-          <p:cNvPr id="20" name="Text 17"/>
-          <p:cNvSpPr txBox="1"/>
-          <p:nvPr/>
-        </p:nvSpPr>
-        <p:spPr>
-          <a:xfrm>
-            <a:off x="548640" y="2670048"/>
-            <a:ext cx="329184" cy="329184"/>
-          </a:xfrm>
-          <a:prstGeom prst="rect">
-            <a:avLst/>
-          </a:prstGeom>
-          <a:noFill/>
-          <a:ln/>
-        </p:spPr>
-        <p:txBody>
-          <a:bodyPr wrap="square" lIns="0" tIns="0" rIns="0" bIns="0" rtlCol="0" anchor="ctr"/>
-          <a:lstStyle/>
-          <a:p>
-            <a:pPr algn="ctr" indent="0" marL="0">
-              <a:buNone/>
-            </a:pPr>
-            <a:r>
-              <a:rPr lang="en-US" sz="900" b="1" dirty="0">
-                <a:solidFill>
-                  <a:srgbClr val="2D39B9"/>
-                </a:solidFill>
-                <a:latin typeface="Calibri" pitchFamily="34" charset="0"/>
-                <a:ea typeface="Calibri" pitchFamily="34" charset="-122"/>
-                <a:cs typeface="Calibri" pitchFamily="34" charset="-120"/>
-              </a:rPr>
-              <a:t>7</a:t>
-            </a:r>
-            <a:endParaRPr lang="en-US" sz="900" dirty="0"/>
-          </a:p>
-        </p:txBody>
-      </p:sp>
-      <p:sp>
-        <p:nvSpPr>
-          <p:cNvPr id="21" name="Shape 18"/>
-          <p:cNvSpPr/>
-          <p:nvPr/>
-        </p:nvSpPr>
-        <p:spPr>
-          <a:xfrm>
-            <a:off x="713232" y="2999232"/>
-            <a:ext cx="0" cy="173736"/>
-          </a:xfrm>
-          <a:prstGeom prst="line">
-            <a:avLst/>
-          </a:prstGeom>
-          <a:noFill/>
-          <a:ln w="12700">
-            <a:solidFill>
-              <a:srgbClr val="D9DCE8"/>
-            </a:solidFill>
-            <a:prstDash val="solid"/>
-          </a:ln>
-        </p:spPr>
-      </p:sp>
-      <p:sp>
-        <p:nvSpPr>
-          <p:cNvPr id="22" name="Text 19"/>
-          <p:cNvSpPr txBox="1"/>
-          <p:nvPr/>
-        </p:nvSpPr>
-        <p:spPr>
-          <a:xfrm>
-            <a:off x="1097280" y="2679192"/>
-            <a:ext cx="7498080" cy="365760"/>
-          </a:xfrm>
-          <a:prstGeom prst="rect">
-            <a:avLst/>
-          </a:prstGeom>
-          <a:noFill/>
-          <a:ln/>
-        </p:spPr>
-        <p:txBody>
-          <a:bodyPr wrap="square" lIns="0" tIns="0" rIns="0" bIns="0" rtlCol="0" anchor="t"/>
-          <a:lstStyle/>
-          <a:p>
-            <a:pPr indent="0" marL="0">
-              <a:buNone/>
-            </a:pPr>
-            <a:r>
-              <a:rPr lang="en-US" sz="1250" dirty="0">
+              <a:t>PWA: </a:t>
+            </a:r>
+            <a:pPr indent="0" marL="0">
+              <a:spcAft>
+                <a:spcPts val="400"/>
+              </a:spcAft>
+              <a:buNone/>
+            </a:pPr>
+            <a:r>
+              <a:rPr lang="en-US" sz="1100" dirty="0">
                 <a:solidFill>
                   <a:srgbClr val="1B1F3B"/>
                 </a:solidFill>
@@ -8753,125 +7202,17 @@
                 <a:ea typeface="Calibri" pitchFamily="34" charset="-122"/>
                 <a:cs typeface="Calibri" pitchFamily="34" charset="-120"/>
               </a:rPr>
-              <a:t>PIN, auto-bloqueio, cópias cifradas, modo de privacidade</a:t>
-            </a:r>
-            <a:endParaRPr lang="en-US" sz="1250" dirty="0"/>
-          </a:p>
-        </p:txBody>
-      </p:sp>
-      <p:sp>
-        <p:nvSpPr>
-          <p:cNvPr id="23" name="Shape 20"/>
-          <p:cNvSpPr/>
-          <p:nvPr/>
-        </p:nvSpPr>
-        <p:spPr>
-          <a:xfrm>
-            <a:off x="548640" y="3172968"/>
-            <a:ext cx="329184" cy="329184"/>
-          </a:xfrm>
-          <a:prstGeom prst="ellipse">
-            <a:avLst/>
-          </a:prstGeom>
-          <a:solidFill>
-            <a:srgbClr val="EEF0FB"/>
-          </a:solidFill>
-          <a:ln w="9525">
-            <a:solidFill>
-              <a:srgbClr val="D9DCE8"/>
-            </a:solidFill>
-            <a:prstDash val="solid"/>
-          </a:ln>
-        </p:spPr>
-      </p:sp>
-      <p:sp>
-        <p:nvSpPr>
-          <p:cNvPr id="24" name="Text 21"/>
-          <p:cNvSpPr txBox="1"/>
-          <p:nvPr/>
-        </p:nvSpPr>
-        <p:spPr>
-          <a:xfrm>
-            <a:off x="548640" y="3172968"/>
-            <a:ext cx="329184" cy="329184"/>
-          </a:xfrm>
-          <a:prstGeom prst="rect">
-            <a:avLst/>
-          </a:prstGeom>
-          <a:noFill/>
-          <a:ln/>
-        </p:spPr>
-        <p:txBody>
-          <a:bodyPr wrap="square" lIns="0" tIns="0" rIns="0" bIns="0" rtlCol="0" anchor="ctr"/>
-          <a:lstStyle/>
-          <a:p>
-            <a:pPr algn="ctr" indent="0" marL="0">
-              <a:buNone/>
-            </a:pPr>
-            <a:r>
-              <a:rPr lang="en-US" sz="900" b="1" dirty="0">
-                <a:solidFill>
-                  <a:srgbClr val="2D39B9"/>
-                </a:solidFill>
-                <a:latin typeface="Calibri" pitchFamily="34" charset="0"/>
-                <a:ea typeface="Calibri" pitchFamily="34" charset="-122"/>
-                <a:cs typeface="Calibri" pitchFamily="34" charset="-120"/>
-              </a:rPr>
-              <a:t>8</a:t>
-            </a:r>
-            <a:endParaRPr lang="en-US" sz="900" dirty="0"/>
-          </a:p>
-        </p:txBody>
-      </p:sp>
-      <p:sp>
-        <p:nvSpPr>
-          <p:cNvPr id="25" name="Shape 22"/>
-          <p:cNvSpPr/>
-          <p:nvPr/>
-        </p:nvSpPr>
-        <p:spPr>
-          <a:xfrm>
-            <a:off x="713232" y="3502152"/>
-            <a:ext cx="0" cy="173736"/>
-          </a:xfrm>
-          <a:prstGeom prst="line">
-            <a:avLst/>
-          </a:prstGeom>
-          <a:noFill/>
-          <a:ln w="12700">
-            <a:solidFill>
-              <a:srgbClr val="D9DCE8"/>
-            </a:solidFill>
-            <a:prstDash val="solid"/>
-          </a:ln>
-        </p:spPr>
-      </p:sp>
-      <p:sp>
-        <p:nvSpPr>
-          <p:cNvPr id="26" name="Text 23"/>
-          <p:cNvSpPr txBox="1"/>
-          <p:nvPr/>
-        </p:nvSpPr>
-        <p:spPr>
-          <a:xfrm>
-            <a:off x="1097280" y="3182112"/>
-            <a:ext cx="7498080" cy="365760"/>
-          </a:xfrm>
-          <a:prstGeom prst="rect">
-            <a:avLst/>
-          </a:prstGeom>
-          <a:noFill/>
-          <a:ln/>
-        </p:spPr>
-        <p:txBody>
-          <a:bodyPr wrap="square" lIns="0" tIns="0" rIns="0" bIns="0" rtlCol="0" anchor="t"/>
-          <a:lstStyle/>
-          <a:p>
-            <a:pPr indent="0" marL="0">
-              <a:buNone/>
-            </a:pPr>
-            <a:r>
-              <a:rPr lang="en-US" sz="1250" dirty="0">
+              <a:t>instala-se em Windows, macOS, Android e iOS; abre em janela própria.</a:t>
+            </a:r>
+            <a:endParaRPr lang="en-US" sz="1100" dirty="0"/>
+          </a:p>
+          <a:p>
+            <a:pPr marL="177800" indent="-177800">
+              <a:buSzPct val="100000"/>
+              <a:buChar char="•"/>
+            </a:pPr>
+            <a:r>
+              <a:rPr lang="en-US" sz="1100" b="1" dirty="0">
                 <a:solidFill>
                   <a:srgbClr val="1B1F3B"/>
                 </a:solidFill>
@@ -8879,125 +7220,16 @@
                 <a:ea typeface="Calibri" pitchFamily="34" charset="-122"/>
                 <a:cs typeface="Calibri" pitchFamily="34" charset="-120"/>
               </a:rPr>
-              <a:t>França/UE: CSE, lei aplicável, checklist notaire; textos multilingues</a:t>
-            </a:r>
-            <a:endParaRPr lang="en-US" sz="1250" dirty="0"/>
-          </a:p>
-        </p:txBody>
-      </p:sp>
-      <p:sp>
-        <p:nvSpPr>
-          <p:cNvPr id="27" name="Shape 24"/>
-          <p:cNvSpPr/>
-          <p:nvPr/>
-        </p:nvSpPr>
-        <p:spPr>
-          <a:xfrm>
-            <a:off x="548640" y="3675888"/>
-            <a:ext cx="329184" cy="329184"/>
-          </a:xfrm>
-          <a:prstGeom prst="ellipse">
-            <a:avLst/>
-          </a:prstGeom>
-          <a:solidFill>
-            <a:srgbClr val="EEF0FB"/>
-          </a:solidFill>
-          <a:ln w="9525">
-            <a:solidFill>
-              <a:srgbClr val="D9DCE8"/>
-            </a:solidFill>
-            <a:prstDash val="solid"/>
-          </a:ln>
-        </p:spPr>
-      </p:sp>
-      <p:sp>
-        <p:nvSpPr>
-          <p:cNvPr id="28" name="Text 25"/>
-          <p:cNvSpPr txBox="1"/>
-          <p:nvPr/>
-        </p:nvSpPr>
-        <p:spPr>
-          <a:xfrm>
-            <a:off x="548640" y="3675888"/>
-            <a:ext cx="329184" cy="329184"/>
-          </a:xfrm>
-          <a:prstGeom prst="rect">
-            <a:avLst/>
-          </a:prstGeom>
-          <a:noFill/>
-          <a:ln/>
-        </p:spPr>
-        <p:txBody>
-          <a:bodyPr wrap="square" lIns="0" tIns="0" rIns="0" bIns="0" rtlCol="0" anchor="ctr"/>
-          <a:lstStyle/>
-          <a:p>
-            <a:pPr algn="ctr" indent="0" marL="0">
-              <a:buNone/>
-            </a:pPr>
-            <a:r>
-              <a:rPr lang="en-US" sz="900" b="1" dirty="0">
-                <a:solidFill>
-                  <a:srgbClr val="2D39B9"/>
-                </a:solidFill>
-                <a:latin typeface="Calibri" pitchFamily="34" charset="0"/>
-                <a:ea typeface="Calibri" pitchFamily="34" charset="-122"/>
-                <a:cs typeface="Calibri" pitchFamily="34" charset="-120"/>
-              </a:rPr>
-              <a:t>9</a:t>
-            </a:r>
-            <a:endParaRPr lang="en-US" sz="900" dirty="0"/>
-          </a:p>
-        </p:txBody>
-      </p:sp>
-      <p:sp>
-        <p:nvSpPr>
-          <p:cNvPr id="29" name="Shape 26"/>
-          <p:cNvSpPr/>
-          <p:nvPr/>
-        </p:nvSpPr>
-        <p:spPr>
-          <a:xfrm>
-            <a:off x="713232" y="4005072"/>
-            <a:ext cx="0" cy="173736"/>
-          </a:xfrm>
-          <a:prstGeom prst="line">
-            <a:avLst/>
-          </a:prstGeom>
-          <a:noFill/>
-          <a:ln w="12700">
-            <a:solidFill>
-              <a:srgbClr val="D9DCE8"/>
-            </a:solidFill>
-            <a:prstDash val="solid"/>
-          </a:ln>
-        </p:spPr>
-      </p:sp>
-      <p:sp>
-        <p:nvSpPr>
-          <p:cNvPr id="30" name="Text 27"/>
-          <p:cNvSpPr txBox="1"/>
-          <p:nvPr/>
-        </p:nvSpPr>
-        <p:spPr>
-          <a:xfrm>
-            <a:off x="1097280" y="3685032"/>
-            <a:ext cx="7498080" cy="365760"/>
-          </a:xfrm>
-          <a:prstGeom prst="rect">
-            <a:avLst/>
-          </a:prstGeom>
-          <a:noFill/>
-          <a:ln/>
-        </p:spPr>
-        <p:txBody>
-          <a:bodyPr wrap="square" lIns="0" tIns="0" rIns="0" bIns="0" rtlCol="0" anchor="t"/>
-          <a:lstStyle/>
-          <a:p>
-            <a:pPr indent="0" marL="0">
-              <a:buNone/>
-            </a:pPr>
-            <a:r>
-              <a:rPr lang="en-US" sz="1250" dirty="0">
+              <a:t>Offline: </a:t>
+            </a:r>
+            <a:pPr indent="0" marL="0">
+              <a:spcAft>
+                <a:spcPts val="400"/>
+              </a:spcAft>
+              <a:buNone/>
+            </a:pPr>
+            <a:r>
+              <a:rPr lang="en-US" sz="1100" dirty="0">
                 <a:solidFill>
                   <a:srgbClr val="1B1F3B"/>
                 </a:solidFill>
@@ -9005,102 +7237,17 @@
                 <a:ea typeface="Calibri" pitchFamily="34" charset="-122"/>
                 <a:cs typeface="Calibri" pitchFamily="34" charset="-120"/>
               </a:rPr>
-              <a:t>Acessibilidade WCAG AA, desempenho, testes ponta a ponta</a:t>
-            </a:r>
-            <a:endParaRPr lang="en-US" sz="1250" dirty="0"/>
-          </a:p>
-        </p:txBody>
-      </p:sp>
-      <p:sp>
-        <p:nvSpPr>
-          <p:cNvPr id="31" name="Shape 28"/>
-          <p:cNvSpPr/>
-          <p:nvPr/>
-        </p:nvSpPr>
-        <p:spPr>
-          <a:xfrm>
-            <a:off x="548640" y="4178808"/>
-            <a:ext cx="329184" cy="329184"/>
-          </a:xfrm>
-          <a:prstGeom prst="ellipse">
-            <a:avLst/>
-          </a:prstGeom>
-          <a:solidFill>
-            <a:srgbClr val="EEF0FB"/>
-          </a:solidFill>
-          <a:ln w="9525">
-            <a:solidFill>
-              <a:srgbClr val="D9DCE8"/>
-            </a:solidFill>
-            <a:prstDash val="solid"/>
-          </a:ln>
-        </p:spPr>
-      </p:sp>
-      <p:sp>
-        <p:nvSpPr>
-          <p:cNvPr id="32" name="Text 29"/>
-          <p:cNvSpPr txBox="1"/>
-          <p:nvPr/>
-        </p:nvSpPr>
-        <p:spPr>
-          <a:xfrm>
-            <a:off x="548640" y="4178808"/>
-            <a:ext cx="329184" cy="329184"/>
-          </a:xfrm>
-          <a:prstGeom prst="rect">
-            <a:avLst/>
-          </a:prstGeom>
-          <a:noFill/>
-          <a:ln/>
-        </p:spPr>
-        <p:txBody>
-          <a:bodyPr wrap="square" lIns="0" tIns="0" rIns="0" bIns="0" rtlCol="0" anchor="ctr"/>
-          <a:lstStyle/>
-          <a:p>
-            <a:pPr algn="ctr" indent="0" marL="0">
-              <a:buNone/>
-            </a:pPr>
-            <a:r>
-              <a:rPr lang="en-US" sz="900" b="1" dirty="0">
-                <a:solidFill>
-                  <a:srgbClr val="2D39B9"/>
-                </a:solidFill>
-                <a:latin typeface="Calibri" pitchFamily="34" charset="0"/>
-                <a:ea typeface="Calibri" pitchFamily="34" charset="-122"/>
-                <a:cs typeface="Calibri" pitchFamily="34" charset="-120"/>
-              </a:rPr>
-              <a:t>10</a:t>
-            </a:r>
-            <a:endParaRPr lang="en-US" sz="900" dirty="0"/>
-          </a:p>
-        </p:txBody>
-      </p:sp>
-      <p:sp>
-        <p:nvSpPr>
-          <p:cNvPr id="33" name="Text 30"/>
-          <p:cNvSpPr txBox="1"/>
-          <p:nvPr/>
-        </p:nvSpPr>
-        <p:spPr>
-          <a:xfrm>
-            <a:off x="1097280" y="4187952"/>
-            <a:ext cx="7498080" cy="365760"/>
-          </a:xfrm>
-          <a:prstGeom prst="rect">
-            <a:avLst/>
-          </a:prstGeom>
-          <a:noFill/>
-          <a:ln/>
-        </p:spPr>
-        <p:txBody>
-          <a:bodyPr wrap="square" lIns="0" tIns="0" rIns="0" bIns="0" rtlCol="0" anchor="t"/>
-          <a:lstStyle/>
-          <a:p>
-            <a:pPr indent="0" marL="0">
-              <a:buNone/>
-            </a:pPr>
-            <a:r>
-              <a:rPr lang="en-US" sz="1250" dirty="0">
+              <a:t>tudo funciona sem ligação; atualizações quando escolher.</a:t>
+            </a:r>
+            <a:endParaRPr lang="en-US" sz="1100" dirty="0"/>
+          </a:p>
+          <a:p>
+            <a:pPr marL="177800" indent="-177800">
+              <a:buSzPct val="100000"/>
+              <a:buChar char="•"/>
+            </a:pPr>
+            <a:r>
+              <a:rPr lang="en-US" sz="1100" b="1" dirty="0">
                 <a:solidFill>
                   <a:srgbClr val="1B1F3B"/>
                 </a:solidFill>
@@ -9108,9 +7255,26 @@
                 <a:ea typeface="Calibri" pitchFamily="34" charset="-122"/>
                 <a:cs typeface="Calibri" pitchFamily="34" charset="-120"/>
               </a:rPr>
-              <a:t>Revisão final, guia, pacote de entrega, resumo executivo</a:t>
-            </a:r>
-            <a:endParaRPr lang="en-US" sz="1250" dirty="0"/>
+              <a:t>Tema escuro, </a:t>
+            </a:r>
+            <a:pPr indent="0" marL="0">
+              <a:spcAft>
+                <a:spcPts val="400"/>
+              </a:spcAft>
+              <a:buNone/>
+            </a:pPr>
+            <a:r>
+              <a:rPr lang="en-US" sz="1100" dirty="0">
+                <a:solidFill>
+                  <a:srgbClr val="1B1F3B"/>
+                </a:solidFill>
+                <a:latin typeface="Calibri" pitchFamily="34" charset="0"/>
+                <a:ea typeface="Calibri" pitchFamily="34" charset="-122"/>
+                <a:cs typeface="Calibri" pitchFamily="34" charset="-120"/>
+              </a:rPr>
+              <a:t>notificações e contador de pendentes no ícone.</a:t>
+            </a:r>
+            <a:endParaRPr lang="en-US" sz="1100" dirty="0"/>
           </a:p>
         </p:txBody>
       </p:sp>
@@ -9179,7 +7343,7 @@
                 <a:ea typeface="Calibri" pitchFamily="34" charset="-122"/>
                 <a:cs typeface="Calibri" pitchFamily="34" charset="-120"/>
               </a:rPr>
-              <a:t>COMO COMEÇAR</a:t>
+              <a:t>PRIVACIDADE E SEGURANÇA</a:t>
             </a:r>
             <a:endParaRPr lang="en-US" sz="1000" dirty="0"/>
           </a:p>
@@ -9218,7 +7382,7 @@
                 <a:ea typeface="Cambria" pitchFamily="34" charset="-122"/>
                 <a:cs typeface="Cambria" pitchFamily="34" charset="-120"/>
               </a:rPr>
-              <a:t>Três passos e cinco minutos</a:t>
+              <a:t>Os dados ficam no dispositivo do escritório</a:t>
             </a:r>
             <a:endParaRPr lang="en-US" sz="2800" dirty="0"/>
           </a:p>
@@ -9310,12 +7474,12 @@
         </p:nvSpPr>
         <p:spPr>
           <a:xfrm>
-            <a:off x="457200" y="1188720"/>
-            <a:ext cx="2651760" cy="2377440"/>
+            <a:off x="457200" y="1143000"/>
+            <a:ext cx="8229600" cy="749808"/>
           </a:xfrm>
           <a:prstGeom prst="roundRect">
             <a:avLst>
-              <a:gd name="adj" fmla="val 3077"/>
+              <a:gd name="adj" fmla="val 9756"/>
             </a:avLst>
           </a:prstGeom>
           <a:solidFill>
@@ -9337,8 +7501,8 @@
         </p:nvSpPr>
         <p:spPr>
           <a:xfrm>
-            <a:off x="685800" y="1417320"/>
-            <a:ext cx="548640" cy="548640"/>
+            <a:off x="640080" y="1289304"/>
+            <a:ext cx="457200" cy="457200"/>
           </a:xfrm>
           <a:prstGeom prst="ellipse">
             <a:avLst/>
@@ -9356,7 +7520,7 @@
       </p:sp>
       <p:pic>
         <p:nvPicPr>
-          <p:cNvPr id="8" name="Image 0" descr="icons/globe-white.png">    </p:cNvPr>
+          <p:cNvPr id="8" name="Image 0" descr="icons/hard-drive-white.png">    </p:cNvPr>
           <p:cNvPicPr>
             <a:picLocks noChangeAspect="1"/>
           </p:cNvPicPr>
@@ -9370,8 +7534,8 @@
         </p:blipFill>
         <p:spPr>
           <a:xfrm>
-            <a:off x="817474" y="1548994"/>
-            <a:ext cx="285293" cy="285293"/>
+            <a:off x="749808" y="1399032"/>
+            <a:ext cx="237744" cy="237744"/>
           </a:xfrm>
           <a:prstGeom prst="rect">
             <a:avLst/>
@@ -9386,34 +7550,34 @@
         </p:nvSpPr>
         <p:spPr>
           <a:xfrm>
-            <a:off x="2468880" y="1325880"/>
-            <a:ext cx="457200" cy="548640"/>
-          </a:xfrm>
-          <a:prstGeom prst="rect">
-            <a:avLst/>
-          </a:prstGeom>
-          <a:noFill/>
-          <a:ln/>
-        </p:spPr>
-        <p:txBody>
-          <a:bodyPr wrap="square" lIns="0" tIns="0" rIns="0" bIns="0" rtlCol="0" anchor="ctr"/>
-          <a:lstStyle/>
-          <a:p>
-            <a:pPr algn="r" indent="0" marL="0">
-              <a:buNone/>
-            </a:pPr>
-            <a:r>
-              <a:rPr lang="en-US" sz="3000" b="1" dirty="0">
-                <a:solidFill>
-                  <a:srgbClr val="EEF0FB"/>
-                </a:solidFill>
-                <a:latin typeface="Cambria" pitchFamily="34" charset="0"/>
-                <a:ea typeface="Cambria" pitchFamily="34" charset="-122"/>
-                <a:cs typeface="Cambria" pitchFamily="34" charset="-120"/>
-              </a:rPr>
-              <a:t>1</a:t>
-            </a:r>
-            <a:endParaRPr lang="en-US" sz="3000" dirty="0"/>
+            <a:off x="1280160" y="1252728"/>
+            <a:ext cx="2377440" cy="320040"/>
+          </a:xfrm>
+          <a:prstGeom prst="rect">
+            <a:avLst/>
+          </a:prstGeom>
+          <a:noFill/>
+          <a:ln/>
+        </p:spPr>
+        <p:txBody>
+          <a:bodyPr wrap="square" lIns="0" tIns="0" rIns="0" bIns="0" rtlCol="0" anchor="t"/>
+          <a:lstStyle/>
+          <a:p>
+            <a:pPr indent="0" marL="0">
+              <a:buNone/>
+            </a:pPr>
+            <a:r>
+              <a:rPr lang="en-US" sz="1300" b="1" dirty="0">
+                <a:solidFill>
+                  <a:srgbClr val="1B1F3B"/>
+                </a:solidFill>
+                <a:latin typeface="Calibri" pitchFamily="34" charset="0"/>
+                <a:ea typeface="Calibri" pitchFamily="34" charset="-122"/>
+                <a:cs typeface="Calibri" pitchFamily="34" charset="-120"/>
+              </a:rPr>
+              <a:t>Armazenamento local</a:t>
+            </a:r>
+            <a:endParaRPr lang="en-US" sz="1300" dirty="0"/>
           </a:p>
         </p:txBody>
       </p:sp>
@@ -9425,8 +7589,8 @@
         </p:nvSpPr>
         <p:spPr>
           <a:xfrm>
-            <a:off x="685800" y="2103120"/>
-            <a:ext cx="2194560" cy="365760"/>
+            <a:off x="3657600" y="1252728"/>
+            <a:ext cx="4846320" cy="566928"/>
           </a:xfrm>
           <a:prstGeom prst="rect">
             <a:avLst/>
@@ -9442,45 +7606,6 @@
               <a:buNone/>
             </a:pPr>
             <a:r>
-              <a:rPr lang="en-US" sz="1600" b="1" dirty="0">
-                <a:solidFill>
-                  <a:srgbClr val="1B1F3B"/>
-                </a:solidFill>
-                <a:latin typeface="Calibri" pitchFamily="34" charset="0"/>
-                <a:ea typeface="Calibri" pitchFamily="34" charset="-122"/>
-                <a:cs typeface="Calibri" pitchFamily="34" charset="-120"/>
-              </a:rPr>
-              <a:t>Abrir</a:t>
-            </a:r>
-            <a:endParaRPr lang="en-US" sz="1600" dirty="0"/>
-          </a:p>
-        </p:txBody>
-      </p:sp>
-      <p:sp>
-        <p:nvSpPr>
-          <p:cNvPr id="11" name="Text 8"/>
-          <p:cNvSpPr txBox="1"/>
-          <p:nvPr/>
-        </p:nvSpPr>
-        <p:spPr>
-          <a:xfrm>
-            <a:off x="685800" y="2514600"/>
-            <a:ext cx="2194560" cy="1005840"/>
-          </a:xfrm>
-          <a:prstGeom prst="rect">
-            <a:avLst/>
-          </a:prstGeom>
-          <a:noFill/>
-          <a:ln/>
-        </p:spPr>
-        <p:txBody>
-          <a:bodyPr wrap="square" lIns="0" tIns="0" rIns="0" bIns="0" rtlCol="0" anchor="t"/>
-          <a:lstStyle/>
-          <a:p>
-            <a:pPr indent="0" marL="0">
-              <a:buNone/>
-            </a:pPr>
-            <a:r>
               <a:rPr lang="en-US" sz="1100" dirty="0">
                 <a:solidFill>
                   <a:srgbClr val="5B6180"/>
@@ -9489,11 +7614,38 @@
                 <a:ea typeface="Calibri" pitchFamily="34" charset="-122"/>
                 <a:cs typeface="Calibri" pitchFamily="34" charset="-120"/>
               </a:rPr>
-              <a:t>Aceda a nelsonsous.github.io/balcao-sucessoes em qualquer navegador atual.</a:t>
+              <a:t>IndexedDB no navegador, incluindo anexos. Sem contas, sem servidores, sem telemetria.</a:t>
             </a:r>
             <a:endParaRPr lang="en-US" sz="1100" dirty="0"/>
           </a:p>
         </p:txBody>
+      </p:sp>
+      <p:sp>
+        <p:nvSpPr>
+          <p:cNvPr id="11" name="Shape 8"/>
+          <p:cNvSpPr/>
+          <p:nvPr/>
+        </p:nvSpPr>
+        <p:spPr>
+          <a:xfrm>
+            <a:off x="457200" y="2011680"/>
+            <a:ext cx="8229600" cy="749808"/>
+          </a:xfrm>
+          <a:prstGeom prst="roundRect">
+            <a:avLst>
+              <a:gd name="adj" fmla="val 9756"/>
+            </a:avLst>
+          </a:prstGeom>
+          <a:solidFill>
+            <a:srgbClr val="FFFFFF"/>
+          </a:solidFill>
+          <a:ln w="9525">
+            <a:solidFill>
+              <a:srgbClr val="D9DCE8"/>
+            </a:solidFill>
+            <a:prstDash val="solid"/>
+          </a:ln>
+        </p:spPr>
       </p:sp>
       <p:sp>
         <p:nvSpPr>
@@ -9503,12 +7655,139 @@
         </p:nvSpPr>
         <p:spPr>
           <a:xfrm>
-            <a:off x="3291840" y="1188720"/>
-            <a:ext cx="2651760" cy="2377440"/>
+            <a:off x="640080" y="2157984"/>
+            <a:ext cx="457200" cy="457200"/>
+          </a:xfrm>
+          <a:prstGeom prst="ellipse">
+            <a:avLst/>
+          </a:prstGeom>
+          <a:solidFill>
+            <a:srgbClr val="2D39B9"/>
+          </a:solidFill>
+          <a:ln w="12700">
+            <a:solidFill>
+              <a:srgbClr val="2D39B9"/>
+            </a:solidFill>
+            <a:prstDash val="solid"/>
+          </a:ln>
+        </p:spPr>
+      </p:sp>
+      <p:pic>
+        <p:nvPicPr>
+          <p:cNvPr id="13" name="Image 1" descr="icons/database-white.png">    </p:cNvPr>
+          <p:cNvPicPr>
+            <a:picLocks noChangeAspect="1"/>
+          </p:cNvPicPr>
+          <p:nvPr/>
+        </p:nvPicPr>
+        <p:blipFill>
+          <a:blip r:embed="rId2"/>
+          <a:stretch>
+            <a:fillRect/>
+          </a:stretch>
+        </p:blipFill>
+        <p:spPr>
+          <a:xfrm>
+            <a:off x="749808" y="2267712"/>
+            <a:ext cx="237744" cy="237744"/>
+          </a:xfrm>
+          <a:prstGeom prst="rect">
+            <a:avLst/>
+          </a:prstGeom>
+        </p:spPr>
+      </p:pic>
+      <p:sp>
+        <p:nvSpPr>
+          <p:cNvPr id="14" name="Text 10"/>
+          <p:cNvSpPr txBox="1"/>
+          <p:nvPr/>
+        </p:nvSpPr>
+        <p:spPr>
+          <a:xfrm>
+            <a:off x="1280160" y="2121408"/>
+            <a:ext cx="2377440" cy="320040"/>
+          </a:xfrm>
+          <a:prstGeom prst="rect">
+            <a:avLst/>
+          </a:prstGeom>
+          <a:noFill/>
+          <a:ln/>
+        </p:spPr>
+        <p:txBody>
+          <a:bodyPr wrap="square" lIns="0" tIns="0" rIns="0" bIns="0" rtlCol="0" anchor="t"/>
+          <a:lstStyle/>
+          <a:p>
+            <a:pPr indent="0" marL="0">
+              <a:buNone/>
+            </a:pPr>
+            <a:r>
+              <a:rPr lang="en-US" sz="1300" b="1" dirty="0">
+                <a:solidFill>
+                  <a:srgbClr val="1B1F3B"/>
+                </a:solidFill>
+                <a:latin typeface="Calibri" pitchFamily="34" charset="0"/>
+                <a:ea typeface="Calibri" pitchFamily="34" charset="-122"/>
+                <a:cs typeface="Calibri" pitchFamily="34" charset="-120"/>
+              </a:rPr>
+              <a:t>Cópias de segurança</a:t>
+            </a:r>
+            <a:endParaRPr lang="en-US" sz="1300" dirty="0"/>
+          </a:p>
+        </p:txBody>
+      </p:sp>
+      <p:sp>
+        <p:nvSpPr>
+          <p:cNvPr id="15" name="Text 11"/>
+          <p:cNvSpPr txBox="1"/>
+          <p:nvPr/>
+        </p:nvSpPr>
+        <p:spPr>
+          <a:xfrm>
+            <a:off x="3657600" y="2121408"/>
+            <a:ext cx="4846320" cy="566928"/>
+          </a:xfrm>
+          <a:prstGeom prst="rect">
+            <a:avLst/>
+          </a:prstGeom>
+          <a:noFill/>
+          <a:ln/>
+        </p:spPr>
+        <p:txBody>
+          <a:bodyPr wrap="square" lIns="0" tIns="0" rIns="0" bIns="0" rtlCol="0" anchor="t"/>
+          <a:lstStyle/>
+          <a:p>
+            <a:pPr indent="0" marL="0">
+              <a:buNone/>
+            </a:pPr>
+            <a:r>
+              <a:rPr lang="en-US" sz="1100" dirty="0">
+                <a:solidFill>
+                  <a:srgbClr val="5B6180"/>
+                </a:solidFill>
+                <a:latin typeface="Calibri" pitchFamily="34" charset="0"/>
+                <a:ea typeface="Calibri" pitchFamily="34" charset="-122"/>
+                <a:cs typeface="Calibri" pitchFamily="34" charset="-120"/>
+              </a:rPr>
+              <a:t>Ficheiro .json (com ou sem anexos) para guardar, transferir e restaurar — substituir ou juntar.</a:t>
+            </a:r>
+            <a:endParaRPr lang="en-US" sz="1100" dirty="0"/>
+          </a:p>
+        </p:txBody>
+      </p:sp>
+      <p:sp>
+        <p:nvSpPr>
+          <p:cNvPr id="16" name="Shape 12"/>
+          <p:cNvSpPr/>
+          <p:nvPr/>
+        </p:nvSpPr>
+        <p:spPr>
+          <a:xfrm>
+            <a:off x="457200" y="2880360"/>
+            <a:ext cx="8229600" cy="749808"/>
           </a:xfrm>
           <a:prstGeom prst="roundRect">
             <a:avLst>
-              <a:gd name="adj" fmla="val 3077"/>
+              <a:gd name="adj" fmla="val 9756"/>
             </a:avLst>
           </a:prstGeom>
           <a:solidFill>
@@ -9524,14 +7803,14 @@
       </p:sp>
       <p:sp>
         <p:nvSpPr>
-          <p:cNvPr id="13" name="Shape 10"/>
+          <p:cNvPr id="17" name="Shape 13"/>
           <p:cNvSpPr/>
           <p:nvPr/>
         </p:nvSpPr>
         <p:spPr>
           <a:xfrm>
-            <a:off x="3520440" y="1417320"/>
-            <a:ext cx="548640" cy="548640"/>
+            <a:off x="640080" y="3026664"/>
+            <a:ext cx="457200" cy="457200"/>
           </a:xfrm>
           <a:prstGeom prst="ellipse">
             <a:avLst/>
@@ -9549,22 +7828,22 @@
       </p:sp>
       <p:pic>
         <p:nvPicPr>
-          <p:cNvPr id="14" name="Image 1" descr="icons/download-white.png">    </p:cNvPr>
+          <p:cNvPr id="18" name="Image 2" descr="icons/eye-off-white.png">    </p:cNvPr>
           <p:cNvPicPr>
             <a:picLocks noChangeAspect="1"/>
           </p:cNvPicPr>
           <p:nvPr/>
         </p:nvPicPr>
         <p:blipFill>
-          <a:blip r:embed="rId2"/>
+          <a:blip r:embed="rId3"/>
           <a:stretch>
             <a:fillRect/>
           </a:stretch>
         </p:blipFill>
         <p:spPr>
           <a:xfrm>
-            <a:off x="3652114" y="1548994"/>
-            <a:ext cx="285293" cy="285293"/>
+            <a:off x="749808" y="3136392"/>
+            <a:ext cx="237744" cy="237744"/>
           </a:xfrm>
           <a:prstGeom prst="rect">
             <a:avLst/>
@@ -9573,53 +7852,14 @@
       </p:pic>
       <p:sp>
         <p:nvSpPr>
-          <p:cNvPr id="15" name="Text 11"/>
-          <p:cNvSpPr txBox="1"/>
-          <p:nvPr/>
-        </p:nvSpPr>
-        <p:spPr>
-          <a:xfrm>
-            <a:off x="5303520" y="1325880"/>
-            <a:ext cx="457200" cy="548640"/>
-          </a:xfrm>
-          <a:prstGeom prst="rect">
-            <a:avLst/>
-          </a:prstGeom>
-          <a:noFill/>
-          <a:ln/>
-        </p:spPr>
-        <p:txBody>
-          <a:bodyPr wrap="square" lIns="0" tIns="0" rIns="0" bIns="0" rtlCol="0" anchor="ctr"/>
-          <a:lstStyle/>
-          <a:p>
-            <a:pPr algn="r" indent="0" marL="0">
-              <a:buNone/>
-            </a:pPr>
-            <a:r>
-              <a:rPr lang="en-US" sz="3000" b="1" dirty="0">
-                <a:solidFill>
-                  <a:srgbClr val="EEF0FB"/>
-                </a:solidFill>
-                <a:latin typeface="Cambria" pitchFamily="34" charset="0"/>
-                <a:ea typeface="Cambria" pitchFamily="34" charset="-122"/>
-                <a:cs typeface="Cambria" pitchFamily="34" charset="-120"/>
-              </a:rPr>
-              <a:t>2</a:t>
-            </a:r>
-            <a:endParaRPr lang="en-US" sz="3000" dirty="0"/>
-          </a:p>
-        </p:txBody>
-      </p:sp>
-      <p:sp>
-        <p:nvSpPr>
-          <p:cNvPr id="16" name="Text 12"/>
-          <p:cNvSpPr txBox="1"/>
-          <p:nvPr/>
-        </p:nvSpPr>
-        <p:spPr>
-          <a:xfrm>
-            <a:off x="3520440" y="2103120"/>
-            <a:ext cx="2194560" cy="365760"/>
+          <p:cNvPr id="19" name="Text 14"/>
+          <p:cNvSpPr txBox="1"/>
+          <p:nvPr/>
+        </p:nvSpPr>
+        <p:spPr>
+          <a:xfrm>
+            <a:off x="1280160" y="2990088"/>
+            <a:ext cx="2377440" cy="320040"/>
           </a:xfrm>
           <a:prstGeom prst="rect">
             <a:avLst/>
@@ -9635,7 +7875,7 @@
               <a:buNone/>
             </a:pPr>
             <a:r>
-              <a:rPr lang="en-US" sz="1600" b="1" dirty="0">
+              <a:rPr lang="en-US" sz="1300" b="1" dirty="0">
                 <a:solidFill>
                   <a:srgbClr val="1B1F3B"/>
                 </a:solidFill>
@@ -9643,22 +7883,22 @@
                 <a:ea typeface="Calibri" pitchFamily="34" charset="-122"/>
                 <a:cs typeface="Calibri" pitchFamily="34" charset="-120"/>
               </a:rPr>
-              <a:t>Instalar</a:t>
-            </a:r>
-            <a:endParaRPr lang="en-US" sz="1600" dirty="0"/>
-          </a:p>
-        </p:txBody>
-      </p:sp>
-      <p:sp>
-        <p:nvSpPr>
-          <p:cNvPr id="17" name="Text 13"/>
-          <p:cNvSpPr txBox="1"/>
-          <p:nvPr/>
-        </p:nvSpPr>
-        <p:spPr>
-          <a:xfrm>
-            <a:off x="3520440" y="2514600"/>
-            <a:ext cx="2194560" cy="1005840"/>
+              <a:t>Eliminação controlada</a:t>
+            </a:r>
+            <a:endParaRPr lang="en-US" sz="1300" dirty="0"/>
+          </a:p>
+        </p:txBody>
+      </p:sp>
+      <p:sp>
+        <p:nvSpPr>
+          <p:cNvPr id="20" name="Text 15"/>
+          <p:cNvSpPr txBox="1"/>
+          <p:nvPr/>
+        </p:nvSpPr>
+        <p:spPr>
+          <a:xfrm>
+            <a:off x="3657600" y="2990088"/>
+            <a:ext cx="4846320" cy="566928"/>
           </a:xfrm>
           <a:prstGeom prst="rect">
             <a:avLst/>
@@ -9682,7 +7922,7 @@
                 <a:ea typeface="Calibri" pitchFamily="34" charset="-122"/>
                 <a:cs typeface="Calibri" pitchFamily="34" charset="-120"/>
               </a:rPr>
-              <a:t>Clique em «Instalar» (computador/Android) ou Partilhar → Adicionar ao ecrã principal (iPhone/iPad).</a:t>
+              <a:t>Eliminar um dossier apaga tudo o que lhe pertence; «apagar todos os dados» limpa o dispositivo.</a:t>
             </a:r>
             <a:endParaRPr lang="en-US" sz="1100" dirty="0"/>
           </a:p>
@@ -9690,22 +7930,22 @@
       </p:sp>
       <p:sp>
         <p:nvSpPr>
-          <p:cNvPr id="18" name="Shape 14"/>
+          <p:cNvPr id="21" name="Shape 16"/>
           <p:cNvSpPr/>
           <p:nvPr/>
         </p:nvSpPr>
         <p:spPr>
           <a:xfrm>
-            <a:off x="6126480" y="1188720"/>
-            <a:ext cx="2651760" cy="2377440"/>
+            <a:off x="457200" y="3749040"/>
+            <a:ext cx="8229600" cy="749808"/>
           </a:xfrm>
           <a:prstGeom prst="roundRect">
             <a:avLst>
-              <a:gd name="adj" fmla="val 3077"/>
+              <a:gd name="adj" fmla="val 9756"/>
             </a:avLst>
           </a:prstGeom>
           <a:solidFill>
-            <a:srgbClr val="F7F8FC"/>
+            <a:srgbClr val="FFFFFF"/>
           </a:solidFill>
           <a:ln w="9525">
             <a:solidFill>
@@ -9717,14 +7957,14 @@
       </p:sp>
       <p:sp>
         <p:nvSpPr>
-          <p:cNvPr id="19" name="Shape 15"/>
+          <p:cNvPr id="22" name="Shape 17"/>
           <p:cNvSpPr/>
           <p:nvPr/>
         </p:nvSpPr>
         <p:spPr>
           <a:xfrm>
-            <a:off x="6355080" y="1417320"/>
-            <a:ext cx="548640" cy="548640"/>
+            <a:off x="640080" y="3895344"/>
+            <a:ext cx="457200" cy="457200"/>
           </a:xfrm>
           <a:prstGeom prst="ellipse">
             <a:avLst/>
@@ -9742,200 +7982,7 @@
       </p:sp>
       <p:pic>
         <p:nvPicPr>
-          <p:cNvPr id="20" name="Image 2" descr="icons/sparkles-white.png">    </p:cNvPr>
-          <p:cNvPicPr>
-            <a:picLocks noChangeAspect="1"/>
-          </p:cNvPicPr>
-          <p:nvPr/>
-        </p:nvPicPr>
-        <p:blipFill>
-          <a:blip r:embed="rId3"/>
-          <a:stretch>
-            <a:fillRect/>
-          </a:stretch>
-        </p:blipFill>
-        <p:spPr>
-          <a:xfrm>
-            <a:off x="6486754" y="1548994"/>
-            <a:ext cx="285293" cy="285293"/>
-          </a:xfrm>
-          <a:prstGeom prst="rect">
-            <a:avLst/>
-          </a:prstGeom>
-        </p:spPr>
-      </p:pic>
-      <p:sp>
-        <p:nvSpPr>
-          <p:cNvPr id="21" name="Text 16"/>
-          <p:cNvSpPr txBox="1"/>
-          <p:nvPr/>
-        </p:nvSpPr>
-        <p:spPr>
-          <a:xfrm>
-            <a:off x="8138160" y="1325880"/>
-            <a:ext cx="457200" cy="548640"/>
-          </a:xfrm>
-          <a:prstGeom prst="rect">
-            <a:avLst/>
-          </a:prstGeom>
-          <a:noFill/>
-          <a:ln/>
-        </p:spPr>
-        <p:txBody>
-          <a:bodyPr wrap="square" lIns="0" tIns="0" rIns="0" bIns="0" rtlCol="0" anchor="ctr"/>
-          <a:lstStyle/>
-          <a:p>
-            <a:pPr algn="r" indent="0" marL="0">
-              <a:buNone/>
-            </a:pPr>
-            <a:r>
-              <a:rPr lang="en-US" sz="3000" b="1" dirty="0">
-                <a:solidFill>
-                  <a:srgbClr val="EEF0FB"/>
-                </a:solidFill>
-                <a:latin typeface="Cambria" pitchFamily="34" charset="0"/>
-                <a:ea typeface="Cambria" pitchFamily="34" charset="-122"/>
-                <a:cs typeface="Cambria" pitchFamily="34" charset="-120"/>
-              </a:rPr>
-              <a:t>3</a:t>
-            </a:r>
-            <a:endParaRPr lang="en-US" sz="3000" dirty="0"/>
-          </a:p>
-        </p:txBody>
-      </p:sp>
-      <p:sp>
-        <p:nvSpPr>
-          <p:cNvPr id="22" name="Text 17"/>
-          <p:cNvSpPr txBox="1"/>
-          <p:nvPr/>
-        </p:nvSpPr>
-        <p:spPr>
-          <a:xfrm>
-            <a:off x="6355080" y="2103120"/>
-            <a:ext cx="2194560" cy="365760"/>
-          </a:xfrm>
-          <a:prstGeom prst="rect">
-            <a:avLst/>
-          </a:prstGeom>
-          <a:noFill/>
-          <a:ln/>
-        </p:spPr>
-        <p:txBody>
-          <a:bodyPr wrap="square" lIns="0" tIns="0" rIns="0" bIns="0" rtlCol="0" anchor="t"/>
-          <a:lstStyle/>
-          <a:p>
-            <a:pPr indent="0" marL="0">
-              <a:buNone/>
-            </a:pPr>
-            <a:r>
-              <a:rPr lang="en-US" sz="1600" b="1" dirty="0">
-                <a:solidFill>
-                  <a:srgbClr val="1B1F3B"/>
-                </a:solidFill>
-                <a:latin typeface="Calibri" pitchFamily="34" charset="0"/>
-                <a:ea typeface="Calibri" pitchFamily="34" charset="-122"/>
-                <a:cs typeface="Calibri" pitchFamily="34" charset="-120"/>
-              </a:rPr>
-              <a:t>Explorar</a:t>
-            </a:r>
-            <a:endParaRPr lang="en-US" sz="1600" dirty="0"/>
-          </a:p>
-        </p:txBody>
-      </p:sp>
-      <p:sp>
-        <p:nvSpPr>
-          <p:cNvPr id="23" name="Text 18"/>
-          <p:cNvSpPr txBox="1"/>
-          <p:nvPr/>
-        </p:nvSpPr>
-        <p:spPr>
-          <a:xfrm>
-            <a:off x="6355080" y="2514600"/>
-            <a:ext cx="2194560" cy="1005840"/>
-          </a:xfrm>
-          <a:prstGeom prst="rect">
-            <a:avLst/>
-          </a:prstGeom>
-          <a:noFill/>
-          <a:ln/>
-        </p:spPr>
-        <p:txBody>
-          <a:bodyPr wrap="square" lIns="0" tIns="0" rIns="0" bIns="0" rtlCol="0" anchor="t"/>
-          <a:lstStyle/>
-          <a:p>
-            <a:pPr indent="0" marL="0">
-              <a:buNone/>
-            </a:pPr>
-            <a:r>
-              <a:rPr lang="en-US" sz="1100" dirty="0">
-                <a:solidFill>
-                  <a:srgbClr val="5B6180"/>
-                </a:solidFill>
-                <a:latin typeface="Calibri" pitchFamily="34" charset="0"/>
-                <a:ea typeface="Calibri" pitchFamily="34" charset="-122"/>
-                <a:cs typeface="Calibri" pitchFamily="34" charset="-120"/>
-              </a:rPr>
-              <a:t>Escolha «Explorar com dados fictícios» e percorra um dossier de demonstração; remova-os quando quiser.</a:t>
-            </a:r>
-            <a:endParaRPr lang="en-US" sz="1100" dirty="0"/>
-          </a:p>
-        </p:txBody>
-      </p:sp>
-      <p:sp>
-        <p:nvSpPr>
-          <p:cNvPr id="24" name="Shape 19"/>
-          <p:cNvSpPr/>
-          <p:nvPr/>
-        </p:nvSpPr>
-        <p:spPr>
-          <a:xfrm>
-            <a:off x="457200" y="3794760"/>
-            <a:ext cx="8229600" cy="685800"/>
-          </a:xfrm>
-          <a:prstGeom prst="roundRect">
-            <a:avLst>
-              <a:gd name="adj" fmla="val 10667"/>
-            </a:avLst>
-          </a:prstGeom>
-          <a:solidFill>
-            <a:srgbClr val="EEF0FB"/>
-          </a:solidFill>
-          <a:ln w="9525">
-            <a:solidFill>
-              <a:srgbClr val="EEF0FB"/>
-            </a:solidFill>
-            <a:prstDash val="solid"/>
-          </a:ln>
-        </p:spPr>
-      </p:sp>
-      <p:sp>
-        <p:nvSpPr>
-          <p:cNvPr id="25" name="Shape 20"/>
-          <p:cNvSpPr/>
-          <p:nvPr/>
-        </p:nvSpPr>
-        <p:spPr>
-          <a:xfrm>
-            <a:off x="640080" y="3904488"/>
-            <a:ext cx="457200" cy="457200"/>
-          </a:xfrm>
-          <a:prstGeom prst="ellipse">
-            <a:avLst/>
-          </a:prstGeom>
-          <a:solidFill>
-            <a:srgbClr val="2D39B9"/>
-          </a:solidFill>
-          <a:ln w="12700">
-            <a:solidFill>
-              <a:srgbClr val="2D39B9"/>
-            </a:solidFill>
-            <a:prstDash val="solid"/>
-          </a:ln>
-        </p:spPr>
-      </p:sp>
-      <p:pic>
-        <p:nvPicPr>
-          <p:cNvPr id="26" name="Image 3" descr="icons/book-open-white.png">    </p:cNvPr>
+          <p:cNvPr id="23" name="Image 3" descr="icons/lock-white.png">    </p:cNvPr>
           <p:cNvPicPr>
             <a:picLocks noChangeAspect="1"/>
           </p:cNvPicPr>
@@ -9949,7 +7996,7 @@
         </p:blipFill>
         <p:spPr>
           <a:xfrm>
-            <a:off x="749808" y="4014216"/>
+            <a:off x="749808" y="4005072"/>
             <a:ext cx="237744" cy="237744"/>
           </a:xfrm>
           <a:prstGeom prst="rect">
@@ -9959,14 +8006,14 @@
       </p:pic>
       <p:sp>
         <p:nvSpPr>
-          <p:cNvPr id="27" name="Text 21"/>
-          <p:cNvSpPr txBox="1"/>
-          <p:nvPr/>
-        </p:nvSpPr>
-        <p:spPr>
-          <a:xfrm>
-            <a:off x="1234440" y="3931920"/>
-            <a:ext cx="7315200" cy="502920"/>
+          <p:cNvPr id="24" name="Text 18"/>
+          <p:cNvSpPr txBox="1"/>
+          <p:nvPr/>
+        </p:nvSpPr>
+        <p:spPr>
+          <a:xfrm>
+            <a:off x="1280160" y="3858768"/>
+            <a:ext cx="2377440" cy="320040"/>
           </a:xfrm>
           <a:prstGeom prst="rect">
             <a:avLst/>
@@ -9982,15 +8029,54 @@
               <a:buNone/>
             </a:pPr>
             <a:r>
+              <a:rPr lang="en-US" sz="1300" b="1" dirty="0">
+                <a:solidFill>
+                  <a:srgbClr val="1B1F3B"/>
+                </a:solidFill>
+                <a:latin typeface="Calibri" pitchFamily="34" charset="0"/>
+                <a:ea typeface="Calibri" pitchFamily="34" charset="-122"/>
+                <a:cs typeface="Calibri" pitchFamily="34" charset="-120"/>
+              </a:rPr>
+              <a:t>Proteções ativas</a:t>
+            </a:r>
+            <a:endParaRPr lang="en-US" sz="1300" dirty="0"/>
+          </a:p>
+        </p:txBody>
+      </p:sp>
+      <p:sp>
+        <p:nvSpPr>
+          <p:cNvPr id="25" name="Text 19"/>
+          <p:cNvSpPr txBox="1"/>
+          <p:nvPr/>
+        </p:nvSpPr>
+        <p:spPr>
+          <a:xfrm>
+            <a:off x="3657600" y="3858768"/>
+            <a:ext cx="4846320" cy="566928"/>
+          </a:xfrm>
+          <a:prstGeom prst="rect">
+            <a:avLst/>
+          </a:prstGeom>
+          <a:noFill/>
+          <a:ln/>
+        </p:spPr>
+        <p:txBody>
+          <a:bodyPr wrap="square" lIns="0" tIns="0" rIns="0" bIns="0" rtlCol="0" anchor="t"/>
+          <a:lstStyle/>
+          <a:p>
+            <a:pPr indent="0" marL="0">
+              <a:buNone/>
+            </a:pPr>
+            <a:r>
               <a:rPr lang="en-US" sz="1100" dirty="0">
                 <a:solidFill>
-                  <a:srgbClr val="1B1F3B"/>
-                </a:solidFill>
-                <a:latin typeface="Calibri" pitchFamily="34" charset="0"/>
-                <a:ea typeface="Calibri" pitchFamily="34" charset="-122"/>
-                <a:cs typeface="Calibri" pitchFamily="34" charset="-120"/>
-              </a:rPr>
-              <a:t>Manual do utilizador (Word) com todas as funcionalidades, passo a passo, e anexos com o catálogo de tarefas, o questionário e os campos das minutas — disponível na pasta docs/ do projeto.</a:t>
+                  <a:srgbClr val="5B6180"/>
+                </a:solidFill>
+                <a:latin typeface="Calibri" pitchFamily="34" charset="0"/>
+                <a:ea typeface="Calibri" pitchFamily="34" charset="-122"/>
+                <a:cs typeface="Calibri" pitchFamily="34" charset="-120"/>
+              </a:rPr>
+              <a:t>Bloqueio por PIN com auto-bloqueio, cópias cifradas (AES-256-GCM), modo privacidade e Content Security Policy.</a:t>
             </a:r>
             <a:endParaRPr lang="en-US" sz="1100" dirty="0"/>
           </a:p>
@@ -10699,6 +8785,4056 @@
     <p:bg>
       <p:bgPr>
         <a:solidFill>
+          <a:srgbClr val="FFFFFF"/>
+        </a:solidFill>
+      </p:bgPr>
+    </p:bg>
+    <p:spTree>
+      <p:nvGrpSpPr>
+        <p:cNvPr id="1" name=""/>
+        <p:cNvGrpSpPr/>
+        <p:nvPr/>
+      </p:nvGrpSpPr>
+      <p:grpSpPr>
+        <a:xfrm>
+          <a:off x="0" y="0"/>
+          <a:ext cx="0" cy="0"/>
+          <a:chOff x="0" y="0"/>
+          <a:chExt cx="0" cy="0"/>
+        </a:xfrm>
+      </p:grpSpPr>
+      <p:sp>
+        <p:nvSpPr>
+          <p:cNvPr id="2" name="Text 0"/>
+          <p:cNvSpPr txBox="1"/>
+          <p:nvPr/>
+        </p:nvSpPr>
+        <p:spPr>
+          <a:xfrm>
+            <a:off x="457200" y="128016"/>
+            <a:ext cx="8229600" cy="228600"/>
+          </a:xfrm>
+          <a:prstGeom prst="rect">
+            <a:avLst/>
+          </a:prstGeom>
+          <a:noFill/>
+          <a:ln/>
+        </p:spPr>
+        <p:txBody>
+          <a:bodyPr wrap="square" lIns="0" tIns="0" rIns="0" bIns="0" rtlCol="0" anchor="ctr"/>
+          <a:lstStyle/>
+          <a:p>
+            <a:pPr indent="0" marL="0">
+              <a:buNone/>
+            </a:pPr>
+            <a:r>
+              <a:rPr lang="en-US" sz="1000" b="1" spc="200" kern="0" dirty="0">
+                <a:solidFill>
+                  <a:srgbClr val="2D39B9"/>
+                </a:solidFill>
+                <a:latin typeface="Calibri" pitchFamily="34" charset="0"/>
+                <a:ea typeface="Calibri" pitchFamily="34" charset="-122"/>
+                <a:cs typeface="Calibri" pitchFamily="34" charset="-120"/>
+              </a:rPr>
+              <a:t>EM NÚMEROS</a:t>
+            </a:r>
+            <a:endParaRPr lang="en-US" sz="1000" dirty="0"/>
+          </a:p>
+        </p:txBody>
+      </p:sp>
+      <p:sp>
+        <p:nvSpPr>
+          <p:cNvPr id="3" name="Text 1"/>
+          <p:cNvSpPr txBox="1"/>
+          <p:nvPr/>
+        </p:nvSpPr>
+        <p:spPr>
+          <a:xfrm>
+            <a:off x="457200" y="347472"/>
+            <a:ext cx="8229600" cy="548640"/>
+          </a:xfrm>
+          <a:prstGeom prst="rect">
+            <a:avLst/>
+          </a:prstGeom>
+          <a:noFill/>
+          <a:ln/>
+        </p:spPr>
+        <p:txBody>
+          <a:bodyPr wrap="square" lIns="0" tIns="0" rIns="0" bIns="0" rtlCol="0" anchor="ctr"/>
+          <a:lstStyle/>
+          <a:p>
+            <a:pPr indent="0" marL="0">
+              <a:buNone/>
+            </a:pPr>
+            <a:r>
+              <a:rPr lang="en-US" sz="2800" b="1" dirty="0">
+                <a:solidFill>
+                  <a:srgbClr val="1B1F3B"/>
+                </a:solidFill>
+                <a:latin typeface="Cambria" pitchFamily="34" charset="0"/>
+                <a:ea typeface="Cambria" pitchFamily="34" charset="-122"/>
+                <a:cs typeface="Cambria" pitchFamily="34" charset="-120"/>
+              </a:rPr>
+              <a:t>O que já está construído</a:t>
+            </a:r>
+            <a:endParaRPr lang="en-US" sz="2800" dirty="0"/>
+          </a:p>
+        </p:txBody>
+      </p:sp>
+      <p:sp>
+        <p:nvSpPr>
+          <p:cNvPr id="4" name="Text 2"/>
+          <p:cNvSpPr txBox="1"/>
+          <p:nvPr/>
+        </p:nvSpPr>
+        <p:spPr>
+          <a:xfrm>
+            <a:off x="457200" y="4773168"/>
+            <a:ext cx="3657600" cy="228600"/>
+          </a:xfrm>
+          <a:prstGeom prst="rect">
+            <a:avLst/>
+          </a:prstGeom>
+          <a:noFill/>
+          <a:ln/>
+        </p:spPr>
+        <p:txBody>
+          <a:bodyPr wrap="square" lIns="0" tIns="0" rIns="0" bIns="0" rtlCol="0" anchor="ctr"/>
+          <a:lstStyle/>
+          <a:p>
+            <a:pPr indent="0" marL="0">
+              <a:buNone/>
+            </a:pPr>
+            <a:r>
+              <a:rPr lang="en-US" sz="900" dirty="0">
+                <a:solidFill>
+                  <a:srgbClr val="5B6180"/>
+                </a:solidFill>
+                <a:latin typeface="Calibri" pitchFamily="34" charset="0"/>
+                <a:ea typeface="Calibri" pitchFamily="34" charset="-122"/>
+                <a:cs typeface="Calibri" pitchFamily="34" charset="-120"/>
+              </a:rPr>
+              <a:t>Balcão das Sucessões</a:t>
+            </a:r>
+            <a:endParaRPr lang="en-US" sz="900" dirty="0"/>
+          </a:p>
+        </p:txBody>
+      </p:sp>
+      <p:sp>
+        <p:nvSpPr>
+          <p:cNvPr id="5" name="Text 3"/>
+          <p:cNvSpPr txBox="1"/>
+          <p:nvPr/>
+        </p:nvSpPr>
+        <p:spPr>
+          <a:xfrm>
+            <a:off x="8138160" y="4773168"/>
+            <a:ext cx="548640" cy="228600"/>
+          </a:xfrm>
+          <a:prstGeom prst="rect">
+            <a:avLst/>
+          </a:prstGeom>
+          <a:noFill/>
+          <a:ln/>
+        </p:spPr>
+        <p:txBody>
+          <a:bodyPr wrap="square" lIns="0" tIns="0" rIns="0" bIns="0" rtlCol="0" anchor="ctr"/>
+          <a:lstStyle/>
+          <a:p>
+            <a:pPr algn="r" indent="0" marL="0">
+              <a:buNone/>
+            </a:pPr>
+            <a:r>
+              <a:rPr lang="en-US" sz="900" dirty="0">
+                <a:solidFill>
+                  <a:srgbClr val="5B6180"/>
+                </a:solidFill>
+                <a:latin typeface="Calibri" pitchFamily="34" charset="0"/>
+                <a:ea typeface="Calibri" pitchFamily="34" charset="-122"/>
+                <a:cs typeface="Calibri" pitchFamily="34" charset="-120"/>
+              </a:rPr>
+              <a:t>20</a:t>
+            </a:r>
+            <a:endParaRPr lang="en-US" sz="900" dirty="0"/>
+          </a:p>
+        </p:txBody>
+      </p:sp>
+      <p:sp>
+        <p:nvSpPr>
+          <p:cNvPr id="6" name="Shape 4"/>
+          <p:cNvSpPr/>
+          <p:nvPr/>
+        </p:nvSpPr>
+        <p:spPr>
+          <a:xfrm>
+            <a:off x="457200" y="1188720"/>
+            <a:ext cx="1920240" cy="1417320"/>
+          </a:xfrm>
+          <a:prstGeom prst="roundRect">
+            <a:avLst>
+              <a:gd name="adj" fmla="val 5161"/>
+            </a:avLst>
+          </a:prstGeom>
+          <a:solidFill>
+            <a:srgbClr val="F7F8FC"/>
+          </a:solidFill>
+          <a:ln w="9525">
+            <a:solidFill>
+              <a:srgbClr val="D9DCE8"/>
+            </a:solidFill>
+            <a:prstDash val="solid"/>
+          </a:ln>
+        </p:spPr>
+      </p:sp>
+      <p:sp>
+        <p:nvSpPr>
+          <p:cNvPr id="7" name="Text 5"/>
+          <p:cNvSpPr txBox="1"/>
+          <p:nvPr/>
+        </p:nvSpPr>
+        <p:spPr>
+          <a:xfrm>
+            <a:off x="457200" y="1325880"/>
+            <a:ext cx="1920240" cy="731520"/>
+          </a:xfrm>
+          <a:prstGeom prst="rect">
+            <a:avLst/>
+          </a:prstGeom>
+          <a:noFill/>
+          <a:ln/>
+        </p:spPr>
+        <p:txBody>
+          <a:bodyPr wrap="square" lIns="0" tIns="0" rIns="0" bIns="0" rtlCol="0" anchor="ctr"/>
+          <a:lstStyle/>
+          <a:p>
+            <a:pPr algn="ctr" indent="0" marL="0">
+              <a:buNone/>
+            </a:pPr>
+            <a:r>
+              <a:rPr lang="en-US" sz="4400" b="1" dirty="0">
+                <a:solidFill>
+                  <a:srgbClr val="2D39B9"/>
+                </a:solidFill>
+                <a:latin typeface="Cambria" pitchFamily="34" charset="0"/>
+                <a:ea typeface="Cambria" pitchFamily="34" charset="-122"/>
+                <a:cs typeface="Cambria" pitchFamily="34" charset="-120"/>
+              </a:rPr>
+              <a:t>24</a:t>
+            </a:r>
+            <a:endParaRPr lang="en-US" sz="4400" dirty="0"/>
+          </a:p>
+        </p:txBody>
+      </p:sp>
+      <p:sp>
+        <p:nvSpPr>
+          <p:cNvPr id="8" name="Text 6"/>
+          <p:cNvSpPr txBox="1"/>
+          <p:nvPr/>
+        </p:nvSpPr>
+        <p:spPr>
+          <a:xfrm>
+            <a:off x="457200" y="2057400"/>
+            <a:ext cx="1920240" cy="365760"/>
+          </a:xfrm>
+          <a:prstGeom prst="rect">
+            <a:avLst/>
+          </a:prstGeom>
+          <a:noFill/>
+          <a:ln/>
+        </p:spPr>
+        <p:txBody>
+          <a:bodyPr wrap="square" lIns="0" tIns="0" rIns="0" bIns="0" rtlCol="0" anchor="ctr"/>
+          <a:lstStyle/>
+          <a:p>
+            <a:pPr algn="ctr" indent="0" marL="0">
+              <a:buNone/>
+            </a:pPr>
+            <a:r>
+              <a:rPr lang="en-US" sz="1200" dirty="0">
+                <a:solidFill>
+                  <a:srgbClr val="5B6180"/>
+                </a:solidFill>
+                <a:latin typeface="Calibri" pitchFamily="34" charset="0"/>
+                <a:ea typeface="Calibri" pitchFamily="34" charset="-122"/>
+                <a:cs typeface="Calibri" pitchFamily="34" charset="-120"/>
+              </a:rPr>
+              <a:t>perguntas</a:t>
+            </a:r>
+            <a:endParaRPr lang="en-US" sz="1200" dirty="0"/>
+          </a:p>
+        </p:txBody>
+      </p:sp>
+      <p:sp>
+        <p:nvSpPr>
+          <p:cNvPr id="9" name="Shape 7"/>
+          <p:cNvSpPr/>
+          <p:nvPr/>
+        </p:nvSpPr>
+        <p:spPr>
+          <a:xfrm>
+            <a:off x="2560320" y="1188720"/>
+            <a:ext cx="1920240" cy="1417320"/>
+          </a:xfrm>
+          <a:prstGeom prst="roundRect">
+            <a:avLst>
+              <a:gd name="adj" fmla="val 5161"/>
+            </a:avLst>
+          </a:prstGeom>
+          <a:solidFill>
+            <a:srgbClr val="F7F8FC"/>
+          </a:solidFill>
+          <a:ln w="9525">
+            <a:solidFill>
+              <a:srgbClr val="D9DCE8"/>
+            </a:solidFill>
+            <a:prstDash val="solid"/>
+          </a:ln>
+        </p:spPr>
+      </p:sp>
+      <p:sp>
+        <p:nvSpPr>
+          <p:cNvPr id="10" name="Text 8"/>
+          <p:cNvSpPr txBox="1"/>
+          <p:nvPr/>
+        </p:nvSpPr>
+        <p:spPr>
+          <a:xfrm>
+            <a:off x="2560320" y="1325880"/>
+            <a:ext cx="1920240" cy="731520"/>
+          </a:xfrm>
+          <a:prstGeom prst="rect">
+            <a:avLst/>
+          </a:prstGeom>
+          <a:noFill/>
+          <a:ln/>
+        </p:spPr>
+        <p:txBody>
+          <a:bodyPr wrap="square" lIns="0" tIns="0" rIns="0" bIns="0" rtlCol="0" anchor="ctr"/>
+          <a:lstStyle/>
+          <a:p>
+            <a:pPr algn="ctr" indent="0" marL="0">
+              <a:buNone/>
+            </a:pPr>
+            <a:r>
+              <a:rPr lang="en-US" sz="4400" b="1" dirty="0">
+                <a:solidFill>
+                  <a:srgbClr val="2D39B9"/>
+                </a:solidFill>
+                <a:latin typeface="Cambria" pitchFamily="34" charset="0"/>
+                <a:ea typeface="Cambria" pitchFamily="34" charset="-122"/>
+                <a:cs typeface="Cambria" pitchFamily="34" charset="-120"/>
+              </a:rPr>
+              <a:t>55</a:t>
+            </a:r>
+            <a:endParaRPr lang="en-US" sz="4400" dirty="0"/>
+          </a:p>
+        </p:txBody>
+      </p:sp>
+      <p:sp>
+        <p:nvSpPr>
+          <p:cNvPr id="11" name="Text 9"/>
+          <p:cNvSpPr txBox="1"/>
+          <p:nvPr/>
+        </p:nvSpPr>
+        <p:spPr>
+          <a:xfrm>
+            <a:off x="2560320" y="2057400"/>
+            <a:ext cx="1920240" cy="365760"/>
+          </a:xfrm>
+          <a:prstGeom prst="rect">
+            <a:avLst/>
+          </a:prstGeom>
+          <a:noFill/>
+          <a:ln/>
+        </p:spPr>
+        <p:txBody>
+          <a:bodyPr wrap="square" lIns="0" tIns="0" rIns="0" bIns="0" rtlCol="0" anchor="ctr"/>
+          <a:lstStyle/>
+          <a:p>
+            <a:pPr algn="ctr" indent="0" marL="0">
+              <a:buNone/>
+            </a:pPr>
+            <a:r>
+              <a:rPr lang="en-US" sz="1200" dirty="0">
+                <a:solidFill>
+                  <a:srgbClr val="5B6180"/>
+                </a:solidFill>
+                <a:latin typeface="Calibri" pitchFamily="34" charset="0"/>
+                <a:ea typeface="Calibri" pitchFamily="34" charset="-122"/>
+                <a:cs typeface="Calibri" pitchFamily="34" charset="-120"/>
+              </a:rPr>
+              <a:t>regras</a:t>
+            </a:r>
+            <a:endParaRPr lang="en-US" sz="1200" dirty="0"/>
+          </a:p>
+        </p:txBody>
+      </p:sp>
+      <p:sp>
+        <p:nvSpPr>
+          <p:cNvPr id="12" name="Shape 10"/>
+          <p:cNvSpPr/>
+          <p:nvPr/>
+        </p:nvSpPr>
+        <p:spPr>
+          <a:xfrm>
+            <a:off x="4663440" y="1188720"/>
+            <a:ext cx="1920240" cy="1417320"/>
+          </a:xfrm>
+          <a:prstGeom prst="roundRect">
+            <a:avLst>
+              <a:gd name="adj" fmla="val 5161"/>
+            </a:avLst>
+          </a:prstGeom>
+          <a:solidFill>
+            <a:srgbClr val="F7F8FC"/>
+          </a:solidFill>
+          <a:ln w="9525">
+            <a:solidFill>
+              <a:srgbClr val="D9DCE8"/>
+            </a:solidFill>
+            <a:prstDash val="solid"/>
+          </a:ln>
+        </p:spPr>
+      </p:sp>
+      <p:sp>
+        <p:nvSpPr>
+          <p:cNvPr id="13" name="Text 11"/>
+          <p:cNvSpPr txBox="1"/>
+          <p:nvPr/>
+        </p:nvSpPr>
+        <p:spPr>
+          <a:xfrm>
+            <a:off x="4663440" y="1325880"/>
+            <a:ext cx="1920240" cy="731520"/>
+          </a:xfrm>
+          <a:prstGeom prst="rect">
+            <a:avLst/>
+          </a:prstGeom>
+          <a:noFill/>
+          <a:ln/>
+        </p:spPr>
+        <p:txBody>
+          <a:bodyPr wrap="square" lIns="0" tIns="0" rIns="0" bIns="0" rtlCol="0" anchor="ctr"/>
+          <a:lstStyle/>
+          <a:p>
+            <a:pPr algn="ctr" indent="0" marL="0">
+              <a:buNone/>
+            </a:pPr>
+            <a:r>
+              <a:rPr lang="en-US" sz="4400" b="1" dirty="0">
+                <a:solidFill>
+                  <a:srgbClr val="2D39B9"/>
+                </a:solidFill>
+                <a:latin typeface="Cambria" pitchFamily="34" charset="0"/>
+                <a:ea typeface="Cambria" pitchFamily="34" charset="-122"/>
+                <a:cs typeface="Cambria" pitchFamily="34" charset="-120"/>
+              </a:rPr>
+              <a:t>72</a:t>
+            </a:r>
+            <a:endParaRPr lang="en-US" sz="4400" dirty="0"/>
+          </a:p>
+        </p:txBody>
+      </p:sp>
+      <p:sp>
+        <p:nvSpPr>
+          <p:cNvPr id="14" name="Text 12"/>
+          <p:cNvSpPr txBox="1"/>
+          <p:nvPr/>
+        </p:nvSpPr>
+        <p:spPr>
+          <a:xfrm>
+            <a:off x="4663440" y="2057400"/>
+            <a:ext cx="1920240" cy="365760"/>
+          </a:xfrm>
+          <a:prstGeom prst="rect">
+            <a:avLst/>
+          </a:prstGeom>
+          <a:noFill/>
+          <a:ln/>
+        </p:spPr>
+        <p:txBody>
+          <a:bodyPr wrap="square" lIns="0" tIns="0" rIns="0" bIns="0" rtlCol="0" anchor="ctr"/>
+          <a:lstStyle/>
+          <a:p>
+            <a:pPr algn="ctr" indent="0" marL="0">
+              <a:buNone/>
+            </a:pPr>
+            <a:r>
+              <a:rPr lang="en-US" sz="1200" dirty="0">
+                <a:solidFill>
+                  <a:srgbClr val="5B6180"/>
+                </a:solidFill>
+                <a:latin typeface="Calibri" pitchFamily="34" charset="0"/>
+                <a:ea typeface="Calibri" pitchFamily="34" charset="-122"/>
+                <a:cs typeface="Calibri" pitchFamily="34" charset="-120"/>
+              </a:rPr>
+              <a:t>tarefas</a:t>
+            </a:r>
+            <a:endParaRPr lang="en-US" sz="1200" dirty="0"/>
+          </a:p>
+        </p:txBody>
+      </p:sp>
+      <p:sp>
+        <p:nvSpPr>
+          <p:cNvPr id="15" name="Shape 13"/>
+          <p:cNvSpPr/>
+          <p:nvPr/>
+        </p:nvSpPr>
+        <p:spPr>
+          <a:xfrm>
+            <a:off x="6766560" y="1188720"/>
+            <a:ext cx="1920240" cy="1417320"/>
+          </a:xfrm>
+          <a:prstGeom prst="roundRect">
+            <a:avLst>
+              <a:gd name="adj" fmla="val 5161"/>
+            </a:avLst>
+          </a:prstGeom>
+          <a:solidFill>
+            <a:srgbClr val="F7F8FC"/>
+          </a:solidFill>
+          <a:ln w="9525">
+            <a:solidFill>
+              <a:srgbClr val="D9DCE8"/>
+            </a:solidFill>
+            <a:prstDash val="solid"/>
+          </a:ln>
+        </p:spPr>
+      </p:sp>
+      <p:sp>
+        <p:nvSpPr>
+          <p:cNvPr id="16" name="Text 14"/>
+          <p:cNvSpPr txBox="1"/>
+          <p:nvPr/>
+        </p:nvSpPr>
+        <p:spPr>
+          <a:xfrm>
+            <a:off x="6766560" y="1325880"/>
+            <a:ext cx="1920240" cy="731520"/>
+          </a:xfrm>
+          <a:prstGeom prst="rect">
+            <a:avLst/>
+          </a:prstGeom>
+          <a:noFill/>
+          <a:ln/>
+        </p:spPr>
+        <p:txBody>
+          <a:bodyPr wrap="square" lIns="0" tIns="0" rIns="0" bIns="0" rtlCol="0" anchor="ctr"/>
+          <a:lstStyle/>
+          <a:p>
+            <a:pPr algn="ctr" indent="0" marL="0">
+              <a:buNone/>
+            </a:pPr>
+            <a:r>
+              <a:rPr lang="en-US" sz="4400" b="1" dirty="0">
+                <a:solidFill>
+                  <a:srgbClr val="2D39B9"/>
+                </a:solidFill>
+                <a:latin typeface="Cambria" pitchFamily="34" charset="0"/>
+                <a:ea typeface="Cambria" pitchFamily="34" charset="-122"/>
+                <a:cs typeface="Cambria" pitchFamily="34" charset="-120"/>
+              </a:rPr>
+              <a:t>13</a:t>
+            </a:r>
+            <a:endParaRPr lang="en-US" sz="4400" dirty="0"/>
+          </a:p>
+        </p:txBody>
+      </p:sp>
+      <p:sp>
+        <p:nvSpPr>
+          <p:cNvPr id="17" name="Text 15"/>
+          <p:cNvSpPr txBox="1"/>
+          <p:nvPr/>
+        </p:nvSpPr>
+        <p:spPr>
+          <a:xfrm>
+            <a:off x="6766560" y="2057400"/>
+            <a:ext cx="1920240" cy="365760"/>
+          </a:xfrm>
+          <a:prstGeom prst="rect">
+            <a:avLst/>
+          </a:prstGeom>
+          <a:noFill/>
+          <a:ln/>
+        </p:spPr>
+        <p:txBody>
+          <a:bodyPr wrap="square" lIns="0" tIns="0" rIns="0" bIns="0" rtlCol="0" anchor="ctr"/>
+          <a:lstStyle/>
+          <a:p>
+            <a:pPr algn="ctr" indent="0" marL="0">
+              <a:buNone/>
+            </a:pPr>
+            <a:r>
+              <a:rPr lang="en-US" sz="1200" dirty="0">
+                <a:solidFill>
+                  <a:srgbClr val="5B6180"/>
+                </a:solidFill>
+                <a:latin typeface="Calibri" pitchFamily="34" charset="0"/>
+                <a:ea typeface="Calibri" pitchFamily="34" charset="-122"/>
+                <a:cs typeface="Calibri" pitchFamily="34" charset="-120"/>
+              </a:rPr>
+              <a:t>minutas</a:t>
+            </a:r>
+            <a:endParaRPr lang="en-US" sz="1200" dirty="0"/>
+          </a:p>
+        </p:txBody>
+      </p:sp>
+      <p:sp>
+        <p:nvSpPr>
+          <p:cNvPr id="18" name="Shape 16"/>
+          <p:cNvSpPr/>
+          <p:nvPr/>
+        </p:nvSpPr>
+        <p:spPr>
+          <a:xfrm>
+            <a:off x="457200" y="2834640"/>
+            <a:ext cx="1920240" cy="1417320"/>
+          </a:xfrm>
+          <a:prstGeom prst="roundRect">
+            <a:avLst>
+              <a:gd name="adj" fmla="val 5161"/>
+            </a:avLst>
+          </a:prstGeom>
+          <a:solidFill>
+            <a:srgbClr val="F7F8FC"/>
+          </a:solidFill>
+          <a:ln w="9525">
+            <a:solidFill>
+              <a:srgbClr val="D9DCE8"/>
+            </a:solidFill>
+            <a:prstDash val="solid"/>
+          </a:ln>
+        </p:spPr>
+      </p:sp>
+      <p:sp>
+        <p:nvSpPr>
+          <p:cNvPr id="19" name="Text 17"/>
+          <p:cNvSpPr txBox="1"/>
+          <p:nvPr/>
+        </p:nvSpPr>
+        <p:spPr>
+          <a:xfrm>
+            <a:off x="457200" y="2971800"/>
+            <a:ext cx="1920240" cy="731520"/>
+          </a:xfrm>
+          <a:prstGeom prst="rect">
+            <a:avLst/>
+          </a:prstGeom>
+          <a:noFill/>
+          <a:ln/>
+        </p:spPr>
+        <p:txBody>
+          <a:bodyPr wrap="square" lIns="0" tIns="0" rIns="0" bIns="0" rtlCol="0" anchor="ctr"/>
+          <a:lstStyle/>
+          <a:p>
+            <a:pPr algn="ctr" indent="0" marL="0">
+              <a:buNone/>
+            </a:pPr>
+            <a:r>
+              <a:rPr lang="en-US" sz="4400" b="1" dirty="0">
+                <a:solidFill>
+                  <a:srgbClr val="2D39B9"/>
+                </a:solidFill>
+                <a:latin typeface="Cambria" pitchFamily="34" charset="0"/>
+                <a:ea typeface="Cambria" pitchFamily="34" charset="-122"/>
+                <a:cs typeface="Cambria" pitchFamily="34" charset="-120"/>
+              </a:rPr>
+              <a:t>16</a:t>
+            </a:r>
+            <a:endParaRPr lang="en-US" sz="4400" dirty="0"/>
+          </a:p>
+        </p:txBody>
+      </p:sp>
+      <p:sp>
+        <p:nvSpPr>
+          <p:cNvPr id="20" name="Text 18"/>
+          <p:cNvSpPr txBox="1"/>
+          <p:nvPr/>
+        </p:nvSpPr>
+        <p:spPr>
+          <a:xfrm>
+            <a:off x="457200" y="3703320"/>
+            <a:ext cx="1920240" cy="365760"/>
+          </a:xfrm>
+          <a:prstGeom prst="rect">
+            <a:avLst/>
+          </a:prstGeom>
+          <a:noFill/>
+          <a:ln/>
+        </p:spPr>
+        <p:txBody>
+          <a:bodyPr wrap="square" lIns="0" tIns="0" rIns="0" bIns="0" rtlCol="0" anchor="ctr"/>
+          <a:lstStyle/>
+          <a:p>
+            <a:pPr algn="ctr" indent="0" marL="0">
+              <a:buNone/>
+            </a:pPr>
+            <a:r>
+              <a:rPr lang="en-US" sz="1200" dirty="0">
+                <a:solidFill>
+                  <a:srgbClr val="5B6180"/>
+                </a:solidFill>
+                <a:latin typeface="Calibri" pitchFamily="34" charset="0"/>
+                <a:ea typeface="Calibri" pitchFamily="34" charset="-122"/>
+                <a:cs typeface="Calibri" pitchFamily="34" charset="-120"/>
+              </a:rPr>
+              <a:t>países</a:t>
+            </a:r>
+            <a:endParaRPr lang="en-US" sz="1200" dirty="0"/>
+          </a:p>
+        </p:txBody>
+      </p:sp>
+      <p:sp>
+        <p:nvSpPr>
+          <p:cNvPr id="21" name="Shape 19"/>
+          <p:cNvSpPr/>
+          <p:nvPr/>
+        </p:nvSpPr>
+        <p:spPr>
+          <a:xfrm>
+            <a:off x="2560320" y="2834640"/>
+            <a:ext cx="1920240" cy="1417320"/>
+          </a:xfrm>
+          <a:prstGeom prst="roundRect">
+            <a:avLst>
+              <a:gd name="adj" fmla="val 5161"/>
+            </a:avLst>
+          </a:prstGeom>
+          <a:solidFill>
+            <a:srgbClr val="F7F8FC"/>
+          </a:solidFill>
+          <a:ln w="9525">
+            <a:solidFill>
+              <a:srgbClr val="D9DCE8"/>
+            </a:solidFill>
+            <a:prstDash val="solid"/>
+          </a:ln>
+        </p:spPr>
+      </p:sp>
+      <p:sp>
+        <p:nvSpPr>
+          <p:cNvPr id="22" name="Text 20"/>
+          <p:cNvSpPr txBox="1"/>
+          <p:nvPr/>
+        </p:nvSpPr>
+        <p:spPr>
+          <a:xfrm>
+            <a:off x="2560320" y="2971800"/>
+            <a:ext cx="1920240" cy="731520"/>
+          </a:xfrm>
+          <a:prstGeom prst="rect">
+            <a:avLst/>
+          </a:prstGeom>
+          <a:noFill/>
+          <a:ln/>
+        </p:spPr>
+        <p:txBody>
+          <a:bodyPr wrap="square" lIns="0" tIns="0" rIns="0" bIns="0" rtlCol="0" anchor="ctr"/>
+          <a:lstStyle/>
+          <a:p>
+            <a:pPr algn="ctr" indent="0" marL="0">
+              <a:buNone/>
+            </a:pPr>
+            <a:r>
+              <a:rPr lang="en-US" sz="4400" b="1" dirty="0">
+                <a:solidFill>
+                  <a:srgbClr val="2D39B9"/>
+                </a:solidFill>
+                <a:latin typeface="Cambria" pitchFamily="34" charset="0"/>
+                <a:ea typeface="Cambria" pitchFamily="34" charset="-122"/>
+                <a:cs typeface="Cambria" pitchFamily="34" charset="-120"/>
+              </a:rPr>
+              <a:t>94</a:t>
+            </a:r>
+            <a:endParaRPr lang="en-US" sz="4400" dirty="0"/>
+          </a:p>
+        </p:txBody>
+      </p:sp>
+      <p:sp>
+        <p:nvSpPr>
+          <p:cNvPr id="23" name="Text 21"/>
+          <p:cNvSpPr txBox="1"/>
+          <p:nvPr/>
+        </p:nvSpPr>
+        <p:spPr>
+          <a:xfrm>
+            <a:off x="2560320" y="3703320"/>
+            <a:ext cx="1920240" cy="365760"/>
+          </a:xfrm>
+          <a:prstGeom prst="rect">
+            <a:avLst/>
+          </a:prstGeom>
+          <a:noFill/>
+          <a:ln/>
+        </p:spPr>
+        <p:txBody>
+          <a:bodyPr wrap="square" lIns="0" tIns="0" rIns="0" bIns="0" rtlCol="0" anchor="ctr"/>
+          <a:lstStyle/>
+          <a:p>
+            <a:pPr algn="ctr" indent="0" marL="0">
+              <a:buNone/>
+            </a:pPr>
+            <a:r>
+              <a:rPr lang="en-US" sz="1200" dirty="0">
+                <a:solidFill>
+                  <a:srgbClr val="5B6180"/>
+                </a:solidFill>
+                <a:latin typeface="Calibri" pitchFamily="34" charset="0"/>
+                <a:ea typeface="Calibri" pitchFamily="34" charset="-122"/>
+                <a:cs typeface="Calibri" pitchFamily="34" charset="-120"/>
+              </a:rPr>
+              <a:t>testes</a:t>
+            </a:r>
+            <a:endParaRPr lang="en-US" sz="1200" dirty="0"/>
+          </a:p>
+        </p:txBody>
+      </p:sp>
+      <p:sp>
+        <p:nvSpPr>
+          <p:cNvPr id="24" name="Shape 22"/>
+          <p:cNvSpPr/>
+          <p:nvPr/>
+        </p:nvSpPr>
+        <p:spPr>
+          <a:xfrm>
+            <a:off x="4663440" y="2834640"/>
+            <a:ext cx="1920240" cy="1417320"/>
+          </a:xfrm>
+          <a:prstGeom prst="roundRect">
+            <a:avLst>
+              <a:gd name="adj" fmla="val 5161"/>
+            </a:avLst>
+          </a:prstGeom>
+          <a:solidFill>
+            <a:srgbClr val="F7F8FC"/>
+          </a:solidFill>
+          <a:ln w="9525">
+            <a:solidFill>
+              <a:srgbClr val="D9DCE8"/>
+            </a:solidFill>
+            <a:prstDash val="solid"/>
+          </a:ln>
+        </p:spPr>
+      </p:sp>
+      <p:sp>
+        <p:nvSpPr>
+          <p:cNvPr id="25" name="Text 23"/>
+          <p:cNvSpPr txBox="1"/>
+          <p:nvPr/>
+        </p:nvSpPr>
+        <p:spPr>
+          <a:xfrm>
+            <a:off x="4663440" y="2971800"/>
+            <a:ext cx="1920240" cy="731520"/>
+          </a:xfrm>
+          <a:prstGeom prst="rect">
+            <a:avLst/>
+          </a:prstGeom>
+          <a:noFill/>
+          <a:ln/>
+        </p:spPr>
+        <p:txBody>
+          <a:bodyPr wrap="square" lIns="0" tIns="0" rIns="0" bIns="0" rtlCol="0" anchor="ctr"/>
+          <a:lstStyle/>
+          <a:p>
+            <a:pPr algn="ctr" indent="0" marL="0">
+              <a:buNone/>
+            </a:pPr>
+            <a:r>
+              <a:rPr lang="en-US" sz="4400" b="1" dirty="0">
+                <a:solidFill>
+                  <a:srgbClr val="2D39B9"/>
+                </a:solidFill>
+                <a:latin typeface="Cambria" pitchFamily="34" charset="0"/>
+                <a:ea typeface="Cambria" pitchFamily="34" charset="-122"/>
+                <a:cs typeface="Cambria" pitchFamily="34" charset="-120"/>
+              </a:rPr>
+              <a:t>10</a:t>
+            </a:r>
+            <a:endParaRPr lang="en-US" sz="4400" dirty="0"/>
+          </a:p>
+        </p:txBody>
+      </p:sp>
+      <p:sp>
+        <p:nvSpPr>
+          <p:cNvPr id="26" name="Text 24"/>
+          <p:cNvSpPr txBox="1"/>
+          <p:nvPr/>
+        </p:nvSpPr>
+        <p:spPr>
+          <a:xfrm>
+            <a:off x="4663440" y="3703320"/>
+            <a:ext cx="1920240" cy="365760"/>
+          </a:xfrm>
+          <a:prstGeom prst="rect">
+            <a:avLst/>
+          </a:prstGeom>
+          <a:noFill/>
+          <a:ln/>
+        </p:spPr>
+        <p:txBody>
+          <a:bodyPr wrap="square" lIns="0" tIns="0" rIns="0" bIns="0" rtlCol="0" anchor="ctr"/>
+          <a:lstStyle/>
+          <a:p>
+            <a:pPr algn="ctr" indent="0" marL="0">
+              <a:buNone/>
+            </a:pPr>
+            <a:r>
+              <a:rPr lang="en-US" sz="1200" dirty="0">
+                <a:solidFill>
+                  <a:srgbClr val="5B6180"/>
+                </a:solidFill>
+                <a:latin typeface="Calibri" pitchFamily="34" charset="0"/>
+                <a:ea typeface="Calibri" pitchFamily="34" charset="-122"/>
+                <a:cs typeface="Calibri" pitchFamily="34" charset="-120"/>
+              </a:rPr>
+              <a:t>passos E2E</a:t>
+            </a:r>
+            <a:endParaRPr lang="en-US" sz="1200" dirty="0"/>
+          </a:p>
+        </p:txBody>
+      </p:sp>
+      <p:sp>
+        <p:nvSpPr>
+          <p:cNvPr id="27" name="Shape 25"/>
+          <p:cNvSpPr/>
+          <p:nvPr/>
+        </p:nvSpPr>
+        <p:spPr>
+          <a:xfrm>
+            <a:off x="6766560" y="2834640"/>
+            <a:ext cx="1920240" cy="1417320"/>
+          </a:xfrm>
+          <a:prstGeom prst="roundRect">
+            <a:avLst>
+              <a:gd name="adj" fmla="val 5161"/>
+            </a:avLst>
+          </a:prstGeom>
+          <a:solidFill>
+            <a:srgbClr val="F7F8FC"/>
+          </a:solidFill>
+          <a:ln w="9525">
+            <a:solidFill>
+              <a:srgbClr val="D9DCE8"/>
+            </a:solidFill>
+            <a:prstDash val="solid"/>
+          </a:ln>
+        </p:spPr>
+      </p:sp>
+      <p:sp>
+        <p:nvSpPr>
+          <p:cNvPr id="28" name="Text 26"/>
+          <p:cNvSpPr txBox="1"/>
+          <p:nvPr/>
+        </p:nvSpPr>
+        <p:spPr>
+          <a:xfrm>
+            <a:off x="6766560" y="2971800"/>
+            <a:ext cx="1920240" cy="731520"/>
+          </a:xfrm>
+          <a:prstGeom prst="rect">
+            <a:avLst/>
+          </a:prstGeom>
+          <a:noFill/>
+          <a:ln/>
+        </p:spPr>
+        <p:txBody>
+          <a:bodyPr wrap="square" lIns="0" tIns="0" rIns="0" bIns="0" rtlCol="0" anchor="ctr"/>
+          <a:lstStyle/>
+          <a:p>
+            <a:pPr algn="ctr" indent="0" marL="0">
+              <a:buNone/>
+            </a:pPr>
+            <a:r>
+              <a:rPr lang="en-US" sz="4400" b="1" dirty="0">
+                <a:solidFill>
+                  <a:srgbClr val="2D39B9"/>
+                </a:solidFill>
+                <a:latin typeface="Cambria" pitchFamily="34" charset="0"/>
+                <a:ea typeface="Cambria" pitchFamily="34" charset="-122"/>
+                <a:cs typeface="Cambria" pitchFamily="34" charset="-120"/>
+              </a:rPr>
+              <a:t>0</a:t>
+            </a:r>
+            <a:endParaRPr lang="en-US" sz="4400" dirty="0"/>
+          </a:p>
+        </p:txBody>
+      </p:sp>
+      <p:sp>
+        <p:nvSpPr>
+          <p:cNvPr id="29" name="Text 27"/>
+          <p:cNvSpPr txBox="1"/>
+          <p:nvPr/>
+        </p:nvSpPr>
+        <p:spPr>
+          <a:xfrm>
+            <a:off x="6766560" y="3703320"/>
+            <a:ext cx="1920240" cy="365760"/>
+          </a:xfrm>
+          <a:prstGeom prst="rect">
+            <a:avLst/>
+          </a:prstGeom>
+          <a:noFill/>
+          <a:ln/>
+        </p:spPr>
+        <p:txBody>
+          <a:bodyPr wrap="square" lIns="0" tIns="0" rIns="0" bIns="0" rtlCol="0" anchor="ctr"/>
+          <a:lstStyle/>
+          <a:p>
+            <a:pPr algn="ctr" indent="0" marL="0">
+              <a:buNone/>
+            </a:pPr>
+            <a:r>
+              <a:rPr lang="en-US" sz="1200" dirty="0">
+                <a:solidFill>
+                  <a:srgbClr val="5B6180"/>
+                </a:solidFill>
+                <a:latin typeface="Calibri" pitchFamily="34" charset="0"/>
+                <a:ea typeface="Calibri" pitchFamily="34" charset="-122"/>
+                <a:cs typeface="Calibri" pitchFamily="34" charset="-120"/>
+              </a:rPr>
+              <a:t>falhas WCAG</a:t>
+            </a:r>
+            <a:endParaRPr lang="en-US" sz="1200" dirty="0"/>
+          </a:p>
+        </p:txBody>
+      </p:sp>
+    </p:spTree>
+  </p:cSld>
+  <p:clrMapOvr>
+    <a:masterClrMapping/>
+  </p:clrMapOvr>
+</p:sld>
+</file>
+
+<file path=ppt/slides/slide21.xml><?xml version="1.0" encoding="utf-8"?>
+<p:sld xmlns:a="http://schemas.openxmlformats.org/drawingml/2006/main" xmlns:r="http://schemas.openxmlformats.org/officeDocument/2006/relationships" xmlns:p="http://schemas.openxmlformats.org/presentationml/2006/main">
+  <p:cSld name="Slide 21">
+    <p:bg>
+      <p:bgPr>
+        <a:solidFill>
+          <a:srgbClr val="FFFFFF"/>
+        </a:solidFill>
+      </p:bgPr>
+    </p:bg>
+    <p:spTree>
+      <p:nvGrpSpPr>
+        <p:cNvPr id="1" name=""/>
+        <p:cNvGrpSpPr/>
+        <p:nvPr/>
+      </p:nvGrpSpPr>
+      <p:grpSpPr>
+        <a:xfrm>
+          <a:off x="0" y="0"/>
+          <a:ext cx="0" cy="0"/>
+          <a:chOff x="0" y="0"/>
+          <a:chExt cx="0" cy="0"/>
+        </a:xfrm>
+      </p:grpSpPr>
+      <p:sp>
+        <p:nvSpPr>
+          <p:cNvPr id="2" name="Text 0"/>
+          <p:cNvSpPr txBox="1"/>
+          <p:nvPr/>
+        </p:nvSpPr>
+        <p:spPr>
+          <a:xfrm>
+            <a:off x="457200" y="128016"/>
+            <a:ext cx="8229600" cy="228600"/>
+          </a:xfrm>
+          <a:prstGeom prst="rect">
+            <a:avLst/>
+          </a:prstGeom>
+          <a:noFill/>
+          <a:ln/>
+        </p:spPr>
+        <p:txBody>
+          <a:bodyPr wrap="square" lIns="0" tIns="0" rIns="0" bIns="0" rtlCol="0" anchor="ctr"/>
+          <a:lstStyle/>
+          <a:p>
+            <a:pPr indent="0" marL="0">
+              <a:buNone/>
+            </a:pPr>
+            <a:r>
+              <a:rPr lang="en-US" sz="1000" b="1" spc="200" kern="0" dirty="0">
+                <a:solidFill>
+                  <a:srgbClr val="2D39B9"/>
+                </a:solidFill>
+                <a:latin typeface="Calibri" pitchFamily="34" charset="0"/>
+                <a:ea typeface="Calibri" pitchFamily="34" charset="-122"/>
+                <a:cs typeface="Calibri" pitchFamily="34" charset="-120"/>
+              </a:rPr>
+              <a:t>TECNOLOGIA E PUBLICAÇÃO</a:t>
+            </a:r>
+            <a:endParaRPr lang="en-US" sz="1000" dirty="0"/>
+          </a:p>
+        </p:txBody>
+      </p:sp>
+      <p:sp>
+        <p:nvSpPr>
+          <p:cNvPr id="3" name="Text 1"/>
+          <p:cNvSpPr txBox="1"/>
+          <p:nvPr/>
+        </p:nvSpPr>
+        <p:spPr>
+          <a:xfrm>
+            <a:off x="457200" y="347472"/>
+            <a:ext cx="8229600" cy="548640"/>
+          </a:xfrm>
+          <a:prstGeom prst="rect">
+            <a:avLst/>
+          </a:prstGeom>
+          <a:noFill/>
+          <a:ln/>
+        </p:spPr>
+        <p:txBody>
+          <a:bodyPr wrap="square" lIns="0" tIns="0" rIns="0" bIns="0" rtlCol="0" anchor="ctr"/>
+          <a:lstStyle/>
+          <a:p>
+            <a:pPr indent="0" marL="0">
+              <a:buNone/>
+            </a:pPr>
+            <a:r>
+              <a:rPr lang="en-US" sz="2800" b="1" dirty="0">
+                <a:solidFill>
+                  <a:srgbClr val="1B1F3B"/>
+                </a:solidFill>
+                <a:latin typeface="Cambria" pitchFamily="34" charset="0"/>
+                <a:ea typeface="Cambria" pitchFamily="34" charset="-122"/>
+                <a:cs typeface="Cambria" pitchFamily="34" charset="-120"/>
+              </a:rPr>
+              <a:t>Moderno, aberto e verificável</a:t>
+            </a:r>
+            <a:endParaRPr lang="en-US" sz="2800" dirty="0"/>
+          </a:p>
+        </p:txBody>
+      </p:sp>
+      <p:sp>
+        <p:nvSpPr>
+          <p:cNvPr id="4" name="Text 2"/>
+          <p:cNvSpPr txBox="1"/>
+          <p:nvPr/>
+        </p:nvSpPr>
+        <p:spPr>
+          <a:xfrm>
+            <a:off x="457200" y="4773168"/>
+            <a:ext cx="3657600" cy="228600"/>
+          </a:xfrm>
+          <a:prstGeom prst="rect">
+            <a:avLst/>
+          </a:prstGeom>
+          <a:noFill/>
+          <a:ln/>
+        </p:spPr>
+        <p:txBody>
+          <a:bodyPr wrap="square" lIns="0" tIns="0" rIns="0" bIns="0" rtlCol="0" anchor="ctr"/>
+          <a:lstStyle/>
+          <a:p>
+            <a:pPr indent="0" marL="0">
+              <a:buNone/>
+            </a:pPr>
+            <a:r>
+              <a:rPr lang="en-US" sz="900" dirty="0">
+                <a:solidFill>
+                  <a:srgbClr val="5B6180"/>
+                </a:solidFill>
+                <a:latin typeface="Calibri" pitchFamily="34" charset="0"/>
+                <a:ea typeface="Calibri" pitchFamily="34" charset="-122"/>
+                <a:cs typeface="Calibri" pitchFamily="34" charset="-120"/>
+              </a:rPr>
+              <a:t>Balcão das Sucessões</a:t>
+            </a:r>
+            <a:endParaRPr lang="en-US" sz="900" dirty="0"/>
+          </a:p>
+        </p:txBody>
+      </p:sp>
+      <p:sp>
+        <p:nvSpPr>
+          <p:cNvPr id="5" name="Text 3"/>
+          <p:cNvSpPr txBox="1"/>
+          <p:nvPr/>
+        </p:nvSpPr>
+        <p:spPr>
+          <a:xfrm>
+            <a:off x="8138160" y="4773168"/>
+            <a:ext cx="548640" cy="228600"/>
+          </a:xfrm>
+          <a:prstGeom prst="rect">
+            <a:avLst/>
+          </a:prstGeom>
+          <a:noFill/>
+          <a:ln/>
+        </p:spPr>
+        <p:txBody>
+          <a:bodyPr wrap="square" lIns="0" tIns="0" rIns="0" bIns="0" rtlCol="0" anchor="ctr"/>
+          <a:lstStyle/>
+          <a:p>
+            <a:pPr algn="r" indent="0" marL="0">
+              <a:buNone/>
+            </a:pPr>
+            <a:r>
+              <a:rPr lang="en-US" sz="900" dirty="0">
+                <a:solidFill>
+                  <a:srgbClr val="5B6180"/>
+                </a:solidFill>
+                <a:latin typeface="Calibri" pitchFamily="34" charset="0"/>
+                <a:ea typeface="Calibri" pitchFamily="34" charset="-122"/>
+                <a:cs typeface="Calibri" pitchFamily="34" charset="-120"/>
+              </a:rPr>
+              <a:t>21</a:t>
+            </a:r>
+            <a:endParaRPr lang="en-US" sz="900" dirty="0"/>
+          </a:p>
+        </p:txBody>
+      </p:sp>
+      <p:sp>
+        <p:nvSpPr>
+          <p:cNvPr id="6" name="Shape 4"/>
+          <p:cNvSpPr/>
+          <p:nvPr/>
+        </p:nvSpPr>
+        <p:spPr>
+          <a:xfrm>
+            <a:off x="457200" y="1143000"/>
+            <a:ext cx="4023360" cy="3429000"/>
+          </a:xfrm>
+          <a:prstGeom prst="roundRect">
+            <a:avLst>
+              <a:gd name="adj" fmla="val 2133"/>
+            </a:avLst>
+          </a:prstGeom>
+          <a:solidFill>
+            <a:srgbClr val="FFFFFF"/>
+          </a:solidFill>
+          <a:ln w="9525">
+            <a:solidFill>
+              <a:srgbClr val="D9DCE8"/>
+            </a:solidFill>
+            <a:prstDash val="solid"/>
+          </a:ln>
+        </p:spPr>
+      </p:sp>
+      <p:sp>
+        <p:nvSpPr>
+          <p:cNvPr id="7" name="Shape 5"/>
+          <p:cNvSpPr/>
+          <p:nvPr/>
+        </p:nvSpPr>
+        <p:spPr>
+          <a:xfrm>
+            <a:off x="685800" y="1325880"/>
+            <a:ext cx="457200" cy="457200"/>
+          </a:xfrm>
+          <a:prstGeom prst="ellipse">
+            <a:avLst/>
+          </a:prstGeom>
+          <a:solidFill>
+            <a:srgbClr val="2D39B9"/>
+          </a:solidFill>
+          <a:ln w="12700">
+            <a:solidFill>
+              <a:srgbClr val="2D39B9"/>
+            </a:solidFill>
+            <a:prstDash val="solid"/>
+          </a:ln>
+        </p:spPr>
+      </p:sp>
+      <p:pic>
+        <p:nvPicPr>
+          <p:cNvPr id="8" name="Image 0" descr="icons/cpu-white.png">    </p:cNvPr>
+          <p:cNvPicPr>
+            <a:picLocks noChangeAspect="1"/>
+          </p:cNvPicPr>
+          <p:nvPr/>
+        </p:nvPicPr>
+        <p:blipFill>
+          <a:blip r:embed="rId1"/>
+          <a:stretch>
+            <a:fillRect/>
+          </a:stretch>
+        </p:blipFill>
+        <p:spPr>
+          <a:xfrm>
+            <a:off x="795528" y="1435608"/>
+            <a:ext cx="237744" cy="237744"/>
+          </a:xfrm>
+          <a:prstGeom prst="rect">
+            <a:avLst/>
+          </a:prstGeom>
+        </p:spPr>
+      </p:pic>
+      <p:sp>
+        <p:nvSpPr>
+          <p:cNvPr id="9" name="Text 6"/>
+          <p:cNvSpPr txBox="1"/>
+          <p:nvPr/>
+        </p:nvSpPr>
+        <p:spPr>
+          <a:xfrm>
+            <a:off x="1280160" y="1371600"/>
+            <a:ext cx="2743200" cy="365760"/>
+          </a:xfrm>
+          <a:prstGeom prst="rect">
+            <a:avLst/>
+          </a:prstGeom>
+          <a:noFill/>
+          <a:ln/>
+        </p:spPr>
+        <p:txBody>
+          <a:bodyPr wrap="square" lIns="0" tIns="0" rIns="0" bIns="0" rtlCol="0" anchor="t"/>
+          <a:lstStyle/>
+          <a:p>
+            <a:pPr indent="0" marL="0">
+              <a:buNone/>
+            </a:pPr>
+            <a:r>
+              <a:rPr lang="en-US" sz="1400" b="1" dirty="0">
+                <a:solidFill>
+                  <a:srgbClr val="1B1F3B"/>
+                </a:solidFill>
+                <a:latin typeface="Calibri" pitchFamily="34" charset="0"/>
+                <a:ea typeface="Calibri" pitchFamily="34" charset="-122"/>
+                <a:cs typeface="Calibri" pitchFamily="34" charset="-120"/>
+              </a:rPr>
+              <a:t>Plataforma</a:t>
+            </a:r>
+            <a:endParaRPr lang="en-US" sz="1400" dirty="0"/>
+          </a:p>
+        </p:txBody>
+      </p:sp>
+      <p:sp>
+        <p:nvSpPr>
+          <p:cNvPr id="10" name="Text 7"/>
+          <p:cNvSpPr txBox="1"/>
+          <p:nvPr/>
+        </p:nvSpPr>
+        <p:spPr>
+          <a:xfrm>
+            <a:off x="685800" y="1920240"/>
+            <a:ext cx="3566160" cy="2560320"/>
+          </a:xfrm>
+          <a:prstGeom prst="rect">
+            <a:avLst/>
+          </a:prstGeom>
+          <a:noFill/>
+          <a:ln/>
+        </p:spPr>
+        <p:txBody>
+          <a:bodyPr wrap="square" lIns="0" tIns="0" rIns="0" bIns="0" rtlCol="0" anchor="t"/>
+          <a:lstStyle/>
+          <a:p>
+            <a:pPr marL="177800" indent="-177800">
+              <a:spcAft>
+                <a:spcPts val="500"/>
+              </a:spcAft>
+              <a:buSzPct val="100000"/>
+              <a:buChar char="•"/>
+            </a:pPr>
+            <a:r>
+              <a:rPr lang="en-US" sz="1150" dirty="0">
+                <a:solidFill>
+                  <a:srgbClr val="1B1F3B"/>
+                </a:solidFill>
+                <a:latin typeface="Calibri" pitchFamily="34" charset="0"/>
+                <a:ea typeface="Calibri" pitchFamily="34" charset="-122"/>
+                <a:cs typeface="Calibri" pitchFamily="34" charset="-120"/>
+              </a:rPr>
+              <a:t>React 19 e TypeScript em modo estrito</a:t>
+            </a:r>
+            <a:endParaRPr lang="en-US" sz="1150" dirty="0"/>
+          </a:p>
+          <a:p>
+            <a:pPr marL="177800" indent="-177800">
+              <a:spcAft>
+                <a:spcPts val="500"/>
+              </a:spcAft>
+              <a:buSzPct val="100000"/>
+              <a:buChar char="•"/>
+            </a:pPr>
+            <a:r>
+              <a:rPr lang="en-US" sz="1150" dirty="0">
+                <a:solidFill>
+                  <a:srgbClr val="1B1F3B"/>
+                </a:solidFill>
+                <a:latin typeface="Calibri" pitchFamily="34" charset="0"/>
+                <a:ea typeface="Calibri" pitchFamily="34" charset="-122"/>
+                <a:cs typeface="Calibri" pitchFamily="34" charset="-120"/>
+              </a:rPr>
+              <a:t>Vite e Workbox (service worker, precache)</a:t>
+            </a:r>
+            <a:endParaRPr lang="en-US" sz="1150" dirty="0"/>
+          </a:p>
+          <a:p>
+            <a:pPr marL="177800" indent="-177800">
+              <a:spcAft>
+                <a:spcPts val="500"/>
+              </a:spcAft>
+              <a:buSzPct val="100000"/>
+              <a:buChar char="•"/>
+            </a:pPr>
+            <a:r>
+              <a:rPr lang="en-US" sz="1150" dirty="0">
+                <a:solidFill>
+                  <a:srgbClr val="1B1F3B"/>
+                </a:solidFill>
+                <a:latin typeface="Calibri" pitchFamily="34" charset="0"/>
+                <a:ea typeface="Calibri" pitchFamily="34" charset="-122"/>
+                <a:cs typeface="Calibri" pitchFamily="34" charset="-120"/>
+              </a:rPr>
+              <a:t>Dexie sobre IndexedDB (dados e anexos)</a:t>
+            </a:r>
+            <a:endParaRPr lang="en-US" sz="1150" dirty="0"/>
+          </a:p>
+          <a:p>
+            <a:pPr marL="177800" indent="-177800">
+              <a:spcAft>
+                <a:spcPts val="500"/>
+              </a:spcAft>
+              <a:buSzPct val="100000"/>
+              <a:buChar char="•"/>
+            </a:pPr>
+            <a:r>
+              <a:rPr lang="en-US" sz="1150" dirty="0">
+                <a:solidFill>
+                  <a:srgbClr val="1B1F3B"/>
+                </a:solidFill>
+                <a:latin typeface="Calibri" pitchFamily="34" charset="0"/>
+                <a:ea typeface="Calibri" pitchFamily="34" charset="-122"/>
+                <a:cs typeface="Calibri" pitchFamily="34" charset="-120"/>
+              </a:rPr>
+              <a:t>Motor de regras, calendário e calculadora testados (Vitest)</a:t>
+            </a:r>
+            <a:endParaRPr lang="en-US" sz="1150" dirty="0"/>
+          </a:p>
+          <a:p>
+            <a:pPr marL="177800" indent="-177800">
+              <a:spcAft>
+                <a:spcPts val="500"/>
+              </a:spcAft>
+              <a:buSzPct val="100000"/>
+              <a:buChar char="•"/>
+            </a:pPr>
+            <a:r>
+              <a:rPr lang="en-US" sz="1150" dirty="0">
+                <a:solidFill>
+                  <a:srgbClr val="1B1F3B"/>
+                </a:solidFill>
+                <a:latin typeface="Calibri" pitchFamily="34" charset="0"/>
+                <a:ea typeface="Calibri" pitchFamily="34" charset="-122"/>
+                <a:cs typeface="Calibri" pitchFamily="34" charset="-120"/>
+              </a:rPr>
+              <a:t>Minutas em Office Open XML; iCalendar RFC 5545</a:t>
+            </a:r>
+            <a:endParaRPr lang="en-US" sz="1150" dirty="0"/>
+          </a:p>
+        </p:txBody>
+      </p:sp>
+      <p:sp>
+        <p:nvSpPr>
+          <p:cNvPr id="11" name="Shape 8"/>
+          <p:cNvSpPr/>
+          <p:nvPr/>
+        </p:nvSpPr>
+        <p:spPr>
+          <a:xfrm>
+            <a:off x="4663440" y="1143000"/>
+            <a:ext cx="4023360" cy="3429000"/>
+          </a:xfrm>
+          <a:prstGeom prst="roundRect">
+            <a:avLst>
+              <a:gd name="adj" fmla="val 2133"/>
+            </a:avLst>
+          </a:prstGeom>
+          <a:solidFill>
+            <a:srgbClr val="FFFFFF"/>
+          </a:solidFill>
+          <a:ln w="9525">
+            <a:solidFill>
+              <a:srgbClr val="D9DCE8"/>
+            </a:solidFill>
+            <a:prstDash val="solid"/>
+          </a:ln>
+        </p:spPr>
+      </p:sp>
+      <p:sp>
+        <p:nvSpPr>
+          <p:cNvPr id="12" name="Shape 9"/>
+          <p:cNvSpPr/>
+          <p:nvPr/>
+        </p:nvSpPr>
+        <p:spPr>
+          <a:xfrm>
+            <a:off x="4892040" y="1325880"/>
+            <a:ext cx="457200" cy="457200"/>
+          </a:xfrm>
+          <a:prstGeom prst="ellipse">
+            <a:avLst/>
+          </a:prstGeom>
+          <a:solidFill>
+            <a:srgbClr val="2D39B9"/>
+          </a:solidFill>
+          <a:ln w="12700">
+            <a:solidFill>
+              <a:srgbClr val="2D39B9"/>
+            </a:solidFill>
+            <a:prstDash val="solid"/>
+          </a:ln>
+        </p:spPr>
+      </p:sp>
+      <p:pic>
+        <p:nvPicPr>
+          <p:cNvPr id="13" name="Image 1" descr="icons/rocket-white.png">    </p:cNvPr>
+          <p:cNvPicPr>
+            <a:picLocks noChangeAspect="1"/>
+          </p:cNvPicPr>
+          <p:nvPr/>
+        </p:nvPicPr>
+        <p:blipFill>
+          <a:blip r:embed="rId2"/>
+          <a:stretch>
+            <a:fillRect/>
+          </a:stretch>
+        </p:blipFill>
+        <p:spPr>
+          <a:xfrm>
+            <a:off x="5001768" y="1435608"/>
+            <a:ext cx="237744" cy="237744"/>
+          </a:xfrm>
+          <a:prstGeom prst="rect">
+            <a:avLst/>
+          </a:prstGeom>
+        </p:spPr>
+      </p:pic>
+      <p:sp>
+        <p:nvSpPr>
+          <p:cNvPr id="14" name="Text 10"/>
+          <p:cNvSpPr txBox="1"/>
+          <p:nvPr/>
+        </p:nvSpPr>
+        <p:spPr>
+          <a:xfrm>
+            <a:off x="5486400" y="1371600"/>
+            <a:ext cx="2743200" cy="365760"/>
+          </a:xfrm>
+          <a:prstGeom prst="rect">
+            <a:avLst/>
+          </a:prstGeom>
+          <a:noFill/>
+          <a:ln/>
+        </p:spPr>
+        <p:txBody>
+          <a:bodyPr wrap="square" lIns="0" tIns="0" rIns="0" bIns="0" rtlCol="0" anchor="t"/>
+          <a:lstStyle/>
+          <a:p>
+            <a:pPr indent="0" marL="0">
+              <a:buNone/>
+            </a:pPr>
+            <a:r>
+              <a:rPr lang="en-US" sz="1400" b="1" dirty="0">
+                <a:solidFill>
+                  <a:srgbClr val="1B1F3B"/>
+                </a:solidFill>
+                <a:latin typeface="Calibri" pitchFamily="34" charset="0"/>
+                <a:ea typeface="Calibri" pitchFamily="34" charset="-122"/>
+                <a:cs typeface="Calibri" pitchFamily="34" charset="-120"/>
+              </a:rPr>
+              <a:t>Publicação contínua</a:t>
+            </a:r>
+            <a:endParaRPr lang="en-US" sz="1400" dirty="0"/>
+          </a:p>
+        </p:txBody>
+      </p:sp>
+      <p:sp>
+        <p:nvSpPr>
+          <p:cNvPr id="15" name="Shape 11"/>
+          <p:cNvSpPr/>
+          <p:nvPr/>
+        </p:nvSpPr>
+        <p:spPr>
+          <a:xfrm>
+            <a:off x="4892040" y="2011680"/>
+            <a:ext cx="1051560" cy="411480"/>
+          </a:xfrm>
+          <a:prstGeom prst="roundRect">
+            <a:avLst>
+              <a:gd name="adj" fmla="val 17778"/>
+            </a:avLst>
+          </a:prstGeom>
+          <a:solidFill>
+            <a:srgbClr val="EEF0FB"/>
+          </a:solidFill>
+          <a:ln w="12700">
+            <a:solidFill>
+              <a:srgbClr val="EEF0FB"/>
+            </a:solidFill>
+            <a:prstDash val="solid"/>
+          </a:ln>
+        </p:spPr>
+      </p:sp>
+      <p:sp>
+        <p:nvSpPr>
+          <p:cNvPr id="16" name="Text 12"/>
+          <p:cNvSpPr txBox="1"/>
+          <p:nvPr/>
+        </p:nvSpPr>
+        <p:spPr>
+          <a:xfrm>
+            <a:off x="4892040" y="2011680"/>
+            <a:ext cx="1051560" cy="411480"/>
+          </a:xfrm>
+          <a:prstGeom prst="rect">
+            <a:avLst/>
+          </a:prstGeom>
+          <a:noFill/>
+          <a:ln/>
+        </p:spPr>
+        <p:txBody>
+          <a:bodyPr wrap="square" lIns="0" tIns="0" rIns="0" bIns="0" rtlCol="0" anchor="ctr"/>
+          <a:lstStyle/>
+          <a:p>
+            <a:pPr algn="ctr" indent="0" marL="0">
+              <a:buNone/>
+            </a:pPr>
+            <a:r>
+              <a:rPr lang="en-US" sz="1050" b="1" dirty="0">
+                <a:solidFill>
+                  <a:srgbClr val="2D39B9"/>
+                </a:solidFill>
+                <a:latin typeface="Calibri" pitchFamily="34" charset="0"/>
+                <a:ea typeface="Calibri" pitchFamily="34" charset="-122"/>
+                <a:cs typeface="Calibri" pitchFamily="34" charset="-120"/>
+              </a:rPr>
+              <a:t>Testes</a:t>
+            </a:r>
+            <a:endParaRPr lang="en-US" sz="1050" dirty="0"/>
+          </a:p>
+        </p:txBody>
+      </p:sp>
+      <p:pic>
+        <p:nvPicPr>
+          <p:cNvPr id="17" name="Image 2" descr="icons/arrow-right-indigo.png">    </p:cNvPr>
+          <p:cNvPicPr>
+            <a:picLocks noChangeAspect="1"/>
+          </p:cNvPicPr>
+          <p:nvPr/>
+        </p:nvPicPr>
+        <p:blipFill>
+          <a:blip r:embed="rId3"/>
+          <a:stretch>
+            <a:fillRect/>
+          </a:stretch>
+        </p:blipFill>
+        <p:spPr>
+          <a:xfrm>
+            <a:off x="5961888" y="2121408"/>
+            <a:ext cx="182880" cy="182880"/>
+          </a:xfrm>
+          <a:prstGeom prst="rect">
+            <a:avLst/>
+          </a:prstGeom>
+        </p:spPr>
+      </p:pic>
+      <p:sp>
+        <p:nvSpPr>
+          <p:cNvPr id="18" name="Shape 13"/>
+          <p:cNvSpPr/>
+          <p:nvPr/>
+        </p:nvSpPr>
+        <p:spPr>
+          <a:xfrm>
+            <a:off x="6172200" y="2011680"/>
+            <a:ext cx="1051560" cy="411480"/>
+          </a:xfrm>
+          <a:prstGeom prst="roundRect">
+            <a:avLst>
+              <a:gd name="adj" fmla="val 17778"/>
+            </a:avLst>
+          </a:prstGeom>
+          <a:solidFill>
+            <a:srgbClr val="EEF0FB"/>
+          </a:solidFill>
+          <a:ln w="12700">
+            <a:solidFill>
+              <a:srgbClr val="EEF0FB"/>
+            </a:solidFill>
+            <a:prstDash val="solid"/>
+          </a:ln>
+        </p:spPr>
+      </p:sp>
+      <p:sp>
+        <p:nvSpPr>
+          <p:cNvPr id="19" name="Text 14"/>
+          <p:cNvSpPr txBox="1"/>
+          <p:nvPr/>
+        </p:nvSpPr>
+        <p:spPr>
+          <a:xfrm>
+            <a:off x="6172200" y="2011680"/>
+            <a:ext cx="1051560" cy="411480"/>
+          </a:xfrm>
+          <a:prstGeom prst="rect">
+            <a:avLst/>
+          </a:prstGeom>
+          <a:noFill/>
+          <a:ln/>
+        </p:spPr>
+        <p:txBody>
+          <a:bodyPr wrap="square" lIns="0" tIns="0" rIns="0" bIns="0" rtlCol="0" anchor="ctr"/>
+          <a:lstStyle/>
+          <a:p>
+            <a:pPr algn="ctr" indent="0" marL="0">
+              <a:buNone/>
+            </a:pPr>
+            <a:r>
+              <a:rPr lang="en-US" sz="1050" b="1" dirty="0">
+                <a:solidFill>
+                  <a:srgbClr val="2D39B9"/>
+                </a:solidFill>
+                <a:latin typeface="Calibri" pitchFamily="34" charset="0"/>
+                <a:ea typeface="Calibri" pitchFamily="34" charset="-122"/>
+                <a:cs typeface="Calibri" pitchFamily="34" charset="-120"/>
+              </a:rPr>
+              <a:t>E2E</a:t>
+            </a:r>
+            <a:endParaRPr lang="en-US" sz="1050" dirty="0"/>
+          </a:p>
+        </p:txBody>
+      </p:sp>
+      <p:pic>
+        <p:nvPicPr>
+          <p:cNvPr id="20" name="Image 3" descr="icons/arrow-right-indigo.png">    </p:cNvPr>
+          <p:cNvPicPr>
+            <a:picLocks noChangeAspect="1"/>
+          </p:cNvPicPr>
+          <p:nvPr/>
+        </p:nvPicPr>
+        <p:blipFill>
+          <a:blip r:embed="rId4"/>
+          <a:stretch>
+            <a:fillRect/>
+          </a:stretch>
+        </p:blipFill>
+        <p:spPr>
+          <a:xfrm>
+            <a:off x="7242048" y="2121408"/>
+            <a:ext cx="182880" cy="182880"/>
+          </a:xfrm>
+          <a:prstGeom prst="rect">
+            <a:avLst/>
+          </a:prstGeom>
+        </p:spPr>
+      </p:pic>
+      <p:sp>
+        <p:nvSpPr>
+          <p:cNvPr id="21" name="Shape 15"/>
+          <p:cNvSpPr/>
+          <p:nvPr/>
+        </p:nvSpPr>
+        <p:spPr>
+          <a:xfrm>
+            <a:off x="7452360" y="2011680"/>
+            <a:ext cx="1051560" cy="411480"/>
+          </a:xfrm>
+          <a:prstGeom prst="roundRect">
+            <a:avLst>
+              <a:gd name="adj" fmla="val 17778"/>
+            </a:avLst>
+          </a:prstGeom>
+          <a:solidFill>
+            <a:srgbClr val="EEF0FB"/>
+          </a:solidFill>
+          <a:ln w="12700">
+            <a:solidFill>
+              <a:srgbClr val="EEF0FB"/>
+            </a:solidFill>
+            <a:prstDash val="solid"/>
+          </a:ln>
+        </p:spPr>
+      </p:sp>
+      <p:sp>
+        <p:nvSpPr>
+          <p:cNvPr id="22" name="Text 16"/>
+          <p:cNvSpPr txBox="1"/>
+          <p:nvPr/>
+        </p:nvSpPr>
+        <p:spPr>
+          <a:xfrm>
+            <a:off x="7452360" y="2011680"/>
+            <a:ext cx="1051560" cy="411480"/>
+          </a:xfrm>
+          <a:prstGeom prst="rect">
+            <a:avLst/>
+          </a:prstGeom>
+          <a:noFill/>
+          <a:ln/>
+        </p:spPr>
+        <p:txBody>
+          <a:bodyPr wrap="square" lIns="0" tIns="0" rIns="0" bIns="0" rtlCol="0" anchor="ctr"/>
+          <a:lstStyle/>
+          <a:p>
+            <a:pPr algn="ctr" indent="0" marL="0">
+              <a:buNone/>
+            </a:pPr>
+            <a:r>
+              <a:rPr lang="en-US" sz="1050" b="1" dirty="0">
+                <a:solidFill>
+                  <a:srgbClr val="2D39B9"/>
+                </a:solidFill>
+                <a:latin typeface="Calibri" pitchFamily="34" charset="0"/>
+                <a:ea typeface="Calibri" pitchFamily="34" charset="-122"/>
+                <a:cs typeface="Calibri" pitchFamily="34" charset="-120"/>
+              </a:rPr>
+              <a:t>GitHub Pages</a:t>
+            </a:r>
+            <a:endParaRPr lang="en-US" sz="1050" dirty="0"/>
+          </a:p>
+        </p:txBody>
+      </p:sp>
+      <p:sp>
+        <p:nvSpPr>
+          <p:cNvPr id="23" name="Text 17"/>
+          <p:cNvSpPr txBox="1"/>
+          <p:nvPr/>
+        </p:nvSpPr>
+        <p:spPr>
+          <a:xfrm>
+            <a:off x="4892040" y="2651760"/>
+            <a:ext cx="3611880" cy="1828800"/>
+          </a:xfrm>
+          <a:prstGeom prst="rect">
+            <a:avLst/>
+          </a:prstGeom>
+          <a:noFill/>
+          <a:ln/>
+        </p:spPr>
+        <p:txBody>
+          <a:bodyPr wrap="square" lIns="0" tIns="0" rIns="0" bIns="0" rtlCol="0" anchor="t"/>
+          <a:lstStyle/>
+          <a:p>
+            <a:pPr marL="177800" indent="-177800">
+              <a:spcAft>
+                <a:spcPts val="500"/>
+              </a:spcAft>
+              <a:buSzPct val="100000"/>
+              <a:buChar char="•"/>
+            </a:pPr>
+            <a:r>
+              <a:rPr lang="en-US" sz="1100" dirty="0">
+                <a:solidFill>
+                  <a:srgbClr val="1B1F3B"/>
+                </a:solidFill>
+                <a:latin typeface="Calibri" pitchFamily="34" charset="0"/>
+                <a:ea typeface="Calibri" pitchFamily="34" charset="-122"/>
+                <a:cs typeface="Calibri" pitchFamily="34" charset="-120"/>
+              </a:rPr>
+              <a:t>Cada alteração passa por 94 testes unitários, 10 passos ponta a ponta e pela compilação antes de ser publicada</a:t>
+            </a:r>
+            <a:endParaRPr lang="en-US" sz="1100" dirty="0"/>
+          </a:p>
+          <a:p>
+            <a:pPr marL="177800" indent="-177800">
+              <a:buSzPct val="100000"/>
+              <a:buChar char="•"/>
+            </a:pPr>
+            <a:r>
+              <a:rPr lang="en-US" sz="1100" dirty="0">
+                <a:solidFill>
+                  <a:srgbClr val="1B1F3B"/>
+                </a:solidFill>
+                <a:latin typeface="Calibri" pitchFamily="34" charset="0"/>
+                <a:ea typeface="Calibri" pitchFamily="34" charset="-122"/>
+                <a:cs typeface="Calibri" pitchFamily="34" charset="-120"/>
+              </a:rPr>
+              <a:t>Aplicação: </a:t>
+            </a:r>
+            <a:pPr indent="0" marL="0">
+              <a:spcAft>
+                <a:spcPts val="500"/>
+              </a:spcAft>
+              <a:buNone/>
+            </a:pPr>
+            <a:r>
+              <a:rPr lang="en-US" sz="1100" b="1" dirty="0">
+                <a:solidFill>
+                  <a:srgbClr val="1B1F3B"/>
+                </a:solidFill>
+                <a:latin typeface="Calibri" pitchFamily="34" charset="0"/>
+                <a:ea typeface="Calibri" pitchFamily="34" charset="-122"/>
+                <a:cs typeface="Calibri" pitchFamily="34" charset="-120"/>
+              </a:rPr>
+              <a:t>nelsonsous.github.io/balcao-sucessoes</a:t>
+            </a:r>
+            <a:endParaRPr lang="en-US" sz="1100" dirty="0"/>
+          </a:p>
+          <a:p>
+            <a:pPr marL="177800" indent="-177800">
+              <a:buSzPct val="100000"/>
+              <a:buChar char="•"/>
+            </a:pPr>
+            <a:r>
+              <a:rPr lang="en-US" sz="1100" dirty="0">
+                <a:solidFill>
+                  <a:srgbClr val="1B1F3B"/>
+                </a:solidFill>
+                <a:latin typeface="Calibri" pitchFamily="34" charset="0"/>
+                <a:ea typeface="Calibri" pitchFamily="34" charset="-122"/>
+                <a:cs typeface="Calibri" pitchFamily="34" charset="-120"/>
+              </a:rPr>
+              <a:t>Código-fonte: </a:t>
+            </a:r>
+            <a:pPr indent="0" marL="0">
+              <a:spcAft>
+                <a:spcPts val="500"/>
+              </a:spcAft>
+              <a:buNone/>
+            </a:pPr>
+            <a:r>
+              <a:rPr lang="en-US" sz="1100" b="1" dirty="0">
+                <a:solidFill>
+                  <a:srgbClr val="1B1F3B"/>
+                </a:solidFill>
+                <a:latin typeface="Calibri" pitchFamily="34" charset="0"/>
+                <a:ea typeface="Calibri" pitchFamily="34" charset="-122"/>
+                <a:cs typeface="Calibri" pitchFamily="34" charset="-120"/>
+              </a:rPr>
+              <a:t>github.com/nelsonsous/balcao-sucessoes</a:t>
+            </a:r>
+            <a:endParaRPr lang="en-US" sz="1100" dirty="0"/>
+          </a:p>
+          <a:p>
+            <a:pPr marL="177800" indent="-177800">
+              <a:spcAft>
+                <a:spcPts val="500"/>
+              </a:spcAft>
+              <a:buSzPct val="100000"/>
+              <a:buChar char="•"/>
+            </a:pPr>
+            <a:r>
+              <a:rPr lang="en-US" sz="1100" dirty="0">
+                <a:solidFill>
+                  <a:srgbClr val="1B1F3B"/>
+                </a:solidFill>
+                <a:latin typeface="Calibri" pitchFamily="34" charset="0"/>
+                <a:ea typeface="Calibri" pitchFamily="34" charset="-122"/>
+                <a:cs typeface="Calibri" pitchFamily="34" charset="-120"/>
+              </a:rPr>
+              <a:t>Atualizações entregues à aplicação instalada com aviso «Nova versão disponível»</a:t>
+            </a:r>
+            <a:endParaRPr lang="en-US" sz="1100" dirty="0"/>
+          </a:p>
+        </p:txBody>
+      </p:sp>
+    </p:spTree>
+  </p:cSld>
+  <p:clrMapOvr>
+    <a:masterClrMapping/>
+  </p:clrMapOvr>
+</p:sld>
+</file>
+
+<file path=ppt/slides/slide22.xml><?xml version="1.0" encoding="utf-8"?>
+<p:sld xmlns:a="http://schemas.openxmlformats.org/drawingml/2006/main" xmlns:r="http://schemas.openxmlformats.org/officeDocument/2006/relationships" xmlns:p="http://schemas.openxmlformats.org/presentationml/2006/main">
+  <p:cSld name="Slide 22">
+    <p:bg>
+      <p:bgPr>
+        <a:solidFill>
+          <a:srgbClr val="FFFFFF"/>
+        </a:solidFill>
+      </p:bgPr>
+    </p:bg>
+    <p:spTree>
+      <p:nvGrpSpPr>
+        <p:cNvPr id="1" name=""/>
+        <p:cNvGrpSpPr/>
+        <p:nvPr/>
+      </p:nvGrpSpPr>
+      <p:grpSpPr>
+        <a:xfrm>
+          <a:off x="0" y="0"/>
+          <a:ext cx="0" cy="0"/>
+          <a:chOff x="0" y="0"/>
+          <a:chExt cx="0" cy="0"/>
+        </a:xfrm>
+      </p:grpSpPr>
+      <p:sp>
+        <p:nvSpPr>
+          <p:cNvPr id="2" name="Text 0"/>
+          <p:cNvSpPr txBox="1"/>
+          <p:nvPr/>
+        </p:nvSpPr>
+        <p:spPr>
+          <a:xfrm>
+            <a:off x="457200" y="128016"/>
+            <a:ext cx="8229600" cy="228600"/>
+          </a:xfrm>
+          <a:prstGeom prst="rect">
+            <a:avLst/>
+          </a:prstGeom>
+          <a:noFill/>
+          <a:ln/>
+        </p:spPr>
+        <p:txBody>
+          <a:bodyPr wrap="square" lIns="0" tIns="0" rIns="0" bIns="0" rtlCol="0" anchor="ctr"/>
+          <a:lstStyle/>
+          <a:p>
+            <a:pPr indent="0" marL="0">
+              <a:buNone/>
+            </a:pPr>
+            <a:r>
+              <a:rPr lang="en-US" sz="1000" b="1" spc="200" kern="0" dirty="0">
+                <a:solidFill>
+                  <a:srgbClr val="2D39B9"/>
+                </a:solidFill>
+                <a:latin typeface="Calibri" pitchFamily="34" charset="0"/>
+                <a:ea typeface="Calibri" pitchFamily="34" charset="-122"/>
+                <a:cs typeface="Calibri" pitchFamily="34" charset="-120"/>
+              </a:rPr>
+              <a:t>PERCURSO</a:t>
+            </a:r>
+            <a:endParaRPr lang="en-US" sz="1000" dirty="0"/>
+          </a:p>
+        </p:txBody>
+      </p:sp>
+      <p:sp>
+        <p:nvSpPr>
+          <p:cNvPr id="3" name="Text 1"/>
+          <p:cNvSpPr txBox="1"/>
+          <p:nvPr/>
+        </p:nvSpPr>
+        <p:spPr>
+          <a:xfrm>
+            <a:off x="457200" y="347472"/>
+            <a:ext cx="8229600" cy="548640"/>
+          </a:xfrm>
+          <a:prstGeom prst="rect">
+            <a:avLst/>
+          </a:prstGeom>
+          <a:noFill/>
+          <a:ln/>
+        </p:spPr>
+        <p:txBody>
+          <a:bodyPr wrap="square" lIns="0" tIns="0" rIns="0" bIns="0" rtlCol="0" anchor="ctr"/>
+          <a:lstStyle/>
+          <a:p>
+            <a:pPr indent="0" marL="0">
+              <a:buNone/>
+            </a:pPr>
+            <a:r>
+              <a:rPr lang="en-US" sz="2800" b="1" dirty="0">
+                <a:solidFill>
+                  <a:srgbClr val="1B1F3B"/>
+                </a:solidFill>
+                <a:latin typeface="Cambria" pitchFamily="34" charset="0"/>
+                <a:ea typeface="Cambria" pitchFamily="34" charset="-122"/>
+                <a:cs typeface="Cambria" pitchFamily="34" charset="-120"/>
+              </a:rPr>
+              <a:t>Dez ciclos, todos entregues</a:t>
+            </a:r>
+            <a:endParaRPr lang="en-US" sz="2800" dirty="0"/>
+          </a:p>
+        </p:txBody>
+      </p:sp>
+      <p:sp>
+        <p:nvSpPr>
+          <p:cNvPr id="4" name="Text 2"/>
+          <p:cNvSpPr txBox="1"/>
+          <p:nvPr/>
+        </p:nvSpPr>
+        <p:spPr>
+          <a:xfrm>
+            <a:off x="457200" y="4773168"/>
+            <a:ext cx="3657600" cy="228600"/>
+          </a:xfrm>
+          <a:prstGeom prst="rect">
+            <a:avLst/>
+          </a:prstGeom>
+          <a:noFill/>
+          <a:ln/>
+        </p:spPr>
+        <p:txBody>
+          <a:bodyPr wrap="square" lIns="0" tIns="0" rIns="0" bIns="0" rtlCol="0" anchor="ctr"/>
+          <a:lstStyle/>
+          <a:p>
+            <a:pPr indent="0" marL="0">
+              <a:buNone/>
+            </a:pPr>
+            <a:r>
+              <a:rPr lang="en-US" sz="900" dirty="0">
+                <a:solidFill>
+                  <a:srgbClr val="5B6180"/>
+                </a:solidFill>
+                <a:latin typeface="Calibri" pitchFamily="34" charset="0"/>
+                <a:ea typeface="Calibri" pitchFamily="34" charset="-122"/>
+                <a:cs typeface="Calibri" pitchFamily="34" charset="-120"/>
+              </a:rPr>
+              <a:t>Balcão das Sucessões</a:t>
+            </a:r>
+            <a:endParaRPr lang="en-US" sz="900" dirty="0"/>
+          </a:p>
+        </p:txBody>
+      </p:sp>
+      <p:sp>
+        <p:nvSpPr>
+          <p:cNvPr id="5" name="Text 3"/>
+          <p:cNvSpPr txBox="1"/>
+          <p:nvPr/>
+        </p:nvSpPr>
+        <p:spPr>
+          <a:xfrm>
+            <a:off x="8138160" y="4773168"/>
+            <a:ext cx="548640" cy="228600"/>
+          </a:xfrm>
+          <a:prstGeom prst="rect">
+            <a:avLst/>
+          </a:prstGeom>
+          <a:noFill/>
+          <a:ln/>
+        </p:spPr>
+        <p:txBody>
+          <a:bodyPr wrap="square" lIns="0" tIns="0" rIns="0" bIns="0" rtlCol="0" anchor="ctr"/>
+          <a:lstStyle/>
+          <a:p>
+            <a:pPr algn="r" indent="0" marL="0">
+              <a:buNone/>
+            </a:pPr>
+            <a:r>
+              <a:rPr lang="en-US" sz="900" dirty="0">
+                <a:solidFill>
+                  <a:srgbClr val="5B6180"/>
+                </a:solidFill>
+                <a:latin typeface="Calibri" pitchFamily="34" charset="0"/>
+                <a:ea typeface="Calibri" pitchFamily="34" charset="-122"/>
+                <a:cs typeface="Calibri" pitchFamily="34" charset="-120"/>
+              </a:rPr>
+              <a:t>22</a:t>
+            </a:r>
+            <a:endParaRPr lang="en-US" sz="900" dirty="0"/>
+          </a:p>
+        </p:txBody>
+      </p:sp>
+      <p:sp>
+        <p:nvSpPr>
+          <p:cNvPr id="6" name="Shape 4"/>
+          <p:cNvSpPr/>
+          <p:nvPr/>
+        </p:nvSpPr>
+        <p:spPr>
+          <a:xfrm>
+            <a:off x="548640" y="1161288"/>
+            <a:ext cx="329184" cy="329184"/>
+          </a:xfrm>
+          <a:prstGeom prst="ellipse">
+            <a:avLst/>
+          </a:prstGeom>
+          <a:solidFill>
+            <a:srgbClr val="2D39B9"/>
+          </a:solidFill>
+          <a:ln w="9525">
+            <a:solidFill>
+              <a:srgbClr val="2D39B9"/>
+            </a:solidFill>
+            <a:prstDash val="solid"/>
+          </a:ln>
+        </p:spPr>
+      </p:sp>
+      <p:sp>
+        <p:nvSpPr>
+          <p:cNvPr id="7" name="Text 5"/>
+          <p:cNvSpPr txBox="1"/>
+          <p:nvPr/>
+        </p:nvSpPr>
+        <p:spPr>
+          <a:xfrm>
+            <a:off x="548640" y="1161288"/>
+            <a:ext cx="329184" cy="329184"/>
+          </a:xfrm>
+          <a:prstGeom prst="rect">
+            <a:avLst/>
+          </a:prstGeom>
+          <a:noFill/>
+          <a:ln/>
+        </p:spPr>
+        <p:txBody>
+          <a:bodyPr wrap="square" lIns="0" tIns="0" rIns="0" bIns="0" rtlCol="0" anchor="ctr"/>
+          <a:lstStyle/>
+          <a:p>
+            <a:pPr algn="ctr" indent="0" marL="0">
+              <a:buNone/>
+            </a:pPr>
+            <a:r>
+              <a:rPr lang="en-US" sz="900" b="1" dirty="0">
+                <a:solidFill>
+                  <a:srgbClr val="FFFFFF"/>
+                </a:solidFill>
+                <a:latin typeface="Calibri" pitchFamily="34" charset="0"/>
+                <a:ea typeface="Calibri" pitchFamily="34" charset="-122"/>
+                <a:cs typeface="Calibri" pitchFamily="34" charset="-120"/>
+              </a:rPr>
+              <a:t>1–4</a:t>
+            </a:r>
+            <a:endParaRPr lang="en-US" sz="900" dirty="0"/>
+          </a:p>
+        </p:txBody>
+      </p:sp>
+      <p:sp>
+        <p:nvSpPr>
+          <p:cNvPr id="8" name="Shape 6"/>
+          <p:cNvSpPr/>
+          <p:nvPr/>
+        </p:nvSpPr>
+        <p:spPr>
+          <a:xfrm>
+            <a:off x="713232" y="1490472"/>
+            <a:ext cx="0" cy="173736"/>
+          </a:xfrm>
+          <a:prstGeom prst="line">
+            <a:avLst/>
+          </a:prstGeom>
+          <a:noFill/>
+          <a:ln w="12700">
+            <a:solidFill>
+              <a:srgbClr val="D9DCE8"/>
+            </a:solidFill>
+            <a:prstDash val="solid"/>
+          </a:ln>
+        </p:spPr>
+      </p:sp>
+      <p:sp>
+        <p:nvSpPr>
+          <p:cNvPr id="9" name="Text 7"/>
+          <p:cNvSpPr txBox="1"/>
+          <p:nvPr/>
+        </p:nvSpPr>
+        <p:spPr>
+          <a:xfrm>
+            <a:off x="1097280" y="1170432"/>
+            <a:ext cx="7498080" cy="365760"/>
+          </a:xfrm>
+          <a:prstGeom prst="rect">
+            <a:avLst/>
+          </a:prstGeom>
+          <a:noFill/>
+          <a:ln/>
+        </p:spPr>
+        <p:txBody>
+          <a:bodyPr wrap="square" lIns="0" tIns="0" rIns="0" bIns="0" rtlCol="0" anchor="t"/>
+          <a:lstStyle/>
+          <a:p>
+            <a:pPr indent="0" marL="0">
+              <a:buNone/>
+            </a:pPr>
+            <a:r>
+              <a:rPr lang="en-US" sz="1250" b="1" dirty="0">
+                <a:solidFill>
+                  <a:srgbClr val="1B1F3B"/>
+                </a:solidFill>
+                <a:latin typeface="Calibri" pitchFamily="34" charset="0"/>
+                <a:ea typeface="Calibri" pitchFamily="34" charset="-122"/>
+                <a:cs typeface="Calibri" pitchFamily="34" charset="-120"/>
+              </a:rPr>
+              <a:t>Fundação · Agenda e prazos · Calculadora sucessória · Documentos e minutas</a:t>
+            </a:r>
+            <a:endParaRPr lang="en-US" sz="1250" dirty="0"/>
+          </a:p>
+        </p:txBody>
+      </p:sp>
+      <p:pic>
+        <p:nvPicPr>
+          <p:cNvPr id="10" name="Image 0" descr="icons/circle-check-indigo.png">    </p:cNvPr>
+          <p:cNvPicPr>
+            <a:picLocks noChangeAspect="1"/>
+          </p:cNvPicPr>
+          <p:nvPr/>
+        </p:nvPicPr>
+        <p:blipFill>
+          <a:blip r:embed="rId1"/>
+          <a:stretch>
+            <a:fillRect/>
+          </a:stretch>
+        </p:blipFill>
+        <p:spPr>
+          <a:xfrm>
+            <a:off x="8321040" y="1207008"/>
+            <a:ext cx="237744" cy="237744"/>
+          </a:xfrm>
+          <a:prstGeom prst="rect">
+            <a:avLst/>
+          </a:prstGeom>
+        </p:spPr>
+      </p:pic>
+      <p:sp>
+        <p:nvSpPr>
+          <p:cNvPr id="11" name="Shape 8"/>
+          <p:cNvSpPr/>
+          <p:nvPr/>
+        </p:nvSpPr>
+        <p:spPr>
+          <a:xfrm>
+            <a:off x="548640" y="1664208"/>
+            <a:ext cx="329184" cy="329184"/>
+          </a:xfrm>
+          <a:prstGeom prst="ellipse">
+            <a:avLst/>
+          </a:prstGeom>
+          <a:solidFill>
+            <a:srgbClr val="2D39B9"/>
+          </a:solidFill>
+          <a:ln w="9525">
+            <a:solidFill>
+              <a:srgbClr val="2D39B9"/>
+            </a:solidFill>
+            <a:prstDash val="solid"/>
+          </a:ln>
+        </p:spPr>
+      </p:sp>
+      <p:sp>
+        <p:nvSpPr>
+          <p:cNvPr id="12" name="Text 9"/>
+          <p:cNvSpPr txBox="1"/>
+          <p:nvPr/>
+        </p:nvSpPr>
+        <p:spPr>
+          <a:xfrm>
+            <a:off x="548640" y="1664208"/>
+            <a:ext cx="329184" cy="329184"/>
+          </a:xfrm>
+          <a:prstGeom prst="rect">
+            <a:avLst/>
+          </a:prstGeom>
+          <a:noFill/>
+          <a:ln/>
+        </p:spPr>
+        <p:txBody>
+          <a:bodyPr wrap="square" lIns="0" tIns="0" rIns="0" bIns="0" rtlCol="0" anchor="ctr"/>
+          <a:lstStyle/>
+          <a:p>
+            <a:pPr algn="ctr" indent="0" marL="0">
+              <a:buNone/>
+            </a:pPr>
+            <a:r>
+              <a:rPr lang="en-US" sz="900" b="1" dirty="0">
+                <a:solidFill>
+                  <a:srgbClr val="FFFFFF"/>
+                </a:solidFill>
+                <a:latin typeface="Calibri" pitchFamily="34" charset="0"/>
+                <a:ea typeface="Calibri" pitchFamily="34" charset="-122"/>
+                <a:cs typeface="Calibri" pitchFamily="34" charset="-120"/>
+              </a:rPr>
+              <a:t>5</a:t>
+            </a:r>
+            <a:endParaRPr lang="en-US" sz="900" dirty="0"/>
+          </a:p>
+        </p:txBody>
+      </p:sp>
+      <p:sp>
+        <p:nvSpPr>
+          <p:cNvPr id="13" name="Shape 10"/>
+          <p:cNvSpPr/>
+          <p:nvPr/>
+        </p:nvSpPr>
+        <p:spPr>
+          <a:xfrm>
+            <a:off x="713232" y="1993392"/>
+            <a:ext cx="0" cy="173736"/>
+          </a:xfrm>
+          <a:prstGeom prst="line">
+            <a:avLst/>
+          </a:prstGeom>
+          <a:noFill/>
+          <a:ln w="12700">
+            <a:solidFill>
+              <a:srgbClr val="D9DCE8"/>
+            </a:solidFill>
+            <a:prstDash val="solid"/>
+          </a:ln>
+        </p:spPr>
+      </p:sp>
+      <p:sp>
+        <p:nvSpPr>
+          <p:cNvPr id="14" name="Text 11"/>
+          <p:cNvSpPr txBox="1"/>
+          <p:nvPr/>
+        </p:nvSpPr>
+        <p:spPr>
+          <a:xfrm>
+            <a:off x="1097280" y="1673352"/>
+            <a:ext cx="7498080" cy="365760"/>
+          </a:xfrm>
+          <a:prstGeom prst="rect">
+            <a:avLst/>
+          </a:prstGeom>
+          <a:noFill/>
+          <a:ln/>
+        </p:spPr>
+        <p:txBody>
+          <a:bodyPr wrap="square" lIns="0" tIns="0" rIns="0" bIns="0" rtlCol="0" anchor="t"/>
+          <a:lstStyle/>
+          <a:p>
+            <a:pPr indent="0" marL="0">
+              <a:buNone/>
+            </a:pPr>
+            <a:r>
+              <a:rPr lang="en-US" sz="1250" b="1" dirty="0">
+                <a:solidFill>
+                  <a:srgbClr val="1B1F3B"/>
+                </a:solidFill>
+                <a:latin typeface="Calibri" pitchFamily="34" charset="0"/>
+                <a:ea typeface="Calibri" pitchFamily="34" charset="-122"/>
+                <a:cs typeface="Calibri" pitchFamily="34" charset="-120"/>
+              </a:rPr>
+              <a:t>Relatórios do dossier, relação de bens, mapa de partilha, CSV</a:t>
+            </a:r>
+            <a:endParaRPr lang="en-US" sz="1250" dirty="0"/>
+          </a:p>
+        </p:txBody>
+      </p:sp>
+      <p:pic>
+        <p:nvPicPr>
+          <p:cNvPr id="15" name="Image 1" descr="icons/circle-check-indigo.png">    </p:cNvPr>
+          <p:cNvPicPr>
+            <a:picLocks noChangeAspect="1"/>
+          </p:cNvPicPr>
+          <p:nvPr/>
+        </p:nvPicPr>
+        <p:blipFill>
+          <a:blip r:embed="rId2"/>
+          <a:stretch>
+            <a:fillRect/>
+          </a:stretch>
+        </p:blipFill>
+        <p:spPr>
+          <a:xfrm>
+            <a:off x="8321040" y="1709928"/>
+            <a:ext cx="237744" cy="237744"/>
+          </a:xfrm>
+          <a:prstGeom prst="rect">
+            <a:avLst/>
+          </a:prstGeom>
+        </p:spPr>
+      </p:pic>
+      <p:sp>
+        <p:nvSpPr>
+          <p:cNvPr id="16" name="Shape 12"/>
+          <p:cNvSpPr/>
+          <p:nvPr/>
+        </p:nvSpPr>
+        <p:spPr>
+          <a:xfrm>
+            <a:off x="548640" y="2167128"/>
+            <a:ext cx="329184" cy="329184"/>
+          </a:xfrm>
+          <a:prstGeom prst="ellipse">
+            <a:avLst/>
+          </a:prstGeom>
+          <a:solidFill>
+            <a:srgbClr val="2D39B9"/>
+          </a:solidFill>
+          <a:ln w="9525">
+            <a:solidFill>
+              <a:srgbClr val="2D39B9"/>
+            </a:solidFill>
+            <a:prstDash val="solid"/>
+          </a:ln>
+        </p:spPr>
+      </p:sp>
+      <p:sp>
+        <p:nvSpPr>
+          <p:cNvPr id="17" name="Text 13"/>
+          <p:cNvSpPr txBox="1"/>
+          <p:nvPr/>
+        </p:nvSpPr>
+        <p:spPr>
+          <a:xfrm>
+            <a:off x="548640" y="2167128"/>
+            <a:ext cx="329184" cy="329184"/>
+          </a:xfrm>
+          <a:prstGeom prst="rect">
+            <a:avLst/>
+          </a:prstGeom>
+          <a:noFill/>
+          <a:ln/>
+        </p:spPr>
+        <p:txBody>
+          <a:bodyPr wrap="square" lIns="0" tIns="0" rIns="0" bIns="0" rtlCol="0" anchor="ctr"/>
+          <a:lstStyle/>
+          <a:p>
+            <a:pPr algn="ctr" indent="0" marL="0">
+              <a:buNone/>
+            </a:pPr>
+            <a:r>
+              <a:rPr lang="en-US" sz="900" b="1" dirty="0">
+                <a:solidFill>
+                  <a:srgbClr val="FFFFFF"/>
+                </a:solidFill>
+                <a:latin typeface="Calibri" pitchFamily="34" charset="0"/>
+                <a:ea typeface="Calibri" pitchFamily="34" charset="-122"/>
+                <a:cs typeface="Calibri" pitchFamily="34" charset="-120"/>
+              </a:rPr>
+              <a:t>6</a:t>
+            </a:r>
+            <a:endParaRPr lang="en-US" sz="900" dirty="0"/>
+          </a:p>
+        </p:txBody>
+      </p:sp>
+      <p:sp>
+        <p:nvSpPr>
+          <p:cNvPr id="18" name="Shape 14"/>
+          <p:cNvSpPr/>
+          <p:nvPr/>
+        </p:nvSpPr>
+        <p:spPr>
+          <a:xfrm>
+            <a:off x="713232" y="2496312"/>
+            <a:ext cx="0" cy="173736"/>
+          </a:xfrm>
+          <a:prstGeom prst="line">
+            <a:avLst/>
+          </a:prstGeom>
+          <a:noFill/>
+          <a:ln w="12700">
+            <a:solidFill>
+              <a:srgbClr val="D9DCE8"/>
+            </a:solidFill>
+            <a:prstDash val="solid"/>
+          </a:ln>
+        </p:spPr>
+      </p:sp>
+      <p:sp>
+        <p:nvSpPr>
+          <p:cNvPr id="19" name="Text 15"/>
+          <p:cNvSpPr txBox="1"/>
+          <p:nvPr/>
+        </p:nvSpPr>
+        <p:spPr>
+          <a:xfrm>
+            <a:off x="1097280" y="2176272"/>
+            <a:ext cx="7498080" cy="365760"/>
+          </a:xfrm>
+          <a:prstGeom prst="rect">
+            <a:avLst/>
+          </a:prstGeom>
+          <a:noFill/>
+          <a:ln/>
+        </p:spPr>
+        <p:txBody>
+          <a:bodyPr wrap="square" lIns="0" tIns="0" rIns="0" bIns="0" rtlCol="0" anchor="t"/>
+          <a:lstStyle/>
+          <a:p>
+            <a:pPr indent="0" marL="0">
+              <a:buNone/>
+            </a:pPr>
+            <a:r>
+              <a:rPr lang="en-US" sz="1250" b="1" dirty="0">
+                <a:solidFill>
+                  <a:srgbClr val="1B1F3B"/>
+                </a:solidFill>
+                <a:latin typeface="Calibri" pitchFamily="34" charset="0"/>
+                <a:ea typeface="Calibri" pitchFamily="34" charset="-122"/>
+                <a:cs typeface="Calibri" pitchFamily="34" charset="-120"/>
+              </a:rPr>
+              <a:t>Paleta de comandos, quadro Kanban, ações em massa, modelos, as minhas tarefas</a:t>
+            </a:r>
+            <a:endParaRPr lang="en-US" sz="1250" dirty="0"/>
+          </a:p>
+        </p:txBody>
+      </p:sp>
+      <p:pic>
+        <p:nvPicPr>
+          <p:cNvPr id="20" name="Image 2" descr="icons/circle-check-indigo.png">    </p:cNvPr>
+          <p:cNvPicPr>
+            <a:picLocks noChangeAspect="1"/>
+          </p:cNvPicPr>
+          <p:nvPr/>
+        </p:nvPicPr>
+        <p:blipFill>
+          <a:blip r:embed="rId3"/>
+          <a:stretch>
+            <a:fillRect/>
+          </a:stretch>
+        </p:blipFill>
+        <p:spPr>
+          <a:xfrm>
+            <a:off x="8321040" y="2212848"/>
+            <a:ext cx="237744" cy="237744"/>
+          </a:xfrm>
+          <a:prstGeom prst="rect">
+            <a:avLst/>
+          </a:prstGeom>
+        </p:spPr>
+      </p:pic>
+      <p:sp>
+        <p:nvSpPr>
+          <p:cNvPr id="21" name="Shape 16"/>
+          <p:cNvSpPr/>
+          <p:nvPr/>
+        </p:nvSpPr>
+        <p:spPr>
+          <a:xfrm>
+            <a:off x="548640" y="2670048"/>
+            <a:ext cx="329184" cy="329184"/>
+          </a:xfrm>
+          <a:prstGeom prst="ellipse">
+            <a:avLst/>
+          </a:prstGeom>
+          <a:solidFill>
+            <a:srgbClr val="2D39B9"/>
+          </a:solidFill>
+          <a:ln w="9525">
+            <a:solidFill>
+              <a:srgbClr val="2D39B9"/>
+            </a:solidFill>
+            <a:prstDash val="solid"/>
+          </a:ln>
+        </p:spPr>
+      </p:sp>
+      <p:sp>
+        <p:nvSpPr>
+          <p:cNvPr id="22" name="Text 17"/>
+          <p:cNvSpPr txBox="1"/>
+          <p:nvPr/>
+        </p:nvSpPr>
+        <p:spPr>
+          <a:xfrm>
+            <a:off x="548640" y="2670048"/>
+            <a:ext cx="329184" cy="329184"/>
+          </a:xfrm>
+          <a:prstGeom prst="rect">
+            <a:avLst/>
+          </a:prstGeom>
+          <a:noFill/>
+          <a:ln/>
+        </p:spPr>
+        <p:txBody>
+          <a:bodyPr wrap="square" lIns="0" tIns="0" rIns="0" bIns="0" rtlCol="0" anchor="ctr"/>
+          <a:lstStyle/>
+          <a:p>
+            <a:pPr algn="ctr" indent="0" marL="0">
+              <a:buNone/>
+            </a:pPr>
+            <a:r>
+              <a:rPr lang="en-US" sz="900" b="1" dirty="0">
+                <a:solidFill>
+                  <a:srgbClr val="FFFFFF"/>
+                </a:solidFill>
+                <a:latin typeface="Calibri" pitchFamily="34" charset="0"/>
+                <a:ea typeface="Calibri" pitchFamily="34" charset="-122"/>
+                <a:cs typeface="Calibri" pitchFamily="34" charset="-120"/>
+              </a:rPr>
+              <a:t>7</a:t>
+            </a:r>
+            <a:endParaRPr lang="en-US" sz="900" dirty="0"/>
+          </a:p>
+        </p:txBody>
+      </p:sp>
+      <p:sp>
+        <p:nvSpPr>
+          <p:cNvPr id="23" name="Shape 18"/>
+          <p:cNvSpPr/>
+          <p:nvPr/>
+        </p:nvSpPr>
+        <p:spPr>
+          <a:xfrm>
+            <a:off x="713232" y="2999232"/>
+            <a:ext cx="0" cy="173736"/>
+          </a:xfrm>
+          <a:prstGeom prst="line">
+            <a:avLst/>
+          </a:prstGeom>
+          <a:noFill/>
+          <a:ln w="12700">
+            <a:solidFill>
+              <a:srgbClr val="D9DCE8"/>
+            </a:solidFill>
+            <a:prstDash val="solid"/>
+          </a:ln>
+        </p:spPr>
+      </p:sp>
+      <p:sp>
+        <p:nvSpPr>
+          <p:cNvPr id="24" name="Text 19"/>
+          <p:cNvSpPr txBox="1"/>
+          <p:nvPr/>
+        </p:nvSpPr>
+        <p:spPr>
+          <a:xfrm>
+            <a:off x="1097280" y="2679192"/>
+            <a:ext cx="7498080" cy="365760"/>
+          </a:xfrm>
+          <a:prstGeom prst="rect">
+            <a:avLst/>
+          </a:prstGeom>
+          <a:noFill/>
+          <a:ln/>
+        </p:spPr>
+        <p:txBody>
+          <a:bodyPr wrap="square" lIns="0" tIns="0" rIns="0" bIns="0" rtlCol="0" anchor="t"/>
+          <a:lstStyle/>
+          <a:p>
+            <a:pPr indent="0" marL="0">
+              <a:buNone/>
+            </a:pPr>
+            <a:r>
+              <a:rPr lang="en-US" sz="1250" b="1" dirty="0">
+                <a:solidFill>
+                  <a:srgbClr val="1B1F3B"/>
+                </a:solidFill>
+                <a:latin typeface="Calibri" pitchFamily="34" charset="0"/>
+                <a:ea typeface="Calibri" pitchFamily="34" charset="-122"/>
+                <a:cs typeface="Calibri" pitchFamily="34" charset="-120"/>
+              </a:rPr>
+              <a:t>PIN e auto-bloqueio, cópias cifradas, modo privacidade, importação do protótipo</a:t>
+            </a:r>
+            <a:endParaRPr lang="en-US" sz="1250" dirty="0"/>
+          </a:p>
+        </p:txBody>
+      </p:sp>
+      <p:pic>
+        <p:nvPicPr>
+          <p:cNvPr id="25" name="Image 3" descr="icons/circle-check-indigo.png">    </p:cNvPr>
+          <p:cNvPicPr>
+            <a:picLocks noChangeAspect="1"/>
+          </p:cNvPicPr>
+          <p:nvPr/>
+        </p:nvPicPr>
+        <p:blipFill>
+          <a:blip r:embed="rId4"/>
+          <a:stretch>
+            <a:fillRect/>
+          </a:stretch>
+        </p:blipFill>
+        <p:spPr>
+          <a:xfrm>
+            <a:off x="8321040" y="2715768"/>
+            <a:ext cx="237744" cy="237744"/>
+          </a:xfrm>
+          <a:prstGeom prst="rect">
+            <a:avLst/>
+          </a:prstGeom>
+        </p:spPr>
+      </p:pic>
+      <p:sp>
+        <p:nvSpPr>
+          <p:cNvPr id="26" name="Shape 20"/>
+          <p:cNvSpPr/>
+          <p:nvPr/>
+        </p:nvSpPr>
+        <p:spPr>
+          <a:xfrm>
+            <a:off x="548640" y="3172968"/>
+            <a:ext cx="329184" cy="329184"/>
+          </a:xfrm>
+          <a:prstGeom prst="ellipse">
+            <a:avLst/>
+          </a:prstGeom>
+          <a:solidFill>
+            <a:srgbClr val="2D39B9"/>
+          </a:solidFill>
+          <a:ln w="9525">
+            <a:solidFill>
+              <a:srgbClr val="2D39B9"/>
+            </a:solidFill>
+            <a:prstDash val="solid"/>
+          </a:ln>
+        </p:spPr>
+      </p:sp>
+      <p:sp>
+        <p:nvSpPr>
+          <p:cNvPr id="27" name="Text 21"/>
+          <p:cNvSpPr txBox="1"/>
+          <p:nvPr/>
+        </p:nvSpPr>
+        <p:spPr>
+          <a:xfrm>
+            <a:off x="548640" y="3172968"/>
+            <a:ext cx="329184" cy="329184"/>
+          </a:xfrm>
+          <a:prstGeom prst="rect">
+            <a:avLst/>
+          </a:prstGeom>
+          <a:noFill/>
+          <a:ln/>
+        </p:spPr>
+        <p:txBody>
+          <a:bodyPr wrap="square" lIns="0" tIns="0" rIns="0" bIns="0" rtlCol="0" anchor="ctr"/>
+          <a:lstStyle/>
+          <a:p>
+            <a:pPr algn="ctr" indent="0" marL="0">
+              <a:buNone/>
+            </a:pPr>
+            <a:r>
+              <a:rPr lang="en-US" sz="900" b="1" dirty="0">
+                <a:solidFill>
+                  <a:srgbClr val="FFFFFF"/>
+                </a:solidFill>
+                <a:latin typeface="Calibri" pitchFamily="34" charset="0"/>
+                <a:ea typeface="Calibri" pitchFamily="34" charset="-122"/>
+                <a:cs typeface="Calibri" pitchFamily="34" charset="-120"/>
+              </a:rPr>
+              <a:t>8</a:t>
+            </a:r>
+            <a:endParaRPr lang="en-US" sz="900" dirty="0"/>
+          </a:p>
+        </p:txBody>
+      </p:sp>
+      <p:sp>
+        <p:nvSpPr>
+          <p:cNvPr id="28" name="Shape 22"/>
+          <p:cNvSpPr/>
+          <p:nvPr/>
+        </p:nvSpPr>
+        <p:spPr>
+          <a:xfrm>
+            <a:off x="713232" y="3502152"/>
+            <a:ext cx="0" cy="173736"/>
+          </a:xfrm>
+          <a:prstGeom prst="line">
+            <a:avLst/>
+          </a:prstGeom>
+          <a:noFill/>
+          <a:ln w="12700">
+            <a:solidFill>
+              <a:srgbClr val="D9DCE8"/>
+            </a:solidFill>
+            <a:prstDash val="solid"/>
+          </a:ln>
+        </p:spPr>
+      </p:sp>
+      <p:sp>
+        <p:nvSpPr>
+          <p:cNvPr id="29" name="Text 23"/>
+          <p:cNvSpPr txBox="1"/>
+          <p:nvPr/>
+        </p:nvSpPr>
+        <p:spPr>
+          <a:xfrm>
+            <a:off x="1097280" y="3182112"/>
+            <a:ext cx="7498080" cy="365760"/>
+          </a:xfrm>
+          <a:prstGeom prst="rect">
+            <a:avLst/>
+          </a:prstGeom>
+          <a:noFill/>
+          <a:ln/>
+        </p:spPr>
+        <p:txBody>
+          <a:bodyPr wrap="square" lIns="0" tIns="0" rIns="0" bIns="0" rtlCol="0" anchor="t"/>
+          <a:lstStyle/>
+          <a:p>
+            <a:pPr indent="0" marL="0">
+              <a:buNone/>
+            </a:pPr>
+            <a:r>
+              <a:rPr lang="en-US" sz="1250" b="1" dirty="0">
+                <a:solidFill>
+                  <a:srgbClr val="1B1F3B"/>
+                </a:solidFill>
+                <a:latin typeface="Calibri" pitchFamily="34" charset="0"/>
+                <a:ea typeface="Calibri" pitchFamily="34" charset="-122"/>
+                <a:cs typeface="Calibri" pitchFamily="34" charset="-120"/>
+              </a:rPr>
+              <a:t>Lei aplicável (Reg. 650/2012), CSE, documentos e prazos por país, PT/FR/EN</a:t>
+            </a:r>
+            <a:endParaRPr lang="en-US" sz="1250" dirty="0"/>
+          </a:p>
+        </p:txBody>
+      </p:sp>
+      <p:pic>
+        <p:nvPicPr>
+          <p:cNvPr id="30" name="Image 4" descr="icons/circle-check-indigo.png">    </p:cNvPr>
+          <p:cNvPicPr>
+            <a:picLocks noChangeAspect="1"/>
+          </p:cNvPicPr>
+          <p:nvPr/>
+        </p:nvPicPr>
+        <p:blipFill>
+          <a:blip r:embed="rId5"/>
+          <a:stretch>
+            <a:fillRect/>
+          </a:stretch>
+        </p:blipFill>
+        <p:spPr>
+          <a:xfrm>
+            <a:off x="8321040" y="3218688"/>
+            <a:ext cx="237744" cy="237744"/>
+          </a:xfrm>
+          <a:prstGeom prst="rect">
+            <a:avLst/>
+          </a:prstGeom>
+        </p:spPr>
+      </p:pic>
+      <p:sp>
+        <p:nvSpPr>
+          <p:cNvPr id="31" name="Shape 24"/>
+          <p:cNvSpPr/>
+          <p:nvPr/>
+        </p:nvSpPr>
+        <p:spPr>
+          <a:xfrm>
+            <a:off x="548640" y="3675888"/>
+            <a:ext cx="329184" cy="329184"/>
+          </a:xfrm>
+          <a:prstGeom prst="ellipse">
+            <a:avLst/>
+          </a:prstGeom>
+          <a:solidFill>
+            <a:srgbClr val="2D39B9"/>
+          </a:solidFill>
+          <a:ln w="9525">
+            <a:solidFill>
+              <a:srgbClr val="2D39B9"/>
+            </a:solidFill>
+            <a:prstDash val="solid"/>
+          </a:ln>
+        </p:spPr>
+      </p:sp>
+      <p:sp>
+        <p:nvSpPr>
+          <p:cNvPr id="32" name="Text 25"/>
+          <p:cNvSpPr txBox="1"/>
+          <p:nvPr/>
+        </p:nvSpPr>
+        <p:spPr>
+          <a:xfrm>
+            <a:off x="548640" y="3675888"/>
+            <a:ext cx="329184" cy="329184"/>
+          </a:xfrm>
+          <a:prstGeom prst="rect">
+            <a:avLst/>
+          </a:prstGeom>
+          <a:noFill/>
+          <a:ln/>
+        </p:spPr>
+        <p:txBody>
+          <a:bodyPr wrap="square" lIns="0" tIns="0" rIns="0" bIns="0" rtlCol="0" anchor="ctr"/>
+          <a:lstStyle/>
+          <a:p>
+            <a:pPr algn="ctr" indent="0" marL="0">
+              <a:buNone/>
+            </a:pPr>
+            <a:r>
+              <a:rPr lang="en-US" sz="900" b="1" dirty="0">
+                <a:solidFill>
+                  <a:srgbClr val="FFFFFF"/>
+                </a:solidFill>
+                <a:latin typeface="Calibri" pitchFamily="34" charset="0"/>
+                <a:ea typeface="Calibri" pitchFamily="34" charset="-122"/>
+                <a:cs typeface="Calibri" pitchFamily="34" charset="-120"/>
+              </a:rPr>
+              <a:t>9</a:t>
+            </a:r>
+            <a:endParaRPr lang="en-US" sz="900" dirty="0"/>
+          </a:p>
+        </p:txBody>
+      </p:sp>
+      <p:sp>
+        <p:nvSpPr>
+          <p:cNvPr id="33" name="Shape 26"/>
+          <p:cNvSpPr/>
+          <p:nvPr/>
+        </p:nvSpPr>
+        <p:spPr>
+          <a:xfrm>
+            <a:off x="713232" y="4005072"/>
+            <a:ext cx="0" cy="173736"/>
+          </a:xfrm>
+          <a:prstGeom prst="line">
+            <a:avLst/>
+          </a:prstGeom>
+          <a:noFill/>
+          <a:ln w="12700">
+            <a:solidFill>
+              <a:srgbClr val="D9DCE8"/>
+            </a:solidFill>
+            <a:prstDash val="solid"/>
+          </a:ln>
+        </p:spPr>
+      </p:sp>
+      <p:sp>
+        <p:nvSpPr>
+          <p:cNvPr id="34" name="Text 27"/>
+          <p:cNvSpPr txBox="1"/>
+          <p:nvPr/>
+        </p:nvSpPr>
+        <p:spPr>
+          <a:xfrm>
+            <a:off x="1097280" y="3685032"/>
+            <a:ext cx="7498080" cy="365760"/>
+          </a:xfrm>
+          <a:prstGeom prst="rect">
+            <a:avLst/>
+          </a:prstGeom>
+          <a:noFill/>
+          <a:ln/>
+        </p:spPr>
+        <p:txBody>
+          <a:bodyPr wrap="square" lIns="0" tIns="0" rIns="0" bIns="0" rtlCol="0" anchor="t"/>
+          <a:lstStyle/>
+          <a:p>
+            <a:pPr indent="0" marL="0">
+              <a:buNone/>
+            </a:pPr>
+            <a:r>
+              <a:rPr lang="en-US" sz="1250" b="1" dirty="0">
+                <a:solidFill>
+                  <a:srgbClr val="1B1F3B"/>
+                </a:solidFill>
+                <a:latin typeface="Calibri" pitchFamily="34" charset="0"/>
+                <a:ea typeface="Calibri" pitchFamily="34" charset="-122"/>
+                <a:cs typeface="Calibri" pitchFamily="34" charset="-120"/>
+              </a:rPr>
+              <a:t>Acessibilidade WCAG 2.2 AA, divisão de código, testes ponta a ponta</a:t>
+            </a:r>
+            <a:endParaRPr lang="en-US" sz="1250" dirty="0"/>
+          </a:p>
+        </p:txBody>
+      </p:sp>
+      <p:pic>
+        <p:nvPicPr>
+          <p:cNvPr id="35" name="Image 5" descr="icons/circle-check-indigo.png">    </p:cNvPr>
+          <p:cNvPicPr>
+            <a:picLocks noChangeAspect="1"/>
+          </p:cNvPicPr>
+          <p:nvPr/>
+        </p:nvPicPr>
+        <p:blipFill>
+          <a:blip r:embed="rId6"/>
+          <a:stretch>
+            <a:fillRect/>
+          </a:stretch>
+        </p:blipFill>
+        <p:spPr>
+          <a:xfrm>
+            <a:off x="8321040" y="3721608"/>
+            <a:ext cx="237744" cy="237744"/>
+          </a:xfrm>
+          <a:prstGeom prst="rect">
+            <a:avLst/>
+          </a:prstGeom>
+        </p:spPr>
+      </p:pic>
+      <p:sp>
+        <p:nvSpPr>
+          <p:cNvPr id="36" name="Shape 28"/>
+          <p:cNvSpPr/>
+          <p:nvPr/>
+        </p:nvSpPr>
+        <p:spPr>
+          <a:xfrm>
+            <a:off x="548640" y="4178808"/>
+            <a:ext cx="329184" cy="329184"/>
+          </a:xfrm>
+          <a:prstGeom prst="ellipse">
+            <a:avLst/>
+          </a:prstGeom>
+          <a:solidFill>
+            <a:srgbClr val="2D39B9"/>
+          </a:solidFill>
+          <a:ln w="9525">
+            <a:solidFill>
+              <a:srgbClr val="2D39B9"/>
+            </a:solidFill>
+            <a:prstDash val="solid"/>
+          </a:ln>
+        </p:spPr>
+      </p:sp>
+      <p:sp>
+        <p:nvSpPr>
+          <p:cNvPr id="37" name="Text 29"/>
+          <p:cNvSpPr txBox="1"/>
+          <p:nvPr/>
+        </p:nvSpPr>
+        <p:spPr>
+          <a:xfrm>
+            <a:off x="548640" y="4178808"/>
+            <a:ext cx="329184" cy="329184"/>
+          </a:xfrm>
+          <a:prstGeom prst="rect">
+            <a:avLst/>
+          </a:prstGeom>
+          <a:noFill/>
+          <a:ln/>
+        </p:spPr>
+        <p:txBody>
+          <a:bodyPr wrap="square" lIns="0" tIns="0" rIns="0" bIns="0" rtlCol="0" anchor="ctr"/>
+          <a:lstStyle/>
+          <a:p>
+            <a:pPr algn="ctr" indent="0" marL="0">
+              <a:buNone/>
+            </a:pPr>
+            <a:r>
+              <a:rPr lang="en-US" sz="900" b="1" dirty="0">
+                <a:solidFill>
+                  <a:srgbClr val="FFFFFF"/>
+                </a:solidFill>
+                <a:latin typeface="Calibri" pitchFamily="34" charset="0"/>
+                <a:ea typeface="Calibri" pitchFamily="34" charset="-122"/>
+                <a:cs typeface="Calibri" pitchFamily="34" charset="-120"/>
+              </a:rPr>
+              <a:t>10</a:t>
+            </a:r>
+            <a:endParaRPr lang="en-US" sz="900" dirty="0"/>
+          </a:p>
+        </p:txBody>
+      </p:sp>
+      <p:sp>
+        <p:nvSpPr>
+          <p:cNvPr id="38" name="Text 30"/>
+          <p:cNvSpPr txBox="1"/>
+          <p:nvPr/>
+        </p:nvSpPr>
+        <p:spPr>
+          <a:xfrm>
+            <a:off x="1097280" y="4187952"/>
+            <a:ext cx="7498080" cy="365760"/>
+          </a:xfrm>
+          <a:prstGeom prst="rect">
+            <a:avLst/>
+          </a:prstGeom>
+          <a:noFill/>
+          <a:ln/>
+        </p:spPr>
+        <p:txBody>
+          <a:bodyPr wrap="square" lIns="0" tIns="0" rIns="0" bIns="0" rtlCol="0" anchor="t"/>
+          <a:lstStyle/>
+          <a:p>
+            <a:pPr indent="0" marL="0">
+              <a:buNone/>
+            </a:pPr>
+            <a:r>
+              <a:rPr lang="en-US" sz="1250" b="1" dirty="0">
+                <a:solidFill>
+                  <a:srgbClr val="1B1F3B"/>
+                </a:solidFill>
+                <a:latin typeface="Calibri" pitchFamily="34" charset="0"/>
+                <a:ea typeface="Calibri" pitchFamily="34" charset="-122"/>
+                <a:cs typeface="Calibri" pitchFamily="34" charset="-120"/>
+              </a:rPr>
+              <a:t>Manual, apresentação e resumo executivo atualizados</a:t>
+            </a:r>
+            <a:endParaRPr lang="en-US" sz="1250" dirty="0"/>
+          </a:p>
+        </p:txBody>
+      </p:sp>
+      <p:pic>
+        <p:nvPicPr>
+          <p:cNvPr id="39" name="Image 6" descr="icons/circle-check-indigo.png">    </p:cNvPr>
+          <p:cNvPicPr>
+            <a:picLocks noChangeAspect="1"/>
+          </p:cNvPicPr>
+          <p:nvPr/>
+        </p:nvPicPr>
+        <p:blipFill>
+          <a:blip r:embed="rId7"/>
+          <a:stretch>
+            <a:fillRect/>
+          </a:stretch>
+        </p:blipFill>
+        <p:spPr>
+          <a:xfrm>
+            <a:off x="8321040" y="4224528"/>
+            <a:ext cx="237744" cy="237744"/>
+          </a:xfrm>
+          <a:prstGeom prst="rect">
+            <a:avLst/>
+          </a:prstGeom>
+        </p:spPr>
+      </p:pic>
+    </p:spTree>
+  </p:cSld>
+  <p:clrMapOvr>
+    <a:masterClrMapping/>
+  </p:clrMapOvr>
+</p:sld>
+</file>
+
+<file path=ppt/slides/slide23.xml><?xml version="1.0" encoding="utf-8"?>
+<p:sld xmlns:a="http://schemas.openxmlformats.org/drawingml/2006/main" xmlns:r="http://schemas.openxmlformats.org/officeDocument/2006/relationships" xmlns:p="http://schemas.openxmlformats.org/presentationml/2006/main">
+  <p:cSld name="Slide 23">
+    <p:bg>
+      <p:bgPr>
+        <a:solidFill>
+          <a:srgbClr val="FFFFFF"/>
+        </a:solidFill>
+      </p:bgPr>
+    </p:bg>
+    <p:spTree>
+      <p:nvGrpSpPr>
+        <p:cNvPr id="1" name=""/>
+        <p:cNvGrpSpPr/>
+        <p:nvPr/>
+      </p:nvGrpSpPr>
+      <p:grpSpPr>
+        <a:xfrm>
+          <a:off x="0" y="0"/>
+          <a:ext cx="0" cy="0"/>
+          <a:chOff x="0" y="0"/>
+          <a:chExt cx="0" cy="0"/>
+        </a:xfrm>
+      </p:grpSpPr>
+      <p:sp>
+        <p:nvSpPr>
+          <p:cNvPr id="2" name="Text 0"/>
+          <p:cNvSpPr txBox="1"/>
+          <p:nvPr/>
+        </p:nvSpPr>
+        <p:spPr>
+          <a:xfrm>
+            <a:off x="457200" y="128016"/>
+            <a:ext cx="8229600" cy="228600"/>
+          </a:xfrm>
+          <a:prstGeom prst="rect">
+            <a:avLst/>
+          </a:prstGeom>
+          <a:noFill/>
+          <a:ln/>
+        </p:spPr>
+        <p:txBody>
+          <a:bodyPr wrap="square" lIns="0" tIns="0" rIns="0" bIns="0" rtlCol="0" anchor="ctr"/>
+          <a:lstStyle/>
+          <a:p>
+            <a:pPr indent="0" marL="0">
+              <a:buNone/>
+            </a:pPr>
+            <a:r>
+              <a:rPr lang="en-US" sz="1000" b="1" spc="200" kern="0" dirty="0">
+                <a:solidFill>
+                  <a:srgbClr val="2D39B9"/>
+                </a:solidFill>
+                <a:latin typeface="Calibri" pitchFamily="34" charset="0"/>
+                <a:ea typeface="Calibri" pitchFamily="34" charset="-122"/>
+                <a:cs typeface="Calibri" pitchFamily="34" charset="-120"/>
+              </a:rPr>
+              <a:t>COMO COMEÇAR</a:t>
+            </a:r>
+            <a:endParaRPr lang="en-US" sz="1000" dirty="0"/>
+          </a:p>
+        </p:txBody>
+      </p:sp>
+      <p:sp>
+        <p:nvSpPr>
+          <p:cNvPr id="3" name="Text 1"/>
+          <p:cNvSpPr txBox="1"/>
+          <p:nvPr/>
+        </p:nvSpPr>
+        <p:spPr>
+          <a:xfrm>
+            <a:off x="457200" y="347472"/>
+            <a:ext cx="8229600" cy="548640"/>
+          </a:xfrm>
+          <a:prstGeom prst="rect">
+            <a:avLst/>
+          </a:prstGeom>
+          <a:noFill/>
+          <a:ln/>
+        </p:spPr>
+        <p:txBody>
+          <a:bodyPr wrap="square" lIns="0" tIns="0" rIns="0" bIns="0" rtlCol="0" anchor="ctr"/>
+          <a:lstStyle/>
+          <a:p>
+            <a:pPr indent="0" marL="0">
+              <a:buNone/>
+            </a:pPr>
+            <a:r>
+              <a:rPr lang="en-US" sz="2800" b="1" dirty="0">
+                <a:solidFill>
+                  <a:srgbClr val="1B1F3B"/>
+                </a:solidFill>
+                <a:latin typeface="Cambria" pitchFamily="34" charset="0"/>
+                <a:ea typeface="Cambria" pitchFamily="34" charset="-122"/>
+                <a:cs typeface="Cambria" pitchFamily="34" charset="-120"/>
+              </a:rPr>
+              <a:t>Três passos e cinco minutos</a:t>
+            </a:r>
+            <a:endParaRPr lang="en-US" sz="2800" dirty="0"/>
+          </a:p>
+        </p:txBody>
+      </p:sp>
+      <p:sp>
+        <p:nvSpPr>
+          <p:cNvPr id="4" name="Text 2"/>
+          <p:cNvSpPr txBox="1"/>
+          <p:nvPr/>
+        </p:nvSpPr>
+        <p:spPr>
+          <a:xfrm>
+            <a:off x="457200" y="4773168"/>
+            <a:ext cx="3657600" cy="228600"/>
+          </a:xfrm>
+          <a:prstGeom prst="rect">
+            <a:avLst/>
+          </a:prstGeom>
+          <a:noFill/>
+          <a:ln/>
+        </p:spPr>
+        <p:txBody>
+          <a:bodyPr wrap="square" lIns="0" tIns="0" rIns="0" bIns="0" rtlCol="0" anchor="ctr"/>
+          <a:lstStyle/>
+          <a:p>
+            <a:pPr indent="0" marL="0">
+              <a:buNone/>
+            </a:pPr>
+            <a:r>
+              <a:rPr lang="en-US" sz="900" dirty="0">
+                <a:solidFill>
+                  <a:srgbClr val="5B6180"/>
+                </a:solidFill>
+                <a:latin typeface="Calibri" pitchFamily="34" charset="0"/>
+                <a:ea typeface="Calibri" pitchFamily="34" charset="-122"/>
+                <a:cs typeface="Calibri" pitchFamily="34" charset="-120"/>
+              </a:rPr>
+              <a:t>Balcão das Sucessões</a:t>
+            </a:r>
+            <a:endParaRPr lang="en-US" sz="900" dirty="0"/>
+          </a:p>
+        </p:txBody>
+      </p:sp>
+      <p:sp>
+        <p:nvSpPr>
+          <p:cNvPr id="5" name="Text 3"/>
+          <p:cNvSpPr txBox="1"/>
+          <p:nvPr/>
+        </p:nvSpPr>
+        <p:spPr>
+          <a:xfrm>
+            <a:off x="8138160" y="4773168"/>
+            <a:ext cx="548640" cy="228600"/>
+          </a:xfrm>
+          <a:prstGeom prst="rect">
+            <a:avLst/>
+          </a:prstGeom>
+          <a:noFill/>
+          <a:ln/>
+        </p:spPr>
+        <p:txBody>
+          <a:bodyPr wrap="square" lIns="0" tIns="0" rIns="0" bIns="0" rtlCol="0" anchor="ctr"/>
+          <a:lstStyle/>
+          <a:p>
+            <a:pPr algn="r" indent="0" marL="0">
+              <a:buNone/>
+            </a:pPr>
+            <a:r>
+              <a:rPr lang="en-US" sz="900" dirty="0">
+                <a:solidFill>
+                  <a:srgbClr val="5B6180"/>
+                </a:solidFill>
+                <a:latin typeface="Calibri" pitchFamily="34" charset="0"/>
+                <a:ea typeface="Calibri" pitchFamily="34" charset="-122"/>
+                <a:cs typeface="Calibri" pitchFamily="34" charset="-120"/>
+              </a:rPr>
+              <a:t>23</a:t>
+            </a:r>
+            <a:endParaRPr lang="en-US" sz="900" dirty="0"/>
+          </a:p>
+        </p:txBody>
+      </p:sp>
+      <p:sp>
+        <p:nvSpPr>
+          <p:cNvPr id="6" name="Shape 4"/>
+          <p:cNvSpPr/>
+          <p:nvPr/>
+        </p:nvSpPr>
+        <p:spPr>
+          <a:xfrm>
+            <a:off x="457200" y="1188720"/>
+            <a:ext cx="2651760" cy="2377440"/>
+          </a:xfrm>
+          <a:prstGeom prst="roundRect">
+            <a:avLst>
+              <a:gd name="adj" fmla="val 3077"/>
+            </a:avLst>
+          </a:prstGeom>
+          <a:solidFill>
+            <a:srgbClr val="F7F8FC"/>
+          </a:solidFill>
+          <a:ln w="9525">
+            <a:solidFill>
+              <a:srgbClr val="D9DCE8"/>
+            </a:solidFill>
+            <a:prstDash val="solid"/>
+          </a:ln>
+        </p:spPr>
+      </p:sp>
+      <p:sp>
+        <p:nvSpPr>
+          <p:cNvPr id="7" name="Shape 5"/>
+          <p:cNvSpPr/>
+          <p:nvPr/>
+        </p:nvSpPr>
+        <p:spPr>
+          <a:xfrm>
+            <a:off x="685800" y="1417320"/>
+            <a:ext cx="548640" cy="548640"/>
+          </a:xfrm>
+          <a:prstGeom prst="ellipse">
+            <a:avLst/>
+          </a:prstGeom>
+          <a:solidFill>
+            <a:srgbClr val="2D39B9"/>
+          </a:solidFill>
+          <a:ln w="12700">
+            <a:solidFill>
+              <a:srgbClr val="2D39B9"/>
+            </a:solidFill>
+            <a:prstDash val="solid"/>
+          </a:ln>
+        </p:spPr>
+      </p:sp>
+      <p:pic>
+        <p:nvPicPr>
+          <p:cNvPr id="8" name="Image 0" descr="icons/globe-white.png">    </p:cNvPr>
+          <p:cNvPicPr>
+            <a:picLocks noChangeAspect="1"/>
+          </p:cNvPicPr>
+          <p:nvPr/>
+        </p:nvPicPr>
+        <p:blipFill>
+          <a:blip r:embed="rId1"/>
+          <a:stretch>
+            <a:fillRect/>
+          </a:stretch>
+        </p:blipFill>
+        <p:spPr>
+          <a:xfrm>
+            <a:off x="817474" y="1548994"/>
+            <a:ext cx="285293" cy="285293"/>
+          </a:xfrm>
+          <a:prstGeom prst="rect">
+            <a:avLst/>
+          </a:prstGeom>
+        </p:spPr>
+      </p:pic>
+      <p:sp>
+        <p:nvSpPr>
+          <p:cNvPr id="9" name="Text 6"/>
+          <p:cNvSpPr txBox="1"/>
+          <p:nvPr/>
+        </p:nvSpPr>
+        <p:spPr>
+          <a:xfrm>
+            <a:off x="2468880" y="1325880"/>
+            <a:ext cx="457200" cy="548640"/>
+          </a:xfrm>
+          <a:prstGeom prst="rect">
+            <a:avLst/>
+          </a:prstGeom>
+          <a:noFill/>
+          <a:ln/>
+        </p:spPr>
+        <p:txBody>
+          <a:bodyPr wrap="square" lIns="0" tIns="0" rIns="0" bIns="0" rtlCol="0" anchor="ctr"/>
+          <a:lstStyle/>
+          <a:p>
+            <a:pPr algn="r" indent="0" marL="0">
+              <a:buNone/>
+            </a:pPr>
+            <a:r>
+              <a:rPr lang="en-US" sz="3000" b="1" dirty="0">
+                <a:solidFill>
+                  <a:srgbClr val="EEF0FB"/>
+                </a:solidFill>
+                <a:latin typeface="Cambria" pitchFamily="34" charset="0"/>
+                <a:ea typeface="Cambria" pitchFamily="34" charset="-122"/>
+                <a:cs typeface="Cambria" pitchFamily="34" charset="-120"/>
+              </a:rPr>
+              <a:t>1</a:t>
+            </a:r>
+            <a:endParaRPr lang="en-US" sz="3000" dirty="0"/>
+          </a:p>
+        </p:txBody>
+      </p:sp>
+      <p:sp>
+        <p:nvSpPr>
+          <p:cNvPr id="10" name="Text 7"/>
+          <p:cNvSpPr txBox="1"/>
+          <p:nvPr/>
+        </p:nvSpPr>
+        <p:spPr>
+          <a:xfrm>
+            <a:off x="685800" y="2103120"/>
+            <a:ext cx="2194560" cy="365760"/>
+          </a:xfrm>
+          <a:prstGeom prst="rect">
+            <a:avLst/>
+          </a:prstGeom>
+          <a:noFill/>
+          <a:ln/>
+        </p:spPr>
+        <p:txBody>
+          <a:bodyPr wrap="square" lIns="0" tIns="0" rIns="0" bIns="0" rtlCol="0" anchor="t"/>
+          <a:lstStyle/>
+          <a:p>
+            <a:pPr indent="0" marL="0">
+              <a:buNone/>
+            </a:pPr>
+            <a:r>
+              <a:rPr lang="en-US" sz="1600" b="1" dirty="0">
+                <a:solidFill>
+                  <a:srgbClr val="1B1F3B"/>
+                </a:solidFill>
+                <a:latin typeface="Calibri" pitchFamily="34" charset="0"/>
+                <a:ea typeface="Calibri" pitchFamily="34" charset="-122"/>
+                <a:cs typeface="Calibri" pitchFamily="34" charset="-120"/>
+              </a:rPr>
+              <a:t>Abrir</a:t>
+            </a:r>
+            <a:endParaRPr lang="en-US" sz="1600" dirty="0"/>
+          </a:p>
+        </p:txBody>
+      </p:sp>
+      <p:sp>
+        <p:nvSpPr>
+          <p:cNvPr id="11" name="Text 8"/>
+          <p:cNvSpPr txBox="1"/>
+          <p:nvPr/>
+        </p:nvSpPr>
+        <p:spPr>
+          <a:xfrm>
+            <a:off x="685800" y="2514600"/>
+            <a:ext cx="2194560" cy="1005840"/>
+          </a:xfrm>
+          <a:prstGeom prst="rect">
+            <a:avLst/>
+          </a:prstGeom>
+          <a:noFill/>
+          <a:ln/>
+        </p:spPr>
+        <p:txBody>
+          <a:bodyPr wrap="square" lIns="0" tIns="0" rIns="0" bIns="0" rtlCol="0" anchor="t"/>
+          <a:lstStyle/>
+          <a:p>
+            <a:pPr indent="0" marL="0">
+              <a:buNone/>
+            </a:pPr>
+            <a:r>
+              <a:rPr lang="en-US" sz="1100" dirty="0">
+                <a:solidFill>
+                  <a:srgbClr val="5B6180"/>
+                </a:solidFill>
+                <a:latin typeface="Calibri" pitchFamily="34" charset="0"/>
+                <a:ea typeface="Calibri" pitchFamily="34" charset="-122"/>
+                <a:cs typeface="Calibri" pitchFamily="34" charset="-120"/>
+              </a:rPr>
+              <a:t>Aceda a nelsonsous.github.io/balcao-sucessoes em qualquer navegador atual.</a:t>
+            </a:r>
+            <a:endParaRPr lang="en-US" sz="1100" dirty="0"/>
+          </a:p>
+        </p:txBody>
+      </p:sp>
+      <p:sp>
+        <p:nvSpPr>
+          <p:cNvPr id="12" name="Shape 9"/>
+          <p:cNvSpPr/>
+          <p:nvPr/>
+        </p:nvSpPr>
+        <p:spPr>
+          <a:xfrm>
+            <a:off x="3291840" y="1188720"/>
+            <a:ext cx="2651760" cy="2377440"/>
+          </a:xfrm>
+          <a:prstGeom prst="roundRect">
+            <a:avLst>
+              <a:gd name="adj" fmla="val 3077"/>
+            </a:avLst>
+          </a:prstGeom>
+          <a:solidFill>
+            <a:srgbClr val="F7F8FC"/>
+          </a:solidFill>
+          <a:ln w="9525">
+            <a:solidFill>
+              <a:srgbClr val="D9DCE8"/>
+            </a:solidFill>
+            <a:prstDash val="solid"/>
+          </a:ln>
+        </p:spPr>
+      </p:sp>
+      <p:sp>
+        <p:nvSpPr>
+          <p:cNvPr id="13" name="Shape 10"/>
+          <p:cNvSpPr/>
+          <p:nvPr/>
+        </p:nvSpPr>
+        <p:spPr>
+          <a:xfrm>
+            <a:off x="3520440" y="1417320"/>
+            <a:ext cx="548640" cy="548640"/>
+          </a:xfrm>
+          <a:prstGeom prst="ellipse">
+            <a:avLst/>
+          </a:prstGeom>
+          <a:solidFill>
+            <a:srgbClr val="2D39B9"/>
+          </a:solidFill>
+          <a:ln w="12700">
+            <a:solidFill>
+              <a:srgbClr val="2D39B9"/>
+            </a:solidFill>
+            <a:prstDash val="solid"/>
+          </a:ln>
+        </p:spPr>
+      </p:sp>
+      <p:pic>
+        <p:nvPicPr>
+          <p:cNvPr id="14" name="Image 1" descr="icons/download-white.png">    </p:cNvPr>
+          <p:cNvPicPr>
+            <a:picLocks noChangeAspect="1"/>
+          </p:cNvPicPr>
+          <p:nvPr/>
+        </p:nvPicPr>
+        <p:blipFill>
+          <a:blip r:embed="rId2"/>
+          <a:stretch>
+            <a:fillRect/>
+          </a:stretch>
+        </p:blipFill>
+        <p:spPr>
+          <a:xfrm>
+            <a:off x="3652114" y="1548994"/>
+            <a:ext cx="285293" cy="285293"/>
+          </a:xfrm>
+          <a:prstGeom prst="rect">
+            <a:avLst/>
+          </a:prstGeom>
+        </p:spPr>
+      </p:pic>
+      <p:sp>
+        <p:nvSpPr>
+          <p:cNvPr id="15" name="Text 11"/>
+          <p:cNvSpPr txBox="1"/>
+          <p:nvPr/>
+        </p:nvSpPr>
+        <p:spPr>
+          <a:xfrm>
+            <a:off x="5303520" y="1325880"/>
+            <a:ext cx="457200" cy="548640"/>
+          </a:xfrm>
+          <a:prstGeom prst="rect">
+            <a:avLst/>
+          </a:prstGeom>
+          <a:noFill/>
+          <a:ln/>
+        </p:spPr>
+        <p:txBody>
+          <a:bodyPr wrap="square" lIns="0" tIns="0" rIns="0" bIns="0" rtlCol="0" anchor="ctr"/>
+          <a:lstStyle/>
+          <a:p>
+            <a:pPr algn="r" indent="0" marL="0">
+              <a:buNone/>
+            </a:pPr>
+            <a:r>
+              <a:rPr lang="en-US" sz="3000" b="1" dirty="0">
+                <a:solidFill>
+                  <a:srgbClr val="EEF0FB"/>
+                </a:solidFill>
+                <a:latin typeface="Cambria" pitchFamily="34" charset="0"/>
+                <a:ea typeface="Cambria" pitchFamily="34" charset="-122"/>
+                <a:cs typeface="Cambria" pitchFamily="34" charset="-120"/>
+              </a:rPr>
+              <a:t>2</a:t>
+            </a:r>
+            <a:endParaRPr lang="en-US" sz="3000" dirty="0"/>
+          </a:p>
+        </p:txBody>
+      </p:sp>
+      <p:sp>
+        <p:nvSpPr>
+          <p:cNvPr id="16" name="Text 12"/>
+          <p:cNvSpPr txBox="1"/>
+          <p:nvPr/>
+        </p:nvSpPr>
+        <p:spPr>
+          <a:xfrm>
+            <a:off x="3520440" y="2103120"/>
+            <a:ext cx="2194560" cy="365760"/>
+          </a:xfrm>
+          <a:prstGeom prst="rect">
+            <a:avLst/>
+          </a:prstGeom>
+          <a:noFill/>
+          <a:ln/>
+        </p:spPr>
+        <p:txBody>
+          <a:bodyPr wrap="square" lIns="0" tIns="0" rIns="0" bIns="0" rtlCol="0" anchor="t"/>
+          <a:lstStyle/>
+          <a:p>
+            <a:pPr indent="0" marL="0">
+              <a:buNone/>
+            </a:pPr>
+            <a:r>
+              <a:rPr lang="en-US" sz="1600" b="1" dirty="0">
+                <a:solidFill>
+                  <a:srgbClr val="1B1F3B"/>
+                </a:solidFill>
+                <a:latin typeface="Calibri" pitchFamily="34" charset="0"/>
+                <a:ea typeface="Calibri" pitchFamily="34" charset="-122"/>
+                <a:cs typeface="Calibri" pitchFamily="34" charset="-120"/>
+              </a:rPr>
+              <a:t>Instalar</a:t>
+            </a:r>
+            <a:endParaRPr lang="en-US" sz="1600" dirty="0"/>
+          </a:p>
+        </p:txBody>
+      </p:sp>
+      <p:sp>
+        <p:nvSpPr>
+          <p:cNvPr id="17" name="Text 13"/>
+          <p:cNvSpPr txBox="1"/>
+          <p:nvPr/>
+        </p:nvSpPr>
+        <p:spPr>
+          <a:xfrm>
+            <a:off x="3520440" y="2514600"/>
+            <a:ext cx="2194560" cy="1005840"/>
+          </a:xfrm>
+          <a:prstGeom prst="rect">
+            <a:avLst/>
+          </a:prstGeom>
+          <a:noFill/>
+          <a:ln/>
+        </p:spPr>
+        <p:txBody>
+          <a:bodyPr wrap="square" lIns="0" tIns="0" rIns="0" bIns="0" rtlCol="0" anchor="t"/>
+          <a:lstStyle/>
+          <a:p>
+            <a:pPr indent="0" marL="0">
+              <a:buNone/>
+            </a:pPr>
+            <a:r>
+              <a:rPr lang="en-US" sz="1100" dirty="0">
+                <a:solidFill>
+                  <a:srgbClr val="5B6180"/>
+                </a:solidFill>
+                <a:latin typeface="Calibri" pitchFamily="34" charset="0"/>
+                <a:ea typeface="Calibri" pitchFamily="34" charset="-122"/>
+                <a:cs typeface="Calibri" pitchFamily="34" charset="-120"/>
+              </a:rPr>
+              <a:t>Clique em «Instalar» (computador/Android) ou Partilhar → Adicionar ao ecrã principal (iPhone/iPad).</a:t>
+            </a:r>
+            <a:endParaRPr lang="en-US" sz="1100" dirty="0"/>
+          </a:p>
+        </p:txBody>
+      </p:sp>
+      <p:sp>
+        <p:nvSpPr>
+          <p:cNvPr id="18" name="Shape 14"/>
+          <p:cNvSpPr/>
+          <p:nvPr/>
+        </p:nvSpPr>
+        <p:spPr>
+          <a:xfrm>
+            <a:off x="6126480" y="1188720"/>
+            <a:ext cx="2651760" cy="2377440"/>
+          </a:xfrm>
+          <a:prstGeom prst="roundRect">
+            <a:avLst>
+              <a:gd name="adj" fmla="val 3077"/>
+            </a:avLst>
+          </a:prstGeom>
+          <a:solidFill>
+            <a:srgbClr val="F7F8FC"/>
+          </a:solidFill>
+          <a:ln w="9525">
+            <a:solidFill>
+              <a:srgbClr val="D9DCE8"/>
+            </a:solidFill>
+            <a:prstDash val="solid"/>
+          </a:ln>
+        </p:spPr>
+      </p:sp>
+      <p:sp>
+        <p:nvSpPr>
+          <p:cNvPr id="19" name="Shape 15"/>
+          <p:cNvSpPr/>
+          <p:nvPr/>
+        </p:nvSpPr>
+        <p:spPr>
+          <a:xfrm>
+            <a:off x="6355080" y="1417320"/>
+            <a:ext cx="548640" cy="548640"/>
+          </a:xfrm>
+          <a:prstGeom prst="ellipse">
+            <a:avLst/>
+          </a:prstGeom>
+          <a:solidFill>
+            <a:srgbClr val="2D39B9"/>
+          </a:solidFill>
+          <a:ln w="12700">
+            <a:solidFill>
+              <a:srgbClr val="2D39B9"/>
+            </a:solidFill>
+            <a:prstDash val="solid"/>
+          </a:ln>
+        </p:spPr>
+      </p:sp>
+      <p:pic>
+        <p:nvPicPr>
+          <p:cNvPr id="20" name="Image 2" descr="icons/sparkles-white.png">    </p:cNvPr>
+          <p:cNvPicPr>
+            <a:picLocks noChangeAspect="1"/>
+          </p:cNvPicPr>
+          <p:nvPr/>
+        </p:nvPicPr>
+        <p:blipFill>
+          <a:blip r:embed="rId3"/>
+          <a:stretch>
+            <a:fillRect/>
+          </a:stretch>
+        </p:blipFill>
+        <p:spPr>
+          <a:xfrm>
+            <a:off x="6486754" y="1548994"/>
+            <a:ext cx="285293" cy="285293"/>
+          </a:xfrm>
+          <a:prstGeom prst="rect">
+            <a:avLst/>
+          </a:prstGeom>
+        </p:spPr>
+      </p:pic>
+      <p:sp>
+        <p:nvSpPr>
+          <p:cNvPr id="21" name="Text 16"/>
+          <p:cNvSpPr txBox="1"/>
+          <p:nvPr/>
+        </p:nvSpPr>
+        <p:spPr>
+          <a:xfrm>
+            <a:off x="8138160" y="1325880"/>
+            <a:ext cx="457200" cy="548640"/>
+          </a:xfrm>
+          <a:prstGeom prst="rect">
+            <a:avLst/>
+          </a:prstGeom>
+          <a:noFill/>
+          <a:ln/>
+        </p:spPr>
+        <p:txBody>
+          <a:bodyPr wrap="square" lIns="0" tIns="0" rIns="0" bIns="0" rtlCol="0" anchor="ctr"/>
+          <a:lstStyle/>
+          <a:p>
+            <a:pPr algn="r" indent="0" marL="0">
+              <a:buNone/>
+            </a:pPr>
+            <a:r>
+              <a:rPr lang="en-US" sz="3000" b="1" dirty="0">
+                <a:solidFill>
+                  <a:srgbClr val="EEF0FB"/>
+                </a:solidFill>
+                <a:latin typeface="Cambria" pitchFamily="34" charset="0"/>
+                <a:ea typeface="Cambria" pitchFamily="34" charset="-122"/>
+                <a:cs typeface="Cambria" pitchFamily="34" charset="-120"/>
+              </a:rPr>
+              <a:t>3</a:t>
+            </a:r>
+            <a:endParaRPr lang="en-US" sz="3000" dirty="0"/>
+          </a:p>
+        </p:txBody>
+      </p:sp>
+      <p:sp>
+        <p:nvSpPr>
+          <p:cNvPr id="22" name="Text 17"/>
+          <p:cNvSpPr txBox="1"/>
+          <p:nvPr/>
+        </p:nvSpPr>
+        <p:spPr>
+          <a:xfrm>
+            <a:off x="6355080" y="2103120"/>
+            <a:ext cx="2194560" cy="365760"/>
+          </a:xfrm>
+          <a:prstGeom prst="rect">
+            <a:avLst/>
+          </a:prstGeom>
+          <a:noFill/>
+          <a:ln/>
+        </p:spPr>
+        <p:txBody>
+          <a:bodyPr wrap="square" lIns="0" tIns="0" rIns="0" bIns="0" rtlCol="0" anchor="t"/>
+          <a:lstStyle/>
+          <a:p>
+            <a:pPr indent="0" marL="0">
+              <a:buNone/>
+            </a:pPr>
+            <a:r>
+              <a:rPr lang="en-US" sz="1600" b="1" dirty="0">
+                <a:solidFill>
+                  <a:srgbClr val="1B1F3B"/>
+                </a:solidFill>
+                <a:latin typeface="Calibri" pitchFamily="34" charset="0"/>
+                <a:ea typeface="Calibri" pitchFamily="34" charset="-122"/>
+                <a:cs typeface="Calibri" pitchFamily="34" charset="-120"/>
+              </a:rPr>
+              <a:t>Explorar</a:t>
+            </a:r>
+            <a:endParaRPr lang="en-US" sz="1600" dirty="0"/>
+          </a:p>
+        </p:txBody>
+      </p:sp>
+      <p:sp>
+        <p:nvSpPr>
+          <p:cNvPr id="23" name="Text 18"/>
+          <p:cNvSpPr txBox="1"/>
+          <p:nvPr/>
+        </p:nvSpPr>
+        <p:spPr>
+          <a:xfrm>
+            <a:off x="6355080" y="2514600"/>
+            <a:ext cx="2194560" cy="1005840"/>
+          </a:xfrm>
+          <a:prstGeom prst="rect">
+            <a:avLst/>
+          </a:prstGeom>
+          <a:noFill/>
+          <a:ln/>
+        </p:spPr>
+        <p:txBody>
+          <a:bodyPr wrap="square" lIns="0" tIns="0" rIns="0" bIns="0" rtlCol="0" anchor="t"/>
+          <a:lstStyle/>
+          <a:p>
+            <a:pPr indent="0" marL="0">
+              <a:buNone/>
+            </a:pPr>
+            <a:r>
+              <a:rPr lang="en-US" sz="1100" dirty="0">
+                <a:solidFill>
+                  <a:srgbClr val="5B6180"/>
+                </a:solidFill>
+                <a:latin typeface="Calibri" pitchFamily="34" charset="0"/>
+                <a:ea typeface="Calibri" pitchFamily="34" charset="-122"/>
+                <a:cs typeface="Calibri" pitchFamily="34" charset="-120"/>
+              </a:rPr>
+              <a:t>Escolha «Explorar com dados fictícios» e percorra um dossier de demonstração; remova-os quando quiser.</a:t>
+            </a:r>
+            <a:endParaRPr lang="en-US" sz="1100" dirty="0"/>
+          </a:p>
+        </p:txBody>
+      </p:sp>
+      <p:sp>
+        <p:nvSpPr>
+          <p:cNvPr id="24" name="Shape 19"/>
+          <p:cNvSpPr/>
+          <p:nvPr/>
+        </p:nvSpPr>
+        <p:spPr>
+          <a:xfrm>
+            <a:off x="457200" y="3794760"/>
+            <a:ext cx="8229600" cy="685800"/>
+          </a:xfrm>
+          <a:prstGeom prst="roundRect">
+            <a:avLst>
+              <a:gd name="adj" fmla="val 10667"/>
+            </a:avLst>
+          </a:prstGeom>
+          <a:solidFill>
+            <a:srgbClr val="EEF0FB"/>
+          </a:solidFill>
+          <a:ln w="9525">
+            <a:solidFill>
+              <a:srgbClr val="EEF0FB"/>
+            </a:solidFill>
+            <a:prstDash val="solid"/>
+          </a:ln>
+        </p:spPr>
+      </p:sp>
+      <p:sp>
+        <p:nvSpPr>
+          <p:cNvPr id="25" name="Shape 20"/>
+          <p:cNvSpPr/>
+          <p:nvPr/>
+        </p:nvSpPr>
+        <p:spPr>
+          <a:xfrm>
+            <a:off x="640080" y="3904488"/>
+            <a:ext cx="457200" cy="457200"/>
+          </a:xfrm>
+          <a:prstGeom prst="ellipse">
+            <a:avLst/>
+          </a:prstGeom>
+          <a:solidFill>
+            <a:srgbClr val="2D39B9"/>
+          </a:solidFill>
+          <a:ln w="12700">
+            <a:solidFill>
+              <a:srgbClr val="2D39B9"/>
+            </a:solidFill>
+            <a:prstDash val="solid"/>
+          </a:ln>
+        </p:spPr>
+      </p:sp>
+      <p:pic>
+        <p:nvPicPr>
+          <p:cNvPr id="26" name="Image 3" descr="icons/book-open-white.png">    </p:cNvPr>
+          <p:cNvPicPr>
+            <a:picLocks noChangeAspect="1"/>
+          </p:cNvPicPr>
+          <p:nvPr/>
+        </p:nvPicPr>
+        <p:blipFill>
+          <a:blip r:embed="rId4"/>
+          <a:stretch>
+            <a:fillRect/>
+          </a:stretch>
+        </p:blipFill>
+        <p:spPr>
+          <a:xfrm>
+            <a:off x="749808" y="4014216"/>
+            <a:ext cx="237744" cy="237744"/>
+          </a:xfrm>
+          <a:prstGeom prst="rect">
+            <a:avLst/>
+          </a:prstGeom>
+        </p:spPr>
+      </p:pic>
+      <p:sp>
+        <p:nvSpPr>
+          <p:cNvPr id="27" name="Text 21"/>
+          <p:cNvSpPr txBox="1"/>
+          <p:nvPr/>
+        </p:nvSpPr>
+        <p:spPr>
+          <a:xfrm>
+            <a:off x="1234440" y="3931920"/>
+            <a:ext cx="7315200" cy="502920"/>
+          </a:xfrm>
+          <a:prstGeom prst="rect">
+            <a:avLst/>
+          </a:prstGeom>
+          <a:noFill/>
+          <a:ln/>
+        </p:spPr>
+        <p:txBody>
+          <a:bodyPr wrap="square" lIns="0" tIns="0" rIns="0" bIns="0" rtlCol="0" anchor="t"/>
+          <a:lstStyle/>
+          <a:p>
+            <a:pPr indent="0" marL="0">
+              <a:buNone/>
+            </a:pPr>
+            <a:r>
+              <a:rPr lang="en-US" sz="1100" dirty="0">
+                <a:solidFill>
+                  <a:srgbClr val="1B1F3B"/>
+                </a:solidFill>
+                <a:latin typeface="Calibri" pitchFamily="34" charset="0"/>
+                <a:ea typeface="Calibri" pitchFamily="34" charset="-122"/>
+                <a:cs typeface="Calibri" pitchFamily="34" charset="-120"/>
+              </a:rPr>
+              <a:t>Manual do utilizador (Word e PDF, 18 capítulos e 7 anexos) e resumo executivo — na pasta docs/ do projeto: github.com/nelsonsous/balcao-sucessoes.</a:t>
+            </a:r>
+            <a:endParaRPr lang="en-US" sz="1100" dirty="0"/>
+          </a:p>
+        </p:txBody>
+      </p:sp>
+    </p:spTree>
+  </p:cSld>
+  <p:clrMapOvr>
+    <a:masterClrMapping/>
+  </p:clrMapOvr>
+</p:sld>
+</file>
+
+<file path=ppt/slides/slide24.xml><?xml version="1.0" encoding="utf-8"?>
+<p:sld xmlns:a="http://schemas.openxmlformats.org/drawingml/2006/main" xmlns:r="http://schemas.openxmlformats.org/officeDocument/2006/relationships" xmlns:p="http://schemas.openxmlformats.org/presentationml/2006/main">
+  <p:cSld name="Slide 24">
+    <p:bg>
+      <p:bgPr>
+        <a:solidFill>
           <a:srgbClr val="121A36"/>
         </a:solidFill>
       </p:bgPr>
@@ -13934,7 +16070,7 @@
                 <a:ea typeface="Cambria" pitchFamily="34" charset="-122"/>
                 <a:cs typeface="Cambria" pitchFamily="34" charset="-120"/>
               </a:rPr>
-              <a:t>Cada sucessão organizada em nove separadores</a:t>
+              <a:t>Cada sucessão organizada em dez separadores</a:t>
             </a:r>
             <a:endParaRPr lang="en-US" sz="2800" dirty="0"/>
           </a:p>
@@ -14085,11 +16221,11 @@
         <p:spPr>
           <a:xfrm>
             <a:off x="6080760" y="1115568"/>
-            <a:ext cx="2651760" cy="301752"/>
+            <a:ext cx="2651760" cy="283464"/>
           </a:xfrm>
           <a:prstGeom prst="roundRect">
             <a:avLst>
-              <a:gd name="adj" fmla="val 18182"/>
+              <a:gd name="adj" fmla="val 19355"/>
             </a:avLst>
           </a:prstGeom>
           <a:solidFill>
@@ -14112,7 +16248,7 @@
         <p:spPr>
           <a:xfrm>
             <a:off x="6172200" y="1115568"/>
-            <a:ext cx="2468880" cy="301752"/>
+            <a:ext cx="2468880" cy="283464"/>
           </a:xfrm>
           <a:prstGeom prst="rect">
             <a:avLst/>
@@ -14150,12 +16286,12 @@
         </p:nvSpPr>
         <p:spPr>
           <a:xfrm>
-            <a:off x="6080760" y="1481328"/>
-            <a:ext cx="2651760" cy="301752"/>
+            <a:off x="6080760" y="1453896"/>
+            <a:ext cx="2651760" cy="283464"/>
           </a:xfrm>
           <a:prstGeom prst="roundRect">
             <a:avLst>
-              <a:gd name="adj" fmla="val 18182"/>
+              <a:gd name="adj" fmla="val 19355"/>
             </a:avLst>
           </a:prstGeom>
           <a:solidFill>
@@ -14177,8 +16313,8 @@
         </p:nvSpPr>
         <p:spPr>
           <a:xfrm>
-            <a:off x="6172200" y="1481328"/>
-            <a:ext cx="2468880" cy="301752"/>
+            <a:off x="6172200" y="1453896"/>
+            <a:ext cx="2468880" cy="283464"/>
           </a:xfrm>
           <a:prstGeom prst="rect">
             <a:avLst/>
@@ -14216,12 +16352,12 @@
         </p:nvSpPr>
         <p:spPr>
           <a:xfrm>
-            <a:off x="6080760" y="1847088"/>
-            <a:ext cx="2651760" cy="301752"/>
+            <a:off x="6080760" y="1792224"/>
+            <a:ext cx="2651760" cy="283464"/>
           </a:xfrm>
           <a:prstGeom prst="roundRect">
             <a:avLst>
-              <a:gd name="adj" fmla="val 18182"/>
+              <a:gd name="adj" fmla="val 19355"/>
             </a:avLst>
           </a:prstGeom>
           <a:solidFill>
@@ -14243,8 +16379,8 @@
         </p:nvSpPr>
         <p:spPr>
           <a:xfrm>
-            <a:off x="6172200" y="1847088"/>
-            <a:ext cx="2468880" cy="301752"/>
+            <a:off x="6172200" y="1792224"/>
+            <a:ext cx="2468880" cy="283464"/>
           </a:xfrm>
           <a:prstGeom prst="rect">
             <a:avLst/>
@@ -14282,12 +16418,12 @@
         </p:nvSpPr>
         <p:spPr>
           <a:xfrm>
-            <a:off x="6080760" y="2212848"/>
-            <a:ext cx="2651760" cy="301752"/>
+            <a:off x="6080760" y="2130552"/>
+            <a:ext cx="2651760" cy="283464"/>
           </a:xfrm>
           <a:prstGeom prst="roundRect">
             <a:avLst>
-              <a:gd name="adj" fmla="val 18182"/>
+              <a:gd name="adj" fmla="val 19355"/>
             </a:avLst>
           </a:prstGeom>
           <a:solidFill>
@@ -14309,8 +16445,8 @@
         </p:nvSpPr>
         <p:spPr>
           <a:xfrm>
-            <a:off x="6172200" y="2212848"/>
-            <a:ext cx="2468880" cy="301752"/>
+            <a:off x="6172200" y="2130552"/>
+            <a:ext cx="2468880" cy="283464"/>
           </a:xfrm>
           <a:prstGeom prst="rect">
             <a:avLst/>
@@ -14348,12 +16484,12 @@
         </p:nvSpPr>
         <p:spPr>
           <a:xfrm>
-            <a:off x="6080760" y="2578608"/>
-            <a:ext cx="2651760" cy="301752"/>
+            <a:off x="6080760" y="2468880"/>
+            <a:ext cx="2651760" cy="283464"/>
           </a:xfrm>
           <a:prstGeom prst="roundRect">
             <a:avLst>
-              <a:gd name="adj" fmla="val 18182"/>
+              <a:gd name="adj" fmla="val 19355"/>
             </a:avLst>
           </a:prstGeom>
           <a:solidFill>
@@ -14375,8 +16511,8 @@
         </p:nvSpPr>
         <p:spPr>
           <a:xfrm>
-            <a:off x="6172200" y="2578608"/>
-            <a:ext cx="2468880" cy="301752"/>
+            <a:off x="6172200" y="2468880"/>
+            <a:ext cx="2468880" cy="283464"/>
           </a:xfrm>
           <a:prstGeom prst="rect">
             <a:avLst/>
@@ -14414,12 +16550,12 @@
         </p:nvSpPr>
         <p:spPr>
           <a:xfrm>
-            <a:off x="6080760" y="2944368"/>
-            <a:ext cx="2651760" cy="301752"/>
+            <a:off x="6080760" y="2807208"/>
+            <a:ext cx="2651760" cy="283464"/>
           </a:xfrm>
           <a:prstGeom prst="roundRect">
             <a:avLst>
-              <a:gd name="adj" fmla="val 18182"/>
+              <a:gd name="adj" fmla="val 19355"/>
             </a:avLst>
           </a:prstGeom>
           <a:solidFill>
@@ -14441,8 +16577,8 @@
         </p:nvSpPr>
         <p:spPr>
           <a:xfrm>
-            <a:off x="6172200" y="2944368"/>
-            <a:ext cx="2468880" cy="301752"/>
+            <a:off x="6172200" y="2807208"/>
+            <a:ext cx="2468880" cy="283464"/>
           </a:xfrm>
           <a:prstGeom prst="rect">
             <a:avLst/>
@@ -14466,7 +16602,7 @@
                 <a:ea typeface="Calibri" pitchFamily="34" charset="-122"/>
                 <a:cs typeface="Calibri" pitchFamily="34" charset="-120"/>
               </a:rPr>
-              <a:t>Agenda</a:t>
+              <a:t>Internacional</a:t>
             </a:r>
             <a:endParaRPr lang="en-US" sz="1100" dirty="0"/>
           </a:p>
@@ -14480,12 +16616,12 @@
         </p:nvSpPr>
         <p:spPr>
           <a:xfrm>
-            <a:off x="6080760" y="3310128"/>
-            <a:ext cx="2651760" cy="301752"/>
+            <a:off x="6080760" y="3145536"/>
+            <a:ext cx="2651760" cy="283464"/>
           </a:xfrm>
           <a:prstGeom prst="roundRect">
             <a:avLst>
-              <a:gd name="adj" fmla="val 18182"/>
+              <a:gd name="adj" fmla="val 19355"/>
             </a:avLst>
           </a:prstGeom>
           <a:solidFill>
@@ -14507,8 +16643,8 @@
         </p:nvSpPr>
         <p:spPr>
           <a:xfrm>
-            <a:off x="6172200" y="3310128"/>
-            <a:ext cx="2468880" cy="301752"/>
+            <a:off x="6172200" y="3145536"/>
+            <a:ext cx="2468880" cy="283464"/>
           </a:xfrm>
           <a:prstGeom prst="rect">
             <a:avLst/>
@@ -14532,7 +16668,7 @@
                 <a:ea typeface="Calibri" pitchFamily="34" charset="-122"/>
                 <a:cs typeface="Calibri" pitchFamily="34" charset="-120"/>
               </a:rPr>
-              <a:t>Notas &amp; contactos</a:t>
+              <a:t>Agenda</a:t>
             </a:r>
             <a:endParaRPr lang="en-US" sz="1100" dirty="0"/>
           </a:p>
@@ -14546,12 +16682,12 @@
         </p:nvSpPr>
         <p:spPr>
           <a:xfrm>
-            <a:off x="6080760" y="3675888"/>
-            <a:ext cx="2651760" cy="301752"/>
+            <a:off x="6080760" y="3483864"/>
+            <a:ext cx="2651760" cy="283464"/>
           </a:xfrm>
           <a:prstGeom prst="roundRect">
             <a:avLst>
-              <a:gd name="adj" fmla="val 18182"/>
+              <a:gd name="adj" fmla="val 19355"/>
             </a:avLst>
           </a:prstGeom>
           <a:solidFill>
@@ -14573,8 +16709,8 @@
         </p:nvSpPr>
         <p:spPr>
           <a:xfrm>
-            <a:off x="6172200" y="3675888"/>
-            <a:ext cx="2468880" cy="301752"/>
+            <a:off x="6172200" y="3483864"/>
+            <a:ext cx="2468880" cy="283464"/>
           </a:xfrm>
           <a:prstGeom prst="rect">
             <a:avLst/>
@@ -14598,7 +16734,7 @@
                 <a:ea typeface="Calibri" pitchFamily="34" charset="-122"/>
                 <a:cs typeface="Calibri" pitchFamily="34" charset="-120"/>
               </a:rPr>
-              <a:t>Questionário</a:t>
+              <a:t>Notas &amp; contactos</a:t>
             </a:r>
             <a:endParaRPr lang="en-US" sz="1100" dirty="0"/>
           </a:p>
@@ -14612,12 +16748,12 @@
         </p:nvSpPr>
         <p:spPr>
           <a:xfrm>
-            <a:off x="6080760" y="4041648"/>
-            <a:ext cx="2651760" cy="301752"/>
+            <a:off x="6080760" y="3822192"/>
+            <a:ext cx="2651760" cy="283464"/>
           </a:xfrm>
           <a:prstGeom prst="roundRect">
             <a:avLst>
-              <a:gd name="adj" fmla="val 18182"/>
+              <a:gd name="adj" fmla="val 19355"/>
             </a:avLst>
           </a:prstGeom>
           <a:solidFill>
@@ -14639,8 +16775,74 @@
         </p:nvSpPr>
         <p:spPr>
           <a:xfrm>
-            <a:off x="6172200" y="4041648"/>
-            <a:ext cx="2468880" cy="301752"/>
+            <a:off x="6172200" y="3822192"/>
+            <a:ext cx="2468880" cy="283464"/>
+          </a:xfrm>
+          <a:prstGeom prst="rect">
+            <a:avLst/>
+          </a:prstGeom>
+          <a:noFill/>
+          <a:ln/>
+        </p:spPr>
+        <p:txBody>
+          <a:bodyPr wrap="square" lIns="0" tIns="0" rIns="0" bIns="0" rtlCol="0" anchor="ctr"/>
+          <a:lstStyle/>
+          <a:p>
+            <a:pPr indent="0" marL="0">
+              <a:buNone/>
+            </a:pPr>
+            <a:r>
+              <a:rPr lang="en-US" sz="1100" b="1" dirty="0">
+                <a:solidFill>
+                  <a:srgbClr val="2D39B9"/>
+                </a:solidFill>
+                <a:latin typeface="Calibri" pitchFamily="34" charset="0"/>
+                <a:ea typeface="Calibri" pitchFamily="34" charset="-122"/>
+                <a:cs typeface="Calibri" pitchFamily="34" charset="-120"/>
+              </a:rPr>
+              <a:t>Questionário</a:t>
+            </a:r>
+            <a:endParaRPr lang="en-US" sz="1100" dirty="0"/>
+          </a:p>
+        </p:txBody>
+      </p:sp>
+      <p:sp>
+        <p:nvSpPr>
+          <p:cNvPr id="26" name="Shape 23"/>
+          <p:cNvSpPr/>
+          <p:nvPr/>
+        </p:nvSpPr>
+        <p:spPr>
+          <a:xfrm>
+            <a:off x="6080760" y="4160520"/>
+            <a:ext cx="2651760" cy="283464"/>
+          </a:xfrm>
+          <a:prstGeom prst="roundRect">
+            <a:avLst>
+              <a:gd name="adj" fmla="val 19355"/>
+            </a:avLst>
+          </a:prstGeom>
+          <a:solidFill>
+            <a:srgbClr val="EEF0FB"/>
+          </a:solidFill>
+          <a:ln w="12700">
+            <a:solidFill>
+              <a:srgbClr val="EEF0FB"/>
+            </a:solidFill>
+            <a:prstDash val="solid"/>
+          </a:ln>
+        </p:spPr>
+      </p:sp>
+      <p:sp>
+        <p:nvSpPr>
+          <p:cNvPr id="27" name="Text 24"/>
+          <p:cNvSpPr txBox="1"/>
+          <p:nvPr/>
+        </p:nvSpPr>
+        <p:spPr>
+          <a:xfrm>
+            <a:off x="6172200" y="4160520"/>
+            <a:ext cx="2468880" cy="283464"/>
           </a:xfrm>
           <a:prstGeom prst="rect">
             <a:avLst/>

--- a/docs/Balcao-das-Sucessoes-Apresentacao.pptx
+++ b/docs/Balcao-das-Sucessoes-Apresentacao.pptx
@@ -29,9 +29,14 @@
     <p:sldId id="277" r:id="rId23"/>
     <p:sldId id="278" r:id="rId24"/>
     <p:sldId id="279" r:id="rId25"/>
+    <p:sldId id="280" r:id="rId26"/>
+    <p:sldId id="281" r:id="rId27"/>
+    <p:sldId id="282" r:id="rId28"/>
+    <p:sldId id="283" r:id="rId29"/>
+    <p:sldId id="284" r:id="rId30"/>
   </p:sldIdLst>
   <p:notesMasterIdLst>
-    <p:notesMasterId r:id="rId26"/>
+    <p:notesMasterId r:id="rId31"/>
   </p:notesMasterIdLst>
   <p:sldSz cx="9144000" cy="5143500"/>
   <p:notesSz cx="5143500" cy="9144000"/>
@@ -1581,7 +1586,7 @@
           <a:p>
             <a:r>
               <a:rPr lang="en-US" dirty="0"/>
-              <a:t>24 perguntas, 55 regras, 72 modelos de tarefa, 13 minutas em três línguas, prazos de referência em 16 países, 94 testes unitários e 10 passos ponta a ponta em cada publicação, 0 violações de acessibilidade (axe-core, WCAG 2.2 AA) em 16 ecrãs.</a:t>
+              <a:t>Novidades da versão 2.1 (1/5): a calculadora de prazos aplica as regras gerais do CC e do CPC; a partilha por ficheiro cifrado permite trabalhar o mesmo dossier em dois dispositivos sem servidor.</a:t>
             </a:r>
             <a:endParaRPr lang="en-US" dirty="0"/>
           </a:p>
@@ -1669,7 +1674,7 @@
           <a:p>
             <a:r>
               <a:rPr lang="en-US" dirty="0"/>
-              <a:t>Stack moderna e aberta. A publicação é automática e só acontece com os testes a passar.</a:t>
+              <a:t>Novidades da versão 2.1 (2/5): sem servidor, mas com cópias automáticas para a pasta do escritório e receção de ficheiros a partir do telemóvel.</a:t>
             </a:r>
             <a:endParaRPr lang="en-US" dirty="0"/>
           </a:p>
@@ -1757,7 +1762,7 @@
           <a:p>
             <a:r>
               <a:rPr lang="en-US" dirty="0"/>
-              <a:t>Dez ciclos entregues em sequência, cada um publicado com testes a passar.</a:t>
+              <a:t>Novidades da versão 2.1 (3/5): segurança operacional — enganos desfazem-se e nada se apaga de imediato.</a:t>
             </a:r>
             <a:endParaRPr lang="en-US" dirty="0"/>
           </a:p>
@@ -1845,7 +1850,7 @@
           <a:p>
             <a:r>
               <a:rPr lang="en-US" dirty="0"/>
-              <a:t>Convite a experimentar: abrir, instalar, explorar com dados fictícios. O manual acompanha a apresentação.</a:t>
+              <a:t>Novidades da versão 2.1 (4/5): indicadores de gestão interna calculados no dispositivo, com tabela alternativa em cada gráfico.</a:t>
             </a:r>
             <a:endParaRPr lang="en-US" dirty="0"/>
           </a:p>
@@ -1933,7 +1938,7 @@
           <a:p>
             <a:r>
               <a:rPr lang="en-US" dirty="0"/>
-              <a:t>Fecho e convite às perguntas.</a:t>
+              <a:t>Novidades da versão 2.1 (5/5): encontrar depressa o que interessa e tratar documentos em lote, com pedidos por interessado.</a:t>
             </a:r>
             <a:endParaRPr lang="en-US" dirty="0"/>
           </a:p>
@@ -1957,6 +1962,446 @@
             <a:fld id="{F7021451-1387-4CA6-816F-3879F97B5CBC}" type="slidenum">
               <a:rPr lang="en-US"/>
               <a:t>24</a:t>
+            </a:fld>
+            <a:endParaRPr lang="en-US"/>
+          </a:p>
+        </p:txBody>
+      </p:sp>
+    </p:spTree>
+    <p:extLst>
+      <p:ext uri="{BB962C8B-B14F-4D97-AF65-F5344CB8AC3E}">
+        <p14:creationId xmlns:p14="http://schemas.microsoft.com/office/powerpoint/2010/main" val="1024086991"/>
+      </p:ext>
+    </p:extLst>
+  </p:cSld>
+  <p:clrMapOvr>
+    <a:masterClrMapping/>
+  </p:clrMapOvr>
+</p:notes>
+</file>
+
+<file path=ppt/notesSlides/notesSlide25.xml><?xml version="1.0" encoding="utf-8"?>
+<p:notes xmlns:a="http://schemas.openxmlformats.org/drawingml/2006/main" xmlns:r="http://schemas.openxmlformats.org/officeDocument/2006/relationships" xmlns:p="http://schemas.openxmlformats.org/presentationml/2006/main">
+  <p:cSld>
+    <p:spTree>
+      <p:nvGrpSpPr>
+        <p:cNvPr id="1" name=""/>
+        <p:cNvGrpSpPr/>
+        <p:nvPr/>
+      </p:nvGrpSpPr>
+      <p:grpSpPr>
+        <a:xfrm>
+          <a:off x="0" y="0"/>
+          <a:ext cx="0" cy="0"/>
+          <a:chOff x="0" y="0"/>
+          <a:chExt cx="0" cy="0"/>
+        </a:xfrm>
+      </p:grpSpPr>
+      <p:sp>
+        <p:nvSpPr>
+          <p:cNvPr id="2" name="Slide Image Placeholder 1"/>
+          <p:cNvSpPr>
+            <a:spLocks noGrp="1" noRot="1" noChangeAspect="1"/>
+          </p:cNvSpPr>
+          <p:nvPr>
+            <p:ph type="sldImg"/>
+          </p:nvPr>
+        </p:nvSpPr>
+        <p:spPr/>
+      </p:sp>
+      <p:sp>
+        <p:nvSpPr>
+          <p:cNvPr id="3" name="Notes Placeholder 2"/>
+          <p:cNvSpPr>
+            <a:spLocks noGrp="1"/>
+          </p:cNvSpPr>
+          <p:nvPr>
+            <p:ph type="body" idx="1"/>
+          </p:nvPr>
+        </p:nvSpPr>
+        <p:spPr/>
+        <p:txBody>
+          <a:bodyPr/>
+          <a:lstStyle/>
+          <a:p>
+            <a:r>
+              <a:rPr lang="en-US" dirty="0"/>
+              <a:t>27 perguntas, 59 regras, 80 modelos de tarefa, 13 minutas em três línguas, prazos de referência em 16 países, 212 testes e 16 passos ponta a ponta em cada publicação, 0 violações de acessibilidade em 23 ecrãs (axe-core, WCAG 2.2 AA) em 16 ecrãs.</a:t>
+            </a:r>
+            <a:endParaRPr lang="en-US" dirty="0"/>
+          </a:p>
+        </p:txBody>
+      </p:sp>
+      <p:sp>
+        <p:nvSpPr>
+          <p:cNvPr id="4" name="Slide Number Placeholder 3"/>
+          <p:cNvSpPr>
+            <a:spLocks noGrp="1"/>
+          </p:cNvSpPr>
+          <p:nvPr>
+            <p:ph type="sldNum" sz="quarter" idx="10"/>
+          </p:nvPr>
+        </p:nvSpPr>
+        <p:spPr/>
+        <p:txBody>
+          <a:bodyPr/>
+          <a:lstStyle/>
+          <a:p>
+            <a:fld id="{F7021451-1387-4CA6-816F-3879F97B5CBC}" type="slidenum">
+              <a:rPr lang="en-US"/>
+              <a:t>25</a:t>
+            </a:fld>
+            <a:endParaRPr lang="en-US"/>
+          </a:p>
+        </p:txBody>
+      </p:sp>
+    </p:spTree>
+    <p:extLst>
+      <p:ext uri="{BB962C8B-B14F-4D97-AF65-F5344CB8AC3E}">
+        <p14:creationId xmlns:p14="http://schemas.microsoft.com/office/powerpoint/2010/main" val="1024086991"/>
+      </p:ext>
+    </p:extLst>
+  </p:cSld>
+  <p:clrMapOvr>
+    <a:masterClrMapping/>
+  </p:clrMapOvr>
+</p:notes>
+</file>
+
+<file path=ppt/notesSlides/notesSlide26.xml><?xml version="1.0" encoding="utf-8"?>
+<p:notes xmlns:a="http://schemas.openxmlformats.org/drawingml/2006/main" xmlns:r="http://schemas.openxmlformats.org/officeDocument/2006/relationships" xmlns:p="http://schemas.openxmlformats.org/presentationml/2006/main">
+  <p:cSld>
+    <p:spTree>
+      <p:nvGrpSpPr>
+        <p:cNvPr id="1" name=""/>
+        <p:cNvGrpSpPr/>
+        <p:nvPr/>
+      </p:nvGrpSpPr>
+      <p:grpSpPr>
+        <a:xfrm>
+          <a:off x="0" y="0"/>
+          <a:ext cx="0" cy="0"/>
+          <a:chOff x="0" y="0"/>
+          <a:chExt cx="0" cy="0"/>
+        </a:xfrm>
+      </p:grpSpPr>
+      <p:sp>
+        <p:nvSpPr>
+          <p:cNvPr id="2" name="Slide Image Placeholder 1"/>
+          <p:cNvSpPr>
+            <a:spLocks noGrp="1" noRot="1" noChangeAspect="1"/>
+          </p:cNvSpPr>
+          <p:nvPr>
+            <p:ph type="sldImg"/>
+          </p:nvPr>
+        </p:nvSpPr>
+        <p:spPr/>
+      </p:sp>
+      <p:sp>
+        <p:nvSpPr>
+          <p:cNvPr id="3" name="Notes Placeholder 2"/>
+          <p:cNvSpPr>
+            <a:spLocks noGrp="1"/>
+          </p:cNvSpPr>
+          <p:nvPr>
+            <p:ph type="body" idx="1"/>
+          </p:nvPr>
+        </p:nvSpPr>
+        <p:spPr/>
+        <p:txBody>
+          <a:bodyPr/>
+          <a:lstStyle/>
+          <a:p>
+            <a:r>
+              <a:rPr lang="en-US" dirty="0"/>
+              <a:t>Stack moderna e aberta. A publicação é automática e só acontece com os testes a passar.</a:t>
+            </a:r>
+            <a:endParaRPr lang="en-US" dirty="0"/>
+          </a:p>
+        </p:txBody>
+      </p:sp>
+      <p:sp>
+        <p:nvSpPr>
+          <p:cNvPr id="4" name="Slide Number Placeholder 3"/>
+          <p:cNvSpPr>
+            <a:spLocks noGrp="1"/>
+          </p:cNvSpPr>
+          <p:nvPr>
+            <p:ph type="sldNum" sz="quarter" idx="10"/>
+          </p:nvPr>
+        </p:nvSpPr>
+        <p:spPr/>
+        <p:txBody>
+          <a:bodyPr/>
+          <a:lstStyle/>
+          <a:p>
+            <a:fld id="{F7021451-1387-4CA6-816F-3879F97B5CBC}" type="slidenum">
+              <a:rPr lang="en-US"/>
+              <a:t>26</a:t>
+            </a:fld>
+            <a:endParaRPr lang="en-US"/>
+          </a:p>
+        </p:txBody>
+      </p:sp>
+    </p:spTree>
+    <p:extLst>
+      <p:ext uri="{BB962C8B-B14F-4D97-AF65-F5344CB8AC3E}">
+        <p14:creationId xmlns:p14="http://schemas.microsoft.com/office/powerpoint/2010/main" val="1024086991"/>
+      </p:ext>
+    </p:extLst>
+  </p:cSld>
+  <p:clrMapOvr>
+    <a:masterClrMapping/>
+  </p:clrMapOvr>
+</p:notes>
+</file>
+
+<file path=ppt/notesSlides/notesSlide27.xml><?xml version="1.0" encoding="utf-8"?>
+<p:notes xmlns:a="http://schemas.openxmlformats.org/drawingml/2006/main" xmlns:r="http://schemas.openxmlformats.org/officeDocument/2006/relationships" xmlns:p="http://schemas.openxmlformats.org/presentationml/2006/main">
+  <p:cSld>
+    <p:spTree>
+      <p:nvGrpSpPr>
+        <p:cNvPr id="1" name=""/>
+        <p:cNvGrpSpPr/>
+        <p:nvPr/>
+      </p:nvGrpSpPr>
+      <p:grpSpPr>
+        <a:xfrm>
+          <a:off x="0" y="0"/>
+          <a:ext cx="0" cy="0"/>
+          <a:chOff x="0" y="0"/>
+          <a:chExt cx="0" cy="0"/>
+        </a:xfrm>
+      </p:grpSpPr>
+      <p:sp>
+        <p:nvSpPr>
+          <p:cNvPr id="2" name="Slide Image Placeholder 1"/>
+          <p:cNvSpPr>
+            <a:spLocks noGrp="1" noRot="1" noChangeAspect="1"/>
+          </p:cNvSpPr>
+          <p:nvPr>
+            <p:ph type="sldImg"/>
+          </p:nvPr>
+        </p:nvSpPr>
+        <p:spPr/>
+      </p:sp>
+      <p:sp>
+        <p:nvSpPr>
+          <p:cNvPr id="3" name="Notes Placeholder 2"/>
+          <p:cNvSpPr>
+            <a:spLocks noGrp="1"/>
+          </p:cNvSpPr>
+          <p:nvPr>
+            <p:ph type="body" idx="1"/>
+          </p:nvPr>
+        </p:nvSpPr>
+        <p:spPr/>
+        <p:txBody>
+          <a:bodyPr/>
+          <a:lstStyle/>
+          <a:p>
+            <a:r>
+              <a:rPr lang="en-US" dirty="0"/>
+              <a:t>Vinte ciclos entregues em sequência (dois ciclos de dez), cada um publicado com testes a passar.</a:t>
+            </a:r>
+            <a:endParaRPr lang="en-US" dirty="0"/>
+          </a:p>
+        </p:txBody>
+      </p:sp>
+      <p:sp>
+        <p:nvSpPr>
+          <p:cNvPr id="4" name="Slide Number Placeholder 3"/>
+          <p:cNvSpPr>
+            <a:spLocks noGrp="1"/>
+          </p:cNvSpPr>
+          <p:nvPr>
+            <p:ph type="sldNum" sz="quarter" idx="10"/>
+          </p:nvPr>
+        </p:nvSpPr>
+        <p:spPr/>
+        <p:txBody>
+          <a:bodyPr/>
+          <a:lstStyle/>
+          <a:p>
+            <a:fld id="{F7021451-1387-4CA6-816F-3879F97B5CBC}" type="slidenum">
+              <a:rPr lang="en-US"/>
+              <a:t>27</a:t>
+            </a:fld>
+            <a:endParaRPr lang="en-US"/>
+          </a:p>
+        </p:txBody>
+      </p:sp>
+    </p:spTree>
+    <p:extLst>
+      <p:ext uri="{BB962C8B-B14F-4D97-AF65-F5344CB8AC3E}">
+        <p14:creationId xmlns:p14="http://schemas.microsoft.com/office/powerpoint/2010/main" val="1024086991"/>
+      </p:ext>
+    </p:extLst>
+  </p:cSld>
+  <p:clrMapOvr>
+    <a:masterClrMapping/>
+  </p:clrMapOvr>
+</p:notes>
+</file>
+
+<file path=ppt/notesSlides/notesSlide28.xml><?xml version="1.0" encoding="utf-8"?>
+<p:notes xmlns:a="http://schemas.openxmlformats.org/drawingml/2006/main" xmlns:r="http://schemas.openxmlformats.org/officeDocument/2006/relationships" xmlns:p="http://schemas.openxmlformats.org/presentationml/2006/main">
+  <p:cSld>
+    <p:spTree>
+      <p:nvGrpSpPr>
+        <p:cNvPr id="1" name=""/>
+        <p:cNvGrpSpPr/>
+        <p:nvPr/>
+      </p:nvGrpSpPr>
+      <p:grpSpPr>
+        <a:xfrm>
+          <a:off x="0" y="0"/>
+          <a:ext cx="0" cy="0"/>
+          <a:chOff x="0" y="0"/>
+          <a:chExt cx="0" cy="0"/>
+        </a:xfrm>
+      </p:grpSpPr>
+      <p:sp>
+        <p:nvSpPr>
+          <p:cNvPr id="2" name="Slide Image Placeholder 1"/>
+          <p:cNvSpPr>
+            <a:spLocks noGrp="1" noRot="1" noChangeAspect="1"/>
+          </p:cNvSpPr>
+          <p:nvPr>
+            <p:ph type="sldImg"/>
+          </p:nvPr>
+        </p:nvSpPr>
+        <p:spPr/>
+      </p:sp>
+      <p:sp>
+        <p:nvSpPr>
+          <p:cNvPr id="3" name="Notes Placeholder 2"/>
+          <p:cNvSpPr>
+            <a:spLocks noGrp="1"/>
+          </p:cNvSpPr>
+          <p:nvPr>
+            <p:ph type="body" idx="1"/>
+          </p:nvPr>
+        </p:nvSpPr>
+        <p:spPr/>
+        <p:txBody>
+          <a:bodyPr/>
+          <a:lstStyle/>
+          <a:p>
+            <a:r>
+              <a:rPr lang="en-US" dirty="0"/>
+              <a:t>Convite a experimentar: abrir, instalar, explorar com dados fictícios. O manual acompanha a apresentação.</a:t>
+            </a:r>
+            <a:endParaRPr lang="en-US" dirty="0"/>
+          </a:p>
+        </p:txBody>
+      </p:sp>
+      <p:sp>
+        <p:nvSpPr>
+          <p:cNvPr id="4" name="Slide Number Placeholder 3"/>
+          <p:cNvSpPr>
+            <a:spLocks noGrp="1"/>
+          </p:cNvSpPr>
+          <p:nvPr>
+            <p:ph type="sldNum" sz="quarter" idx="10"/>
+          </p:nvPr>
+        </p:nvSpPr>
+        <p:spPr/>
+        <p:txBody>
+          <a:bodyPr/>
+          <a:lstStyle/>
+          <a:p>
+            <a:fld id="{F7021451-1387-4CA6-816F-3879F97B5CBC}" type="slidenum">
+              <a:rPr lang="en-US"/>
+              <a:t>28</a:t>
+            </a:fld>
+            <a:endParaRPr lang="en-US"/>
+          </a:p>
+        </p:txBody>
+      </p:sp>
+    </p:spTree>
+    <p:extLst>
+      <p:ext uri="{BB962C8B-B14F-4D97-AF65-F5344CB8AC3E}">
+        <p14:creationId xmlns:p14="http://schemas.microsoft.com/office/powerpoint/2010/main" val="1024086991"/>
+      </p:ext>
+    </p:extLst>
+  </p:cSld>
+  <p:clrMapOvr>
+    <a:masterClrMapping/>
+  </p:clrMapOvr>
+</p:notes>
+</file>
+
+<file path=ppt/notesSlides/notesSlide29.xml><?xml version="1.0" encoding="utf-8"?>
+<p:notes xmlns:a="http://schemas.openxmlformats.org/drawingml/2006/main" xmlns:r="http://schemas.openxmlformats.org/officeDocument/2006/relationships" xmlns:p="http://schemas.openxmlformats.org/presentationml/2006/main">
+  <p:cSld>
+    <p:spTree>
+      <p:nvGrpSpPr>
+        <p:cNvPr id="1" name=""/>
+        <p:cNvGrpSpPr/>
+        <p:nvPr/>
+      </p:nvGrpSpPr>
+      <p:grpSpPr>
+        <a:xfrm>
+          <a:off x="0" y="0"/>
+          <a:ext cx="0" cy="0"/>
+          <a:chOff x="0" y="0"/>
+          <a:chExt cx="0" cy="0"/>
+        </a:xfrm>
+      </p:grpSpPr>
+      <p:sp>
+        <p:nvSpPr>
+          <p:cNvPr id="2" name="Slide Image Placeholder 1"/>
+          <p:cNvSpPr>
+            <a:spLocks noGrp="1" noRot="1" noChangeAspect="1"/>
+          </p:cNvSpPr>
+          <p:nvPr>
+            <p:ph type="sldImg"/>
+          </p:nvPr>
+        </p:nvSpPr>
+        <p:spPr/>
+      </p:sp>
+      <p:sp>
+        <p:nvSpPr>
+          <p:cNvPr id="3" name="Notes Placeholder 2"/>
+          <p:cNvSpPr>
+            <a:spLocks noGrp="1"/>
+          </p:cNvSpPr>
+          <p:nvPr>
+            <p:ph type="body" idx="1"/>
+          </p:nvPr>
+        </p:nvSpPr>
+        <p:spPr/>
+        <p:txBody>
+          <a:bodyPr/>
+          <a:lstStyle/>
+          <a:p>
+            <a:r>
+              <a:rPr lang="en-US" dirty="0"/>
+              <a:t>Fecho e convite às perguntas.</a:t>
+            </a:r>
+            <a:endParaRPr lang="en-US" dirty="0"/>
+          </a:p>
+        </p:txBody>
+      </p:sp>
+      <p:sp>
+        <p:nvSpPr>
+          <p:cNvPr id="4" name="Slide Number Placeholder 3"/>
+          <p:cNvSpPr>
+            <a:spLocks noGrp="1"/>
+          </p:cNvSpPr>
+          <p:nvPr>
+            <p:ph type="sldNum" sz="quarter" idx="10"/>
+          </p:nvPr>
+        </p:nvSpPr>
+        <p:spPr/>
+        <p:txBody>
+          <a:bodyPr/>
+          <a:lstStyle/>
+          <a:p>
+            <a:fld id="{F7021451-1387-4CA6-816F-3879F97B5CBC}" type="slidenum">
+              <a:rPr lang="en-US"/>
+              <a:t>29</a:t>
             </a:fld>
             <a:endParaRPr lang="en-US"/>
           </a:p>
@@ -3147,7 +3592,7 @@
                 <a:ea typeface="Calibri" pitchFamily="34" charset="-122"/>
                 <a:cs typeface="Calibri" pitchFamily="34" charset="-120"/>
               </a:rPr>
-              <a:t>Apresentação · versão completa · 17 de setembro de 2026</a:t>
+              <a:t>Apresentação · versão 2.1 · 17 de setembro de 2026</a:t>
             </a:r>
             <a:endParaRPr lang="en-US" sz="1000" dirty="0"/>
           </a:p>
@@ -8836,7 +9281,7 @@
                 <a:ea typeface="Calibri" pitchFamily="34" charset="-122"/>
                 <a:cs typeface="Calibri" pitchFamily="34" charset="-120"/>
               </a:rPr>
-              <a:t>EM NÚMEROS</a:t>
+              <a:t>NOVIDADES 2.1</a:t>
             </a:r>
             <a:endParaRPr lang="en-US" sz="1000" dirty="0"/>
           </a:p>
@@ -8875,7 +9320,7 @@
                 <a:ea typeface="Cambria" pitchFamily="34" charset="-122"/>
                 <a:cs typeface="Cambria" pitchFamily="34" charset="-120"/>
               </a:rPr>
-              <a:t>O que já está construído</a:t>
+              <a:t>Prazos certos e dossiers que viajam entre colegas</a:t>
             </a:r>
             <a:endParaRPr lang="en-US" sz="2800" dirty="0"/>
           </a:p>
@@ -8967,16 +9412,16 @@
         </p:nvSpPr>
         <p:spPr>
           <a:xfrm>
-            <a:off x="457200" y="1188720"/>
-            <a:ext cx="1920240" cy="1417320"/>
+            <a:off x="457200" y="1097280"/>
+            <a:ext cx="4023360" cy="2514600"/>
           </a:xfrm>
           <a:prstGeom prst="roundRect">
             <a:avLst>
-              <a:gd name="adj" fmla="val 5161"/>
+              <a:gd name="adj" fmla="val 3636"/>
             </a:avLst>
           </a:prstGeom>
           <a:solidFill>
-            <a:srgbClr val="F7F8FC"/>
+            <a:srgbClr val="FFFFFF"/>
           </a:solidFill>
           <a:ln w="9525">
             <a:solidFill>
@@ -8984,104 +9429,57 @@
             </a:solidFill>
             <a:prstDash val="solid"/>
           </a:ln>
-        </p:spPr>
-      </p:sp>
-      <p:sp>
-        <p:nvSpPr>
-          <p:cNvPr id="7" name="Text 5"/>
-          <p:cNvSpPr txBox="1"/>
-          <p:nvPr/>
-        </p:nvSpPr>
-        <p:spPr>
-          <a:xfrm>
-            <a:off x="457200" y="1325880"/>
-            <a:ext cx="1920240" cy="731520"/>
-          </a:xfrm>
-          <a:prstGeom prst="rect">
-            <a:avLst/>
-          </a:prstGeom>
-          <a:noFill/>
-          <a:ln/>
-        </p:spPr>
-        <p:txBody>
-          <a:bodyPr wrap="square" lIns="0" tIns="0" rIns="0" bIns="0" rtlCol="0" anchor="ctr"/>
-          <a:lstStyle/>
-          <a:p>
-            <a:pPr algn="ctr" indent="0" marL="0">
-              <a:buNone/>
-            </a:pPr>
-            <a:r>
-              <a:rPr lang="en-US" sz="4400" b="1" dirty="0">
-                <a:solidFill>
-                  <a:srgbClr val="2D39B9"/>
-                </a:solidFill>
-                <a:latin typeface="Cambria" pitchFamily="34" charset="0"/>
-                <a:ea typeface="Cambria" pitchFamily="34" charset="-122"/>
-                <a:cs typeface="Cambria" pitchFamily="34" charset="-120"/>
-              </a:rPr>
-              <a:t>24</a:t>
-            </a:r>
-            <a:endParaRPr lang="en-US" sz="4400" dirty="0"/>
-          </a:p>
-        </p:txBody>
-      </p:sp>
-      <p:sp>
-        <p:nvSpPr>
-          <p:cNvPr id="8" name="Text 6"/>
-          <p:cNvSpPr txBox="1"/>
-          <p:nvPr/>
-        </p:nvSpPr>
-        <p:spPr>
-          <a:xfrm>
-            <a:off x="457200" y="2057400"/>
-            <a:ext cx="1920240" cy="365760"/>
-          </a:xfrm>
-          <a:prstGeom prst="rect">
-            <a:avLst/>
-          </a:prstGeom>
-          <a:noFill/>
-          <a:ln/>
-        </p:spPr>
-        <p:txBody>
-          <a:bodyPr wrap="square" lIns="0" tIns="0" rIns="0" bIns="0" rtlCol="0" anchor="ctr"/>
-          <a:lstStyle/>
-          <a:p>
-            <a:pPr algn="ctr" indent="0" marL="0">
-              <a:buNone/>
-            </a:pPr>
-            <a:r>
-              <a:rPr lang="en-US" sz="1200" dirty="0">
-                <a:solidFill>
-                  <a:srgbClr val="5B6180"/>
-                </a:solidFill>
-                <a:latin typeface="Calibri" pitchFamily="34" charset="0"/>
-                <a:ea typeface="Calibri" pitchFamily="34" charset="-122"/>
-                <a:cs typeface="Calibri" pitchFamily="34" charset="-120"/>
-              </a:rPr>
-              <a:t>perguntas</a:t>
-            </a:r>
-            <a:endParaRPr lang="en-US" sz="1200" dirty="0"/>
-          </a:p>
-        </p:txBody>
-      </p:sp>
-      <p:sp>
-        <p:nvSpPr>
-          <p:cNvPr id="9" name="Shape 7"/>
+          <a:effectLst>
+            <a:outerShdw sx="100000" sy="100000" kx="0" ky="0" algn="bl" rotWithShape="0" blurRad="101600" dist="25400" dir="5400000">
+              <a:srgbClr val="000000">
+                <a:alpha val="16000"/>
+              </a:srgbClr>
+            </a:outerShdw>
+          </a:effectLst>
+        </p:spPr>
+      </p:sp>
+      <p:pic>
+        <p:nvPicPr>
+          <p:cNvPr id="7" name="Image 0" descr="img/41-prazos.jpg">    </p:cNvPr>
+          <p:cNvPicPr>
+            <a:picLocks noChangeAspect="1"/>
+          </p:cNvPicPr>
+          <p:nvPr/>
+        </p:nvPicPr>
+        <p:blipFill>
+          <a:blip r:embed="rId1"/>
+          <a:stretch>
+            <a:fillRect/>
+          </a:stretch>
+        </p:blipFill>
+        <p:spPr>
+          <a:xfrm>
+            <a:off x="521208" y="1161288"/>
+            <a:ext cx="3895344" cy="2386584"/>
+          </a:xfrm>
+          <a:prstGeom prst="rect">
+            <a:avLst/>
+          </a:prstGeom>
+        </p:spPr>
+      </p:pic>
+      <p:sp>
+        <p:nvSpPr>
+          <p:cNvPr id="8" name="Shape 5"/>
           <p:cNvSpPr/>
           <p:nvPr/>
         </p:nvSpPr>
         <p:spPr>
           <a:xfrm>
-            <a:off x="2560320" y="1188720"/>
-            <a:ext cx="1920240" cy="1417320"/>
+            <a:off x="4663440" y="1097280"/>
+            <a:ext cx="4023360" cy="2514600"/>
           </a:xfrm>
           <a:prstGeom prst="roundRect">
             <a:avLst>
-              <a:gd name="adj" fmla="val 5161"/>
+              <a:gd name="adj" fmla="val 3636"/>
             </a:avLst>
           </a:prstGeom>
           <a:solidFill>
-            <a:srgbClr val="F7F8FC"/>
+            <a:srgbClr val="FFFFFF"/>
           </a:solidFill>
           <a:ln w="9525">
             <a:solidFill>
@@ -9089,713 +9487,128 @@
             </a:solidFill>
             <a:prstDash val="solid"/>
           </a:ln>
-        </p:spPr>
-      </p:sp>
-      <p:sp>
-        <p:nvSpPr>
-          <p:cNvPr id="10" name="Text 8"/>
-          <p:cNvSpPr txBox="1"/>
-          <p:nvPr/>
-        </p:nvSpPr>
-        <p:spPr>
-          <a:xfrm>
-            <a:off x="2560320" y="1325880"/>
-            <a:ext cx="1920240" cy="731520"/>
-          </a:xfrm>
-          <a:prstGeom prst="rect">
-            <a:avLst/>
-          </a:prstGeom>
-          <a:noFill/>
-          <a:ln/>
-        </p:spPr>
-        <p:txBody>
-          <a:bodyPr wrap="square" lIns="0" tIns="0" rIns="0" bIns="0" rtlCol="0" anchor="ctr"/>
-          <a:lstStyle/>
-          <a:p>
-            <a:pPr algn="ctr" indent="0" marL="0">
-              <a:buNone/>
-            </a:pPr>
-            <a:r>
-              <a:rPr lang="en-US" sz="4400" b="1" dirty="0">
-                <a:solidFill>
-                  <a:srgbClr val="2D39B9"/>
-                </a:solidFill>
-                <a:latin typeface="Cambria" pitchFamily="34" charset="0"/>
-                <a:ea typeface="Cambria" pitchFamily="34" charset="-122"/>
-                <a:cs typeface="Cambria" pitchFamily="34" charset="-120"/>
-              </a:rPr>
-              <a:t>55</a:t>
-            </a:r>
-            <a:endParaRPr lang="en-US" sz="4400" dirty="0"/>
-          </a:p>
-        </p:txBody>
-      </p:sp>
-      <p:sp>
-        <p:nvSpPr>
-          <p:cNvPr id="11" name="Text 9"/>
-          <p:cNvSpPr txBox="1"/>
-          <p:nvPr/>
-        </p:nvSpPr>
-        <p:spPr>
-          <a:xfrm>
-            <a:off x="2560320" y="2057400"/>
-            <a:ext cx="1920240" cy="365760"/>
-          </a:xfrm>
-          <a:prstGeom prst="rect">
-            <a:avLst/>
-          </a:prstGeom>
-          <a:noFill/>
-          <a:ln/>
-        </p:spPr>
-        <p:txBody>
-          <a:bodyPr wrap="square" lIns="0" tIns="0" rIns="0" bIns="0" rtlCol="0" anchor="ctr"/>
-          <a:lstStyle/>
-          <a:p>
-            <a:pPr algn="ctr" indent="0" marL="0">
-              <a:buNone/>
-            </a:pPr>
-            <a:r>
-              <a:rPr lang="en-US" sz="1200" dirty="0">
-                <a:solidFill>
-                  <a:srgbClr val="5B6180"/>
-                </a:solidFill>
-                <a:latin typeface="Calibri" pitchFamily="34" charset="0"/>
-                <a:ea typeface="Calibri" pitchFamily="34" charset="-122"/>
-                <a:cs typeface="Calibri" pitchFamily="34" charset="-120"/>
-              </a:rPr>
-              <a:t>regras</a:t>
-            </a:r>
-            <a:endParaRPr lang="en-US" sz="1200" dirty="0"/>
-          </a:p>
-        </p:txBody>
-      </p:sp>
-      <p:sp>
-        <p:nvSpPr>
-          <p:cNvPr id="12" name="Shape 10"/>
-          <p:cNvSpPr/>
-          <p:nvPr/>
-        </p:nvSpPr>
-        <p:spPr>
-          <a:xfrm>
-            <a:off x="4663440" y="1188720"/>
-            <a:ext cx="1920240" cy="1417320"/>
-          </a:xfrm>
-          <a:prstGeom prst="roundRect">
-            <a:avLst>
-              <a:gd name="adj" fmla="val 5161"/>
-            </a:avLst>
-          </a:prstGeom>
-          <a:solidFill>
-            <a:srgbClr val="F7F8FC"/>
-          </a:solidFill>
-          <a:ln w="9525">
-            <a:solidFill>
-              <a:srgbClr val="D9DCE8"/>
-            </a:solidFill>
-            <a:prstDash val="solid"/>
-          </a:ln>
-        </p:spPr>
-      </p:sp>
-      <p:sp>
-        <p:nvSpPr>
-          <p:cNvPr id="13" name="Text 11"/>
-          <p:cNvSpPr txBox="1"/>
-          <p:nvPr/>
-        </p:nvSpPr>
-        <p:spPr>
-          <a:xfrm>
-            <a:off x="4663440" y="1325880"/>
-            <a:ext cx="1920240" cy="731520"/>
-          </a:xfrm>
-          <a:prstGeom prst="rect">
-            <a:avLst/>
-          </a:prstGeom>
-          <a:noFill/>
-          <a:ln/>
-        </p:spPr>
-        <p:txBody>
-          <a:bodyPr wrap="square" lIns="0" tIns="0" rIns="0" bIns="0" rtlCol="0" anchor="ctr"/>
-          <a:lstStyle/>
-          <a:p>
-            <a:pPr algn="ctr" indent="0" marL="0">
-              <a:buNone/>
-            </a:pPr>
-            <a:r>
-              <a:rPr lang="en-US" sz="4400" b="1" dirty="0">
-                <a:solidFill>
-                  <a:srgbClr val="2D39B9"/>
-                </a:solidFill>
-                <a:latin typeface="Cambria" pitchFamily="34" charset="0"/>
-                <a:ea typeface="Cambria" pitchFamily="34" charset="-122"/>
-                <a:cs typeface="Cambria" pitchFamily="34" charset="-120"/>
-              </a:rPr>
-              <a:t>72</a:t>
-            </a:r>
-            <a:endParaRPr lang="en-US" sz="4400" dirty="0"/>
-          </a:p>
-        </p:txBody>
-      </p:sp>
-      <p:sp>
-        <p:nvSpPr>
-          <p:cNvPr id="14" name="Text 12"/>
-          <p:cNvSpPr txBox="1"/>
-          <p:nvPr/>
-        </p:nvSpPr>
-        <p:spPr>
-          <a:xfrm>
-            <a:off x="4663440" y="2057400"/>
-            <a:ext cx="1920240" cy="365760"/>
-          </a:xfrm>
-          <a:prstGeom prst="rect">
-            <a:avLst/>
-          </a:prstGeom>
-          <a:noFill/>
-          <a:ln/>
-        </p:spPr>
-        <p:txBody>
-          <a:bodyPr wrap="square" lIns="0" tIns="0" rIns="0" bIns="0" rtlCol="0" anchor="ctr"/>
-          <a:lstStyle/>
-          <a:p>
-            <a:pPr algn="ctr" indent="0" marL="0">
-              <a:buNone/>
-            </a:pPr>
-            <a:r>
-              <a:rPr lang="en-US" sz="1200" dirty="0">
-                <a:solidFill>
-                  <a:srgbClr val="5B6180"/>
-                </a:solidFill>
-                <a:latin typeface="Calibri" pitchFamily="34" charset="0"/>
-                <a:ea typeface="Calibri" pitchFamily="34" charset="-122"/>
-                <a:cs typeface="Calibri" pitchFamily="34" charset="-120"/>
-              </a:rPr>
-              <a:t>tarefas</a:t>
-            </a:r>
-            <a:endParaRPr lang="en-US" sz="1200" dirty="0"/>
-          </a:p>
-        </p:txBody>
-      </p:sp>
-      <p:sp>
-        <p:nvSpPr>
-          <p:cNvPr id="15" name="Shape 13"/>
-          <p:cNvSpPr/>
-          <p:nvPr/>
-        </p:nvSpPr>
-        <p:spPr>
-          <a:xfrm>
-            <a:off x="6766560" y="1188720"/>
-            <a:ext cx="1920240" cy="1417320"/>
-          </a:xfrm>
-          <a:prstGeom prst="roundRect">
-            <a:avLst>
-              <a:gd name="adj" fmla="val 5161"/>
-            </a:avLst>
-          </a:prstGeom>
-          <a:solidFill>
-            <a:srgbClr val="F7F8FC"/>
-          </a:solidFill>
-          <a:ln w="9525">
-            <a:solidFill>
-              <a:srgbClr val="D9DCE8"/>
-            </a:solidFill>
-            <a:prstDash val="solid"/>
-          </a:ln>
-        </p:spPr>
-      </p:sp>
-      <p:sp>
-        <p:nvSpPr>
-          <p:cNvPr id="16" name="Text 14"/>
-          <p:cNvSpPr txBox="1"/>
-          <p:nvPr/>
-        </p:nvSpPr>
-        <p:spPr>
-          <a:xfrm>
-            <a:off x="6766560" y="1325880"/>
-            <a:ext cx="1920240" cy="731520"/>
-          </a:xfrm>
-          <a:prstGeom prst="rect">
-            <a:avLst/>
-          </a:prstGeom>
-          <a:noFill/>
-          <a:ln/>
-        </p:spPr>
-        <p:txBody>
-          <a:bodyPr wrap="square" lIns="0" tIns="0" rIns="0" bIns="0" rtlCol="0" anchor="ctr"/>
-          <a:lstStyle/>
-          <a:p>
-            <a:pPr algn="ctr" indent="0" marL="0">
-              <a:buNone/>
-            </a:pPr>
-            <a:r>
-              <a:rPr lang="en-US" sz="4400" b="1" dirty="0">
-                <a:solidFill>
-                  <a:srgbClr val="2D39B9"/>
-                </a:solidFill>
-                <a:latin typeface="Cambria" pitchFamily="34" charset="0"/>
-                <a:ea typeface="Cambria" pitchFamily="34" charset="-122"/>
-                <a:cs typeface="Cambria" pitchFamily="34" charset="-120"/>
-              </a:rPr>
-              <a:t>13</a:t>
-            </a:r>
-            <a:endParaRPr lang="en-US" sz="4400" dirty="0"/>
-          </a:p>
-        </p:txBody>
-      </p:sp>
-      <p:sp>
-        <p:nvSpPr>
-          <p:cNvPr id="17" name="Text 15"/>
-          <p:cNvSpPr txBox="1"/>
-          <p:nvPr/>
-        </p:nvSpPr>
-        <p:spPr>
-          <a:xfrm>
-            <a:off x="6766560" y="2057400"/>
-            <a:ext cx="1920240" cy="365760"/>
-          </a:xfrm>
-          <a:prstGeom prst="rect">
-            <a:avLst/>
-          </a:prstGeom>
-          <a:noFill/>
-          <a:ln/>
-        </p:spPr>
-        <p:txBody>
-          <a:bodyPr wrap="square" lIns="0" tIns="0" rIns="0" bIns="0" rtlCol="0" anchor="ctr"/>
-          <a:lstStyle/>
-          <a:p>
-            <a:pPr algn="ctr" indent="0" marL="0">
-              <a:buNone/>
-            </a:pPr>
-            <a:r>
-              <a:rPr lang="en-US" sz="1200" dirty="0">
-                <a:solidFill>
-                  <a:srgbClr val="5B6180"/>
-                </a:solidFill>
-                <a:latin typeface="Calibri" pitchFamily="34" charset="0"/>
-                <a:ea typeface="Calibri" pitchFamily="34" charset="-122"/>
-                <a:cs typeface="Calibri" pitchFamily="34" charset="-120"/>
-              </a:rPr>
-              <a:t>minutas</a:t>
-            </a:r>
-            <a:endParaRPr lang="en-US" sz="1200" dirty="0"/>
-          </a:p>
-        </p:txBody>
-      </p:sp>
-      <p:sp>
-        <p:nvSpPr>
-          <p:cNvPr id="18" name="Shape 16"/>
-          <p:cNvSpPr/>
-          <p:nvPr/>
-        </p:nvSpPr>
-        <p:spPr>
-          <a:xfrm>
-            <a:off x="457200" y="2834640"/>
-            <a:ext cx="1920240" cy="1417320"/>
-          </a:xfrm>
-          <a:prstGeom prst="roundRect">
-            <a:avLst>
-              <a:gd name="adj" fmla="val 5161"/>
-            </a:avLst>
-          </a:prstGeom>
-          <a:solidFill>
-            <a:srgbClr val="F7F8FC"/>
-          </a:solidFill>
-          <a:ln w="9525">
-            <a:solidFill>
-              <a:srgbClr val="D9DCE8"/>
-            </a:solidFill>
-            <a:prstDash val="solid"/>
-          </a:ln>
-        </p:spPr>
-      </p:sp>
-      <p:sp>
-        <p:nvSpPr>
-          <p:cNvPr id="19" name="Text 17"/>
-          <p:cNvSpPr txBox="1"/>
-          <p:nvPr/>
-        </p:nvSpPr>
-        <p:spPr>
-          <a:xfrm>
-            <a:off x="457200" y="2971800"/>
-            <a:ext cx="1920240" cy="731520"/>
-          </a:xfrm>
-          <a:prstGeom prst="rect">
-            <a:avLst/>
-          </a:prstGeom>
-          <a:noFill/>
-          <a:ln/>
-        </p:spPr>
-        <p:txBody>
-          <a:bodyPr wrap="square" lIns="0" tIns="0" rIns="0" bIns="0" rtlCol="0" anchor="ctr"/>
-          <a:lstStyle/>
-          <a:p>
-            <a:pPr algn="ctr" indent="0" marL="0">
-              <a:buNone/>
-            </a:pPr>
-            <a:r>
-              <a:rPr lang="en-US" sz="4400" b="1" dirty="0">
-                <a:solidFill>
-                  <a:srgbClr val="2D39B9"/>
-                </a:solidFill>
-                <a:latin typeface="Cambria" pitchFamily="34" charset="0"/>
-                <a:ea typeface="Cambria" pitchFamily="34" charset="-122"/>
-                <a:cs typeface="Cambria" pitchFamily="34" charset="-120"/>
-              </a:rPr>
-              <a:t>16</a:t>
-            </a:r>
-            <a:endParaRPr lang="en-US" sz="4400" dirty="0"/>
-          </a:p>
-        </p:txBody>
-      </p:sp>
-      <p:sp>
-        <p:nvSpPr>
-          <p:cNvPr id="20" name="Text 18"/>
-          <p:cNvSpPr txBox="1"/>
-          <p:nvPr/>
-        </p:nvSpPr>
-        <p:spPr>
-          <a:xfrm>
-            <a:off x="457200" y="3703320"/>
-            <a:ext cx="1920240" cy="365760"/>
-          </a:xfrm>
-          <a:prstGeom prst="rect">
-            <a:avLst/>
-          </a:prstGeom>
-          <a:noFill/>
-          <a:ln/>
-        </p:spPr>
-        <p:txBody>
-          <a:bodyPr wrap="square" lIns="0" tIns="0" rIns="0" bIns="0" rtlCol="0" anchor="ctr"/>
-          <a:lstStyle/>
-          <a:p>
-            <a:pPr algn="ctr" indent="0" marL="0">
-              <a:buNone/>
-            </a:pPr>
-            <a:r>
-              <a:rPr lang="en-US" sz="1200" dirty="0">
-                <a:solidFill>
-                  <a:srgbClr val="5B6180"/>
-                </a:solidFill>
-                <a:latin typeface="Calibri" pitchFamily="34" charset="0"/>
-                <a:ea typeface="Calibri" pitchFamily="34" charset="-122"/>
-                <a:cs typeface="Calibri" pitchFamily="34" charset="-120"/>
-              </a:rPr>
-              <a:t>países</a:t>
-            </a:r>
-            <a:endParaRPr lang="en-US" sz="1200" dirty="0"/>
-          </a:p>
-        </p:txBody>
-      </p:sp>
-      <p:sp>
-        <p:nvSpPr>
-          <p:cNvPr id="21" name="Shape 19"/>
-          <p:cNvSpPr/>
-          <p:nvPr/>
-        </p:nvSpPr>
-        <p:spPr>
-          <a:xfrm>
-            <a:off x="2560320" y="2834640"/>
-            <a:ext cx="1920240" cy="1417320"/>
-          </a:xfrm>
-          <a:prstGeom prst="roundRect">
-            <a:avLst>
-              <a:gd name="adj" fmla="val 5161"/>
-            </a:avLst>
-          </a:prstGeom>
-          <a:solidFill>
-            <a:srgbClr val="F7F8FC"/>
-          </a:solidFill>
-          <a:ln w="9525">
-            <a:solidFill>
-              <a:srgbClr val="D9DCE8"/>
-            </a:solidFill>
-            <a:prstDash val="solid"/>
-          </a:ln>
-        </p:spPr>
-      </p:sp>
-      <p:sp>
-        <p:nvSpPr>
-          <p:cNvPr id="22" name="Text 20"/>
-          <p:cNvSpPr txBox="1"/>
-          <p:nvPr/>
-        </p:nvSpPr>
-        <p:spPr>
-          <a:xfrm>
-            <a:off x="2560320" y="2971800"/>
-            <a:ext cx="1920240" cy="731520"/>
-          </a:xfrm>
-          <a:prstGeom prst="rect">
-            <a:avLst/>
-          </a:prstGeom>
-          <a:noFill/>
-          <a:ln/>
-        </p:spPr>
-        <p:txBody>
-          <a:bodyPr wrap="square" lIns="0" tIns="0" rIns="0" bIns="0" rtlCol="0" anchor="ctr"/>
-          <a:lstStyle/>
-          <a:p>
-            <a:pPr algn="ctr" indent="0" marL="0">
-              <a:buNone/>
-            </a:pPr>
-            <a:r>
-              <a:rPr lang="en-US" sz="4400" b="1" dirty="0">
-                <a:solidFill>
-                  <a:srgbClr val="2D39B9"/>
-                </a:solidFill>
-                <a:latin typeface="Cambria" pitchFamily="34" charset="0"/>
-                <a:ea typeface="Cambria" pitchFamily="34" charset="-122"/>
-                <a:cs typeface="Cambria" pitchFamily="34" charset="-120"/>
-              </a:rPr>
-              <a:t>94</a:t>
-            </a:r>
-            <a:endParaRPr lang="en-US" sz="4400" dirty="0"/>
-          </a:p>
-        </p:txBody>
-      </p:sp>
-      <p:sp>
-        <p:nvSpPr>
-          <p:cNvPr id="23" name="Text 21"/>
-          <p:cNvSpPr txBox="1"/>
-          <p:nvPr/>
-        </p:nvSpPr>
-        <p:spPr>
-          <a:xfrm>
-            <a:off x="2560320" y="3703320"/>
-            <a:ext cx="1920240" cy="365760"/>
-          </a:xfrm>
-          <a:prstGeom prst="rect">
-            <a:avLst/>
-          </a:prstGeom>
-          <a:noFill/>
-          <a:ln/>
-        </p:spPr>
-        <p:txBody>
-          <a:bodyPr wrap="square" lIns="0" tIns="0" rIns="0" bIns="0" rtlCol="0" anchor="ctr"/>
-          <a:lstStyle/>
-          <a:p>
-            <a:pPr algn="ctr" indent="0" marL="0">
-              <a:buNone/>
-            </a:pPr>
-            <a:r>
-              <a:rPr lang="en-US" sz="1200" dirty="0">
-                <a:solidFill>
-                  <a:srgbClr val="5B6180"/>
-                </a:solidFill>
-                <a:latin typeface="Calibri" pitchFamily="34" charset="0"/>
-                <a:ea typeface="Calibri" pitchFamily="34" charset="-122"/>
-                <a:cs typeface="Calibri" pitchFamily="34" charset="-120"/>
-              </a:rPr>
-              <a:t>testes</a:t>
-            </a:r>
-            <a:endParaRPr lang="en-US" sz="1200" dirty="0"/>
-          </a:p>
-        </p:txBody>
-      </p:sp>
-      <p:sp>
-        <p:nvSpPr>
-          <p:cNvPr id="24" name="Shape 22"/>
-          <p:cNvSpPr/>
-          <p:nvPr/>
-        </p:nvSpPr>
-        <p:spPr>
-          <a:xfrm>
-            <a:off x="4663440" y="2834640"/>
-            <a:ext cx="1920240" cy="1417320"/>
-          </a:xfrm>
-          <a:prstGeom prst="roundRect">
-            <a:avLst>
-              <a:gd name="adj" fmla="val 5161"/>
-            </a:avLst>
-          </a:prstGeom>
-          <a:solidFill>
-            <a:srgbClr val="F7F8FC"/>
-          </a:solidFill>
-          <a:ln w="9525">
-            <a:solidFill>
-              <a:srgbClr val="D9DCE8"/>
-            </a:solidFill>
-            <a:prstDash val="solid"/>
-          </a:ln>
-        </p:spPr>
-      </p:sp>
-      <p:sp>
-        <p:nvSpPr>
-          <p:cNvPr id="25" name="Text 23"/>
-          <p:cNvSpPr txBox="1"/>
-          <p:nvPr/>
-        </p:nvSpPr>
-        <p:spPr>
-          <a:xfrm>
-            <a:off x="4663440" y="2971800"/>
-            <a:ext cx="1920240" cy="731520"/>
-          </a:xfrm>
-          <a:prstGeom prst="rect">
-            <a:avLst/>
-          </a:prstGeom>
-          <a:noFill/>
-          <a:ln/>
-        </p:spPr>
-        <p:txBody>
-          <a:bodyPr wrap="square" lIns="0" tIns="0" rIns="0" bIns="0" rtlCol="0" anchor="ctr"/>
-          <a:lstStyle/>
-          <a:p>
-            <a:pPr algn="ctr" indent="0" marL="0">
-              <a:buNone/>
-            </a:pPr>
-            <a:r>
-              <a:rPr lang="en-US" sz="4400" b="1" dirty="0">
-                <a:solidFill>
-                  <a:srgbClr val="2D39B9"/>
-                </a:solidFill>
-                <a:latin typeface="Cambria" pitchFamily="34" charset="0"/>
-                <a:ea typeface="Cambria" pitchFamily="34" charset="-122"/>
-                <a:cs typeface="Cambria" pitchFamily="34" charset="-120"/>
-              </a:rPr>
-              <a:t>10</a:t>
-            </a:r>
-            <a:endParaRPr lang="en-US" sz="4400" dirty="0"/>
-          </a:p>
-        </p:txBody>
-      </p:sp>
-      <p:sp>
-        <p:nvSpPr>
-          <p:cNvPr id="26" name="Text 24"/>
-          <p:cNvSpPr txBox="1"/>
-          <p:nvPr/>
-        </p:nvSpPr>
-        <p:spPr>
-          <a:xfrm>
-            <a:off x="4663440" y="3703320"/>
-            <a:ext cx="1920240" cy="365760"/>
-          </a:xfrm>
-          <a:prstGeom prst="rect">
-            <a:avLst/>
-          </a:prstGeom>
-          <a:noFill/>
-          <a:ln/>
-        </p:spPr>
-        <p:txBody>
-          <a:bodyPr wrap="square" lIns="0" tIns="0" rIns="0" bIns="0" rtlCol="0" anchor="ctr"/>
-          <a:lstStyle/>
-          <a:p>
-            <a:pPr algn="ctr" indent="0" marL="0">
-              <a:buNone/>
-            </a:pPr>
-            <a:r>
-              <a:rPr lang="en-US" sz="1200" dirty="0">
-                <a:solidFill>
-                  <a:srgbClr val="5B6180"/>
-                </a:solidFill>
-                <a:latin typeface="Calibri" pitchFamily="34" charset="0"/>
-                <a:ea typeface="Calibri" pitchFamily="34" charset="-122"/>
-                <a:cs typeface="Calibri" pitchFamily="34" charset="-120"/>
-              </a:rPr>
-              <a:t>passos E2E</a:t>
-            </a:r>
-            <a:endParaRPr lang="en-US" sz="1200" dirty="0"/>
-          </a:p>
-        </p:txBody>
-      </p:sp>
-      <p:sp>
-        <p:nvSpPr>
-          <p:cNvPr id="27" name="Shape 25"/>
-          <p:cNvSpPr/>
-          <p:nvPr/>
-        </p:nvSpPr>
-        <p:spPr>
-          <a:xfrm>
-            <a:off x="6766560" y="2834640"/>
-            <a:ext cx="1920240" cy="1417320"/>
-          </a:xfrm>
-          <a:prstGeom prst="roundRect">
-            <a:avLst>
-              <a:gd name="adj" fmla="val 5161"/>
-            </a:avLst>
-          </a:prstGeom>
-          <a:solidFill>
-            <a:srgbClr val="F7F8FC"/>
-          </a:solidFill>
-          <a:ln w="9525">
-            <a:solidFill>
-              <a:srgbClr val="D9DCE8"/>
-            </a:solidFill>
-            <a:prstDash val="solid"/>
-          </a:ln>
-        </p:spPr>
-      </p:sp>
-      <p:sp>
-        <p:nvSpPr>
-          <p:cNvPr id="28" name="Text 26"/>
-          <p:cNvSpPr txBox="1"/>
-          <p:nvPr/>
-        </p:nvSpPr>
-        <p:spPr>
-          <a:xfrm>
-            <a:off x="6766560" y="2971800"/>
-            <a:ext cx="1920240" cy="731520"/>
-          </a:xfrm>
-          <a:prstGeom prst="rect">
-            <a:avLst/>
-          </a:prstGeom>
-          <a:noFill/>
-          <a:ln/>
-        </p:spPr>
-        <p:txBody>
-          <a:bodyPr wrap="square" lIns="0" tIns="0" rIns="0" bIns="0" rtlCol="0" anchor="ctr"/>
-          <a:lstStyle/>
-          <a:p>
-            <a:pPr algn="ctr" indent="0" marL="0">
-              <a:buNone/>
-            </a:pPr>
-            <a:r>
-              <a:rPr lang="en-US" sz="4400" b="1" dirty="0">
-                <a:solidFill>
-                  <a:srgbClr val="2D39B9"/>
-                </a:solidFill>
-                <a:latin typeface="Cambria" pitchFamily="34" charset="0"/>
-                <a:ea typeface="Cambria" pitchFamily="34" charset="-122"/>
-                <a:cs typeface="Cambria" pitchFamily="34" charset="-120"/>
-              </a:rPr>
-              <a:t>0</a:t>
-            </a:r>
-            <a:endParaRPr lang="en-US" sz="4400" dirty="0"/>
-          </a:p>
-        </p:txBody>
-      </p:sp>
-      <p:sp>
-        <p:nvSpPr>
-          <p:cNvPr id="29" name="Text 27"/>
-          <p:cNvSpPr txBox="1"/>
-          <p:nvPr/>
-        </p:nvSpPr>
-        <p:spPr>
-          <a:xfrm>
-            <a:off x="6766560" y="3703320"/>
-            <a:ext cx="1920240" cy="365760"/>
-          </a:xfrm>
-          <a:prstGeom prst="rect">
-            <a:avLst/>
-          </a:prstGeom>
-          <a:noFill/>
-          <a:ln/>
-        </p:spPr>
-        <p:txBody>
-          <a:bodyPr wrap="square" lIns="0" tIns="0" rIns="0" bIns="0" rtlCol="0" anchor="ctr"/>
-          <a:lstStyle/>
-          <a:p>
-            <a:pPr algn="ctr" indent="0" marL="0">
-              <a:buNone/>
-            </a:pPr>
-            <a:r>
-              <a:rPr lang="en-US" sz="1200" dirty="0">
-                <a:solidFill>
-                  <a:srgbClr val="5B6180"/>
-                </a:solidFill>
-                <a:latin typeface="Calibri" pitchFamily="34" charset="0"/>
-                <a:ea typeface="Calibri" pitchFamily="34" charset="-122"/>
-                <a:cs typeface="Calibri" pitchFamily="34" charset="-120"/>
-              </a:rPr>
-              <a:t>falhas WCAG</a:t>
-            </a:r>
-            <a:endParaRPr lang="en-US" sz="1200" dirty="0"/>
+          <a:effectLst>
+            <a:outerShdw sx="100000" sy="100000" kx="0" ky="0" algn="bl" rotWithShape="0" blurRad="101600" dist="25400" dir="5400000">
+              <a:srgbClr val="000000">
+                <a:alpha val="16000"/>
+              </a:srgbClr>
+            </a:outerShdw>
+          </a:effectLst>
+        </p:spPr>
+      </p:sp>
+      <p:pic>
+        <p:nvPicPr>
+          <p:cNvPr id="9" name="Image 1" descr="img/43-importar-dossier.jpg">    </p:cNvPr>
+          <p:cNvPicPr>
+            <a:picLocks noChangeAspect="1"/>
+          </p:cNvPicPr>
+          <p:nvPr/>
+        </p:nvPicPr>
+        <p:blipFill>
+          <a:blip r:embed="rId2"/>
+          <a:stretch>
+            <a:fillRect/>
+          </a:stretch>
+        </p:blipFill>
+        <p:spPr>
+          <a:xfrm>
+            <a:off x="4727448" y="1161288"/>
+            <a:ext cx="3895344" cy="2386584"/>
+          </a:xfrm>
+          <a:prstGeom prst="rect">
+            <a:avLst/>
+          </a:prstGeom>
+        </p:spPr>
+      </p:pic>
+      <p:sp>
+        <p:nvSpPr>
+          <p:cNvPr id="10" name="Text 6"/>
+          <p:cNvSpPr txBox="1"/>
+          <p:nvPr/>
+        </p:nvSpPr>
+        <p:spPr>
+          <a:xfrm>
+            <a:off x="457200" y="3749040"/>
+            <a:ext cx="8229600" cy="914400"/>
+          </a:xfrm>
+          <a:prstGeom prst="rect">
+            <a:avLst/>
+          </a:prstGeom>
+          <a:noFill/>
+          <a:ln/>
+        </p:spPr>
+        <p:txBody>
+          <a:bodyPr wrap="square" lIns="0" tIns="0" rIns="0" bIns="0" rtlCol="0" anchor="t"/>
+          <a:lstStyle/>
+          <a:p>
+            <a:pPr marL="177800" indent="-177800">
+              <a:buSzPct val="100000"/>
+              <a:buChar char="•"/>
+            </a:pPr>
+            <a:r>
+              <a:rPr lang="en-US" sz="1150" b="1" dirty="0">
+                <a:solidFill>
+                  <a:srgbClr val="1B1F3B"/>
+                </a:solidFill>
+                <a:latin typeface="Calibri" pitchFamily="34" charset="0"/>
+                <a:ea typeface="Calibri" pitchFamily="34" charset="-122"/>
+                <a:cs typeface="Calibri" pitchFamily="34" charset="-120"/>
+              </a:rPr>
+              <a:t>Calculadora de prazos: </a:t>
+            </a:r>
+            <a:pPr indent="0" marL="0">
+              <a:spcAft>
+                <a:spcPts val="400"/>
+              </a:spcAft>
+              <a:buNone/>
+            </a:pPr>
+            <a:r>
+              <a:rPr lang="en-US" sz="1150" dirty="0">
+                <a:solidFill>
+                  <a:srgbClr val="1B1F3B"/>
+                </a:solidFill>
+                <a:latin typeface="Calibri" pitchFamily="34" charset="0"/>
+                <a:ea typeface="Calibri" pitchFamily="34" charset="-122"/>
+                <a:cs typeface="Calibri" pitchFamily="34" charset="-120"/>
+              </a:rPr>
+              <a:t>dias corridos ou úteis, meses e anos, suspensão nas férias judiciais e transferência para o dia útil, com explicação passo a passo; agendar ou usar como prazo de uma tarefa.</a:t>
+            </a:r>
+            <a:endParaRPr lang="en-US" sz="1150" dirty="0"/>
+          </a:p>
+          <a:p>
+            <a:pPr marL="177800" indent="-177800">
+              <a:buSzPct val="100000"/>
+              <a:buChar char="•"/>
+            </a:pPr>
+            <a:r>
+              <a:rPr lang="en-US" sz="1150" b="1" dirty="0">
+                <a:solidFill>
+                  <a:srgbClr val="1B1F3B"/>
+                </a:solidFill>
+                <a:latin typeface="Calibri" pitchFamily="34" charset="0"/>
+                <a:ea typeface="Calibri" pitchFamily="34" charset="-122"/>
+                <a:cs typeface="Calibri" pitchFamily="34" charset="-120"/>
+              </a:rPr>
+              <a:t>Partilha entre colegas: </a:t>
+            </a:r>
+            <a:pPr indent="0" marL="0">
+              <a:spcAft>
+                <a:spcPts val="400"/>
+              </a:spcAft>
+              <a:buNone/>
+            </a:pPr>
+            <a:r>
+              <a:rPr lang="en-US" sz="1150" dirty="0">
+                <a:solidFill>
+                  <a:srgbClr val="1B1F3B"/>
+                </a:solidFill>
+                <a:latin typeface="Calibri" pitchFamily="34" charset="0"/>
+                <a:ea typeface="Calibri" pitchFamily="34" charset="-122"/>
+                <a:cs typeface="Calibri" pitchFamily="34" charset="-120"/>
+              </a:rPr>
+              <a:t>um dossier completo, com anexos, num ficheiro cifrado; importação com pré-visualização dos conflitos e quatro regras de junção — nada é apagado e tudo fica no histórico.</a:t>
+            </a:r>
+            <a:endParaRPr lang="en-US" sz="1150" dirty="0"/>
           </a:p>
         </p:txBody>
       </p:sp>
@@ -9864,7 +9677,7 @@
                 <a:ea typeface="Calibri" pitchFamily="34" charset="-122"/>
                 <a:cs typeface="Calibri" pitchFamily="34" charset="-120"/>
               </a:rPr>
-              <a:t>TECNOLOGIA E PUBLICAÇÃO</a:t>
+              <a:t>NOVIDADES 2.1</a:t>
             </a:r>
             <a:endParaRPr lang="en-US" sz="1000" dirty="0"/>
           </a:p>
@@ -9903,7 +9716,7 @@
                 <a:ea typeface="Cambria" pitchFamily="34" charset="-122"/>
                 <a:cs typeface="Cambria" pitchFamily="34" charset="-120"/>
               </a:rPr>
-              <a:t>Moderno, aberto e verificável</a:t>
+              <a:t>Cópias automáticas e Recebidos no telemóvel</a:t>
             </a:r>
             <a:endParaRPr lang="en-US" sz="2800" dirty="0"/>
           </a:p>
@@ -9995,12 +9808,12 @@
         </p:nvSpPr>
         <p:spPr>
           <a:xfrm>
-            <a:off x="457200" y="1143000"/>
-            <a:ext cx="4023360" cy="3429000"/>
+            <a:off x="457200" y="1097280"/>
+            <a:ext cx="4023360" cy="2514600"/>
           </a:xfrm>
           <a:prstGeom prst="roundRect">
             <a:avLst>
-              <a:gd name="adj" fmla="val 2133"/>
+              <a:gd name="adj" fmla="val 3636"/>
             </a:avLst>
           </a:prstGeom>
           <a:solidFill>
@@ -10012,36 +9825,18 @@
             </a:solidFill>
             <a:prstDash val="solid"/>
           </a:ln>
-        </p:spPr>
-      </p:sp>
-      <p:sp>
-        <p:nvSpPr>
-          <p:cNvPr id="7" name="Shape 5"/>
-          <p:cNvSpPr/>
-          <p:nvPr/>
-        </p:nvSpPr>
-        <p:spPr>
-          <a:xfrm>
-            <a:off x="685800" y="1325880"/>
-            <a:ext cx="457200" cy="457200"/>
-          </a:xfrm>
-          <a:prstGeom prst="ellipse">
-            <a:avLst/>
-          </a:prstGeom>
-          <a:solidFill>
-            <a:srgbClr val="2D39B9"/>
-          </a:solidFill>
-          <a:ln w="12700">
-            <a:solidFill>
-              <a:srgbClr val="2D39B9"/>
-            </a:solidFill>
-            <a:prstDash val="solid"/>
-          </a:ln>
+          <a:effectLst>
+            <a:outerShdw sx="100000" sy="100000" kx="0" ky="0" algn="bl" rotWithShape="0" blurRad="101600" dist="25400" dir="5400000">
+              <a:srgbClr val="000000">
+                <a:alpha val="16000"/>
+              </a:srgbClr>
+            </a:outerShdw>
+          </a:effectLst>
         </p:spPr>
       </p:sp>
       <p:pic>
         <p:nvPicPr>
-          <p:cNvPr id="8" name="Image 0" descr="icons/cpu-white.png">    </p:cNvPr>
+          <p:cNvPr id="7" name="Image 0" descr="img/44-copias-automaticas.jpg">    </p:cNvPr>
           <p:cNvPicPr>
             <a:picLocks noChangeAspect="1"/>
           </p:cNvPicPr>
@@ -10055,8 +9850,8 @@
         </p:blipFill>
         <p:spPr>
           <a:xfrm>
-            <a:off x="795528" y="1435608"/>
-            <a:ext cx="237744" cy="237744"/>
+            <a:off x="521208" y="1161288"/>
+            <a:ext cx="3895344" cy="2386584"/>
           </a:xfrm>
           <a:prstGeom prst="rect">
             <a:avLst/>
@@ -10065,184 +9860,18 @@
       </p:pic>
       <p:sp>
         <p:nvSpPr>
-          <p:cNvPr id="9" name="Text 6"/>
-          <p:cNvSpPr txBox="1"/>
-          <p:nvPr/>
-        </p:nvSpPr>
-        <p:spPr>
-          <a:xfrm>
-            <a:off x="1280160" y="1371600"/>
-            <a:ext cx="2743200" cy="365760"/>
-          </a:xfrm>
-          <a:prstGeom prst="rect">
-            <a:avLst/>
-          </a:prstGeom>
-          <a:noFill/>
-          <a:ln/>
-        </p:spPr>
-        <p:txBody>
-          <a:bodyPr wrap="square" lIns="0" tIns="0" rIns="0" bIns="0" rtlCol="0" anchor="t"/>
-          <a:lstStyle/>
-          <a:p>
-            <a:pPr indent="0" marL="0">
-              <a:buNone/>
-            </a:pPr>
-            <a:r>
-              <a:rPr lang="en-US" sz="1400" b="1" dirty="0">
-                <a:solidFill>
-                  <a:srgbClr val="1B1F3B"/>
-                </a:solidFill>
-                <a:latin typeface="Calibri" pitchFamily="34" charset="0"/>
-                <a:ea typeface="Calibri" pitchFamily="34" charset="-122"/>
-                <a:cs typeface="Calibri" pitchFamily="34" charset="-120"/>
-              </a:rPr>
-              <a:t>Plataforma</a:t>
-            </a:r>
-            <a:endParaRPr lang="en-US" sz="1400" dirty="0"/>
-          </a:p>
-        </p:txBody>
-      </p:sp>
-      <p:sp>
-        <p:nvSpPr>
-          <p:cNvPr id="10" name="Text 7"/>
-          <p:cNvSpPr txBox="1"/>
-          <p:nvPr/>
-        </p:nvSpPr>
-        <p:spPr>
-          <a:xfrm>
-            <a:off x="685800" y="1920240"/>
-            <a:ext cx="3566160" cy="2560320"/>
-          </a:xfrm>
-          <a:prstGeom prst="rect">
-            <a:avLst/>
-          </a:prstGeom>
-          <a:noFill/>
-          <a:ln/>
-        </p:spPr>
-        <p:txBody>
-          <a:bodyPr wrap="square" lIns="0" tIns="0" rIns="0" bIns="0" rtlCol="0" anchor="t"/>
-          <a:lstStyle/>
-          <a:p>
-            <a:pPr marL="177800" indent="-177800">
-              <a:spcAft>
-                <a:spcPts val="500"/>
-              </a:spcAft>
-              <a:buSzPct val="100000"/>
-              <a:buChar char="•"/>
-            </a:pPr>
-            <a:r>
-              <a:rPr lang="en-US" sz="1150" dirty="0">
-                <a:solidFill>
-                  <a:srgbClr val="1B1F3B"/>
-                </a:solidFill>
-                <a:latin typeface="Calibri" pitchFamily="34" charset="0"/>
-                <a:ea typeface="Calibri" pitchFamily="34" charset="-122"/>
-                <a:cs typeface="Calibri" pitchFamily="34" charset="-120"/>
-              </a:rPr>
-              <a:t>React 19 e TypeScript em modo estrito</a:t>
-            </a:r>
-            <a:endParaRPr lang="en-US" sz="1150" dirty="0"/>
-          </a:p>
-          <a:p>
-            <a:pPr marL="177800" indent="-177800">
-              <a:spcAft>
-                <a:spcPts val="500"/>
-              </a:spcAft>
-              <a:buSzPct val="100000"/>
-              <a:buChar char="•"/>
-            </a:pPr>
-            <a:r>
-              <a:rPr lang="en-US" sz="1150" dirty="0">
-                <a:solidFill>
-                  <a:srgbClr val="1B1F3B"/>
-                </a:solidFill>
-                <a:latin typeface="Calibri" pitchFamily="34" charset="0"/>
-                <a:ea typeface="Calibri" pitchFamily="34" charset="-122"/>
-                <a:cs typeface="Calibri" pitchFamily="34" charset="-120"/>
-              </a:rPr>
-              <a:t>Vite e Workbox (service worker, precache)</a:t>
-            </a:r>
-            <a:endParaRPr lang="en-US" sz="1150" dirty="0"/>
-          </a:p>
-          <a:p>
-            <a:pPr marL="177800" indent="-177800">
-              <a:spcAft>
-                <a:spcPts val="500"/>
-              </a:spcAft>
-              <a:buSzPct val="100000"/>
-              <a:buChar char="•"/>
-            </a:pPr>
-            <a:r>
-              <a:rPr lang="en-US" sz="1150" dirty="0">
-                <a:solidFill>
-                  <a:srgbClr val="1B1F3B"/>
-                </a:solidFill>
-                <a:latin typeface="Calibri" pitchFamily="34" charset="0"/>
-                <a:ea typeface="Calibri" pitchFamily="34" charset="-122"/>
-                <a:cs typeface="Calibri" pitchFamily="34" charset="-120"/>
-              </a:rPr>
-              <a:t>Dexie sobre IndexedDB (dados e anexos)</a:t>
-            </a:r>
-            <a:endParaRPr lang="en-US" sz="1150" dirty="0"/>
-          </a:p>
-          <a:p>
-            <a:pPr marL="177800" indent="-177800">
-              <a:spcAft>
-                <a:spcPts val="500"/>
-              </a:spcAft>
-              <a:buSzPct val="100000"/>
-              <a:buChar char="•"/>
-            </a:pPr>
-            <a:r>
-              <a:rPr lang="en-US" sz="1150" dirty="0">
-                <a:solidFill>
-                  <a:srgbClr val="1B1F3B"/>
-                </a:solidFill>
-                <a:latin typeface="Calibri" pitchFamily="34" charset="0"/>
-                <a:ea typeface="Calibri" pitchFamily="34" charset="-122"/>
-                <a:cs typeface="Calibri" pitchFamily="34" charset="-120"/>
-              </a:rPr>
-              <a:t>Motor de regras, calendário e calculadora testados (Vitest)</a:t>
-            </a:r>
-            <a:endParaRPr lang="en-US" sz="1150" dirty="0"/>
-          </a:p>
-          <a:p>
-            <a:pPr marL="177800" indent="-177800">
-              <a:spcAft>
-                <a:spcPts val="500"/>
-              </a:spcAft>
-              <a:buSzPct val="100000"/>
-              <a:buChar char="•"/>
-            </a:pPr>
-            <a:r>
-              <a:rPr lang="en-US" sz="1150" dirty="0">
-                <a:solidFill>
-                  <a:srgbClr val="1B1F3B"/>
-                </a:solidFill>
-                <a:latin typeface="Calibri" pitchFamily="34" charset="0"/>
-                <a:ea typeface="Calibri" pitchFamily="34" charset="-122"/>
-                <a:cs typeface="Calibri" pitchFamily="34" charset="-120"/>
-              </a:rPr>
-              <a:t>Minutas em Office Open XML; iCalendar RFC 5545</a:t>
-            </a:r>
-            <a:endParaRPr lang="en-US" sz="1150" dirty="0"/>
-          </a:p>
-        </p:txBody>
-      </p:sp>
-      <p:sp>
-        <p:nvSpPr>
-          <p:cNvPr id="11" name="Shape 8"/>
+          <p:cNvPr id="8" name="Shape 5"/>
           <p:cNvSpPr/>
           <p:nvPr/>
         </p:nvSpPr>
         <p:spPr>
           <a:xfrm>
-            <a:off x="4663440" y="1143000"/>
-            <a:ext cx="4023360" cy="3429000"/>
+            <a:off x="4663440" y="1097280"/>
+            <a:ext cx="4023360" cy="2514600"/>
           </a:xfrm>
           <a:prstGeom prst="roundRect">
             <a:avLst>
-              <a:gd name="adj" fmla="val 2133"/>
+              <a:gd name="adj" fmla="val 3636"/>
             </a:avLst>
           </a:prstGeom>
           <a:solidFill>
@@ -10254,36 +9883,18 @@
             </a:solidFill>
             <a:prstDash val="solid"/>
           </a:ln>
-        </p:spPr>
-      </p:sp>
-      <p:sp>
-        <p:nvSpPr>
-          <p:cNvPr id="12" name="Shape 9"/>
-          <p:cNvSpPr/>
-          <p:nvPr/>
-        </p:nvSpPr>
-        <p:spPr>
-          <a:xfrm>
-            <a:off x="4892040" y="1325880"/>
-            <a:ext cx="457200" cy="457200"/>
-          </a:xfrm>
-          <a:prstGeom prst="ellipse">
-            <a:avLst/>
-          </a:prstGeom>
-          <a:solidFill>
-            <a:srgbClr val="2D39B9"/>
-          </a:solidFill>
-          <a:ln w="12700">
-            <a:solidFill>
-              <a:srgbClr val="2D39B9"/>
-            </a:solidFill>
-            <a:prstDash val="solid"/>
-          </a:ln>
+          <a:effectLst>
+            <a:outerShdw sx="100000" sy="100000" kx="0" ky="0" algn="bl" rotWithShape="0" blurRad="101600" dist="25400" dir="5400000">
+              <a:srgbClr val="000000">
+                <a:alpha val="16000"/>
+              </a:srgbClr>
+            </a:outerShdw>
+          </a:effectLst>
         </p:spPr>
       </p:sp>
       <p:pic>
         <p:nvPicPr>
-          <p:cNvPr id="13" name="Image 1" descr="icons/rocket-white.png">    </p:cNvPr>
+          <p:cNvPr id="9" name="Image 1" descr="img/45-recebidos.jpg">    </p:cNvPr>
           <p:cNvPicPr>
             <a:picLocks noChangeAspect="1"/>
           </p:cNvPicPr>
@@ -10297,8 +9908,8 @@
         </p:blipFill>
         <p:spPr>
           <a:xfrm>
-            <a:off x="5001768" y="1435608"/>
-            <a:ext cx="237744" cy="237744"/>
+            <a:off x="4727448" y="1161288"/>
+            <a:ext cx="3895344" cy="2386584"/>
           </a:xfrm>
           <a:prstGeom prst="rect">
             <a:avLst/>
@@ -10307,14 +9918,14 @@
       </p:pic>
       <p:sp>
         <p:nvSpPr>
-          <p:cNvPr id="14" name="Text 10"/>
-          <p:cNvSpPr txBox="1"/>
-          <p:nvPr/>
-        </p:nvSpPr>
-        <p:spPr>
-          <a:xfrm>
-            <a:off x="5486400" y="1371600"/>
-            <a:ext cx="2743200" cy="365760"/>
+          <p:cNvPr id="10" name="Text 6"/>
+          <p:cNvSpPr txBox="1"/>
+          <p:nvPr/>
+        </p:nvSpPr>
+        <p:spPr>
+          <a:xfrm>
+            <a:off x="457200" y="3749040"/>
+            <a:ext cx="8229600" cy="914400"/>
           </a:xfrm>
           <a:prstGeom prst="rect">
             <a:avLst/>
@@ -10325,319 +9936,13 @@
         <p:txBody>
           <a:bodyPr wrap="square" lIns="0" tIns="0" rIns="0" bIns="0" rtlCol="0" anchor="t"/>
           <a:lstStyle/>
-          <a:p>
-            <a:pPr indent="0" marL="0">
-              <a:buNone/>
-            </a:pPr>
-            <a:r>
-              <a:rPr lang="en-US" sz="1400" b="1" dirty="0">
-                <a:solidFill>
-                  <a:srgbClr val="1B1F3B"/>
-                </a:solidFill>
-                <a:latin typeface="Calibri" pitchFamily="34" charset="0"/>
-                <a:ea typeface="Calibri" pitchFamily="34" charset="-122"/>
-                <a:cs typeface="Calibri" pitchFamily="34" charset="-120"/>
-              </a:rPr>
-              <a:t>Publicação contínua</a:t>
-            </a:r>
-            <a:endParaRPr lang="en-US" sz="1400" dirty="0"/>
-          </a:p>
-        </p:txBody>
-      </p:sp>
-      <p:sp>
-        <p:nvSpPr>
-          <p:cNvPr id="15" name="Shape 11"/>
-          <p:cNvSpPr/>
-          <p:nvPr/>
-        </p:nvSpPr>
-        <p:spPr>
-          <a:xfrm>
-            <a:off x="4892040" y="2011680"/>
-            <a:ext cx="1051560" cy="411480"/>
-          </a:xfrm>
-          <a:prstGeom prst="roundRect">
-            <a:avLst>
-              <a:gd name="adj" fmla="val 17778"/>
-            </a:avLst>
-          </a:prstGeom>
-          <a:solidFill>
-            <a:srgbClr val="EEF0FB"/>
-          </a:solidFill>
-          <a:ln w="12700">
-            <a:solidFill>
-              <a:srgbClr val="EEF0FB"/>
-            </a:solidFill>
-            <a:prstDash val="solid"/>
-          </a:ln>
-        </p:spPr>
-      </p:sp>
-      <p:sp>
-        <p:nvSpPr>
-          <p:cNvPr id="16" name="Text 12"/>
-          <p:cNvSpPr txBox="1"/>
-          <p:nvPr/>
-        </p:nvSpPr>
-        <p:spPr>
-          <a:xfrm>
-            <a:off x="4892040" y="2011680"/>
-            <a:ext cx="1051560" cy="411480"/>
-          </a:xfrm>
-          <a:prstGeom prst="rect">
-            <a:avLst/>
-          </a:prstGeom>
-          <a:noFill/>
-          <a:ln/>
-        </p:spPr>
-        <p:txBody>
-          <a:bodyPr wrap="square" lIns="0" tIns="0" rIns="0" bIns="0" rtlCol="0" anchor="ctr"/>
-          <a:lstStyle/>
-          <a:p>
-            <a:pPr algn="ctr" indent="0" marL="0">
-              <a:buNone/>
-            </a:pPr>
-            <a:r>
-              <a:rPr lang="en-US" sz="1050" b="1" dirty="0">
-                <a:solidFill>
-                  <a:srgbClr val="2D39B9"/>
-                </a:solidFill>
-                <a:latin typeface="Calibri" pitchFamily="34" charset="0"/>
-                <a:ea typeface="Calibri" pitchFamily="34" charset="-122"/>
-                <a:cs typeface="Calibri" pitchFamily="34" charset="-120"/>
-              </a:rPr>
-              <a:t>Testes</a:t>
-            </a:r>
-            <a:endParaRPr lang="en-US" sz="1050" dirty="0"/>
-          </a:p>
-        </p:txBody>
-      </p:sp>
-      <p:pic>
-        <p:nvPicPr>
-          <p:cNvPr id="17" name="Image 2" descr="icons/arrow-right-indigo.png">    </p:cNvPr>
-          <p:cNvPicPr>
-            <a:picLocks noChangeAspect="1"/>
-          </p:cNvPicPr>
-          <p:nvPr/>
-        </p:nvPicPr>
-        <p:blipFill>
-          <a:blip r:embed="rId3"/>
-          <a:stretch>
-            <a:fillRect/>
-          </a:stretch>
-        </p:blipFill>
-        <p:spPr>
-          <a:xfrm>
-            <a:off x="5961888" y="2121408"/>
-            <a:ext cx="182880" cy="182880"/>
-          </a:xfrm>
-          <a:prstGeom prst="rect">
-            <a:avLst/>
-          </a:prstGeom>
-        </p:spPr>
-      </p:pic>
-      <p:sp>
-        <p:nvSpPr>
-          <p:cNvPr id="18" name="Shape 13"/>
-          <p:cNvSpPr/>
-          <p:nvPr/>
-        </p:nvSpPr>
-        <p:spPr>
-          <a:xfrm>
-            <a:off x="6172200" y="2011680"/>
-            <a:ext cx="1051560" cy="411480"/>
-          </a:xfrm>
-          <a:prstGeom prst="roundRect">
-            <a:avLst>
-              <a:gd name="adj" fmla="val 17778"/>
-            </a:avLst>
-          </a:prstGeom>
-          <a:solidFill>
-            <a:srgbClr val="EEF0FB"/>
-          </a:solidFill>
-          <a:ln w="12700">
-            <a:solidFill>
-              <a:srgbClr val="EEF0FB"/>
-            </a:solidFill>
-            <a:prstDash val="solid"/>
-          </a:ln>
-        </p:spPr>
-      </p:sp>
-      <p:sp>
-        <p:nvSpPr>
-          <p:cNvPr id="19" name="Text 14"/>
-          <p:cNvSpPr txBox="1"/>
-          <p:nvPr/>
-        </p:nvSpPr>
-        <p:spPr>
-          <a:xfrm>
-            <a:off x="6172200" y="2011680"/>
-            <a:ext cx="1051560" cy="411480"/>
-          </a:xfrm>
-          <a:prstGeom prst="rect">
-            <a:avLst/>
-          </a:prstGeom>
-          <a:noFill/>
-          <a:ln/>
-        </p:spPr>
-        <p:txBody>
-          <a:bodyPr wrap="square" lIns="0" tIns="0" rIns="0" bIns="0" rtlCol="0" anchor="ctr"/>
-          <a:lstStyle/>
-          <a:p>
-            <a:pPr algn="ctr" indent="0" marL="0">
-              <a:buNone/>
-            </a:pPr>
-            <a:r>
-              <a:rPr lang="en-US" sz="1050" b="1" dirty="0">
-                <a:solidFill>
-                  <a:srgbClr val="2D39B9"/>
-                </a:solidFill>
-                <a:latin typeface="Calibri" pitchFamily="34" charset="0"/>
-                <a:ea typeface="Calibri" pitchFamily="34" charset="-122"/>
-                <a:cs typeface="Calibri" pitchFamily="34" charset="-120"/>
-              </a:rPr>
-              <a:t>E2E</a:t>
-            </a:r>
-            <a:endParaRPr lang="en-US" sz="1050" dirty="0"/>
-          </a:p>
-        </p:txBody>
-      </p:sp>
-      <p:pic>
-        <p:nvPicPr>
-          <p:cNvPr id="20" name="Image 3" descr="icons/arrow-right-indigo.png">    </p:cNvPr>
-          <p:cNvPicPr>
-            <a:picLocks noChangeAspect="1"/>
-          </p:cNvPicPr>
-          <p:nvPr/>
-        </p:nvPicPr>
-        <p:blipFill>
-          <a:blip r:embed="rId4"/>
-          <a:stretch>
-            <a:fillRect/>
-          </a:stretch>
-        </p:blipFill>
-        <p:spPr>
-          <a:xfrm>
-            <a:off x="7242048" y="2121408"/>
-            <a:ext cx="182880" cy="182880"/>
-          </a:xfrm>
-          <a:prstGeom prst="rect">
-            <a:avLst/>
-          </a:prstGeom>
-        </p:spPr>
-      </p:pic>
-      <p:sp>
-        <p:nvSpPr>
-          <p:cNvPr id="21" name="Shape 15"/>
-          <p:cNvSpPr/>
-          <p:nvPr/>
-        </p:nvSpPr>
-        <p:spPr>
-          <a:xfrm>
-            <a:off x="7452360" y="2011680"/>
-            <a:ext cx="1051560" cy="411480"/>
-          </a:xfrm>
-          <a:prstGeom prst="roundRect">
-            <a:avLst>
-              <a:gd name="adj" fmla="val 17778"/>
-            </a:avLst>
-          </a:prstGeom>
-          <a:solidFill>
-            <a:srgbClr val="EEF0FB"/>
-          </a:solidFill>
-          <a:ln w="12700">
-            <a:solidFill>
-              <a:srgbClr val="EEF0FB"/>
-            </a:solidFill>
-            <a:prstDash val="solid"/>
-          </a:ln>
-        </p:spPr>
-      </p:sp>
-      <p:sp>
-        <p:nvSpPr>
-          <p:cNvPr id="22" name="Text 16"/>
-          <p:cNvSpPr txBox="1"/>
-          <p:nvPr/>
-        </p:nvSpPr>
-        <p:spPr>
-          <a:xfrm>
-            <a:off x="7452360" y="2011680"/>
-            <a:ext cx="1051560" cy="411480"/>
-          </a:xfrm>
-          <a:prstGeom prst="rect">
-            <a:avLst/>
-          </a:prstGeom>
-          <a:noFill/>
-          <a:ln/>
-        </p:spPr>
-        <p:txBody>
-          <a:bodyPr wrap="square" lIns="0" tIns="0" rIns="0" bIns="0" rtlCol="0" anchor="ctr"/>
-          <a:lstStyle/>
-          <a:p>
-            <a:pPr algn="ctr" indent="0" marL="0">
-              <a:buNone/>
-            </a:pPr>
-            <a:r>
-              <a:rPr lang="en-US" sz="1050" b="1" dirty="0">
-                <a:solidFill>
-                  <a:srgbClr val="2D39B9"/>
-                </a:solidFill>
-                <a:latin typeface="Calibri" pitchFamily="34" charset="0"/>
-                <a:ea typeface="Calibri" pitchFamily="34" charset="-122"/>
-                <a:cs typeface="Calibri" pitchFamily="34" charset="-120"/>
-              </a:rPr>
-              <a:t>GitHub Pages</a:t>
-            </a:r>
-            <a:endParaRPr lang="en-US" sz="1050" dirty="0"/>
-          </a:p>
-        </p:txBody>
-      </p:sp>
-      <p:sp>
-        <p:nvSpPr>
-          <p:cNvPr id="23" name="Text 17"/>
-          <p:cNvSpPr txBox="1"/>
-          <p:nvPr/>
-        </p:nvSpPr>
-        <p:spPr>
-          <a:xfrm>
-            <a:off x="4892040" y="2651760"/>
-            <a:ext cx="3611880" cy="1828800"/>
-          </a:xfrm>
-          <a:prstGeom prst="rect">
-            <a:avLst/>
-          </a:prstGeom>
-          <a:noFill/>
-          <a:ln/>
-        </p:spPr>
-        <p:txBody>
-          <a:bodyPr wrap="square" lIns="0" tIns="0" rIns="0" bIns="0" rtlCol="0" anchor="t"/>
-          <a:lstStyle/>
-          <a:p>
-            <a:pPr marL="177800" indent="-177800">
-              <a:spcAft>
-                <a:spcPts val="500"/>
-              </a:spcAft>
-              <a:buSzPct val="100000"/>
-              <a:buChar char="•"/>
-            </a:pPr>
-            <a:r>
-              <a:rPr lang="en-US" sz="1100" dirty="0">
-                <a:solidFill>
-                  <a:srgbClr val="1B1F3B"/>
-                </a:solidFill>
-                <a:latin typeface="Calibri" pitchFamily="34" charset="0"/>
-                <a:ea typeface="Calibri" pitchFamily="34" charset="-122"/>
-                <a:cs typeface="Calibri" pitchFamily="34" charset="-120"/>
-              </a:rPr>
-              <a:t>Cada alteração passa por 94 testes unitários, 10 passos ponta a ponta e pela compilação antes de ser publicada</a:t>
-            </a:r>
-            <a:endParaRPr lang="en-US" sz="1100" dirty="0"/>
-          </a:p>
           <a:p>
             <a:pPr marL="177800" indent="-177800">
               <a:buSzPct val="100000"/>
               <a:buChar char="•"/>
             </a:pPr>
             <a:r>
-              <a:rPr lang="en-US" sz="1100" dirty="0">
+              <a:rPr lang="en-US" sz="1150" b="1" dirty="0">
                 <a:solidFill>
                   <a:srgbClr val="1B1F3B"/>
                 </a:solidFill>
@@ -10645,16 +9950,16 @@
                 <a:ea typeface="Calibri" pitchFamily="34" charset="-122"/>
                 <a:cs typeface="Calibri" pitchFamily="34" charset="-120"/>
               </a:rPr>
-              <a:t>Aplicação: </a:t>
+              <a:t>Cópias automáticas: </a:t>
             </a:r>
             <a:pPr indent="0" marL="0">
               <a:spcAft>
-                <a:spcPts val="500"/>
+                <a:spcPts val="400"/>
               </a:spcAft>
               <a:buNone/>
             </a:pPr>
             <a:r>
-              <a:rPr lang="en-US" sz="1100" b="1" dirty="0">
+              <a:rPr lang="en-US" sz="1150" dirty="0">
                 <a:solidFill>
                   <a:srgbClr val="1B1F3B"/>
                 </a:solidFill>
@@ -10662,9 +9967,9 @@
                 <a:ea typeface="Calibri" pitchFamily="34" charset="-122"/>
                 <a:cs typeface="Calibri" pitchFamily="34" charset="-120"/>
               </a:rPr>
-              <a:t>nelsonsous.github.io/balcao-sucessoes</a:t>
-            </a:r>
-            <a:endParaRPr lang="en-US" sz="1100" dirty="0"/>
+              <a:t>cópias cifradas escritas numa pasta do dispositivo, com rotação e frequência à escolha; numa pasta sincronizada (OneDrive, SharePoint, Drive, NAS) o escritório fica com um repositório central sem servidor.</a:t>
+            </a:r>
+            <a:endParaRPr lang="en-US" sz="1150" dirty="0"/>
           </a:p>
           <a:p>
             <a:pPr marL="177800" indent="-177800">
@@ -10672,7 +9977,7 @@
               <a:buChar char="•"/>
             </a:pPr>
             <a:r>
-              <a:rPr lang="en-US" sz="1100" dirty="0">
+              <a:rPr lang="en-US" sz="1150" b="1" dirty="0">
                 <a:solidFill>
                   <a:srgbClr val="1B1F3B"/>
                 </a:solidFill>
@@ -10680,16 +9985,16 @@
                 <a:ea typeface="Calibri" pitchFamily="34" charset="-122"/>
                 <a:cs typeface="Calibri" pitchFamily="34" charset="-120"/>
               </a:rPr>
-              <a:t>Código-fonte: </a:t>
+              <a:t>Recebidos: </a:t>
             </a:r>
             <a:pPr indent="0" marL="0">
               <a:spcAft>
-                <a:spcPts val="500"/>
+                <a:spcPts val="400"/>
               </a:spcAft>
               <a:buNone/>
             </a:pPr>
             <a:r>
-              <a:rPr lang="en-US" sz="1100" b="1" dirty="0">
+              <a:rPr lang="en-US" sz="1150" dirty="0">
                 <a:solidFill>
                   <a:srgbClr val="1B1F3B"/>
                 </a:solidFill>
@@ -10697,30 +10002,9 @@
                 <a:ea typeface="Calibri" pitchFamily="34" charset="-122"/>
                 <a:cs typeface="Calibri" pitchFamily="34" charset="-120"/>
               </a:rPr>
-              <a:t>github.com/nelsonsous/balcao-sucessoes</a:t>
-            </a:r>
-            <a:endParaRPr lang="en-US" sz="1100" dirty="0"/>
-          </a:p>
-          <a:p>
-            <a:pPr marL="177800" indent="-177800">
-              <a:spcAft>
-                <a:spcPts val="500"/>
-              </a:spcAft>
-              <a:buSzPct val="100000"/>
-              <a:buChar char="•"/>
-            </a:pPr>
-            <a:r>
-              <a:rPr lang="en-US" sz="1100" dirty="0">
-                <a:solidFill>
-                  <a:srgbClr val="1B1F3B"/>
-                </a:solidFill>
-                <a:latin typeface="Calibri" pitchFamily="34" charset="0"/>
-                <a:ea typeface="Calibri" pitchFamily="34" charset="-122"/>
-                <a:cs typeface="Calibri" pitchFamily="34" charset="-120"/>
-              </a:rPr>
-              <a:t>Atualizações entregues à aplicação instalada com aviso «Nova versão disponível»</a:t>
-            </a:r>
-            <a:endParaRPr lang="en-US" sz="1100" dirty="0"/>
+              <a:t>no Android, partilhar um PDF, uma fotografia ou uma ligação para o Balcão coloca-o em «Recebidos», pronto a anexar a um dossier ou a guardar como nota.</a:t>
+            </a:r>
+            <a:endParaRPr lang="en-US" sz="1150" dirty="0"/>
           </a:p>
         </p:txBody>
       </p:sp>
@@ -10789,7 +10073,7 @@
                 <a:ea typeface="Calibri" pitchFamily="34" charset="-122"/>
                 <a:cs typeface="Calibri" pitchFamily="34" charset="-120"/>
               </a:rPr>
-              <a:t>PERCURSO</a:t>
+              <a:t>NOVIDADES 2.1</a:t>
             </a:r>
             <a:endParaRPr lang="en-US" sz="1000" dirty="0"/>
           </a:p>
@@ -10828,7 +10112,7 @@
                 <a:ea typeface="Cambria" pitchFamily="34" charset="-122"/>
                 <a:cs typeface="Cambria" pitchFamily="34" charset="-120"/>
               </a:rPr>
-              <a:t>Dez ciclos, todos entregues</a:t>
+              <a:t>Nada se perde por engano</a:t>
             </a:r>
             <a:endParaRPr lang="en-US" sz="2800" dirty="0"/>
           </a:p>
@@ -10920,127 +10204,35 @@
         </p:nvSpPr>
         <p:spPr>
           <a:xfrm>
-            <a:off x="548640" y="1161288"/>
-            <a:ext cx="329184" cy="329184"/>
-          </a:xfrm>
-          <a:prstGeom prst="ellipse">
-            <a:avLst/>
+            <a:off x="457200" y="1097280"/>
+            <a:ext cx="4023360" cy="2514600"/>
+          </a:xfrm>
+          <a:prstGeom prst="roundRect">
+            <a:avLst>
+              <a:gd name="adj" fmla="val 3636"/>
+            </a:avLst>
           </a:prstGeom>
           <a:solidFill>
-            <a:srgbClr val="2D39B9"/>
+            <a:srgbClr val="FFFFFF"/>
           </a:solidFill>
           <a:ln w="9525">
-            <a:solidFill>
-              <a:srgbClr val="2D39B9"/>
-            </a:solidFill>
-            <a:prstDash val="solid"/>
-          </a:ln>
-        </p:spPr>
-      </p:sp>
-      <p:sp>
-        <p:nvSpPr>
-          <p:cNvPr id="7" name="Text 5"/>
-          <p:cNvSpPr txBox="1"/>
-          <p:nvPr/>
-        </p:nvSpPr>
-        <p:spPr>
-          <a:xfrm>
-            <a:off x="548640" y="1161288"/>
-            <a:ext cx="329184" cy="329184"/>
-          </a:xfrm>
-          <a:prstGeom prst="rect">
-            <a:avLst/>
-          </a:prstGeom>
-          <a:noFill/>
-          <a:ln/>
-        </p:spPr>
-        <p:txBody>
-          <a:bodyPr wrap="square" lIns="0" tIns="0" rIns="0" bIns="0" rtlCol="0" anchor="ctr"/>
-          <a:lstStyle/>
-          <a:p>
-            <a:pPr algn="ctr" indent="0" marL="0">
-              <a:buNone/>
-            </a:pPr>
-            <a:r>
-              <a:rPr lang="en-US" sz="900" b="1" dirty="0">
-                <a:solidFill>
-                  <a:srgbClr val="FFFFFF"/>
-                </a:solidFill>
-                <a:latin typeface="Calibri" pitchFamily="34" charset="0"/>
-                <a:ea typeface="Calibri" pitchFamily="34" charset="-122"/>
-                <a:cs typeface="Calibri" pitchFamily="34" charset="-120"/>
-              </a:rPr>
-              <a:t>1–4</a:t>
-            </a:r>
-            <a:endParaRPr lang="en-US" sz="900" dirty="0"/>
-          </a:p>
-        </p:txBody>
-      </p:sp>
-      <p:sp>
-        <p:nvSpPr>
-          <p:cNvPr id="8" name="Shape 6"/>
-          <p:cNvSpPr/>
-          <p:nvPr/>
-        </p:nvSpPr>
-        <p:spPr>
-          <a:xfrm>
-            <a:off x="713232" y="1490472"/>
-            <a:ext cx="0" cy="173736"/>
-          </a:xfrm>
-          <a:prstGeom prst="line">
-            <a:avLst/>
-          </a:prstGeom>
-          <a:noFill/>
-          <a:ln w="12700">
             <a:solidFill>
               <a:srgbClr val="D9DCE8"/>
             </a:solidFill>
             <a:prstDash val="solid"/>
           </a:ln>
-        </p:spPr>
-      </p:sp>
-      <p:sp>
-        <p:nvSpPr>
-          <p:cNvPr id="9" name="Text 7"/>
-          <p:cNvSpPr txBox="1"/>
-          <p:nvPr/>
-        </p:nvSpPr>
-        <p:spPr>
-          <a:xfrm>
-            <a:off x="1097280" y="1170432"/>
-            <a:ext cx="7498080" cy="365760"/>
-          </a:xfrm>
-          <a:prstGeom prst="rect">
-            <a:avLst/>
-          </a:prstGeom>
-          <a:noFill/>
-          <a:ln/>
-        </p:spPr>
-        <p:txBody>
-          <a:bodyPr wrap="square" lIns="0" tIns="0" rIns="0" bIns="0" rtlCol="0" anchor="t"/>
-          <a:lstStyle/>
-          <a:p>
-            <a:pPr indent="0" marL="0">
-              <a:buNone/>
-            </a:pPr>
-            <a:r>
-              <a:rPr lang="en-US" sz="1250" b="1" dirty="0">
-                <a:solidFill>
-                  <a:srgbClr val="1B1F3B"/>
-                </a:solidFill>
-                <a:latin typeface="Calibri" pitchFamily="34" charset="0"/>
-                <a:ea typeface="Calibri" pitchFamily="34" charset="-122"/>
-                <a:cs typeface="Calibri" pitchFamily="34" charset="-120"/>
-              </a:rPr>
-              <a:t>Fundação · Agenda e prazos · Calculadora sucessória · Documentos e minutas</a:t>
-            </a:r>
-            <a:endParaRPr lang="en-US" sz="1250" dirty="0"/>
-          </a:p>
-        </p:txBody>
+          <a:effectLst>
+            <a:outerShdw sx="100000" sy="100000" kx="0" ky="0" algn="bl" rotWithShape="0" blurRad="101600" dist="25400" dir="5400000">
+              <a:srgbClr val="000000">
+                <a:alpha val="16000"/>
+              </a:srgbClr>
+            </a:outerShdw>
+          </a:effectLst>
+        </p:spPr>
       </p:sp>
       <p:pic>
         <p:nvPicPr>
-          <p:cNvPr id="10" name="Image 0" descr="icons/circle-check-indigo.png">    </p:cNvPr>
+          <p:cNvPr id="7" name="Image 0" descr="img/46-anular.jpg">    </p:cNvPr>
           <p:cNvPicPr>
             <a:picLocks noChangeAspect="1"/>
           </p:cNvPicPr>
@@ -11054,8 +10246,8 @@
         </p:blipFill>
         <p:spPr>
           <a:xfrm>
-            <a:off x="8321040" y="1207008"/>
-            <a:ext cx="237744" cy="237744"/>
+            <a:off x="521208" y="1161288"/>
+            <a:ext cx="3895344" cy="2386584"/>
           </a:xfrm>
           <a:prstGeom prst="rect">
             <a:avLst/>
@@ -11064,133 +10256,41 @@
       </p:pic>
       <p:sp>
         <p:nvSpPr>
-          <p:cNvPr id="11" name="Shape 8"/>
+          <p:cNvPr id="8" name="Shape 5"/>
           <p:cNvSpPr/>
           <p:nvPr/>
         </p:nvSpPr>
         <p:spPr>
           <a:xfrm>
-            <a:off x="548640" y="1664208"/>
-            <a:ext cx="329184" cy="329184"/>
-          </a:xfrm>
-          <a:prstGeom prst="ellipse">
-            <a:avLst/>
+            <a:off x="4663440" y="1097280"/>
+            <a:ext cx="4023360" cy="2514600"/>
+          </a:xfrm>
+          <a:prstGeom prst="roundRect">
+            <a:avLst>
+              <a:gd name="adj" fmla="val 3636"/>
+            </a:avLst>
           </a:prstGeom>
           <a:solidFill>
-            <a:srgbClr val="2D39B9"/>
+            <a:srgbClr val="FFFFFF"/>
           </a:solidFill>
           <a:ln w="9525">
-            <a:solidFill>
-              <a:srgbClr val="2D39B9"/>
-            </a:solidFill>
-            <a:prstDash val="solid"/>
-          </a:ln>
-        </p:spPr>
-      </p:sp>
-      <p:sp>
-        <p:nvSpPr>
-          <p:cNvPr id="12" name="Text 9"/>
-          <p:cNvSpPr txBox="1"/>
-          <p:nvPr/>
-        </p:nvSpPr>
-        <p:spPr>
-          <a:xfrm>
-            <a:off x="548640" y="1664208"/>
-            <a:ext cx="329184" cy="329184"/>
-          </a:xfrm>
-          <a:prstGeom prst="rect">
-            <a:avLst/>
-          </a:prstGeom>
-          <a:noFill/>
-          <a:ln/>
-        </p:spPr>
-        <p:txBody>
-          <a:bodyPr wrap="square" lIns="0" tIns="0" rIns="0" bIns="0" rtlCol="0" anchor="ctr"/>
-          <a:lstStyle/>
-          <a:p>
-            <a:pPr algn="ctr" indent="0" marL="0">
-              <a:buNone/>
-            </a:pPr>
-            <a:r>
-              <a:rPr lang="en-US" sz="900" b="1" dirty="0">
-                <a:solidFill>
-                  <a:srgbClr val="FFFFFF"/>
-                </a:solidFill>
-                <a:latin typeface="Calibri" pitchFamily="34" charset="0"/>
-                <a:ea typeface="Calibri" pitchFamily="34" charset="-122"/>
-                <a:cs typeface="Calibri" pitchFamily="34" charset="-120"/>
-              </a:rPr>
-              <a:t>5</a:t>
-            </a:r>
-            <a:endParaRPr lang="en-US" sz="900" dirty="0"/>
-          </a:p>
-        </p:txBody>
-      </p:sp>
-      <p:sp>
-        <p:nvSpPr>
-          <p:cNvPr id="13" name="Shape 10"/>
-          <p:cNvSpPr/>
-          <p:nvPr/>
-        </p:nvSpPr>
-        <p:spPr>
-          <a:xfrm>
-            <a:off x="713232" y="1993392"/>
-            <a:ext cx="0" cy="173736"/>
-          </a:xfrm>
-          <a:prstGeom prst="line">
-            <a:avLst/>
-          </a:prstGeom>
-          <a:noFill/>
-          <a:ln w="12700">
             <a:solidFill>
               <a:srgbClr val="D9DCE8"/>
             </a:solidFill>
             <a:prstDash val="solid"/>
           </a:ln>
-        </p:spPr>
-      </p:sp>
-      <p:sp>
-        <p:nvSpPr>
-          <p:cNvPr id="14" name="Text 11"/>
-          <p:cNvSpPr txBox="1"/>
-          <p:nvPr/>
-        </p:nvSpPr>
-        <p:spPr>
-          <a:xfrm>
-            <a:off x="1097280" y="1673352"/>
-            <a:ext cx="7498080" cy="365760"/>
-          </a:xfrm>
-          <a:prstGeom prst="rect">
-            <a:avLst/>
-          </a:prstGeom>
-          <a:noFill/>
-          <a:ln/>
-        </p:spPr>
-        <p:txBody>
-          <a:bodyPr wrap="square" lIns="0" tIns="0" rIns="0" bIns="0" rtlCol="0" anchor="t"/>
-          <a:lstStyle/>
-          <a:p>
-            <a:pPr indent="0" marL="0">
-              <a:buNone/>
-            </a:pPr>
-            <a:r>
-              <a:rPr lang="en-US" sz="1250" b="1" dirty="0">
-                <a:solidFill>
-                  <a:srgbClr val="1B1F3B"/>
-                </a:solidFill>
-                <a:latin typeface="Calibri" pitchFamily="34" charset="0"/>
-                <a:ea typeface="Calibri" pitchFamily="34" charset="-122"/>
-                <a:cs typeface="Calibri" pitchFamily="34" charset="-120"/>
-              </a:rPr>
-              <a:t>Relatórios do dossier, relação de bens, mapa de partilha, CSV</a:t>
-            </a:r>
-            <a:endParaRPr lang="en-US" sz="1250" dirty="0"/>
-          </a:p>
-        </p:txBody>
+          <a:effectLst>
+            <a:outerShdw sx="100000" sy="100000" kx="0" ky="0" algn="bl" rotWithShape="0" blurRad="101600" dist="25400" dir="5400000">
+              <a:srgbClr val="000000">
+                <a:alpha val="16000"/>
+              </a:srgbClr>
+            </a:outerShdw>
+          </a:effectLst>
+        </p:spPr>
       </p:sp>
       <p:pic>
         <p:nvPicPr>
-          <p:cNvPr id="15" name="Image 1" descr="icons/circle-check-indigo.png">    </p:cNvPr>
+          <p:cNvPr id="9" name="Image 1" descr="img/47-reciclagem.jpg">    </p:cNvPr>
           <p:cNvPicPr>
             <a:picLocks noChangeAspect="1"/>
           </p:cNvPicPr>
@@ -11204,8 +10304,8 @@
         </p:blipFill>
         <p:spPr>
           <a:xfrm>
-            <a:off x="8321040" y="1709928"/>
-            <a:ext cx="237744" cy="237744"/>
+            <a:off x="4727448" y="1161288"/>
+            <a:ext cx="3895344" cy="2386584"/>
           </a:xfrm>
           <a:prstGeom prst="rect">
             <a:avLst/>
@@ -11214,101 +10314,14 @@
       </p:pic>
       <p:sp>
         <p:nvSpPr>
-          <p:cNvPr id="16" name="Shape 12"/>
-          <p:cNvSpPr/>
-          <p:nvPr/>
-        </p:nvSpPr>
-        <p:spPr>
-          <a:xfrm>
-            <a:off x="548640" y="2167128"/>
-            <a:ext cx="329184" cy="329184"/>
-          </a:xfrm>
-          <a:prstGeom prst="ellipse">
-            <a:avLst/>
-          </a:prstGeom>
-          <a:solidFill>
-            <a:srgbClr val="2D39B9"/>
-          </a:solidFill>
-          <a:ln w="9525">
-            <a:solidFill>
-              <a:srgbClr val="2D39B9"/>
-            </a:solidFill>
-            <a:prstDash val="solid"/>
-          </a:ln>
-        </p:spPr>
-      </p:sp>
-      <p:sp>
-        <p:nvSpPr>
-          <p:cNvPr id="17" name="Text 13"/>
-          <p:cNvSpPr txBox="1"/>
-          <p:nvPr/>
-        </p:nvSpPr>
-        <p:spPr>
-          <a:xfrm>
-            <a:off x="548640" y="2167128"/>
-            <a:ext cx="329184" cy="329184"/>
-          </a:xfrm>
-          <a:prstGeom prst="rect">
-            <a:avLst/>
-          </a:prstGeom>
-          <a:noFill/>
-          <a:ln/>
-        </p:spPr>
-        <p:txBody>
-          <a:bodyPr wrap="square" lIns="0" tIns="0" rIns="0" bIns="0" rtlCol="0" anchor="ctr"/>
-          <a:lstStyle/>
-          <a:p>
-            <a:pPr algn="ctr" indent="0" marL="0">
-              <a:buNone/>
-            </a:pPr>
-            <a:r>
-              <a:rPr lang="en-US" sz="900" b="1" dirty="0">
-                <a:solidFill>
-                  <a:srgbClr val="FFFFFF"/>
-                </a:solidFill>
-                <a:latin typeface="Calibri" pitchFamily="34" charset="0"/>
-                <a:ea typeface="Calibri" pitchFamily="34" charset="-122"/>
-                <a:cs typeface="Calibri" pitchFamily="34" charset="-120"/>
-              </a:rPr>
-              <a:t>6</a:t>
-            </a:r>
-            <a:endParaRPr lang="en-US" sz="900" dirty="0"/>
-          </a:p>
-        </p:txBody>
-      </p:sp>
-      <p:sp>
-        <p:nvSpPr>
-          <p:cNvPr id="18" name="Shape 14"/>
-          <p:cNvSpPr/>
-          <p:nvPr/>
-        </p:nvSpPr>
-        <p:spPr>
-          <a:xfrm>
-            <a:off x="713232" y="2496312"/>
-            <a:ext cx="0" cy="173736"/>
-          </a:xfrm>
-          <a:prstGeom prst="line">
-            <a:avLst/>
-          </a:prstGeom>
-          <a:noFill/>
-          <a:ln w="12700">
-            <a:solidFill>
-              <a:srgbClr val="D9DCE8"/>
-            </a:solidFill>
-            <a:prstDash val="solid"/>
-          </a:ln>
-        </p:spPr>
-      </p:sp>
-      <p:sp>
-        <p:nvSpPr>
-          <p:cNvPr id="19" name="Text 15"/>
-          <p:cNvSpPr txBox="1"/>
-          <p:nvPr/>
-        </p:nvSpPr>
-        <p:spPr>
-          <a:xfrm>
-            <a:off x="1097280" y="2176272"/>
-            <a:ext cx="7498080" cy="365760"/>
+          <p:cNvPr id="10" name="Text 6"/>
+          <p:cNvSpPr txBox="1"/>
+          <p:nvPr/>
+        </p:nvSpPr>
+        <p:spPr>
+          <a:xfrm>
+            <a:off x="457200" y="3749040"/>
+            <a:ext cx="8229600" cy="914400"/>
           </a:xfrm>
           <a:prstGeom prst="rect">
             <a:avLst/>
@@ -11320,11 +10333,12 @@
           <a:bodyPr wrap="square" lIns="0" tIns="0" rIns="0" bIns="0" rtlCol="0" anchor="t"/>
           <a:lstStyle/>
           <a:p>
-            <a:pPr indent="0" marL="0">
-              <a:buNone/>
-            </a:pPr>
-            <a:r>
-              <a:rPr lang="en-US" sz="1250" b="1" dirty="0">
+            <a:pPr marL="177800" indent="-177800">
+              <a:buSzPct val="100000"/>
+              <a:buChar char="•"/>
+            </a:pPr>
+            <a:r>
+              <a:rPr lang="en-US" sz="1150" b="1" dirty="0">
                 <a:solidFill>
                   <a:srgbClr val="1B1F3B"/>
                 </a:solidFill>
@@ -11332,149 +10346,16 @@
                 <a:ea typeface="Calibri" pitchFamily="34" charset="-122"/>
                 <a:cs typeface="Calibri" pitchFamily="34" charset="-120"/>
               </a:rPr>
-              <a:t>Paleta de comandos, quadro Kanban, ações em massa, modelos, as minhas tarefas</a:t>
-            </a:r>
-            <a:endParaRPr lang="en-US" sz="1250" dirty="0"/>
-          </a:p>
-        </p:txBody>
-      </p:sp>
-      <p:pic>
-        <p:nvPicPr>
-          <p:cNvPr id="20" name="Image 2" descr="icons/circle-check-indigo.png">    </p:cNvPr>
-          <p:cNvPicPr>
-            <a:picLocks noChangeAspect="1"/>
-          </p:cNvPicPr>
-          <p:nvPr/>
-        </p:nvPicPr>
-        <p:blipFill>
-          <a:blip r:embed="rId3"/>
-          <a:stretch>
-            <a:fillRect/>
-          </a:stretch>
-        </p:blipFill>
-        <p:spPr>
-          <a:xfrm>
-            <a:off x="8321040" y="2212848"/>
-            <a:ext cx="237744" cy="237744"/>
-          </a:xfrm>
-          <a:prstGeom prst="rect">
-            <a:avLst/>
-          </a:prstGeom>
-        </p:spPr>
-      </p:pic>
-      <p:sp>
-        <p:nvSpPr>
-          <p:cNvPr id="21" name="Shape 16"/>
-          <p:cNvSpPr/>
-          <p:nvPr/>
-        </p:nvSpPr>
-        <p:spPr>
-          <a:xfrm>
-            <a:off x="548640" y="2670048"/>
-            <a:ext cx="329184" cy="329184"/>
-          </a:xfrm>
-          <a:prstGeom prst="ellipse">
-            <a:avLst/>
-          </a:prstGeom>
-          <a:solidFill>
-            <a:srgbClr val="2D39B9"/>
-          </a:solidFill>
-          <a:ln w="9525">
-            <a:solidFill>
-              <a:srgbClr val="2D39B9"/>
-            </a:solidFill>
-            <a:prstDash val="solid"/>
-          </a:ln>
-        </p:spPr>
-      </p:sp>
-      <p:sp>
-        <p:nvSpPr>
-          <p:cNvPr id="22" name="Text 17"/>
-          <p:cNvSpPr txBox="1"/>
-          <p:nvPr/>
-        </p:nvSpPr>
-        <p:spPr>
-          <a:xfrm>
-            <a:off x="548640" y="2670048"/>
-            <a:ext cx="329184" cy="329184"/>
-          </a:xfrm>
-          <a:prstGeom prst="rect">
-            <a:avLst/>
-          </a:prstGeom>
-          <a:noFill/>
-          <a:ln/>
-        </p:spPr>
-        <p:txBody>
-          <a:bodyPr wrap="square" lIns="0" tIns="0" rIns="0" bIns="0" rtlCol="0" anchor="ctr"/>
-          <a:lstStyle/>
-          <a:p>
-            <a:pPr algn="ctr" indent="0" marL="0">
-              <a:buNone/>
-            </a:pPr>
-            <a:r>
-              <a:rPr lang="en-US" sz="900" b="1" dirty="0">
-                <a:solidFill>
-                  <a:srgbClr val="FFFFFF"/>
-                </a:solidFill>
-                <a:latin typeface="Calibri" pitchFamily="34" charset="0"/>
-                <a:ea typeface="Calibri" pitchFamily="34" charset="-122"/>
-                <a:cs typeface="Calibri" pitchFamily="34" charset="-120"/>
-              </a:rPr>
-              <a:t>7</a:t>
-            </a:r>
-            <a:endParaRPr lang="en-US" sz="900" dirty="0"/>
-          </a:p>
-        </p:txBody>
-      </p:sp>
-      <p:sp>
-        <p:nvSpPr>
-          <p:cNvPr id="23" name="Shape 18"/>
-          <p:cNvSpPr/>
-          <p:nvPr/>
-        </p:nvSpPr>
-        <p:spPr>
-          <a:xfrm>
-            <a:off x="713232" y="2999232"/>
-            <a:ext cx="0" cy="173736"/>
-          </a:xfrm>
-          <a:prstGeom prst="line">
-            <a:avLst/>
-          </a:prstGeom>
-          <a:noFill/>
-          <a:ln w="12700">
-            <a:solidFill>
-              <a:srgbClr val="D9DCE8"/>
-            </a:solidFill>
-            <a:prstDash val="solid"/>
-          </a:ln>
-        </p:spPr>
-      </p:sp>
-      <p:sp>
-        <p:nvSpPr>
-          <p:cNvPr id="24" name="Text 19"/>
-          <p:cNvSpPr txBox="1"/>
-          <p:nvPr/>
-        </p:nvSpPr>
-        <p:spPr>
-          <a:xfrm>
-            <a:off x="1097280" y="2679192"/>
-            <a:ext cx="7498080" cy="365760"/>
-          </a:xfrm>
-          <a:prstGeom prst="rect">
-            <a:avLst/>
-          </a:prstGeom>
-          <a:noFill/>
-          <a:ln/>
-        </p:spPr>
-        <p:txBody>
-          <a:bodyPr wrap="square" lIns="0" tIns="0" rIns="0" bIns="0" rtlCol="0" anchor="t"/>
-          <a:lstStyle/>
-          <a:p>
-            <a:pPr indent="0" marL="0">
-              <a:buNone/>
-            </a:pPr>
-            <a:r>
-              <a:rPr lang="en-US" sz="1250" b="1" dirty="0">
+              <a:t>Anular: </a:t>
+            </a:r>
+            <a:pPr indent="0" marL="0">
+              <a:spcAft>
+                <a:spcPts val="400"/>
+              </a:spcAft>
+              <a:buNone/>
+            </a:pPr>
+            <a:r>
+              <a:rPr lang="en-US" sz="1150" dirty="0">
                 <a:solidFill>
                   <a:srgbClr val="1B1F3B"/>
                 </a:solidFill>
@@ -11482,149 +10363,17 @@
                 <a:ea typeface="Calibri" pitchFamily="34" charset="-122"/>
                 <a:cs typeface="Calibri" pitchFamily="34" charset="-120"/>
               </a:rPr>
-              <a:t>PIN e auto-bloqueio, cópias cifradas, modo privacidade, importação do protótipo</a:t>
-            </a:r>
-            <a:endParaRPr lang="en-US" sz="1250" dirty="0"/>
-          </a:p>
-        </p:txBody>
-      </p:sp>
-      <p:pic>
-        <p:nvPicPr>
-          <p:cNvPr id="25" name="Image 3" descr="icons/circle-check-indigo.png">    </p:cNvPr>
-          <p:cNvPicPr>
-            <a:picLocks noChangeAspect="1"/>
-          </p:cNvPicPr>
-          <p:nvPr/>
-        </p:nvPicPr>
-        <p:blipFill>
-          <a:blip r:embed="rId4"/>
-          <a:stretch>
-            <a:fillRect/>
-          </a:stretch>
-        </p:blipFill>
-        <p:spPr>
-          <a:xfrm>
-            <a:off x="8321040" y="2715768"/>
-            <a:ext cx="237744" cy="237744"/>
-          </a:xfrm>
-          <a:prstGeom prst="rect">
-            <a:avLst/>
-          </a:prstGeom>
-        </p:spPr>
-      </p:pic>
-      <p:sp>
-        <p:nvSpPr>
-          <p:cNvPr id="26" name="Shape 20"/>
-          <p:cNvSpPr/>
-          <p:nvPr/>
-        </p:nvSpPr>
-        <p:spPr>
-          <a:xfrm>
-            <a:off x="548640" y="3172968"/>
-            <a:ext cx="329184" cy="329184"/>
-          </a:xfrm>
-          <a:prstGeom prst="ellipse">
-            <a:avLst/>
-          </a:prstGeom>
-          <a:solidFill>
-            <a:srgbClr val="2D39B9"/>
-          </a:solidFill>
-          <a:ln w="9525">
-            <a:solidFill>
-              <a:srgbClr val="2D39B9"/>
-            </a:solidFill>
-            <a:prstDash val="solid"/>
-          </a:ln>
-        </p:spPr>
-      </p:sp>
-      <p:sp>
-        <p:nvSpPr>
-          <p:cNvPr id="27" name="Text 21"/>
-          <p:cNvSpPr txBox="1"/>
-          <p:nvPr/>
-        </p:nvSpPr>
-        <p:spPr>
-          <a:xfrm>
-            <a:off x="548640" y="3172968"/>
-            <a:ext cx="329184" cy="329184"/>
-          </a:xfrm>
-          <a:prstGeom prst="rect">
-            <a:avLst/>
-          </a:prstGeom>
-          <a:noFill/>
-          <a:ln/>
-        </p:spPr>
-        <p:txBody>
-          <a:bodyPr wrap="square" lIns="0" tIns="0" rIns="0" bIns="0" rtlCol="0" anchor="ctr"/>
-          <a:lstStyle/>
-          <a:p>
-            <a:pPr algn="ctr" indent="0" marL="0">
-              <a:buNone/>
-            </a:pPr>
-            <a:r>
-              <a:rPr lang="en-US" sz="900" b="1" dirty="0">
-                <a:solidFill>
-                  <a:srgbClr val="FFFFFF"/>
-                </a:solidFill>
-                <a:latin typeface="Calibri" pitchFamily="34" charset="0"/>
-                <a:ea typeface="Calibri" pitchFamily="34" charset="-122"/>
-                <a:cs typeface="Calibri" pitchFamily="34" charset="-120"/>
-              </a:rPr>
-              <a:t>8</a:t>
-            </a:r>
-            <a:endParaRPr lang="en-US" sz="900" dirty="0"/>
-          </a:p>
-        </p:txBody>
-      </p:sp>
-      <p:sp>
-        <p:nvSpPr>
-          <p:cNvPr id="28" name="Shape 22"/>
-          <p:cNvSpPr/>
-          <p:nvPr/>
-        </p:nvSpPr>
-        <p:spPr>
-          <a:xfrm>
-            <a:off x="713232" y="3502152"/>
-            <a:ext cx="0" cy="173736"/>
-          </a:xfrm>
-          <a:prstGeom prst="line">
-            <a:avLst/>
-          </a:prstGeom>
-          <a:noFill/>
-          <a:ln w="12700">
-            <a:solidFill>
-              <a:srgbClr val="D9DCE8"/>
-            </a:solidFill>
-            <a:prstDash val="solid"/>
-          </a:ln>
-        </p:spPr>
-      </p:sp>
-      <p:sp>
-        <p:nvSpPr>
-          <p:cNvPr id="29" name="Text 23"/>
-          <p:cNvSpPr txBox="1"/>
-          <p:nvPr/>
-        </p:nvSpPr>
-        <p:spPr>
-          <a:xfrm>
-            <a:off x="1097280" y="3182112"/>
-            <a:ext cx="7498080" cy="365760"/>
-          </a:xfrm>
-          <a:prstGeom prst="rect">
-            <a:avLst/>
-          </a:prstGeom>
-          <a:noFill/>
-          <a:ln/>
-        </p:spPr>
-        <p:txBody>
-          <a:bodyPr wrap="square" lIns="0" tIns="0" rIns="0" bIns="0" rtlCol="0" anchor="t"/>
-          <a:lstStyle/>
-          <a:p>
-            <a:pPr indent="0" marL="0">
-              <a:buNone/>
-            </a:pPr>
-            <a:r>
-              <a:rPr lang="en-US" sz="1250" b="1" dirty="0">
+              <a:t>cada mudança de estado, alteração em massa ou remoção mostra «Anular» (também Ctrl/⌘+Z); cada anulação fica no histórico.</a:t>
+            </a:r>
+            <a:endParaRPr lang="en-US" sz="1150" dirty="0"/>
+          </a:p>
+          <a:p>
+            <a:pPr marL="177800" indent="-177800">
+              <a:buSzPct val="100000"/>
+              <a:buChar char="•"/>
+            </a:pPr>
+            <a:r>
+              <a:rPr lang="en-US" sz="1150" b="1" dirty="0">
                 <a:solidFill>
                   <a:srgbClr val="1B1F3B"/>
                 </a:solidFill>
@@ -11632,149 +10381,16 @@
                 <a:ea typeface="Calibri" pitchFamily="34" charset="-122"/>
                 <a:cs typeface="Calibri" pitchFamily="34" charset="-120"/>
               </a:rPr>
-              <a:t>Lei aplicável (Reg. 650/2012), CSE, documentos e prazos por país, PT/FR/EN</a:t>
-            </a:r>
-            <a:endParaRPr lang="en-US" sz="1250" dirty="0"/>
-          </a:p>
-        </p:txBody>
-      </p:sp>
-      <p:pic>
-        <p:nvPicPr>
-          <p:cNvPr id="30" name="Image 4" descr="icons/circle-check-indigo.png">    </p:cNvPr>
-          <p:cNvPicPr>
-            <a:picLocks noChangeAspect="1"/>
-          </p:cNvPicPr>
-          <p:nvPr/>
-        </p:nvPicPr>
-        <p:blipFill>
-          <a:blip r:embed="rId5"/>
-          <a:stretch>
-            <a:fillRect/>
-          </a:stretch>
-        </p:blipFill>
-        <p:spPr>
-          <a:xfrm>
-            <a:off x="8321040" y="3218688"/>
-            <a:ext cx="237744" cy="237744"/>
-          </a:xfrm>
-          <a:prstGeom prst="rect">
-            <a:avLst/>
-          </a:prstGeom>
-        </p:spPr>
-      </p:pic>
-      <p:sp>
-        <p:nvSpPr>
-          <p:cNvPr id="31" name="Shape 24"/>
-          <p:cNvSpPr/>
-          <p:nvPr/>
-        </p:nvSpPr>
-        <p:spPr>
-          <a:xfrm>
-            <a:off x="548640" y="3675888"/>
-            <a:ext cx="329184" cy="329184"/>
-          </a:xfrm>
-          <a:prstGeom prst="ellipse">
-            <a:avLst/>
-          </a:prstGeom>
-          <a:solidFill>
-            <a:srgbClr val="2D39B9"/>
-          </a:solidFill>
-          <a:ln w="9525">
-            <a:solidFill>
-              <a:srgbClr val="2D39B9"/>
-            </a:solidFill>
-            <a:prstDash val="solid"/>
-          </a:ln>
-        </p:spPr>
-      </p:sp>
-      <p:sp>
-        <p:nvSpPr>
-          <p:cNvPr id="32" name="Text 25"/>
-          <p:cNvSpPr txBox="1"/>
-          <p:nvPr/>
-        </p:nvSpPr>
-        <p:spPr>
-          <a:xfrm>
-            <a:off x="548640" y="3675888"/>
-            <a:ext cx="329184" cy="329184"/>
-          </a:xfrm>
-          <a:prstGeom prst="rect">
-            <a:avLst/>
-          </a:prstGeom>
-          <a:noFill/>
-          <a:ln/>
-        </p:spPr>
-        <p:txBody>
-          <a:bodyPr wrap="square" lIns="0" tIns="0" rIns="0" bIns="0" rtlCol="0" anchor="ctr"/>
-          <a:lstStyle/>
-          <a:p>
-            <a:pPr algn="ctr" indent="0" marL="0">
-              <a:buNone/>
-            </a:pPr>
-            <a:r>
-              <a:rPr lang="en-US" sz="900" b="1" dirty="0">
-                <a:solidFill>
-                  <a:srgbClr val="FFFFFF"/>
-                </a:solidFill>
-                <a:latin typeface="Calibri" pitchFamily="34" charset="0"/>
-                <a:ea typeface="Calibri" pitchFamily="34" charset="-122"/>
-                <a:cs typeface="Calibri" pitchFamily="34" charset="-120"/>
-              </a:rPr>
-              <a:t>9</a:t>
-            </a:r>
-            <a:endParaRPr lang="en-US" sz="900" dirty="0"/>
-          </a:p>
-        </p:txBody>
-      </p:sp>
-      <p:sp>
-        <p:nvSpPr>
-          <p:cNvPr id="33" name="Shape 26"/>
-          <p:cNvSpPr/>
-          <p:nvPr/>
-        </p:nvSpPr>
-        <p:spPr>
-          <a:xfrm>
-            <a:off x="713232" y="4005072"/>
-            <a:ext cx="0" cy="173736"/>
-          </a:xfrm>
-          <a:prstGeom prst="line">
-            <a:avLst/>
-          </a:prstGeom>
-          <a:noFill/>
-          <a:ln w="12700">
-            <a:solidFill>
-              <a:srgbClr val="D9DCE8"/>
-            </a:solidFill>
-            <a:prstDash val="solid"/>
-          </a:ln>
-        </p:spPr>
-      </p:sp>
-      <p:sp>
-        <p:nvSpPr>
-          <p:cNvPr id="34" name="Text 27"/>
-          <p:cNvSpPr txBox="1"/>
-          <p:nvPr/>
-        </p:nvSpPr>
-        <p:spPr>
-          <a:xfrm>
-            <a:off x="1097280" y="3685032"/>
-            <a:ext cx="7498080" cy="365760"/>
-          </a:xfrm>
-          <a:prstGeom prst="rect">
-            <a:avLst/>
-          </a:prstGeom>
-          <a:noFill/>
-          <a:ln/>
-        </p:spPr>
-        <p:txBody>
-          <a:bodyPr wrap="square" lIns="0" tIns="0" rIns="0" bIns="0" rtlCol="0" anchor="t"/>
-          <a:lstStyle/>
-          <a:p>
-            <a:pPr indent="0" marL="0">
-              <a:buNone/>
-            </a:pPr>
-            <a:r>
-              <a:rPr lang="en-US" sz="1250" b="1" dirty="0">
+              <a:t>Reciclagem: </a:t>
+            </a:r>
+            <a:pPr indent="0" marL="0">
+              <a:spcAft>
+                <a:spcPts val="400"/>
+              </a:spcAft>
+              <a:buNone/>
+            </a:pPr>
+            <a:r>
+              <a:rPr lang="en-US" sz="1150" dirty="0">
                 <a:solidFill>
                   <a:srgbClr val="1B1F3B"/>
                 </a:solidFill>
@@ -11782,163 +10398,12 @@
                 <a:ea typeface="Calibri" pitchFamily="34" charset="-122"/>
                 <a:cs typeface="Calibri" pitchFamily="34" charset="-120"/>
               </a:rPr>
-              <a:t>Acessibilidade WCAG 2.2 AA, divisão de código, testes ponta a ponta</a:t>
-            </a:r>
-            <a:endParaRPr lang="en-US" sz="1250" dirty="0"/>
-          </a:p>
-        </p:txBody>
-      </p:sp>
-      <p:pic>
-        <p:nvPicPr>
-          <p:cNvPr id="35" name="Image 5" descr="icons/circle-check-indigo.png">    </p:cNvPr>
-          <p:cNvPicPr>
-            <a:picLocks noChangeAspect="1"/>
-          </p:cNvPicPr>
-          <p:nvPr/>
-        </p:nvPicPr>
-        <p:blipFill>
-          <a:blip r:embed="rId6"/>
-          <a:stretch>
-            <a:fillRect/>
-          </a:stretch>
-        </p:blipFill>
-        <p:spPr>
-          <a:xfrm>
-            <a:off x="8321040" y="3721608"/>
-            <a:ext cx="237744" cy="237744"/>
-          </a:xfrm>
-          <a:prstGeom prst="rect">
-            <a:avLst/>
-          </a:prstGeom>
-        </p:spPr>
-      </p:pic>
-      <p:sp>
-        <p:nvSpPr>
-          <p:cNvPr id="36" name="Shape 28"/>
-          <p:cNvSpPr/>
-          <p:nvPr/>
-        </p:nvSpPr>
-        <p:spPr>
-          <a:xfrm>
-            <a:off x="548640" y="4178808"/>
-            <a:ext cx="329184" cy="329184"/>
-          </a:xfrm>
-          <a:prstGeom prst="ellipse">
-            <a:avLst/>
-          </a:prstGeom>
-          <a:solidFill>
-            <a:srgbClr val="2D39B9"/>
-          </a:solidFill>
-          <a:ln w="9525">
-            <a:solidFill>
-              <a:srgbClr val="2D39B9"/>
-            </a:solidFill>
-            <a:prstDash val="solid"/>
-          </a:ln>
-        </p:spPr>
-      </p:sp>
-      <p:sp>
-        <p:nvSpPr>
-          <p:cNvPr id="37" name="Text 29"/>
-          <p:cNvSpPr txBox="1"/>
-          <p:nvPr/>
-        </p:nvSpPr>
-        <p:spPr>
-          <a:xfrm>
-            <a:off x="548640" y="4178808"/>
-            <a:ext cx="329184" cy="329184"/>
-          </a:xfrm>
-          <a:prstGeom prst="rect">
-            <a:avLst/>
-          </a:prstGeom>
-          <a:noFill/>
-          <a:ln/>
-        </p:spPr>
-        <p:txBody>
-          <a:bodyPr wrap="square" lIns="0" tIns="0" rIns="0" bIns="0" rtlCol="0" anchor="ctr"/>
-          <a:lstStyle/>
-          <a:p>
-            <a:pPr algn="ctr" indent="0" marL="0">
-              <a:buNone/>
-            </a:pPr>
-            <a:r>
-              <a:rPr lang="en-US" sz="900" b="1" dirty="0">
-                <a:solidFill>
-                  <a:srgbClr val="FFFFFF"/>
-                </a:solidFill>
-                <a:latin typeface="Calibri" pitchFamily="34" charset="0"/>
-                <a:ea typeface="Calibri" pitchFamily="34" charset="-122"/>
-                <a:cs typeface="Calibri" pitchFamily="34" charset="-120"/>
-              </a:rPr>
-              <a:t>10</a:t>
-            </a:r>
-            <a:endParaRPr lang="en-US" sz="900" dirty="0"/>
-          </a:p>
-        </p:txBody>
-      </p:sp>
-      <p:sp>
-        <p:nvSpPr>
-          <p:cNvPr id="38" name="Text 30"/>
-          <p:cNvSpPr txBox="1"/>
-          <p:nvPr/>
-        </p:nvSpPr>
-        <p:spPr>
-          <a:xfrm>
-            <a:off x="1097280" y="4187952"/>
-            <a:ext cx="7498080" cy="365760"/>
-          </a:xfrm>
-          <a:prstGeom prst="rect">
-            <a:avLst/>
-          </a:prstGeom>
-          <a:noFill/>
-          <a:ln/>
-        </p:spPr>
-        <p:txBody>
-          <a:bodyPr wrap="square" lIns="0" tIns="0" rIns="0" bIns="0" rtlCol="0" anchor="t"/>
-          <a:lstStyle/>
-          <a:p>
-            <a:pPr indent="0" marL="0">
-              <a:buNone/>
-            </a:pPr>
-            <a:r>
-              <a:rPr lang="en-US" sz="1250" b="1" dirty="0">
-                <a:solidFill>
-                  <a:srgbClr val="1B1F3B"/>
-                </a:solidFill>
-                <a:latin typeface="Calibri" pitchFamily="34" charset="0"/>
-                <a:ea typeface="Calibri" pitchFamily="34" charset="-122"/>
-                <a:cs typeface="Calibri" pitchFamily="34" charset="-120"/>
-              </a:rPr>
-              <a:t>Manual, apresentação e resumo executivo atualizados</a:t>
-            </a:r>
-            <a:endParaRPr lang="en-US" sz="1250" dirty="0"/>
-          </a:p>
-        </p:txBody>
-      </p:sp>
-      <p:pic>
-        <p:nvPicPr>
-          <p:cNvPr id="39" name="Image 6" descr="icons/circle-check-indigo.png">    </p:cNvPr>
-          <p:cNvPicPr>
-            <a:picLocks noChangeAspect="1"/>
-          </p:cNvPicPr>
-          <p:nvPr/>
-        </p:nvPicPr>
-        <p:blipFill>
-          <a:blip r:embed="rId7"/>
-          <a:stretch>
-            <a:fillRect/>
-          </a:stretch>
-        </p:blipFill>
-        <p:spPr>
-          <a:xfrm>
-            <a:off x="8321040" y="4224528"/>
-            <a:ext cx="237744" cy="237744"/>
-          </a:xfrm>
-          <a:prstGeom prst="rect">
-            <a:avLst/>
-          </a:prstGeom>
-        </p:spPr>
-      </p:pic>
+              <a:t>tarefas, interessados, bens, documentos com anexo e dossiers inteiros ficam 30 dias na reciclagem, com reposição registada; o histórico passou a ser pesquisável e filtrável.</a:t>
+            </a:r>
+            <a:endParaRPr lang="en-US" sz="1150" dirty="0"/>
+          </a:p>
+        </p:txBody>
+      </p:sp>
     </p:spTree>
   </p:cSld>
   <p:clrMapOvr>
@@ -12004,7 +10469,7 @@
                 <a:ea typeface="Calibri" pitchFamily="34" charset="-122"/>
                 <a:cs typeface="Calibri" pitchFamily="34" charset="-120"/>
               </a:rPr>
-              <a:t>COMO COMEÇAR</a:t>
+              <a:t>NOVIDADES 2.1</a:t>
             </a:r>
             <a:endParaRPr lang="en-US" sz="1000" dirty="0"/>
           </a:p>
@@ -12043,7 +10508,7 @@
                 <a:ea typeface="Cambria" pitchFamily="34" charset="-122"/>
                 <a:cs typeface="Cambria" pitchFamily="34" charset="-120"/>
               </a:rPr>
-              <a:t>Três passos e cinco minutos</a:t>
+              <a:t>Análise da equipa: por mês, por fase e por pessoa</a:t>
             </a:r>
             <a:endParaRPr lang="en-US" sz="2800" dirty="0"/>
           </a:p>
@@ -12135,16 +10600,16 @@
         </p:nvSpPr>
         <p:spPr>
           <a:xfrm>
-            <a:off x="457200" y="1188720"/>
-            <a:ext cx="2651760" cy="2377440"/>
+            <a:off x="457200" y="1097280"/>
+            <a:ext cx="5394960" cy="3374136"/>
           </a:xfrm>
           <a:prstGeom prst="roundRect">
             <a:avLst>
-              <a:gd name="adj" fmla="val 3077"/>
+              <a:gd name="adj" fmla="val 2710"/>
             </a:avLst>
           </a:prstGeom>
           <a:solidFill>
-            <a:srgbClr val="F7F8FC"/>
+            <a:srgbClr val="FFFFFF"/>
           </a:solidFill>
           <a:ln w="9525">
             <a:solidFill>
@@ -12152,36 +10617,18 @@
             </a:solidFill>
             <a:prstDash val="solid"/>
           </a:ln>
-        </p:spPr>
-      </p:sp>
-      <p:sp>
-        <p:nvSpPr>
-          <p:cNvPr id="7" name="Shape 5"/>
-          <p:cNvSpPr/>
-          <p:nvPr/>
-        </p:nvSpPr>
-        <p:spPr>
-          <a:xfrm>
-            <a:off x="685800" y="1417320"/>
-            <a:ext cx="548640" cy="548640"/>
-          </a:xfrm>
-          <a:prstGeom prst="ellipse">
-            <a:avLst/>
-          </a:prstGeom>
-          <a:solidFill>
-            <a:srgbClr val="2D39B9"/>
-          </a:solidFill>
-          <a:ln w="12700">
-            <a:solidFill>
-              <a:srgbClr val="2D39B9"/>
-            </a:solidFill>
-            <a:prstDash val="solid"/>
-          </a:ln>
+          <a:effectLst>
+            <a:outerShdw sx="100000" sy="100000" kx="0" ky="0" algn="bl" rotWithShape="0" blurRad="101600" dist="25400" dir="5400000">
+              <a:srgbClr val="000000">
+                <a:alpha val="16000"/>
+              </a:srgbClr>
+            </a:outerShdw>
+          </a:effectLst>
         </p:spPr>
       </p:sp>
       <p:pic>
         <p:nvPicPr>
-          <p:cNvPr id="8" name="Image 0" descr="icons/globe-white.png">    </p:cNvPr>
+          <p:cNvPr id="7" name="Image 0" descr="img/49-analise.jpg">    </p:cNvPr>
           <p:cNvPicPr>
             <a:picLocks noChangeAspect="1"/>
           </p:cNvPicPr>
@@ -12195,8 +10642,8 @@
         </p:blipFill>
         <p:spPr>
           <a:xfrm>
-            <a:off x="817474" y="1548994"/>
-            <a:ext cx="285293" cy="285293"/>
+            <a:off x="521208" y="1161288"/>
+            <a:ext cx="5266944" cy="3246120"/>
           </a:xfrm>
           <a:prstGeom prst="rect">
             <a:avLst/>
@@ -12205,53 +10652,14 @@
       </p:pic>
       <p:sp>
         <p:nvSpPr>
-          <p:cNvPr id="9" name="Text 6"/>
-          <p:cNvSpPr txBox="1"/>
-          <p:nvPr/>
-        </p:nvSpPr>
-        <p:spPr>
-          <a:xfrm>
-            <a:off x="2468880" y="1325880"/>
-            <a:ext cx="457200" cy="548640"/>
-          </a:xfrm>
-          <a:prstGeom prst="rect">
-            <a:avLst/>
-          </a:prstGeom>
-          <a:noFill/>
-          <a:ln/>
-        </p:spPr>
-        <p:txBody>
-          <a:bodyPr wrap="square" lIns="0" tIns="0" rIns="0" bIns="0" rtlCol="0" anchor="ctr"/>
-          <a:lstStyle/>
-          <a:p>
-            <a:pPr algn="r" indent="0" marL="0">
-              <a:buNone/>
-            </a:pPr>
-            <a:r>
-              <a:rPr lang="en-US" sz="3000" b="1" dirty="0">
-                <a:solidFill>
-                  <a:srgbClr val="EEF0FB"/>
-                </a:solidFill>
-                <a:latin typeface="Cambria" pitchFamily="34" charset="0"/>
-                <a:ea typeface="Cambria" pitchFamily="34" charset="-122"/>
-                <a:cs typeface="Cambria" pitchFamily="34" charset="-120"/>
-              </a:rPr>
-              <a:t>1</a:t>
-            </a:r>
-            <a:endParaRPr lang="en-US" sz="3000" dirty="0"/>
-          </a:p>
-        </p:txBody>
-      </p:sp>
-      <p:sp>
-        <p:nvSpPr>
-          <p:cNvPr id="10" name="Text 7"/>
-          <p:cNvSpPr txBox="1"/>
-          <p:nvPr/>
-        </p:nvSpPr>
-        <p:spPr>
-          <a:xfrm>
-            <a:off x="685800" y="2103120"/>
-            <a:ext cx="2194560" cy="365760"/>
+          <p:cNvPr id="8" name="Text 5"/>
+          <p:cNvSpPr txBox="1"/>
+          <p:nvPr/>
+        </p:nvSpPr>
+        <p:spPr>
+          <a:xfrm>
+            <a:off x="6035040" y="1143000"/>
+            <a:ext cx="2651760" cy="3291840"/>
           </a:xfrm>
           <a:prstGeom prst="rect">
             <a:avLst/>
@@ -12263,11 +10671,12 @@
           <a:bodyPr wrap="square" lIns="0" tIns="0" rIns="0" bIns="0" rtlCol="0" anchor="t"/>
           <a:lstStyle/>
           <a:p>
-            <a:pPr indent="0" marL="0">
-              <a:buNone/>
-            </a:pPr>
-            <a:r>
-              <a:rPr lang="en-US" sz="1600" b="1" dirty="0">
+            <a:pPr marL="177800" indent="-177800">
+              <a:buSzPct val="100000"/>
+              <a:buChar char="•"/>
+            </a:pPr>
+            <a:r>
+              <a:rPr lang="en-US" sz="1150" b="1" dirty="0">
                 <a:solidFill>
                   <a:srgbClr val="1B1F3B"/>
                 </a:solidFill>
@@ -12275,192 +10684,16 @@
                 <a:ea typeface="Calibri" pitchFamily="34" charset="-122"/>
                 <a:cs typeface="Calibri" pitchFamily="34" charset="-120"/>
               </a:rPr>
-              <a:t>Abrir</a:t>
-            </a:r>
-            <a:endParaRPr lang="en-US" sz="1600" dirty="0"/>
-          </a:p>
-        </p:txBody>
-      </p:sp>
-      <p:sp>
-        <p:nvSpPr>
-          <p:cNvPr id="11" name="Text 8"/>
-          <p:cNvSpPr txBox="1"/>
-          <p:nvPr/>
-        </p:nvSpPr>
-        <p:spPr>
-          <a:xfrm>
-            <a:off x="685800" y="2514600"/>
-            <a:ext cx="2194560" cy="1005840"/>
-          </a:xfrm>
-          <a:prstGeom prst="rect">
-            <a:avLst/>
-          </a:prstGeom>
-          <a:noFill/>
-          <a:ln/>
-        </p:spPr>
-        <p:txBody>
-          <a:bodyPr wrap="square" lIns="0" tIns="0" rIns="0" bIns="0" rtlCol="0" anchor="t"/>
-          <a:lstStyle/>
-          <a:p>
-            <a:pPr indent="0" marL="0">
-              <a:buNone/>
-            </a:pPr>
-            <a:r>
-              <a:rPr lang="en-US" sz="1100" dirty="0">
-                <a:solidFill>
-                  <a:srgbClr val="5B6180"/>
-                </a:solidFill>
-                <a:latin typeface="Calibri" pitchFamily="34" charset="0"/>
-                <a:ea typeface="Calibri" pitchFamily="34" charset="-122"/>
-                <a:cs typeface="Calibri" pitchFamily="34" charset="-120"/>
-              </a:rPr>
-              <a:t>Aceda a nelsonsous.github.io/balcao-sucessoes em qualquer navegador atual.</a:t>
-            </a:r>
-            <a:endParaRPr lang="en-US" sz="1100" dirty="0"/>
-          </a:p>
-        </p:txBody>
-      </p:sp>
-      <p:sp>
-        <p:nvSpPr>
-          <p:cNvPr id="12" name="Shape 9"/>
-          <p:cNvSpPr/>
-          <p:nvPr/>
-        </p:nvSpPr>
-        <p:spPr>
-          <a:xfrm>
-            <a:off x="3291840" y="1188720"/>
-            <a:ext cx="2651760" cy="2377440"/>
-          </a:xfrm>
-          <a:prstGeom prst="roundRect">
-            <a:avLst>
-              <a:gd name="adj" fmla="val 3077"/>
-            </a:avLst>
-          </a:prstGeom>
-          <a:solidFill>
-            <a:srgbClr val="F7F8FC"/>
-          </a:solidFill>
-          <a:ln w="9525">
-            <a:solidFill>
-              <a:srgbClr val="D9DCE8"/>
-            </a:solidFill>
-            <a:prstDash val="solid"/>
-          </a:ln>
-        </p:spPr>
-      </p:sp>
-      <p:sp>
-        <p:nvSpPr>
-          <p:cNvPr id="13" name="Shape 10"/>
-          <p:cNvSpPr/>
-          <p:nvPr/>
-        </p:nvSpPr>
-        <p:spPr>
-          <a:xfrm>
-            <a:off x="3520440" y="1417320"/>
-            <a:ext cx="548640" cy="548640"/>
-          </a:xfrm>
-          <a:prstGeom prst="ellipse">
-            <a:avLst/>
-          </a:prstGeom>
-          <a:solidFill>
-            <a:srgbClr val="2D39B9"/>
-          </a:solidFill>
-          <a:ln w="12700">
-            <a:solidFill>
-              <a:srgbClr val="2D39B9"/>
-            </a:solidFill>
-            <a:prstDash val="solid"/>
-          </a:ln>
-        </p:spPr>
-      </p:sp>
-      <p:pic>
-        <p:nvPicPr>
-          <p:cNvPr id="14" name="Image 1" descr="icons/download-white.png">    </p:cNvPr>
-          <p:cNvPicPr>
-            <a:picLocks noChangeAspect="1"/>
-          </p:cNvPicPr>
-          <p:nvPr/>
-        </p:nvPicPr>
-        <p:blipFill>
-          <a:blip r:embed="rId2"/>
-          <a:stretch>
-            <a:fillRect/>
-          </a:stretch>
-        </p:blipFill>
-        <p:spPr>
-          <a:xfrm>
-            <a:off x="3652114" y="1548994"/>
-            <a:ext cx="285293" cy="285293"/>
-          </a:xfrm>
-          <a:prstGeom prst="rect">
-            <a:avLst/>
-          </a:prstGeom>
-        </p:spPr>
-      </p:pic>
-      <p:sp>
-        <p:nvSpPr>
-          <p:cNvPr id="15" name="Text 11"/>
-          <p:cNvSpPr txBox="1"/>
-          <p:nvPr/>
-        </p:nvSpPr>
-        <p:spPr>
-          <a:xfrm>
-            <a:off x="5303520" y="1325880"/>
-            <a:ext cx="457200" cy="548640"/>
-          </a:xfrm>
-          <a:prstGeom prst="rect">
-            <a:avLst/>
-          </a:prstGeom>
-          <a:noFill/>
-          <a:ln/>
-        </p:spPr>
-        <p:txBody>
-          <a:bodyPr wrap="square" lIns="0" tIns="0" rIns="0" bIns="0" rtlCol="0" anchor="ctr"/>
-          <a:lstStyle/>
-          <a:p>
-            <a:pPr algn="r" indent="0" marL="0">
-              <a:buNone/>
-            </a:pPr>
-            <a:r>
-              <a:rPr lang="en-US" sz="3000" b="1" dirty="0">
-                <a:solidFill>
-                  <a:srgbClr val="EEF0FB"/>
-                </a:solidFill>
-                <a:latin typeface="Cambria" pitchFamily="34" charset="0"/>
-                <a:ea typeface="Cambria" pitchFamily="34" charset="-122"/>
-                <a:cs typeface="Cambria" pitchFamily="34" charset="-120"/>
-              </a:rPr>
-              <a:t>2</a:t>
-            </a:r>
-            <a:endParaRPr lang="en-US" sz="3000" dirty="0"/>
-          </a:p>
-        </p:txBody>
-      </p:sp>
-      <p:sp>
-        <p:nvSpPr>
-          <p:cNvPr id="16" name="Text 12"/>
-          <p:cNvSpPr txBox="1"/>
-          <p:nvPr/>
-        </p:nvSpPr>
-        <p:spPr>
-          <a:xfrm>
-            <a:off x="3520440" y="2103120"/>
-            <a:ext cx="2194560" cy="365760"/>
-          </a:xfrm>
-          <a:prstGeom prst="rect">
-            <a:avLst/>
-          </a:prstGeom>
-          <a:noFill/>
-          <a:ln/>
-        </p:spPr>
-        <p:txBody>
-          <a:bodyPr wrap="square" lIns="0" tIns="0" rIns="0" bIns="0" rtlCol="0" anchor="t"/>
-          <a:lstStyle/>
-          <a:p>
-            <a:pPr indent="0" marL="0">
-              <a:buNone/>
-            </a:pPr>
-            <a:r>
-              <a:rPr lang="en-US" sz="1600" b="1" dirty="0">
+              <a:t>Por mês: </a:t>
+            </a:r>
+            <a:pPr indent="0" marL="0">
+              <a:spcAft>
+                <a:spcPts val="600"/>
+              </a:spcAft>
+              <a:buNone/>
+            </a:pPr>
+            <a:r>
+              <a:rPr lang="en-US" sz="1150" dirty="0">
                 <a:solidFill>
                   <a:srgbClr val="1B1F3B"/>
                 </a:solidFill>
@@ -12468,192 +10701,17 @@
                 <a:ea typeface="Calibri" pitchFamily="34" charset="-122"/>
                 <a:cs typeface="Calibri" pitchFamily="34" charset="-120"/>
               </a:rPr>
-              <a:t>Instalar</a:t>
-            </a:r>
-            <a:endParaRPr lang="en-US" sz="1600" dirty="0"/>
-          </a:p>
-        </p:txBody>
-      </p:sp>
-      <p:sp>
-        <p:nvSpPr>
-          <p:cNvPr id="17" name="Text 13"/>
-          <p:cNvSpPr txBox="1"/>
-          <p:nvPr/>
-        </p:nvSpPr>
-        <p:spPr>
-          <a:xfrm>
-            <a:off x="3520440" y="2514600"/>
-            <a:ext cx="2194560" cy="1005840"/>
-          </a:xfrm>
-          <a:prstGeom prst="rect">
-            <a:avLst/>
-          </a:prstGeom>
-          <a:noFill/>
-          <a:ln/>
-        </p:spPr>
-        <p:txBody>
-          <a:bodyPr wrap="square" lIns="0" tIns="0" rIns="0" bIns="0" rtlCol="0" anchor="t"/>
-          <a:lstStyle/>
-          <a:p>
-            <a:pPr indent="0" marL="0">
-              <a:buNone/>
-            </a:pPr>
-            <a:r>
-              <a:rPr lang="en-US" sz="1100" dirty="0">
-                <a:solidFill>
-                  <a:srgbClr val="5B6180"/>
-                </a:solidFill>
-                <a:latin typeface="Calibri" pitchFamily="34" charset="0"/>
-                <a:ea typeface="Calibri" pitchFamily="34" charset="-122"/>
-                <a:cs typeface="Calibri" pitchFamily="34" charset="-120"/>
-              </a:rPr>
-              <a:t>Clique em «Instalar» (computador/Android) ou Partilhar → Adicionar ao ecrã principal (iPhone/iPad).</a:t>
-            </a:r>
-            <a:endParaRPr lang="en-US" sz="1100" dirty="0"/>
-          </a:p>
-        </p:txBody>
-      </p:sp>
-      <p:sp>
-        <p:nvSpPr>
-          <p:cNvPr id="18" name="Shape 14"/>
-          <p:cNvSpPr/>
-          <p:nvPr/>
-        </p:nvSpPr>
-        <p:spPr>
-          <a:xfrm>
-            <a:off x="6126480" y="1188720"/>
-            <a:ext cx="2651760" cy="2377440"/>
-          </a:xfrm>
-          <a:prstGeom prst="roundRect">
-            <a:avLst>
-              <a:gd name="adj" fmla="val 3077"/>
-            </a:avLst>
-          </a:prstGeom>
-          <a:solidFill>
-            <a:srgbClr val="F7F8FC"/>
-          </a:solidFill>
-          <a:ln w="9525">
-            <a:solidFill>
-              <a:srgbClr val="D9DCE8"/>
-            </a:solidFill>
-            <a:prstDash val="solid"/>
-          </a:ln>
-        </p:spPr>
-      </p:sp>
-      <p:sp>
-        <p:nvSpPr>
-          <p:cNvPr id="19" name="Shape 15"/>
-          <p:cNvSpPr/>
-          <p:nvPr/>
-        </p:nvSpPr>
-        <p:spPr>
-          <a:xfrm>
-            <a:off x="6355080" y="1417320"/>
-            <a:ext cx="548640" cy="548640"/>
-          </a:xfrm>
-          <a:prstGeom prst="ellipse">
-            <a:avLst/>
-          </a:prstGeom>
-          <a:solidFill>
-            <a:srgbClr val="2D39B9"/>
-          </a:solidFill>
-          <a:ln w="12700">
-            <a:solidFill>
-              <a:srgbClr val="2D39B9"/>
-            </a:solidFill>
-            <a:prstDash val="solid"/>
-          </a:ln>
-        </p:spPr>
-      </p:sp>
-      <p:pic>
-        <p:nvPicPr>
-          <p:cNvPr id="20" name="Image 2" descr="icons/sparkles-white.png">    </p:cNvPr>
-          <p:cNvPicPr>
-            <a:picLocks noChangeAspect="1"/>
-          </p:cNvPicPr>
-          <p:nvPr/>
-        </p:nvPicPr>
-        <p:blipFill>
-          <a:blip r:embed="rId3"/>
-          <a:stretch>
-            <a:fillRect/>
-          </a:stretch>
-        </p:blipFill>
-        <p:spPr>
-          <a:xfrm>
-            <a:off x="6486754" y="1548994"/>
-            <a:ext cx="285293" cy="285293"/>
-          </a:xfrm>
-          <a:prstGeom prst="rect">
-            <a:avLst/>
-          </a:prstGeom>
-        </p:spPr>
-      </p:pic>
-      <p:sp>
-        <p:nvSpPr>
-          <p:cNvPr id="21" name="Text 16"/>
-          <p:cNvSpPr txBox="1"/>
-          <p:nvPr/>
-        </p:nvSpPr>
-        <p:spPr>
-          <a:xfrm>
-            <a:off x="8138160" y="1325880"/>
-            <a:ext cx="457200" cy="548640"/>
-          </a:xfrm>
-          <a:prstGeom prst="rect">
-            <a:avLst/>
-          </a:prstGeom>
-          <a:noFill/>
-          <a:ln/>
-        </p:spPr>
-        <p:txBody>
-          <a:bodyPr wrap="square" lIns="0" tIns="0" rIns="0" bIns="0" rtlCol="0" anchor="ctr"/>
-          <a:lstStyle/>
-          <a:p>
-            <a:pPr algn="r" indent="0" marL="0">
-              <a:buNone/>
-            </a:pPr>
-            <a:r>
-              <a:rPr lang="en-US" sz="3000" b="1" dirty="0">
-                <a:solidFill>
-                  <a:srgbClr val="EEF0FB"/>
-                </a:solidFill>
-                <a:latin typeface="Cambria" pitchFamily="34" charset="0"/>
-                <a:ea typeface="Cambria" pitchFamily="34" charset="-122"/>
-                <a:cs typeface="Cambria" pitchFamily="34" charset="-120"/>
-              </a:rPr>
-              <a:t>3</a:t>
-            </a:r>
-            <a:endParaRPr lang="en-US" sz="3000" dirty="0"/>
-          </a:p>
-        </p:txBody>
-      </p:sp>
-      <p:sp>
-        <p:nvSpPr>
-          <p:cNvPr id="22" name="Text 17"/>
-          <p:cNvSpPr txBox="1"/>
-          <p:nvPr/>
-        </p:nvSpPr>
-        <p:spPr>
-          <a:xfrm>
-            <a:off x="6355080" y="2103120"/>
-            <a:ext cx="2194560" cy="365760"/>
-          </a:xfrm>
-          <a:prstGeom prst="rect">
-            <a:avLst/>
-          </a:prstGeom>
-          <a:noFill/>
-          <a:ln/>
-        </p:spPr>
-        <p:txBody>
-          <a:bodyPr wrap="square" lIns="0" tIns="0" rIns="0" bIns="0" rtlCol="0" anchor="t"/>
-          <a:lstStyle/>
-          <a:p>
-            <a:pPr indent="0" marL="0">
-              <a:buNone/>
-            </a:pPr>
-            <a:r>
-              <a:rPr lang="en-US" sz="1600" b="1" dirty="0">
+              <a:t>dossiers abertos e encerrados, prazos cumpridos e falhados.</a:t>
+            </a:r>
+            <a:endParaRPr lang="en-US" sz="1150" dirty="0"/>
+          </a:p>
+          <a:p>
+            <a:pPr marL="177800" indent="-177800">
+              <a:buSzPct val="100000"/>
+              <a:buChar char="•"/>
+            </a:pPr>
+            <a:r>
+              <a:rPr lang="en-US" sz="1150" b="1" dirty="0">
                 <a:solidFill>
                   <a:srgbClr val="1B1F3B"/>
                 </a:solidFill>
@@ -12661,153 +10719,16 @@
                 <a:ea typeface="Calibri" pitchFamily="34" charset="-122"/>
                 <a:cs typeface="Calibri" pitchFamily="34" charset="-120"/>
               </a:rPr>
-              <a:t>Explorar</a:t>
-            </a:r>
-            <a:endParaRPr lang="en-US" sz="1600" dirty="0"/>
-          </a:p>
-        </p:txBody>
-      </p:sp>
-      <p:sp>
-        <p:nvSpPr>
-          <p:cNvPr id="23" name="Text 18"/>
-          <p:cNvSpPr txBox="1"/>
-          <p:nvPr/>
-        </p:nvSpPr>
-        <p:spPr>
-          <a:xfrm>
-            <a:off x="6355080" y="2514600"/>
-            <a:ext cx="2194560" cy="1005840"/>
-          </a:xfrm>
-          <a:prstGeom prst="rect">
-            <a:avLst/>
-          </a:prstGeom>
-          <a:noFill/>
-          <a:ln/>
-        </p:spPr>
-        <p:txBody>
-          <a:bodyPr wrap="square" lIns="0" tIns="0" rIns="0" bIns="0" rtlCol="0" anchor="t"/>
-          <a:lstStyle/>
-          <a:p>
-            <a:pPr indent="0" marL="0">
-              <a:buNone/>
-            </a:pPr>
-            <a:r>
-              <a:rPr lang="en-US" sz="1100" dirty="0">
-                <a:solidFill>
-                  <a:srgbClr val="5B6180"/>
-                </a:solidFill>
-                <a:latin typeface="Calibri" pitchFamily="34" charset="0"/>
-                <a:ea typeface="Calibri" pitchFamily="34" charset="-122"/>
-                <a:cs typeface="Calibri" pitchFamily="34" charset="-120"/>
-              </a:rPr>
-              <a:t>Escolha «Explorar com dados fictícios» e percorra um dossier de demonstração; remova-os quando quiser.</a:t>
-            </a:r>
-            <a:endParaRPr lang="en-US" sz="1100" dirty="0"/>
-          </a:p>
-        </p:txBody>
-      </p:sp>
-      <p:sp>
-        <p:nvSpPr>
-          <p:cNvPr id="24" name="Shape 19"/>
-          <p:cNvSpPr/>
-          <p:nvPr/>
-        </p:nvSpPr>
-        <p:spPr>
-          <a:xfrm>
-            <a:off x="457200" y="3794760"/>
-            <a:ext cx="8229600" cy="685800"/>
-          </a:xfrm>
-          <a:prstGeom prst="roundRect">
-            <a:avLst>
-              <a:gd name="adj" fmla="val 10667"/>
-            </a:avLst>
-          </a:prstGeom>
-          <a:solidFill>
-            <a:srgbClr val="EEF0FB"/>
-          </a:solidFill>
-          <a:ln w="9525">
-            <a:solidFill>
-              <a:srgbClr val="EEF0FB"/>
-            </a:solidFill>
-            <a:prstDash val="solid"/>
-          </a:ln>
-        </p:spPr>
-      </p:sp>
-      <p:sp>
-        <p:nvSpPr>
-          <p:cNvPr id="25" name="Shape 20"/>
-          <p:cNvSpPr/>
-          <p:nvPr/>
-        </p:nvSpPr>
-        <p:spPr>
-          <a:xfrm>
-            <a:off x="640080" y="3904488"/>
-            <a:ext cx="457200" cy="457200"/>
-          </a:xfrm>
-          <a:prstGeom prst="ellipse">
-            <a:avLst/>
-          </a:prstGeom>
-          <a:solidFill>
-            <a:srgbClr val="2D39B9"/>
-          </a:solidFill>
-          <a:ln w="12700">
-            <a:solidFill>
-              <a:srgbClr val="2D39B9"/>
-            </a:solidFill>
-            <a:prstDash val="solid"/>
-          </a:ln>
-        </p:spPr>
-      </p:sp>
-      <p:pic>
-        <p:nvPicPr>
-          <p:cNvPr id="26" name="Image 3" descr="icons/book-open-white.png">    </p:cNvPr>
-          <p:cNvPicPr>
-            <a:picLocks noChangeAspect="1"/>
-          </p:cNvPicPr>
-          <p:nvPr/>
-        </p:nvPicPr>
-        <p:blipFill>
-          <a:blip r:embed="rId4"/>
-          <a:stretch>
-            <a:fillRect/>
-          </a:stretch>
-        </p:blipFill>
-        <p:spPr>
-          <a:xfrm>
-            <a:off x="749808" y="4014216"/>
-            <a:ext cx="237744" cy="237744"/>
-          </a:xfrm>
-          <a:prstGeom prst="rect">
-            <a:avLst/>
-          </a:prstGeom>
-        </p:spPr>
-      </p:pic>
-      <p:sp>
-        <p:nvSpPr>
-          <p:cNvPr id="27" name="Text 21"/>
-          <p:cNvSpPr txBox="1"/>
-          <p:nvPr/>
-        </p:nvSpPr>
-        <p:spPr>
-          <a:xfrm>
-            <a:off x="1234440" y="3931920"/>
-            <a:ext cx="7315200" cy="502920"/>
-          </a:xfrm>
-          <a:prstGeom prst="rect">
-            <a:avLst/>
-          </a:prstGeom>
-          <a:noFill/>
-          <a:ln/>
-        </p:spPr>
-        <p:txBody>
-          <a:bodyPr wrap="square" lIns="0" tIns="0" rIns="0" bIns="0" rtlCol="0" anchor="t"/>
-          <a:lstStyle/>
-          <a:p>
-            <a:pPr indent="0" marL="0">
-              <a:buNone/>
-            </a:pPr>
-            <a:r>
-              <a:rPr lang="en-US" sz="1100" dirty="0">
+              <a:t>Por fase: </a:t>
+            </a:r>
+            <a:pPr indent="0" marL="0">
+              <a:spcAft>
+                <a:spcPts val="600"/>
+              </a:spcAft>
+              <a:buNone/>
+            </a:pPr>
+            <a:r>
+              <a:rPr lang="en-US" sz="1150" dirty="0">
                 <a:solidFill>
                   <a:srgbClr val="1B1F3B"/>
                 </a:solidFill>
@@ -12815,9 +10736,79 @@
                 <a:ea typeface="Calibri" pitchFamily="34" charset="-122"/>
                 <a:cs typeface="Calibri" pitchFamily="34" charset="-120"/>
               </a:rPr>
-              <a:t>Manual do utilizador (Word e PDF, 18 capítulos e 7 anexos) e resumo executivo — na pasta docs/ do projeto: github.com/nelsonsous/balcao-sucessoes.</a:t>
-            </a:r>
-            <a:endParaRPr lang="en-US" sz="1100" dirty="0"/>
+              <a:t>tempo mediano até concluir cada fase e tarefas em aberto ou em atraso.</a:t>
+            </a:r>
+            <a:endParaRPr lang="en-US" sz="1150" dirty="0"/>
+          </a:p>
+          <a:p>
+            <a:pPr marL="177800" indent="-177800">
+              <a:buSzPct val="100000"/>
+              <a:buChar char="•"/>
+            </a:pPr>
+            <a:r>
+              <a:rPr lang="en-US" sz="1150" b="1" dirty="0">
+                <a:solidFill>
+                  <a:srgbClr val="1B1F3B"/>
+                </a:solidFill>
+                <a:latin typeface="Calibri" pitchFamily="34" charset="0"/>
+                <a:ea typeface="Calibri" pitchFamily="34" charset="-122"/>
+                <a:cs typeface="Calibri" pitchFamily="34" charset="-120"/>
+              </a:rPr>
+              <a:t>Por pessoa: </a:t>
+            </a:r>
+            <a:pPr indent="0" marL="0">
+              <a:spcAft>
+                <a:spcPts val="600"/>
+              </a:spcAft>
+              <a:buNone/>
+            </a:pPr>
+            <a:r>
+              <a:rPr lang="en-US" sz="1150" dirty="0">
+                <a:solidFill>
+                  <a:srgbClr val="1B1F3B"/>
+                </a:solidFill>
+                <a:latin typeface="Calibri" pitchFamily="34" charset="0"/>
+                <a:ea typeface="Calibri" pitchFamily="34" charset="-122"/>
+                <a:cs typeface="Calibri" pitchFamily="34" charset="-120"/>
+              </a:rPr>
+              <a:t>carga atual, prazos cumpridos e tempo médio de conclusão.</a:t>
+            </a:r>
+            <a:endParaRPr lang="en-US" sz="1150" dirty="0"/>
+          </a:p>
+          <a:p>
+            <a:pPr marL="177800" indent="-177800">
+              <a:buSzPct val="100000"/>
+              <a:buChar char="•"/>
+            </a:pPr>
+            <a:r>
+              <a:rPr lang="en-US" sz="1150" b="1" dirty="0">
+                <a:solidFill>
+                  <a:srgbClr val="1B1F3B"/>
+                </a:solidFill>
+                <a:latin typeface="Calibri" pitchFamily="34" charset="0"/>
+                <a:ea typeface="Calibri" pitchFamily="34" charset="-122"/>
+                <a:cs typeface="Calibri" pitchFamily="34" charset="-120"/>
+              </a:rPr>
+              <a:t>Acessível: </a:t>
+            </a:r>
+            <a:pPr indent="0" marL="0">
+              <a:spcAft>
+                <a:spcPts val="600"/>
+              </a:spcAft>
+              <a:buNone/>
+            </a:pPr>
+            <a:r>
+              <a:rPr lang="en-US" sz="1150" dirty="0">
+                <a:solidFill>
+                  <a:srgbClr val="1B1F3B"/>
+                </a:solidFill>
+                <a:latin typeface="Calibri" pitchFamily="34" charset="0"/>
+                <a:ea typeface="Calibri" pitchFamily="34" charset="-122"/>
+                <a:cs typeface="Calibri" pitchFamily="34" charset="-120"/>
+              </a:rPr>
+              <a:t>gráficos SVG com descrição textual e botão «Tabela»; período e pessoa à escolha; CSV.</a:t>
+            </a:r>
+            <a:endParaRPr lang="en-US" sz="1150" dirty="0"/>
           </a:p>
         </p:txBody>
       </p:sp>
@@ -12832,6 +10823,4452 @@
 <file path=ppt/slides/slide24.xml><?xml version="1.0" encoding="utf-8"?>
 <p:sld xmlns:a="http://schemas.openxmlformats.org/drawingml/2006/main" xmlns:r="http://schemas.openxmlformats.org/officeDocument/2006/relationships" xmlns:p="http://schemas.openxmlformats.org/presentationml/2006/main">
   <p:cSld name="Slide 24">
+    <p:bg>
+      <p:bgPr>
+        <a:solidFill>
+          <a:srgbClr val="FFFFFF"/>
+        </a:solidFill>
+      </p:bgPr>
+    </p:bg>
+    <p:spTree>
+      <p:nvGrpSpPr>
+        <p:cNvPr id="1" name=""/>
+        <p:cNvGrpSpPr/>
+        <p:nvPr/>
+      </p:nvGrpSpPr>
+      <p:grpSpPr>
+        <a:xfrm>
+          <a:off x="0" y="0"/>
+          <a:ext cx="0" cy="0"/>
+          <a:chOff x="0" y="0"/>
+          <a:chExt cx="0" cy="0"/>
+        </a:xfrm>
+      </p:grpSpPr>
+      <p:sp>
+        <p:nvSpPr>
+          <p:cNvPr id="2" name="Text 0"/>
+          <p:cNvSpPr txBox="1"/>
+          <p:nvPr/>
+        </p:nvSpPr>
+        <p:spPr>
+          <a:xfrm>
+            <a:off x="457200" y="128016"/>
+            <a:ext cx="8229600" cy="228600"/>
+          </a:xfrm>
+          <a:prstGeom prst="rect">
+            <a:avLst/>
+          </a:prstGeom>
+          <a:noFill/>
+          <a:ln/>
+        </p:spPr>
+        <p:txBody>
+          <a:bodyPr wrap="square" lIns="0" tIns="0" rIns="0" bIns="0" rtlCol="0" anchor="ctr"/>
+          <a:lstStyle/>
+          <a:p>
+            <a:pPr indent="0" marL="0">
+              <a:buNone/>
+            </a:pPr>
+            <a:r>
+              <a:rPr lang="en-US" sz="1000" b="1" spc="200" kern="0" dirty="0">
+                <a:solidFill>
+                  <a:srgbClr val="2D39B9"/>
+                </a:solidFill>
+                <a:latin typeface="Calibri" pitchFamily="34" charset="0"/>
+                <a:ea typeface="Calibri" pitchFamily="34" charset="-122"/>
+                <a:cs typeface="Calibri" pitchFamily="34" charset="-120"/>
+              </a:rPr>
+              <a:t>NOVIDADES 2.1</a:t>
+            </a:r>
+            <a:endParaRPr lang="en-US" sz="1000" dirty="0"/>
+          </a:p>
+        </p:txBody>
+      </p:sp>
+      <p:sp>
+        <p:nvSpPr>
+          <p:cNvPr id="3" name="Text 1"/>
+          <p:cNvSpPr txBox="1"/>
+          <p:nvPr/>
+        </p:nvSpPr>
+        <p:spPr>
+          <a:xfrm>
+            <a:off x="457200" y="347472"/>
+            <a:ext cx="8229600" cy="548640"/>
+          </a:xfrm>
+          <a:prstGeom prst="rect">
+            <a:avLst/>
+          </a:prstGeom>
+          <a:noFill/>
+          <a:ln/>
+        </p:spPr>
+        <p:txBody>
+          <a:bodyPr wrap="square" lIns="0" tIns="0" rIns="0" bIns="0" rtlCol="0" anchor="ctr"/>
+          <a:lstStyle/>
+          <a:p>
+            <a:pPr indent="0" marL="0">
+              <a:buNone/>
+            </a:pPr>
+            <a:r>
+              <a:rPr lang="en-US" sz="2800" b="1" dirty="0">
+                <a:solidFill>
+                  <a:srgbClr val="1B1F3B"/>
+                </a:solidFill>
+                <a:latin typeface="Cambria" pitchFamily="34" charset="0"/>
+                <a:ea typeface="Cambria" pitchFamily="34" charset="-122"/>
+                <a:cs typeface="Cambria" pitchFamily="34" charset="-120"/>
+              </a:rPr>
+              <a:t>Pesquisa, vistas e documentos com validade</a:t>
+            </a:r>
+            <a:endParaRPr lang="en-US" sz="2800" dirty="0"/>
+          </a:p>
+        </p:txBody>
+      </p:sp>
+      <p:sp>
+        <p:nvSpPr>
+          <p:cNvPr id="4" name="Text 2"/>
+          <p:cNvSpPr txBox="1"/>
+          <p:nvPr/>
+        </p:nvSpPr>
+        <p:spPr>
+          <a:xfrm>
+            <a:off x="457200" y="4773168"/>
+            <a:ext cx="3657600" cy="228600"/>
+          </a:xfrm>
+          <a:prstGeom prst="rect">
+            <a:avLst/>
+          </a:prstGeom>
+          <a:noFill/>
+          <a:ln/>
+        </p:spPr>
+        <p:txBody>
+          <a:bodyPr wrap="square" lIns="0" tIns="0" rIns="0" bIns="0" rtlCol="0" anchor="ctr"/>
+          <a:lstStyle/>
+          <a:p>
+            <a:pPr indent="0" marL="0">
+              <a:buNone/>
+            </a:pPr>
+            <a:r>
+              <a:rPr lang="en-US" sz="900" dirty="0">
+                <a:solidFill>
+                  <a:srgbClr val="5B6180"/>
+                </a:solidFill>
+                <a:latin typeface="Calibri" pitchFamily="34" charset="0"/>
+                <a:ea typeface="Calibri" pitchFamily="34" charset="-122"/>
+                <a:cs typeface="Calibri" pitchFamily="34" charset="-120"/>
+              </a:rPr>
+              <a:t>Balcão das Sucessões</a:t>
+            </a:r>
+            <a:endParaRPr lang="en-US" sz="900" dirty="0"/>
+          </a:p>
+        </p:txBody>
+      </p:sp>
+      <p:sp>
+        <p:nvSpPr>
+          <p:cNvPr id="5" name="Text 3"/>
+          <p:cNvSpPr txBox="1"/>
+          <p:nvPr/>
+        </p:nvSpPr>
+        <p:spPr>
+          <a:xfrm>
+            <a:off x="8138160" y="4773168"/>
+            <a:ext cx="548640" cy="228600"/>
+          </a:xfrm>
+          <a:prstGeom prst="rect">
+            <a:avLst/>
+          </a:prstGeom>
+          <a:noFill/>
+          <a:ln/>
+        </p:spPr>
+        <p:txBody>
+          <a:bodyPr wrap="square" lIns="0" tIns="0" rIns="0" bIns="0" rtlCol="0" anchor="ctr"/>
+          <a:lstStyle/>
+          <a:p>
+            <a:pPr algn="r" indent="0" marL="0">
+              <a:buNone/>
+            </a:pPr>
+            <a:r>
+              <a:rPr lang="en-US" sz="900" dirty="0">
+                <a:solidFill>
+                  <a:srgbClr val="5B6180"/>
+                </a:solidFill>
+                <a:latin typeface="Calibri" pitchFamily="34" charset="0"/>
+                <a:ea typeface="Calibri" pitchFamily="34" charset="-122"/>
+                <a:cs typeface="Calibri" pitchFamily="34" charset="-120"/>
+              </a:rPr>
+              <a:t>24</a:t>
+            </a:r>
+            <a:endParaRPr lang="en-US" sz="900" dirty="0"/>
+          </a:p>
+        </p:txBody>
+      </p:sp>
+      <p:sp>
+        <p:nvSpPr>
+          <p:cNvPr id="6" name="Shape 4"/>
+          <p:cNvSpPr/>
+          <p:nvPr/>
+        </p:nvSpPr>
+        <p:spPr>
+          <a:xfrm>
+            <a:off x="457200" y="1097280"/>
+            <a:ext cx="4023360" cy="2514600"/>
+          </a:xfrm>
+          <a:prstGeom prst="roundRect">
+            <a:avLst>
+              <a:gd name="adj" fmla="val 3636"/>
+            </a:avLst>
+          </a:prstGeom>
+          <a:solidFill>
+            <a:srgbClr val="FFFFFF"/>
+          </a:solidFill>
+          <a:ln w="9525">
+            <a:solidFill>
+              <a:srgbClr val="D9DCE8"/>
+            </a:solidFill>
+            <a:prstDash val="solid"/>
+          </a:ln>
+          <a:effectLst>
+            <a:outerShdw sx="100000" sy="100000" kx="0" ky="0" algn="bl" rotWithShape="0" blurRad="101600" dist="25400" dir="5400000">
+              <a:srgbClr val="000000">
+                <a:alpha val="16000"/>
+              </a:srgbClr>
+            </a:outerShdw>
+          </a:effectLst>
+        </p:spPr>
+      </p:sp>
+      <p:pic>
+        <p:nvPicPr>
+          <p:cNvPr id="7" name="Image 0" descr="img/60-filtros.jpg">    </p:cNvPr>
+          <p:cNvPicPr>
+            <a:picLocks noChangeAspect="1"/>
+          </p:cNvPicPr>
+          <p:nvPr/>
+        </p:nvPicPr>
+        <p:blipFill>
+          <a:blip r:embed="rId1"/>
+          <a:stretch>
+            <a:fillRect/>
+          </a:stretch>
+        </p:blipFill>
+        <p:spPr>
+          <a:xfrm>
+            <a:off x="521208" y="1161288"/>
+            <a:ext cx="3895344" cy="2386584"/>
+          </a:xfrm>
+          <a:prstGeom prst="rect">
+            <a:avLst/>
+          </a:prstGeom>
+        </p:spPr>
+      </p:pic>
+      <p:sp>
+        <p:nvSpPr>
+          <p:cNvPr id="8" name="Shape 5"/>
+          <p:cNvSpPr/>
+          <p:nvPr/>
+        </p:nvSpPr>
+        <p:spPr>
+          <a:xfrm>
+            <a:off x="4663440" y="1097280"/>
+            <a:ext cx="4023360" cy="2514600"/>
+          </a:xfrm>
+          <a:prstGeom prst="roundRect">
+            <a:avLst>
+              <a:gd name="adj" fmla="val 3636"/>
+            </a:avLst>
+          </a:prstGeom>
+          <a:solidFill>
+            <a:srgbClr val="FFFFFF"/>
+          </a:solidFill>
+          <a:ln w="9525">
+            <a:solidFill>
+              <a:srgbClr val="D9DCE8"/>
+            </a:solidFill>
+            <a:prstDash val="solid"/>
+          </a:ln>
+          <a:effectLst>
+            <a:outerShdw sx="100000" sy="100000" kx="0" ky="0" algn="bl" rotWithShape="0" blurRad="101600" dist="25400" dir="5400000">
+              <a:srgbClr val="000000">
+                <a:alpha val="16000"/>
+              </a:srgbClr>
+            </a:outerShdw>
+          </a:effectLst>
+        </p:spPr>
+      </p:sp>
+      <p:pic>
+        <p:nvPicPr>
+          <p:cNvPr id="9" name="Image 1" descr="img/63-pedido-documentos.jpg">    </p:cNvPr>
+          <p:cNvPicPr>
+            <a:picLocks noChangeAspect="1"/>
+          </p:cNvPicPr>
+          <p:nvPr/>
+        </p:nvPicPr>
+        <p:blipFill>
+          <a:blip r:embed="rId2"/>
+          <a:stretch>
+            <a:fillRect/>
+          </a:stretch>
+        </p:blipFill>
+        <p:spPr>
+          <a:xfrm>
+            <a:off x="4727448" y="1161288"/>
+            <a:ext cx="3895344" cy="2386584"/>
+          </a:xfrm>
+          <a:prstGeom prst="rect">
+            <a:avLst/>
+          </a:prstGeom>
+        </p:spPr>
+      </p:pic>
+      <p:sp>
+        <p:nvSpPr>
+          <p:cNvPr id="10" name="Text 6"/>
+          <p:cNvSpPr txBox="1"/>
+          <p:nvPr/>
+        </p:nvSpPr>
+        <p:spPr>
+          <a:xfrm>
+            <a:off x="457200" y="3749040"/>
+            <a:ext cx="8229600" cy="914400"/>
+          </a:xfrm>
+          <a:prstGeom prst="rect">
+            <a:avLst/>
+          </a:prstGeom>
+          <a:noFill/>
+          <a:ln/>
+        </p:spPr>
+        <p:txBody>
+          <a:bodyPr wrap="square" lIns="0" tIns="0" rIns="0" bIns="0" rtlCol="0" anchor="t"/>
+          <a:lstStyle/>
+          <a:p>
+            <a:pPr marL="177800" indent="-177800">
+              <a:buSzPct val="100000"/>
+              <a:buChar char="•"/>
+            </a:pPr>
+            <a:r>
+              <a:rPr lang="en-US" sz="1150" b="1" dirty="0">
+                <a:solidFill>
+                  <a:srgbClr val="1B1F3B"/>
+                </a:solidFill>
+                <a:latin typeface="Calibri" pitchFamily="34" charset="0"/>
+                <a:ea typeface="Calibri" pitchFamily="34" charset="-122"/>
+                <a:cs typeface="Calibri" pitchFamily="34" charset="-120"/>
+              </a:rPr>
+              <a:t>Pesquisa e vistas: </a:t>
+            </a:r>
+            <a:pPr indent="0" marL="0">
+              <a:spcAft>
+                <a:spcPts val="400"/>
+              </a:spcAft>
+              <a:buNone/>
+            </a:pPr>
+            <a:r>
+              <a:rPr lang="en-US" sz="1150" dirty="0">
+                <a:solidFill>
+                  <a:srgbClr val="1B1F3B"/>
+                </a:solidFill>
+                <a:latin typeface="Calibri" pitchFamily="34" charset="0"/>
+                <a:ea typeface="Calibri" pitchFamily="34" charset="-122"/>
+                <a:cs typeface="Calibri" pitchFamily="34" charset="-120"/>
+              </a:rPr>
+              <a:t>filtros por prioridade, etiqueta, fase, prazos, óbito e internacional, no endereço da página; vistas predefinidas e guardadas com nome; pesquisa profunda e global (notas, contactos, documentos).</a:t>
+            </a:r>
+            <a:endParaRPr lang="en-US" sz="1150" dirty="0"/>
+          </a:p>
+          <a:p>
+            <a:pPr marL="177800" indent="-177800">
+              <a:buSzPct val="100000"/>
+              <a:buChar char="•"/>
+            </a:pPr>
+            <a:r>
+              <a:rPr lang="en-US" sz="1150" b="1" dirty="0">
+                <a:solidFill>
+                  <a:srgbClr val="1B1F3B"/>
+                </a:solidFill>
+                <a:latin typeface="Calibri" pitchFamily="34" charset="0"/>
+                <a:ea typeface="Calibri" pitchFamily="34" charset="-122"/>
+                <a:cs typeface="Calibri" pitchFamily="34" charset="-120"/>
+              </a:rPr>
+              <a:t>Documentos: </a:t>
+            </a:r>
+            <a:pPr indent="0" marL="0">
+              <a:spcAft>
+                <a:spcPts val="400"/>
+              </a:spcAft>
+              <a:buNone/>
+            </a:pPr>
+            <a:r>
+              <a:rPr lang="en-US" sz="1150" dirty="0">
+                <a:solidFill>
+                  <a:srgbClr val="1B1F3B"/>
+                </a:solidFill>
+                <a:latin typeface="Calibri" pitchFamily="34" charset="0"/>
+                <a:ea typeface="Calibri" pitchFamily="34" charset="-122"/>
+                <a:cs typeface="Calibri" pitchFamily="34" charset="-120"/>
+              </a:rPr>
+              <a:t>validade das certidões com avisos, pedidos de documentos por interessado com texto pronto e e-mail, pré-visualização de anexos e estados em lote.</a:t>
+            </a:r>
+            <a:endParaRPr lang="en-US" sz="1150" dirty="0"/>
+          </a:p>
+        </p:txBody>
+      </p:sp>
+    </p:spTree>
+  </p:cSld>
+  <p:clrMapOvr>
+    <a:masterClrMapping/>
+  </p:clrMapOvr>
+</p:sld>
+</file>
+
+<file path=ppt/slides/slide25.xml><?xml version="1.0" encoding="utf-8"?>
+<p:sld xmlns:a="http://schemas.openxmlformats.org/drawingml/2006/main" xmlns:r="http://schemas.openxmlformats.org/officeDocument/2006/relationships" xmlns:p="http://schemas.openxmlformats.org/presentationml/2006/main">
+  <p:cSld name="Slide 25">
+    <p:bg>
+      <p:bgPr>
+        <a:solidFill>
+          <a:srgbClr val="FFFFFF"/>
+        </a:solidFill>
+      </p:bgPr>
+    </p:bg>
+    <p:spTree>
+      <p:nvGrpSpPr>
+        <p:cNvPr id="1" name=""/>
+        <p:cNvGrpSpPr/>
+        <p:nvPr/>
+      </p:nvGrpSpPr>
+      <p:grpSpPr>
+        <a:xfrm>
+          <a:off x="0" y="0"/>
+          <a:ext cx="0" cy="0"/>
+          <a:chOff x="0" y="0"/>
+          <a:chExt cx="0" cy="0"/>
+        </a:xfrm>
+      </p:grpSpPr>
+      <p:sp>
+        <p:nvSpPr>
+          <p:cNvPr id="2" name="Text 0"/>
+          <p:cNvSpPr txBox="1"/>
+          <p:nvPr/>
+        </p:nvSpPr>
+        <p:spPr>
+          <a:xfrm>
+            <a:off x="457200" y="128016"/>
+            <a:ext cx="8229600" cy="228600"/>
+          </a:xfrm>
+          <a:prstGeom prst="rect">
+            <a:avLst/>
+          </a:prstGeom>
+          <a:noFill/>
+          <a:ln/>
+        </p:spPr>
+        <p:txBody>
+          <a:bodyPr wrap="square" lIns="0" tIns="0" rIns="0" bIns="0" rtlCol="0" anchor="ctr"/>
+          <a:lstStyle/>
+          <a:p>
+            <a:pPr indent="0" marL="0">
+              <a:buNone/>
+            </a:pPr>
+            <a:r>
+              <a:rPr lang="en-US" sz="1000" b="1" spc="200" kern="0" dirty="0">
+                <a:solidFill>
+                  <a:srgbClr val="2D39B9"/>
+                </a:solidFill>
+                <a:latin typeface="Calibri" pitchFamily="34" charset="0"/>
+                <a:ea typeface="Calibri" pitchFamily="34" charset="-122"/>
+                <a:cs typeface="Calibri" pitchFamily="34" charset="-120"/>
+              </a:rPr>
+              <a:t>EM NÚMEROS</a:t>
+            </a:r>
+            <a:endParaRPr lang="en-US" sz="1000" dirty="0"/>
+          </a:p>
+        </p:txBody>
+      </p:sp>
+      <p:sp>
+        <p:nvSpPr>
+          <p:cNvPr id="3" name="Text 1"/>
+          <p:cNvSpPr txBox="1"/>
+          <p:nvPr/>
+        </p:nvSpPr>
+        <p:spPr>
+          <a:xfrm>
+            <a:off x="457200" y="347472"/>
+            <a:ext cx="8229600" cy="548640"/>
+          </a:xfrm>
+          <a:prstGeom prst="rect">
+            <a:avLst/>
+          </a:prstGeom>
+          <a:noFill/>
+          <a:ln/>
+        </p:spPr>
+        <p:txBody>
+          <a:bodyPr wrap="square" lIns="0" tIns="0" rIns="0" bIns="0" rtlCol="0" anchor="ctr"/>
+          <a:lstStyle/>
+          <a:p>
+            <a:pPr indent="0" marL="0">
+              <a:buNone/>
+            </a:pPr>
+            <a:r>
+              <a:rPr lang="en-US" sz="2800" b="1" dirty="0">
+                <a:solidFill>
+                  <a:srgbClr val="1B1F3B"/>
+                </a:solidFill>
+                <a:latin typeface="Cambria" pitchFamily="34" charset="0"/>
+                <a:ea typeface="Cambria" pitchFamily="34" charset="-122"/>
+                <a:cs typeface="Cambria" pitchFamily="34" charset="-120"/>
+              </a:rPr>
+              <a:t>O que já está construído</a:t>
+            </a:r>
+            <a:endParaRPr lang="en-US" sz="2800" dirty="0"/>
+          </a:p>
+        </p:txBody>
+      </p:sp>
+      <p:sp>
+        <p:nvSpPr>
+          <p:cNvPr id="4" name="Text 2"/>
+          <p:cNvSpPr txBox="1"/>
+          <p:nvPr/>
+        </p:nvSpPr>
+        <p:spPr>
+          <a:xfrm>
+            <a:off x="457200" y="4773168"/>
+            <a:ext cx="3657600" cy="228600"/>
+          </a:xfrm>
+          <a:prstGeom prst="rect">
+            <a:avLst/>
+          </a:prstGeom>
+          <a:noFill/>
+          <a:ln/>
+        </p:spPr>
+        <p:txBody>
+          <a:bodyPr wrap="square" lIns="0" tIns="0" rIns="0" bIns="0" rtlCol="0" anchor="ctr"/>
+          <a:lstStyle/>
+          <a:p>
+            <a:pPr indent="0" marL="0">
+              <a:buNone/>
+            </a:pPr>
+            <a:r>
+              <a:rPr lang="en-US" sz="900" dirty="0">
+                <a:solidFill>
+                  <a:srgbClr val="5B6180"/>
+                </a:solidFill>
+                <a:latin typeface="Calibri" pitchFamily="34" charset="0"/>
+                <a:ea typeface="Calibri" pitchFamily="34" charset="-122"/>
+                <a:cs typeface="Calibri" pitchFamily="34" charset="-120"/>
+              </a:rPr>
+              <a:t>Balcão das Sucessões</a:t>
+            </a:r>
+            <a:endParaRPr lang="en-US" sz="900" dirty="0"/>
+          </a:p>
+        </p:txBody>
+      </p:sp>
+      <p:sp>
+        <p:nvSpPr>
+          <p:cNvPr id="5" name="Text 3"/>
+          <p:cNvSpPr txBox="1"/>
+          <p:nvPr/>
+        </p:nvSpPr>
+        <p:spPr>
+          <a:xfrm>
+            <a:off x="8138160" y="4773168"/>
+            <a:ext cx="548640" cy="228600"/>
+          </a:xfrm>
+          <a:prstGeom prst="rect">
+            <a:avLst/>
+          </a:prstGeom>
+          <a:noFill/>
+          <a:ln/>
+        </p:spPr>
+        <p:txBody>
+          <a:bodyPr wrap="square" lIns="0" tIns="0" rIns="0" bIns="0" rtlCol="0" anchor="ctr"/>
+          <a:lstStyle/>
+          <a:p>
+            <a:pPr algn="r" indent="0" marL="0">
+              <a:buNone/>
+            </a:pPr>
+            <a:r>
+              <a:rPr lang="en-US" sz="900" dirty="0">
+                <a:solidFill>
+                  <a:srgbClr val="5B6180"/>
+                </a:solidFill>
+                <a:latin typeface="Calibri" pitchFamily="34" charset="0"/>
+                <a:ea typeface="Calibri" pitchFamily="34" charset="-122"/>
+                <a:cs typeface="Calibri" pitchFamily="34" charset="-120"/>
+              </a:rPr>
+              <a:t>25</a:t>
+            </a:r>
+            <a:endParaRPr lang="en-US" sz="900" dirty="0"/>
+          </a:p>
+        </p:txBody>
+      </p:sp>
+      <p:sp>
+        <p:nvSpPr>
+          <p:cNvPr id="6" name="Shape 4"/>
+          <p:cNvSpPr/>
+          <p:nvPr/>
+        </p:nvSpPr>
+        <p:spPr>
+          <a:xfrm>
+            <a:off x="457200" y="1188720"/>
+            <a:ext cx="1920240" cy="1417320"/>
+          </a:xfrm>
+          <a:prstGeom prst="roundRect">
+            <a:avLst>
+              <a:gd name="adj" fmla="val 5161"/>
+            </a:avLst>
+          </a:prstGeom>
+          <a:solidFill>
+            <a:srgbClr val="F7F8FC"/>
+          </a:solidFill>
+          <a:ln w="9525">
+            <a:solidFill>
+              <a:srgbClr val="D9DCE8"/>
+            </a:solidFill>
+            <a:prstDash val="solid"/>
+          </a:ln>
+        </p:spPr>
+      </p:sp>
+      <p:sp>
+        <p:nvSpPr>
+          <p:cNvPr id="7" name="Text 5"/>
+          <p:cNvSpPr txBox="1"/>
+          <p:nvPr/>
+        </p:nvSpPr>
+        <p:spPr>
+          <a:xfrm>
+            <a:off x="457200" y="1325880"/>
+            <a:ext cx="1920240" cy="731520"/>
+          </a:xfrm>
+          <a:prstGeom prst="rect">
+            <a:avLst/>
+          </a:prstGeom>
+          <a:noFill/>
+          <a:ln/>
+        </p:spPr>
+        <p:txBody>
+          <a:bodyPr wrap="square" lIns="0" tIns="0" rIns="0" bIns="0" rtlCol="0" anchor="ctr"/>
+          <a:lstStyle/>
+          <a:p>
+            <a:pPr algn="ctr" indent="0" marL="0">
+              <a:buNone/>
+            </a:pPr>
+            <a:r>
+              <a:rPr lang="en-US" sz="4400" b="1" dirty="0">
+                <a:solidFill>
+                  <a:srgbClr val="2D39B9"/>
+                </a:solidFill>
+                <a:latin typeface="Cambria" pitchFamily="34" charset="0"/>
+                <a:ea typeface="Cambria" pitchFamily="34" charset="-122"/>
+                <a:cs typeface="Cambria" pitchFamily="34" charset="-120"/>
+              </a:rPr>
+              <a:t>27</a:t>
+            </a:r>
+            <a:endParaRPr lang="en-US" sz="4400" dirty="0"/>
+          </a:p>
+        </p:txBody>
+      </p:sp>
+      <p:sp>
+        <p:nvSpPr>
+          <p:cNvPr id="8" name="Text 6"/>
+          <p:cNvSpPr txBox="1"/>
+          <p:nvPr/>
+        </p:nvSpPr>
+        <p:spPr>
+          <a:xfrm>
+            <a:off x="457200" y="2057400"/>
+            <a:ext cx="1920240" cy="365760"/>
+          </a:xfrm>
+          <a:prstGeom prst="rect">
+            <a:avLst/>
+          </a:prstGeom>
+          <a:noFill/>
+          <a:ln/>
+        </p:spPr>
+        <p:txBody>
+          <a:bodyPr wrap="square" lIns="0" tIns="0" rIns="0" bIns="0" rtlCol="0" anchor="ctr"/>
+          <a:lstStyle/>
+          <a:p>
+            <a:pPr algn="ctr" indent="0" marL="0">
+              <a:buNone/>
+            </a:pPr>
+            <a:r>
+              <a:rPr lang="en-US" sz="1200" dirty="0">
+                <a:solidFill>
+                  <a:srgbClr val="5B6180"/>
+                </a:solidFill>
+                <a:latin typeface="Calibri" pitchFamily="34" charset="0"/>
+                <a:ea typeface="Calibri" pitchFamily="34" charset="-122"/>
+                <a:cs typeface="Calibri" pitchFamily="34" charset="-120"/>
+              </a:rPr>
+              <a:t>perguntas</a:t>
+            </a:r>
+            <a:endParaRPr lang="en-US" sz="1200" dirty="0"/>
+          </a:p>
+        </p:txBody>
+      </p:sp>
+      <p:sp>
+        <p:nvSpPr>
+          <p:cNvPr id="9" name="Shape 7"/>
+          <p:cNvSpPr/>
+          <p:nvPr/>
+        </p:nvSpPr>
+        <p:spPr>
+          <a:xfrm>
+            <a:off x="2560320" y="1188720"/>
+            <a:ext cx="1920240" cy="1417320"/>
+          </a:xfrm>
+          <a:prstGeom prst="roundRect">
+            <a:avLst>
+              <a:gd name="adj" fmla="val 5161"/>
+            </a:avLst>
+          </a:prstGeom>
+          <a:solidFill>
+            <a:srgbClr val="F7F8FC"/>
+          </a:solidFill>
+          <a:ln w="9525">
+            <a:solidFill>
+              <a:srgbClr val="D9DCE8"/>
+            </a:solidFill>
+            <a:prstDash val="solid"/>
+          </a:ln>
+        </p:spPr>
+      </p:sp>
+      <p:sp>
+        <p:nvSpPr>
+          <p:cNvPr id="10" name="Text 8"/>
+          <p:cNvSpPr txBox="1"/>
+          <p:nvPr/>
+        </p:nvSpPr>
+        <p:spPr>
+          <a:xfrm>
+            <a:off x="2560320" y="1325880"/>
+            <a:ext cx="1920240" cy="731520"/>
+          </a:xfrm>
+          <a:prstGeom prst="rect">
+            <a:avLst/>
+          </a:prstGeom>
+          <a:noFill/>
+          <a:ln/>
+        </p:spPr>
+        <p:txBody>
+          <a:bodyPr wrap="square" lIns="0" tIns="0" rIns="0" bIns="0" rtlCol="0" anchor="ctr"/>
+          <a:lstStyle/>
+          <a:p>
+            <a:pPr algn="ctr" indent="0" marL="0">
+              <a:buNone/>
+            </a:pPr>
+            <a:r>
+              <a:rPr lang="en-US" sz="4400" b="1" dirty="0">
+                <a:solidFill>
+                  <a:srgbClr val="2D39B9"/>
+                </a:solidFill>
+                <a:latin typeface="Cambria" pitchFamily="34" charset="0"/>
+                <a:ea typeface="Cambria" pitchFamily="34" charset="-122"/>
+                <a:cs typeface="Cambria" pitchFamily="34" charset="-120"/>
+              </a:rPr>
+              <a:t>59</a:t>
+            </a:r>
+            <a:endParaRPr lang="en-US" sz="4400" dirty="0"/>
+          </a:p>
+        </p:txBody>
+      </p:sp>
+      <p:sp>
+        <p:nvSpPr>
+          <p:cNvPr id="11" name="Text 9"/>
+          <p:cNvSpPr txBox="1"/>
+          <p:nvPr/>
+        </p:nvSpPr>
+        <p:spPr>
+          <a:xfrm>
+            <a:off x="2560320" y="2057400"/>
+            <a:ext cx="1920240" cy="365760"/>
+          </a:xfrm>
+          <a:prstGeom prst="rect">
+            <a:avLst/>
+          </a:prstGeom>
+          <a:noFill/>
+          <a:ln/>
+        </p:spPr>
+        <p:txBody>
+          <a:bodyPr wrap="square" lIns="0" tIns="0" rIns="0" bIns="0" rtlCol="0" anchor="ctr"/>
+          <a:lstStyle/>
+          <a:p>
+            <a:pPr algn="ctr" indent="0" marL="0">
+              <a:buNone/>
+            </a:pPr>
+            <a:r>
+              <a:rPr lang="en-US" sz="1200" dirty="0">
+                <a:solidFill>
+                  <a:srgbClr val="5B6180"/>
+                </a:solidFill>
+                <a:latin typeface="Calibri" pitchFamily="34" charset="0"/>
+                <a:ea typeface="Calibri" pitchFamily="34" charset="-122"/>
+                <a:cs typeface="Calibri" pitchFamily="34" charset="-120"/>
+              </a:rPr>
+              <a:t>regras</a:t>
+            </a:r>
+            <a:endParaRPr lang="en-US" sz="1200" dirty="0"/>
+          </a:p>
+        </p:txBody>
+      </p:sp>
+      <p:sp>
+        <p:nvSpPr>
+          <p:cNvPr id="12" name="Shape 10"/>
+          <p:cNvSpPr/>
+          <p:nvPr/>
+        </p:nvSpPr>
+        <p:spPr>
+          <a:xfrm>
+            <a:off x="4663440" y="1188720"/>
+            <a:ext cx="1920240" cy="1417320"/>
+          </a:xfrm>
+          <a:prstGeom prst="roundRect">
+            <a:avLst>
+              <a:gd name="adj" fmla="val 5161"/>
+            </a:avLst>
+          </a:prstGeom>
+          <a:solidFill>
+            <a:srgbClr val="F7F8FC"/>
+          </a:solidFill>
+          <a:ln w="9525">
+            <a:solidFill>
+              <a:srgbClr val="D9DCE8"/>
+            </a:solidFill>
+            <a:prstDash val="solid"/>
+          </a:ln>
+        </p:spPr>
+      </p:sp>
+      <p:sp>
+        <p:nvSpPr>
+          <p:cNvPr id="13" name="Text 11"/>
+          <p:cNvSpPr txBox="1"/>
+          <p:nvPr/>
+        </p:nvSpPr>
+        <p:spPr>
+          <a:xfrm>
+            <a:off x="4663440" y="1325880"/>
+            <a:ext cx="1920240" cy="731520"/>
+          </a:xfrm>
+          <a:prstGeom prst="rect">
+            <a:avLst/>
+          </a:prstGeom>
+          <a:noFill/>
+          <a:ln/>
+        </p:spPr>
+        <p:txBody>
+          <a:bodyPr wrap="square" lIns="0" tIns="0" rIns="0" bIns="0" rtlCol="0" anchor="ctr"/>
+          <a:lstStyle/>
+          <a:p>
+            <a:pPr algn="ctr" indent="0" marL="0">
+              <a:buNone/>
+            </a:pPr>
+            <a:r>
+              <a:rPr lang="en-US" sz="4400" b="1" dirty="0">
+                <a:solidFill>
+                  <a:srgbClr val="2D39B9"/>
+                </a:solidFill>
+                <a:latin typeface="Cambria" pitchFamily="34" charset="0"/>
+                <a:ea typeface="Cambria" pitchFamily="34" charset="-122"/>
+                <a:cs typeface="Cambria" pitchFamily="34" charset="-120"/>
+              </a:rPr>
+              <a:t>80</a:t>
+            </a:r>
+            <a:endParaRPr lang="en-US" sz="4400" dirty="0"/>
+          </a:p>
+        </p:txBody>
+      </p:sp>
+      <p:sp>
+        <p:nvSpPr>
+          <p:cNvPr id="14" name="Text 12"/>
+          <p:cNvSpPr txBox="1"/>
+          <p:nvPr/>
+        </p:nvSpPr>
+        <p:spPr>
+          <a:xfrm>
+            <a:off x="4663440" y="2057400"/>
+            <a:ext cx="1920240" cy="365760"/>
+          </a:xfrm>
+          <a:prstGeom prst="rect">
+            <a:avLst/>
+          </a:prstGeom>
+          <a:noFill/>
+          <a:ln/>
+        </p:spPr>
+        <p:txBody>
+          <a:bodyPr wrap="square" lIns="0" tIns="0" rIns="0" bIns="0" rtlCol="0" anchor="ctr"/>
+          <a:lstStyle/>
+          <a:p>
+            <a:pPr algn="ctr" indent="0" marL="0">
+              <a:buNone/>
+            </a:pPr>
+            <a:r>
+              <a:rPr lang="en-US" sz="1200" dirty="0">
+                <a:solidFill>
+                  <a:srgbClr val="5B6180"/>
+                </a:solidFill>
+                <a:latin typeface="Calibri" pitchFamily="34" charset="0"/>
+                <a:ea typeface="Calibri" pitchFamily="34" charset="-122"/>
+                <a:cs typeface="Calibri" pitchFamily="34" charset="-120"/>
+              </a:rPr>
+              <a:t>tarefas</a:t>
+            </a:r>
+            <a:endParaRPr lang="en-US" sz="1200" dirty="0"/>
+          </a:p>
+        </p:txBody>
+      </p:sp>
+      <p:sp>
+        <p:nvSpPr>
+          <p:cNvPr id="15" name="Shape 13"/>
+          <p:cNvSpPr/>
+          <p:nvPr/>
+        </p:nvSpPr>
+        <p:spPr>
+          <a:xfrm>
+            <a:off x="6766560" y="1188720"/>
+            <a:ext cx="1920240" cy="1417320"/>
+          </a:xfrm>
+          <a:prstGeom prst="roundRect">
+            <a:avLst>
+              <a:gd name="adj" fmla="val 5161"/>
+            </a:avLst>
+          </a:prstGeom>
+          <a:solidFill>
+            <a:srgbClr val="F7F8FC"/>
+          </a:solidFill>
+          <a:ln w="9525">
+            <a:solidFill>
+              <a:srgbClr val="D9DCE8"/>
+            </a:solidFill>
+            <a:prstDash val="solid"/>
+          </a:ln>
+        </p:spPr>
+      </p:sp>
+      <p:sp>
+        <p:nvSpPr>
+          <p:cNvPr id="16" name="Text 14"/>
+          <p:cNvSpPr txBox="1"/>
+          <p:nvPr/>
+        </p:nvSpPr>
+        <p:spPr>
+          <a:xfrm>
+            <a:off x="6766560" y="1325880"/>
+            <a:ext cx="1920240" cy="731520"/>
+          </a:xfrm>
+          <a:prstGeom prst="rect">
+            <a:avLst/>
+          </a:prstGeom>
+          <a:noFill/>
+          <a:ln/>
+        </p:spPr>
+        <p:txBody>
+          <a:bodyPr wrap="square" lIns="0" tIns="0" rIns="0" bIns="0" rtlCol="0" anchor="ctr"/>
+          <a:lstStyle/>
+          <a:p>
+            <a:pPr algn="ctr" indent="0" marL="0">
+              <a:buNone/>
+            </a:pPr>
+            <a:r>
+              <a:rPr lang="en-US" sz="4400" b="1" dirty="0">
+                <a:solidFill>
+                  <a:srgbClr val="2D39B9"/>
+                </a:solidFill>
+                <a:latin typeface="Cambria" pitchFamily="34" charset="0"/>
+                <a:ea typeface="Cambria" pitchFamily="34" charset="-122"/>
+                <a:cs typeface="Cambria" pitchFamily="34" charset="-120"/>
+              </a:rPr>
+              <a:t>13</a:t>
+            </a:r>
+            <a:endParaRPr lang="en-US" sz="4400" dirty="0"/>
+          </a:p>
+        </p:txBody>
+      </p:sp>
+      <p:sp>
+        <p:nvSpPr>
+          <p:cNvPr id="17" name="Text 15"/>
+          <p:cNvSpPr txBox="1"/>
+          <p:nvPr/>
+        </p:nvSpPr>
+        <p:spPr>
+          <a:xfrm>
+            <a:off x="6766560" y="2057400"/>
+            <a:ext cx="1920240" cy="365760"/>
+          </a:xfrm>
+          <a:prstGeom prst="rect">
+            <a:avLst/>
+          </a:prstGeom>
+          <a:noFill/>
+          <a:ln/>
+        </p:spPr>
+        <p:txBody>
+          <a:bodyPr wrap="square" lIns="0" tIns="0" rIns="0" bIns="0" rtlCol="0" anchor="ctr"/>
+          <a:lstStyle/>
+          <a:p>
+            <a:pPr algn="ctr" indent="0" marL="0">
+              <a:buNone/>
+            </a:pPr>
+            <a:r>
+              <a:rPr lang="en-US" sz="1200" dirty="0">
+                <a:solidFill>
+                  <a:srgbClr val="5B6180"/>
+                </a:solidFill>
+                <a:latin typeface="Calibri" pitchFamily="34" charset="0"/>
+                <a:ea typeface="Calibri" pitchFamily="34" charset="-122"/>
+                <a:cs typeface="Calibri" pitchFamily="34" charset="-120"/>
+              </a:rPr>
+              <a:t>minutas</a:t>
+            </a:r>
+            <a:endParaRPr lang="en-US" sz="1200" dirty="0"/>
+          </a:p>
+        </p:txBody>
+      </p:sp>
+      <p:sp>
+        <p:nvSpPr>
+          <p:cNvPr id="18" name="Shape 16"/>
+          <p:cNvSpPr/>
+          <p:nvPr/>
+        </p:nvSpPr>
+        <p:spPr>
+          <a:xfrm>
+            <a:off x="457200" y="2834640"/>
+            <a:ext cx="1920240" cy="1417320"/>
+          </a:xfrm>
+          <a:prstGeom prst="roundRect">
+            <a:avLst>
+              <a:gd name="adj" fmla="val 5161"/>
+            </a:avLst>
+          </a:prstGeom>
+          <a:solidFill>
+            <a:srgbClr val="F7F8FC"/>
+          </a:solidFill>
+          <a:ln w="9525">
+            <a:solidFill>
+              <a:srgbClr val="D9DCE8"/>
+            </a:solidFill>
+            <a:prstDash val="solid"/>
+          </a:ln>
+        </p:spPr>
+      </p:sp>
+      <p:sp>
+        <p:nvSpPr>
+          <p:cNvPr id="19" name="Text 17"/>
+          <p:cNvSpPr txBox="1"/>
+          <p:nvPr/>
+        </p:nvSpPr>
+        <p:spPr>
+          <a:xfrm>
+            <a:off x="457200" y="2971800"/>
+            <a:ext cx="1920240" cy="731520"/>
+          </a:xfrm>
+          <a:prstGeom prst="rect">
+            <a:avLst/>
+          </a:prstGeom>
+          <a:noFill/>
+          <a:ln/>
+        </p:spPr>
+        <p:txBody>
+          <a:bodyPr wrap="square" lIns="0" tIns="0" rIns="0" bIns="0" rtlCol="0" anchor="ctr"/>
+          <a:lstStyle/>
+          <a:p>
+            <a:pPr algn="ctr" indent="0" marL="0">
+              <a:buNone/>
+            </a:pPr>
+            <a:r>
+              <a:rPr lang="en-US" sz="4400" b="1" dirty="0">
+                <a:solidFill>
+                  <a:srgbClr val="2D39B9"/>
+                </a:solidFill>
+                <a:latin typeface="Cambria" pitchFamily="34" charset="0"/>
+                <a:ea typeface="Cambria" pitchFamily="34" charset="-122"/>
+                <a:cs typeface="Cambria" pitchFamily="34" charset="-120"/>
+              </a:rPr>
+              <a:t>16</a:t>
+            </a:r>
+            <a:endParaRPr lang="en-US" sz="4400" dirty="0"/>
+          </a:p>
+        </p:txBody>
+      </p:sp>
+      <p:sp>
+        <p:nvSpPr>
+          <p:cNvPr id="20" name="Text 18"/>
+          <p:cNvSpPr txBox="1"/>
+          <p:nvPr/>
+        </p:nvSpPr>
+        <p:spPr>
+          <a:xfrm>
+            <a:off x="457200" y="3703320"/>
+            <a:ext cx="1920240" cy="365760"/>
+          </a:xfrm>
+          <a:prstGeom prst="rect">
+            <a:avLst/>
+          </a:prstGeom>
+          <a:noFill/>
+          <a:ln/>
+        </p:spPr>
+        <p:txBody>
+          <a:bodyPr wrap="square" lIns="0" tIns="0" rIns="0" bIns="0" rtlCol="0" anchor="ctr"/>
+          <a:lstStyle/>
+          <a:p>
+            <a:pPr algn="ctr" indent="0" marL="0">
+              <a:buNone/>
+            </a:pPr>
+            <a:r>
+              <a:rPr lang="en-US" sz="1200" dirty="0">
+                <a:solidFill>
+                  <a:srgbClr val="5B6180"/>
+                </a:solidFill>
+                <a:latin typeface="Calibri" pitchFamily="34" charset="0"/>
+                <a:ea typeface="Calibri" pitchFamily="34" charset="-122"/>
+                <a:cs typeface="Calibri" pitchFamily="34" charset="-120"/>
+              </a:rPr>
+              <a:t>países</a:t>
+            </a:r>
+            <a:endParaRPr lang="en-US" sz="1200" dirty="0"/>
+          </a:p>
+        </p:txBody>
+      </p:sp>
+      <p:sp>
+        <p:nvSpPr>
+          <p:cNvPr id="21" name="Shape 19"/>
+          <p:cNvSpPr/>
+          <p:nvPr/>
+        </p:nvSpPr>
+        <p:spPr>
+          <a:xfrm>
+            <a:off x="2560320" y="2834640"/>
+            <a:ext cx="1920240" cy="1417320"/>
+          </a:xfrm>
+          <a:prstGeom prst="roundRect">
+            <a:avLst>
+              <a:gd name="adj" fmla="val 5161"/>
+            </a:avLst>
+          </a:prstGeom>
+          <a:solidFill>
+            <a:srgbClr val="F7F8FC"/>
+          </a:solidFill>
+          <a:ln w="9525">
+            <a:solidFill>
+              <a:srgbClr val="D9DCE8"/>
+            </a:solidFill>
+            <a:prstDash val="solid"/>
+          </a:ln>
+        </p:spPr>
+      </p:sp>
+      <p:sp>
+        <p:nvSpPr>
+          <p:cNvPr id="22" name="Text 20"/>
+          <p:cNvSpPr txBox="1"/>
+          <p:nvPr/>
+        </p:nvSpPr>
+        <p:spPr>
+          <a:xfrm>
+            <a:off x="2560320" y="2971800"/>
+            <a:ext cx="1920240" cy="731520"/>
+          </a:xfrm>
+          <a:prstGeom prst="rect">
+            <a:avLst/>
+          </a:prstGeom>
+          <a:noFill/>
+          <a:ln/>
+        </p:spPr>
+        <p:txBody>
+          <a:bodyPr wrap="square" lIns="0" tIns="0" rIns="0" bIns="0" rtlCol="0" anchor="ctr"/>
+          <a:lstStyle/>
+          <a:p>
+            <a:pPr algn="ctr" indent="0" marL="0">
+              <a:buNone/>
+            </a:pPr>
+            <a:r>
+              <a:rPr lang="en-US" sz="4400" b="1" dirty="0">
+                <a:solidFill>
+                  <a:srgbClr val="2D39B9"/>
+                </a:solidFill>
+                <a:latin typeface="Cambria" pitchFamily="34" charset="0"/>
+                <a:ea typeface="Cambria" pitchFamily="34" charset="-122"/>
+                <a:cs typeface="Cambria" pitchFamily="34" charset="-120"/>
+              </a:rPr>
+              <a:t>212</a:t>
+            </a:r>
+            <a:endParaRPr lang="en-US" sz="4400" dirty="0"/>
+          </a:p>
+        </p:txBody>
+      </p:sp>
+      <p:sp>
+        <p:nvSpPr>
+          <p:cNvPr id="23" name="Text 21"/>
+          <p:cNvSpPr txBox="1"/>
+          <p:nvPr/>
+        </p:nvSpPr>
+        <p:spPr>
+          <a:xfrm>
+            <a:off x="2560320" y="3703320"/>
+            <a:ext cx="1920240" cy="365760"/>
+          </a:xfrm>
+          <a:prstGeom prst="rect">
+            <a:avLst/>
+          </a:prstGeom>
+          <a:noFill/>
+          <a:ln/>
+        </p:spPr>
+        <p:txBody>
+          <a:bodyPr wrap="square" lIns="0" tIns="0" rIns="0" bIns="0" rtlCol="0" anchor="ctr"/>
+          <a:lstStyle/>
+          <a:p>
+            <a:pPr algn="ctr" indent="0" marL="0">
+              <a:buNone/>
+            </a:pPr>
+            <a:r>
+              <a:rPr lang="en-US" sz="1200" dirty="0">
+                <a:solidFill>
+                  <a:srgbClr val="5B6180"/>
+                </a:solidFill>
+                <a:latin typeface="Calibri" pitchFamily="34" charset="0"/>
+                <a:ea typeface="Calibri" pitchFamily="34" charset="-122"/>
+                <a:cs typeface="Calibri" pitchFamily="34" charset="-120"/>
+              </a:rPr>
+              <a:t>testes</a:t>
+            </a:r>
+            <a:endParaRPr lang="en-US" sz="1200" dirty="0"/>
+          </a:p>
+        </p:txBody>
+      </p:sp>
+      <p:sp>
+        <p:nvSpPr>
+          <p:cNvPr id="24" name="Shape 22"/>
+          <p:cNvSpPr/>
+          <p:nvPr/>
+        </p:nvSpPr>
+        <p:spPr>
+          <a:xfrm>
+            <a:off x="4663440" y="2834640"/>
+            <a:ext cx="1920240" cy="1417320"/>
+          </a:xfrm>
+          <a:prstGeom prst="roundRect">
+            <a:avLst>
+              <a:gd name="adj" fmla="val 5161"/>
+            </a:avLst>
+          </a:prstGeom>
+          <a:solidFill>
+            <a:srgbClr val="F7F8FC"/>
+          </a:solidFill>
+          <a:ln w="9525">
+            <a:solidFill>
+              <a:srgbClr val="D9DCE8"/>
+            </a:solidFill>
+            <a:prstDash val="solid"/>
+          </a:ln>
+        </p:spPr>
+      </p:sp>
+      <p:sp>
+        <p:nvSpPr>
+          <p:cNvPr id="25" name="Text 23"/>
+          <p:cNvSpPr txBox="1"/>
+          <p:nvPr/>
+        </p:nvSpPr>
+        <p:spPr>
+          <a:xfrm>
+            <a:off x="4663440" y="2971800"/>
+            <a:ext cx="1920240" cy="731520"/>
+          </a:xfrm>
+          <a:prstGeom prst="rect">
+            <a:avLst/>
+          </a:prstGeom>
+          <a:noFill/>
+          <a:ln/>
+        </p:spPr>
+        <p:txBody>
+          <a:bodyPr wrap="square" lIns="0" tIns="0" rIns="0" bIns="0" rtlCol="0" anchor="ctr"/>
+          <a:lstStyle/>
+          <a:p>
+            <a:pPr algn="ctr" indent="0" marL="0">
+              <a:buNone/>
+            </a:pPr>
+            <a:r>
+              <a:rPr lang="en-US" sz="4400" b="1" dirty="0">
+                <a:solidFill>
+                  <a:srgbClr val="2D39B9"/>
+                </a:solidFill>
+                <a:latin typeface="Cambria" pitchFamily="34" charset="0"/>
+                <a:ea typeface="Cambria" pitchFamily="34" charset="-122"/>
+                <a:cs typeface="Cambria" pitchFamily="34" charset="-120"/>
+              </a:rPr>
+              <a:t>16</a:t>
+            </a:r>
+            <a:endParaRPr lang="en-US" sz="4400" dirty="0"/>
+          </a:p>
+        </p:txBody>
+      </p:sp>
+      <p:sp>
+        <p:nvSpPr>
+          <p:cNvPr id="26" name="Text 24"/>
+          <p:cNvSpPr txBox="1"/>
+          <p:nvPr/>
+        </p:nvSpPr>
+        <p:spPr>
+          <a:xfrm>
+            <a:off x="4663440" y="3703320"/>
+            <a:ext cx="1920240" cy="365760"/>
+          </a:xfrm>
+          <a:prstGeom prst="rect">
+            <a:avLst/>
+          </a:prstGeom>
+          <a:noFill/>
+          <a:ln/>
+        </p:spPr>
+        <p:txBody>
+          <a:bodyPr wrap="square" lIns="0" tIns="0" rIns="0" bIns="0" rtlCol="0" anchor="ctr"/>
+          <a:lstStyle/>
+          <a:p>
+            <a:pPr algn="ctr" indent="0" marL="0">
+              <a:buNone/>
+            </a:pPr>
+            <a:r>
+              <a:rPr lang="en-US" sz="1200" dirty="0">
+                <a:solidFill>
+                  <a:srgbClr val="5B6180"/>
+                </a:solidFill>
+                <a:latin typeface="Calibri" pitchFamily="34" charset="0"/>
+                <a:ea typeface="Calibri" pitchFamily="34" charset="-122"/>
+                <a:cs typeface="Calibri" pitchFamily="34" charset="-120"/>
+              </a:rPr>
+              <a:t>passos E2E</a:t>
+            </a:r>
+            <a:endParaRPr lang="en-US" sz="1200" dirty="0"/>
+          </a:p>
+        </p:txBody>
+      </p:sp>
+      <p:sp>
+        <p:nvSpPr>
+          <p:cNvPr id="27" name="Shape 25"/>
+          <p:cNvSpPr/>
+          <p:nvPr/>
+        </p:nvSpPr>
+        <p:spPr>
+          <a:xfrm>
+            <a:off x="6766560" y="2834640"/>
+            <a:ext cx="1920240" cy="1417320"/>
+          </a:xfrm>
+          <a:prstGeom prst="roundRect">
+            <a:avLst>
+              <a:gd name="adj" fmla="val 5161"/>
+            </a:avLst>
+          </a:prstGeom>
+          <a:solidFill>
+            <a:srgbClr val="F7F8FC"/>
+          </a:solidFill>
+          <a:ln w="9525">
+            <a:solidFill>
+              <a:srgbClr val="D9DCE8"/>
+            </a:solidFill>
+            <a:prstDash val="solid"/>
+          </a:ln>
+        </p:spPr>
+      </p:sp>
+      <p:sp>
+        <p:nvSpPr>
+          <p:cNvPr id="28" name="Text 26"/>
+          <p:cNvSpPr txBox="1"/>
+          <p:nvPr/>
+        </p:nvSpPr>
+        <p:spPr>
+          <a:xfrm>
+            <a:off x="6766560" y="2971800"/>
+            <a:ext cx="1920240" cy="731520"/>
+          </a:xfrm>
+          <a:prstGeom prst="rect">
+            <a:avLst/>
+          </a:prstGeom>
+          <a:noFill/>
+          <a:ln/>
+        </p:spPr>
+        <p:txBody>
+          <a:bodyPr wrap="square" lIns="0" tIns="0" rIns="0" bIns="0" rtlCol="0" anchor="ctr"/>
+          <a:lstStyle/>
+          <a:p>
+            <a:pPr algn="ctr" indent="0" marL="0">
+              <a:buNone/>
+            </a:pPr>
+            <a:r>
+              <a:rPr lang="en-US" sz="4400" b="1" dirty="0">
+                <a:solidFill>
+                  <a:srgbClr val="2D39B9"/>
+                </a:solidFill>
+                <a:latin typeface="Cambria" pitchFamily="34" charset="0"/>
+                <a:ea typeface="Cambria" pitchFamily="34" charset="-122"/>
+                <a:cs typeface="Cambria" pitchFamily="34" charset="-120"/>
+              </a:rPr>
+              <a:t>0</a:t>
+            </a:r>
+            <a:endParaRPr lang="en-US" sz="4400" dirty="0"/>
+          </a:p>
+        </p:txBody>
+      </p:sp>
+      <p:sp>
+        <p:nvSpPr>
+          <p:cNvPr id="29" name="Text 27"/>
+          <p:cNvSpPr txBox="1"/>
+          <p:nvPr/>
+        </p:nvSpPr>
+        <p:spPr>
+          <a:xfrm>
+            <a:off x="6766560" y="3703320"/>
+            <a:ext cx="1920240" cy="365760"/>
+          </a:xfrm>
+          <a:prstGeom prst="rect">
+            <a:avLst/>
+          </a:prstGeom>
+          <a:noFill/>
+          <a:ln/>
+        </p:spPr>
+        <p:txBody>
+          <a:bodyPr wrap="square" lIns="0" tIns="0" rIns="0" bIns="0" rtlCol="0" anchor="ctr"/>
+          <a:lstStyle/>
+          <a:p>
+            <a:pPr algn="ctr" indent="0" marL="0">
+              <a:buNone/>
+            </a:pPr>
+            <a:r>
+              <a:rPr lang="en-US" sz="1200" dirty="0">
+                <a:solidFill>
+                  <a:srgbClr val="5B6180"/>
+                </a:solidFill>
+                <a:latin typeface="Calibri" pitchFamily="34" charset="0"/>
+                <a:ea typeface="Calibri" pitchFamily="34" charset="-122"/>
+                <a:cs typeface="Calibri" pitchFamily="34" charset="-120"/>
+              </a:rPr>
+              <a:t>falhas WCAG</a:t>
+            </a:r>
+            <a:endParaRPr lang="en-US" sz="1200" dirty="0"/>
+          </a:p>
+        </p:txBody>
+      </p:sp>
+    </p:spTree>
+  </p:cSld>
+  <p:clrMapOvr>
+    <a:masterClrMapping/>
+  </p:clrMapOvr>
+</p:sld>
+</file>
+
+<file path=ppt/slides/slide26.xml><?xml version="1.0" encoding="utf-8"?>
+<p:sld xmlns:a="http://schemas.openxmlformats.org/drawingml/2006/main" xmlns:r="http://schemas.openxmlformats.org/officeDocument/2006/relationships" xmlns:p="http://schemas.openxmlformats.org/presentationml/2006/main">
+  <p:cSld name="Slide 26">
+    <p:bg>
+      <p:bgPr>
+        <a:solidFill>
+          <a:srgbClr val="FFFFFF"/>
+        </a:solidFill>
+      </p:bgPr>
+    </p:bg>
+    <p:spTree>
+      <p:nvGrpSpPr>
+        <p:cNvPr id="1" name=""/>
+        <p:cNvGrpSpPr/>
+        <p:nvPr/>
+      </p:nvGrpSpPr>
+      <p:grpSpPr>
+        <a:xfrm>
+          <a:off x="0" y="0"/>
+          <a:ext cx="0" cy="0"/>
+          <a:chOff x="0" y="0"/>
+          <a:chExt cx="0" cy="0"/>
+        </a:xfrm>
+      </p:grpSpPr>
+      <p:sp>
+        <p:nvSpPr>
+          <p:cNvPr id="2" name="Text 0"/>
+          <p:cNvSpPr txBox="1"/>
+          <p:nvPr/>
+        </p:nvSpPr>
+        <p:spPr>
+          <a:xfrm>
+            <a:off x="457200" y="128016"/>
+            <a:ext cx="8229600" cy="228600"/>
+          </a:xfrm>
+          <a:prstGeom prst="rect">
+            <a:avLst/>
+          </a:prstGeom>
+          <a:noFill/>
+          <a:ln/>
+        </p:spPr>
+        <p:txBody>
+          <a:bodyPr wrap="square" lIns="0" tIns="0" rIns="0" bIns="0" rtlCol="0" anchor="ctr"/>
+          <a:lstStyle/>
+          <a:p>
+            <a:pPr indent="0" marL="0">
+              <a:buNone/>
+            </a:pPr>
+            <a:r>
+              <a:rPr lang="en-US" sz="1000" b="1" spc="200" kern="0" dirty="0">
+                <a:solidFill>
+                  <a:srgbClr val="2D39B9"/>
+                </a:solidFill>
+                <a:latin typeface="Calibri" pitchFamily="34" charset="0"/>
+                <a:ea typeface="Calibri" pitchFamily="34" charset="-122"/>
+                <a:cs typeface="Calibri" pitchFamily="34" charset="-120"/>
+              </a:rPr>
+              <a:t>TECNOLOGIA E PUBLICAÇÃO</a:t>
+            </a:r>
+            <a:endParaRPr lang="en-US" sz="1000" dirty="0"/>
+          </a:p>
+        </p:txBody>
+      </p:sp>
+      <p:sp>
+        <p:nvSpPr>
+          <p:cNvPr id="3" name="Text 1"/>
+          <p:cNvSpPr txBox="1"/>
+          <p:nvPr/>
+        </p:nvSpPr>
+        <p:spPr>
+          <a:xfrm>
+            <a:off x="457200" y="347472"/>
+            <a:ext cx="8229600" cy="548640"/>
+          </a:xfrm>
+          <a:prstGeom prst="rect">
+            <a:avLst/>
+          </a:prstGeom>
+          <a:noFill/>
+          <a:ln/>
+        </p:spPr>
+        <p:txBody>
+          <a:bodyPr wrap="square" lIns="0" tIns="0" rIns="0" bIns="0" rtlCol="0" anchor="ctr"/>
+          <a:lstStyle/>
+          <a:p>
+            <a:pPr indent="0" marL="0">
+              <a:buNone/>
+            </a:pPr>
+            <a:r>
+              <a:rPr lang="en-US" sz="2800" b="1" dirty="0">
+                <a:solidFill>
+                  <a:srgbClr val="1B1F3B"/>
+                </a:solidFill>
+                <a:latin typeface="Cambria" pitchFamily="34" charset="0"/>
+                <a:ea typeface="Cambria" pitchFamily="34" charset="-122"/>
+                <a:cs typeface="Cambria" pitchFamily="34" charset="-120"/>
+              </a:rPr>
+              <a:t>Moderno, aberto e verificável</a:t>
+            </a:r>
+            <a:endParaRPr lang="en-US" sz="2800" dirty="0"/>
+          </a:p>
+        </p:txBody>
+      </p:sp>
+      <p:sp>
+        <p:nvSpPr>
+          <p:cNvPr id="4" name="Text 2"/>
+          <p:cNvSpPr txBox="1"/>
+          <p:nvPr/>
+        </p:nvSpPr>
+        <p:spPr>
+          <a:xfrm>
+            <a:off x="457200" y="4773168"/>
+            <a:ext cx="3657600" cy="228600"/>
+          </a:xfrm>
+          <a:prstGeom prst="rect">
+            <a:avLst/>
+          </a:prstGeom>
+          <a:noFill/>
+          <a:ln/>
+        </p:spPr>
+        <p:txBody>
+          <a:bodyPr wrap="square" lIns="0" tIns="0" rIns="0" bIns="0" rtlCol="0" anchor="ctr"/>
+          <a:lstStyle/>
+          <a:p>
+            <a:pPr indent="0" marL="0">
+              <a:buNone/>
+            </a:pPr>
+            <a:r>
+              <a:rPr lang="en-US" sz="900" dirty="0">
+                <a:solidFill>
+                  <a:srgbClr val="5B6180"/>
+                </a:solidFill>
+                <a:latin typeface="Calibri" pitchFamily="34" charset="0"/>
+                <a:ea typeface="Calibri" pitchFamily="34" charset="-122"/>
+                <a:cs typeface="Calibri" pitchFamily="34" charset="-120"/>
+              </a:rPr>
+              <a:t>Balcão das Sucessões</a:t>
+            </a:r>
+            <a:endParaRPr lang="en-US" sz="900" dirty="0"/>
+          </a:p>
+        </p:txBody>
+      </p:sp>
+      <p:sp>
+        <p:nvSpPr>
+          <p:cNvPr id="5" name="Text 3"/>
+          <p:cNvSpPr txBox="1"/>
+          <p:nvPr/>
+        </p:nvSpPr>
+        <p:spPr>
+          <a:xfrm>
+            <a:off x="8138160" y="4773168"/>
+            <a:ext cx="548640" cy="228600"/>
+          </a:xfrm>
+          <a:prstGeom prst="rect">
+            <a:avLst/>
+          </a:prstGeom>
+          <a:noFill/>
+          <a:ln/>
+        </p:spPr>
+        <p:txBody>
+          <a:bodyPr wrap="square" lIns="0" tIns="0" rIns="0" bIns="0" rtlCol="0" anchor="ctr"/>
+          <a:lstStyle/>
+          <a:p>
+            <a:pPr algn="r" indent="0" marL="0">
+              <a:buNone/>
+            </a:pPr>
+            <a:r>
+              <a:rPr lang="en-US" sz="900" dirty="0">
+                <a:solidFill>
+                  <a:srgbClr val="5B6180"/>
+                </a:solidFill>
+                <a:latin typeface="Calibri" pitchFamily="34" charset="0"/>
+                <a:ea typeface="Calibri" pitchFamily="34" charset="-122"/>
+                <a:cs typeface="Calibri" pitchFamily="34" charset="-120"/>
+              </a:rPr>
+              <a:t>26</a:t>
+            </a:r>
+            <a:endParaRPr lang="en-US" sz="900" dirty="0"/>
+          </a:p>
+        </p:txBody>
+      </p:sp>
+      <p:sp>
+        <p:nvSpPr>
+          <p:cNvPr id="6" name="Shape 4"/>
+          <p:cNvSpPr/>
+          <p:nvPr/>
+        </p:nvSpPr>
+        <p:spPr>
+          <a:xfrm>
+            <a:off x="457200" y="1143000"/>
+            <a:ext cx="4023360" cy="3429000"/>
+          </a:xfrm>
+          <a:prstGeom prst="roundRect">
+            <a:avLst>
+              <a:gd name="adj" fmla="val 2133"/>
+            </a:avLst>
+          </a:prstGeom>
+          <a:solidFill>
+            <a:srgbClr val="FFFFFF"/>
+          </a:solidFill>
+          <a:ln w="9525">
+            <a:solidFill>
+              <a:srgbClr val="D9DCE8"/>
+            </a:solidFill>
+            <a:prstDash val="solid"/>
+          </a:ln>
+        </p:spPr>
+      </p:sp>
+      <p:sp>
+        <p:nvSpPr>
+          <p:cNvPr id="7" name="Shape 5"/>
+          <p:cNvSpPr/>
+          <p:nvPr/>
+        </p:nvSpPr>
+        <p:spPr>
+          <a:xfrm>
+            <a:off x="685800" y="1325880"/>
+            <a:ext cx="457200" cy="457200"/>
+          </a:xfrm>
+          <a:prstGeom prst="ellipse">
+            <a:avLst/>
+          </a:prstGeom>
+          <a:solidFill>
+            <a:srgbClr val="2D39B9"/>
+          </a:solidFill>
+          <a:ln w="12700">
+            <a:solidFill>
+              <a:srgbClr val="2D39B9"/>
+            </a:solidFill>
+            <a:prstDash val="solid"/>
+          </a:ln>
+        </p:spPr>
+      </p:sp>
+      <p:pic>
+        <p:nvPicPr>
+          <p:cNvPr id="8" name="Image 0" descr="icons/cpu-white.png">    </p:cNvPr>
+          <p:cNvPicPr>
+            <a:picLocks noChangeAspect="1"/>
+          </p:cNvPicPr>
+          <p:nvPr/>
+        </p:nvPicPr>
+        <p:blipFill>
+          <a:blip r:embed="rId1"/>
+          <a:stretch>
+            <a:fillRect/>
+          </a:stretch>
+        </p:blipFill>
+        <p:spPr>
+          <a:xfrm>
+            <a:off x="795528" y="1435608"/>
+            <a:ext cx="237744" cy="237744"/>
+          </a:xfrm>
+          <a:prstGeom prst="rect">
+            <a:avLst/>
+          </a:prstGeom>
+        </p:spPr>
+      </p:pic>
+      <p:sp>
+        <p:nvSpPr>
+          <p:cNvPr id="9" name="Text 6"/>
+          <p:cNvSpPr txBox="1"/>
+          <p:nvPr/>
+        </p:nvSpPr>
+        <p:spPr>
+          <a:xfrm>
+            <a:off x="1280160" y="1371600"/>
+            <a:ext cx="2743200" cy="365760"/>
+          </a:xfrm>
+          <a:prstGeom prst="rect">
+            <a:avLst/>
+          </a:prstGeom>
+          <a:noFill/>
+          <a:ln/>
+        </p:spPr>
+        <p:txBody>
+          <a:bodyPr wrap="square" lIns="0" tIns="0" rIns="0" bIns="0" rtlCol="0" anchor="t"/>
+          <a:lstStyle/>
+          <a:p>
+            <a:pPr indent="0" marL="0">
+              <a:buNone/>
+            </a:pPr>
+            <a:r>
+              <a:rPr lang="en-US" sz="1400" b="1" dirty="0">
+                <a:solidFill>
+                  <a:srgbClr val="1B1F3B"/>
+                </a:solidFill>
+                <a:latin typeface="Calibri" pitchFamily="34" charset="0"/>
+                <a:ea typeface="Calibri" pitchFamily="34" charset="-122"/>
+                <a:cs typeface="Calibri" pitchFamily="34" charset="-120"/>
+              </a:rPr>
+              <a:t>Plataforma</a:t>
+            </a:r>
+            <a:endParaRPr lang="en-US" sz="1400" dirty="0"/>
+          </a:p>
+        </p:txBody>
+      </p:sp>
+      <p:sp>
+        <p:nvSpPr>
+          <p:cNvPr id="10" name="Text 7"/>
+          <p:cNvSpPr txBox="1"/>
+          <p:nvPr/>
+        </p:nvSpPr>
+        <p:spPr>
+          <a:xfrm>
+            <a:off x="685800" y="1920240"/>
+            <a:ext cx="3566160" cy="2560320"/>
+          </a:xfrm>
+          <a:prstGeom prst="rect">
+            <a:avLst/>
+          </a:prstGeom>
+          <a:noFill/>
+          <a:ln/>
+        </p:spPr>
+        <p:txBody>
+          <a:bodyPr wrap="square" lIns="0" tIns="0" rIns="0" bIns="0" rtlCol="0" anchor="t"/>
+          <a:lstStyle/>
+          <a:p>
+            <a:pPr marL="177800" indent="-177800">
+              <a:spcAft>
+                <a:spcPts val="500"/>
+              </a:spcAft>
+              <a:buSzPct val="100000"/>
+              <a:buChar char="•"/>
+            </a:pPr>
+            <a:r>
+              <a:rPr lang="en-US" sz="1150" dirty="0">
+                <a:solidFill>
+                  <a:srgbClr val="1B1F3B"/>
+                </a:solidFill>
+                <a:latin typeface="Calibri" pitchFamily="34" charset="0"/>
+                <a:ea typeface="Calibri" pitchFamily="34" charset="-122"/>
+                <a:cs typeface="Calibri" pitchFamily="34" charset="-120"/>
+              </a:rPr>
+              <a:t>React 19 e TypeScript em modo estrito</a:t>
+            </a:r>
+            <a:endParaRPr lang="en-US" sz="1150" dirty="0"/>
+          </a:p>
+          <a:p>
+            <a:pPr marL="177800" indent="-177800">
+              <a:spcAft>
+                <a:spcPts val="500"/>
+              </a:spcAft>
+              <a:buSzPct val="100000"/>
+              <a:buChar char="•"/>
+            </a:pPr>
+            <a:r>
+              <a:rPr lang="en-US" sz="1150" dirty="0">
+                <a:solidFill>
+                  <a:srgbClr val="1B1F3B"/>
+                </a:solidFill>
+                <a:latin typeface="Calibri" pitchFamily="34" charset="0"/>
+                <a:ea typeface="Calibri" pitchFamily="34" charset="-122"/>
+                <a:cs typeface="Calibri" pitchFamily="34" charset="-120"/>
+              </a:rPr>
+              <a:t>Vite e Workbox (service worker, precache)</a:t>
+            </a:r>
+            <a:endParaRPr lang="en-US" sz="1150" dirty="0"/>
+          </a:p>
+          <a:p>
+            <a:pPr marL="177800" indent="-177800">
+              <a:spcAft>
+                <a:spcPts val="500"/>
+              </a:spcAft>
+              <a:buSzPct val="100000"/>
+              <a:buChar char="•"/>
+            </a:pPr>
+            <a:r>
+              <a:rPr lang="en-US" sz="1150" dirty="0">
+                <a:solidFill>
+                  <a:srgbClr val="1B1F3B"/>
+                </a:solidFill>
+                <a:latin typeface="Calibri" pitchFamily="34" charset="0"/>
+                <a:ea typeface="Calibri" pitchFamily="34" charset="-122"/>
+                <a:cs typeface="Calibri" pitchFamily="34" charset="-120"/>
+              </a:rPr>
+              <a:t>Dexie sobre IndexedDB (dados e anexos)</a:t>
+            </a:r>
+            <a:endParaRPr lang="en-US" sz="1150" dirty="0"/>
+          </a:p>
+          <a:p>
+            <a:pPr marL="177800" indent="-177800">
+              <a:spcAft>
+                <a:spcPts val="500"/>
+              </a:spcAft>
+              <a:buSzPct val="100000"/>
+              <a:buChar char="•"/>
+            </a:pPr>
+            <a:r>
+              <a:rPr lang="en-US" sz="1150" dirty="0">
+                <a:solidFill>
+                  <a:srgbClr val="1B1F3B"/>
+                </a:solidFill>
+                <a:latin typeface="Calibri" pitchFamily="34" charset="0"/>
+                <a:ea typeface="Calibri" pitchFamily="34" charset="-122"/>
+                <a:cs typeface="Calibri" pitchFamily="34" charset="-120"/>
+              </a:rPr>
+              <a:t>Motor de regras, calendário e calculadora testados (Vitest)</a:t>
+            </a:r>
+            <a:endParaRPr lang="en-US" sz="1150" dirty="0"/>
+          </a:p>
+          <a:p>
+            <a:pPr marL="177800" indent="-177800">
+              <a:spcAft>
+                <a:spcPts val="500"/>
+              </a:spcAft>
+              <a:buSzPct val="100000"/>
+              <a:buChar char="•"/>
+            </a:pPr>
+            <a:r>
+              <a:rPr lang="en-US" sz="1150" dirty="0">
+                <a:solidFill>
+                  <a:srgbClr val="1B1F3B"/>
+                </a:solidFill>
+                <a:latin typeface="Calibri" pitchFamily="34" charset="0"/>
+                <a:ea typeface="Calibri" pitchFamily="34" charset="-122"/>
+                <a:cs typeface="Calibri" pitchFamily="34" charset="-120"/>
+              </a:rPr>
+              <a:t>Minutas em Office Open XML; iCalendar RFC 5545</a:t>
+            </a:r>
+            <a:endParaRPr lang="en-US" sz="1150" dirty="0"/>
+          </a:p>
+        </p:txBody>
+      </p:sp>
+      <p:sp>
+        <p:nvSpPr>
+          <p:cNvPr id="11" name="Shape 8"/>
+          <p:cNvSpPr/>
+          <p:nvPr/>
+        </p:nvSpPr>
+        <p:spPr>
+          <a:xfrm>
+            <a:off x="4663440" y="1143000"/>
+            <a:ext cx="4023360" cy="3429000"/>
+          </a:xfrm>
+          <a:prstGeom prst="roundRect">
+            <a:avLst>
+              <a:gd name="adj" fmla="val 2133"/>
+            </a:avLst>
+          </a:prstGeom>
+          <a:solidFill>
+            <a:srgbClr val="FFFFFF"/>
+          </a:solidFill>
+          <a:ln w="9525">
+            <a:solidFill>
+              <a:srgbClr val="D9DCE8"/>
+            </a:solidFill>
+            <a:prstDash val="solid"/>
+          </a:ln>
+        </p:spPr>
+      </p:sp>
+      <p:sp>
+        <p:nvSpPr>
+          <p:cNvPr id="12" name="Shape 9"/>
+          <p:cNvSpPr/>
+          <p:nvPr/>
+        </p:nvSpPr>
+        <p:spPr>
+          <a:xfrm>
+            <a:off x="4892040" y="1325880"/>
+            <a:ext cx="457200" cy="457200"/>
+          </a:xfrm>
+          <a:prstGeom prst="ellipse">
+            <a:avLst/>
+          </a:prstGeom>
+          <a:solidFill>
+            <a:srgbClr val="2D39B9"/>
+          </a:solidFill>
+          <a:ln w="12700">
+            <a:solidFill>
+              <a:srgbClr val="2D39B9"/>
+            </a:solidFill>
+            <a:prstDash val="solid"/>
+          </a:ln>
+        </p:spPr>
+      </p:sp>
+      <p:pic>
+        <p:nvPicPr>
+          <p:cNvPr id="13" name="Image 1" descr="icons/rocket-white.png">    </p:cNvPr>
+          <p:cNvPicPr>
+            <a:picLocks noChangeAspect="1"/>
+          </p:cNvPicPr>
+          <p:nvPr/>
+        </p:nvPicPr>
+        <p:blipFill>
+          <a:blip r:embed="rId2"/>
+          <a:stretch>
+            <a:fillRect/>
+          </a:stretch>
+        </p:blipFill>
+        <p:spPr>
+          <a:xfrm>
+            <a:off x="5001768" y="1435608"/>
+            <a:ext cx="237744" cy="237744"/>
+          </a:xfrm>
+          <a:prstGeom prst="rect">
+            <a:avLst/>
+          </a:prstGeom>
+        </p:spPr>
+      </p:pic>
+      <p:sp>
+        <p:nvSpPr>
+          <p:cNvPr id="14" name="Text 10"/>
+          <p:cNvSpPr txBox="1"/>
+          <p:nvPr/>
+        </p:nvSpPr>
+        <p:spPr>
+          <a:xfrm>
+            <a:off x="5486400" y="1371600"/>
+            <a:ext cx="2743200" cy="365760"/>
+          </a:xfrm>
+          <a:prstGeom prst="rect">
+            <a:avLst/>
+          </a:prstGeom>
+          <a:noFill/>
+          <a:ln/>
+        </p:spPr>
+        <p:txBody>
+          <a:bodyPr wrap="square" lIns="0" tIns="0" rIns="0" bIns="0" rtlCol="0" anchor="t"/>
+          <a:lstStyle/>
+          <a:p>
+            <a:pPr indent="0" marL="0">
+              <a:buNone/>
+            </a:pPr>
+            <a:r>
+              <a:rPr lang="en-US" sz="1400" b="1" dirty="0">
+                <a:solidFill>
+                  <a:srgbClr val="1B1F3B"/>
+                </a:solidFill>
+                <a:latin typeface="Calibri" pitchFamily="34" charset="0"/>
+                <a:ea typeface="Calibri" pitchFamily="34" charset="-122"/>
+                <a:cs typeface="Calibri" pitchFamily="34" charset="-120"/>
+              </a:rPr>
+              <a:t>Publicação contínua</a:t>
+            </a:r>
+            <a:endParaRPr lang="en-US" sz="1400" dirty="0"/>
+          </a:p>
+        </p:txBody>
+      </p:sp>
+      <p:sp>
+        <p:nvSpPr>
+          <p:cNvPr id="15" name="Shape 11"/>
+          <p:cNvSpPr/>
+          <p:nvPr/>
+        </p:nvSpPr>
+        <p:spPr>
+          <a:xfrm>
+            <a:off x="4892040" y="2011680"/>
+            <a:ext cx="1051560" cy="411480"/>
+          </a:xfrm>
+          <a:prstGeom prst="roundRect">
+            <a:avLst>
+              <a:gd name="adj" fmla="val 17778"/>
+            </a:avLst>
+          </a:prstGeom>
+          <a:solidFill>
+            <a:srgbClr val="EEF0FB"/>
+          </a:solidFill>
+          <a:ln w="12700">
+            <a:solidFill>
+              <a:srgbClr val="EEF0FB"/>
+            </a:solidFill>
+            <a:prstDash val="solid"/>
+          </a:ln>
+        </p:spPr>
+      </p:sp>
+      <p:sp>
+        <p:nvSpPr>
+          <p:cNvPr id="16" name="Text 12"/>
+          <p:cNvSpPr txBox="1"/>
+          <p:nvPr/>
+        </p:nvSpPr>
+        <p:spPr>
+          <a:xfrm>
+            <a:off x="4892040" y="2011680"/>
+            <a:ext cx="1051560" cy="411480"/>
+          </a:xfrm>
+          <a:prstGeom prst="rect">
+            <a:avLst/>
+          </a:prstGeom>
+          <a:noFill/>
+          <a:ln/>
+        </p:spPr>
+        <p:txBody>
+          <a:bodyPr wrap="square" lIns="0" tIns="0" rIns="0" bIns="0" rtlCol="0" anchor="ctr"/>
+          <a:lstStyle/>
+          <a:p>
+            <a:pPr algn="ctr" indent="0" marL="0">
+              <a:buNone/>
+            </a:pPr>
+            <a:r>
+              <a:rPr lang="en-US" sz="1050" b="1" dirty="0">
+                <a:solidFill>
+                  <a:srgbClr val="2D39B9"/>
+                </a:solidFill>
+                <a:latin typeface="Calibri" pitchFamily="34" charset="0"/>
+                <a:ea typeface="Calibri" pitchFamily="34" charset="-122"/>
+                <a:cs typeface="Calibri" pitchFamily="34" charset="-120"/>
+              </a:rPr>
+              <a:t>Testes</a:t>
+            </a:r>
+            <a:endParaRPr lang="en-US" sz="1050" dirty="0"/>
+          </a:p>
+        </p:txBody>
+      </p:sp>
+      <p:pic>
+        <p:nvPicPr>
+          <p:cNvPr id="17" name="Image 2" descr="icons/arrow-right-indigo.png">    </p:cNvPr>
+          <p:cNvPicPr>
+            <a:picLocks noChangeAspect="1"/>
+          </p:cNvPicPr>
+          <p:nvPr/>
+        </p:nvPicPr>
+        <p:blipFill>
+          <a:blip r:embed="rId3"/>
+          <a:stretch>
+            <a:fillRect/>
+          </a:stretch>
+        </p:blipFill>
+        <p:spPr>
+          <a:xfrm>
+            <a:off x="5961888" y="2121408"/>
+            <a:ext cx="182880" cy="182880"/>
+          </a:xfrm>
+          <a:prstGeom prst="rect">
+            <a:avLst/>
+          </a:prstGeom>
+        </p:spPr>
+      </p:pic>
+      <p:sp>
+        <p:nvSpPr>
+          <p:cNvPr id="18" name="Shape 13"/>
+          <p:cNvSpPr/>
+          <p:nvPr/>
+        </p:nvSpPr>
+        <p:spPr>
+          <a:xfrm>
+            <a:off x="6172200" y="2011680"/>
+            <a:ext cx="1051560" cy="411480"/>
+          </a:xfrm>
+          <a:prstGeom prst="roundRect">
+            <a:avLst>
+              <a:gd name="adj" fmla="val 17778"/>
+            </a:avLst>
+          </a:prstGeom>
+          <a:solidFill>
+            <a:srgbClr val="EEF0FB"/>
+          </a:solidFill>
+          <a:ln w="12700">
+            <a:solidFill>
+              <a:srgbClr val="EEF0FB"/>
+            </a:solidFill>
+            <a:prstDash val="solid"/>
+          </a:ln>
+        </p:spPr>
+      </p:sp>
+      <p:sp>
+        <p:nvSpPr>
+          <p:cNvPr id="19" name="Text 14"/>
+          <p:cNvSpPr txBox="1"/>
+          <p:nvPr/>
+        </p:nvSpPr>
+        <p:spPr>
+          <a:xfrm>
+            <a:off x="6172200" y="2011680"/>
+            <a:ext cx="1051560" cy="411480"/>
+          </a:xfrm>
+          <a:prstGeom prst="rect">
+            <a:avLst/>
+          </a:prstGeom>
+          <a:noFill/>
+          <a:ln/>
+        </p:spPr>
+        <p:txBody>
+          <a:bodyPr wrap="square" lIns="0" tIns="0" rIns="0" bIns="0" rtlCol="0" anchor="ctr"/>
+          <a:lstStyle/>
+          <a:p>
+            <a:pPr algn="ctr" indent="0" marL="0">
+              <a:buNone/>
+            </a:pPr>
+            <a:r>
+              <a:rPr lang="en-US" sz="1050" b="1" dirty="0">
+                <a:solidFill>
+                  <a:srgbClr val="2D39B9"/>
+                </a:solidFill>
+                <a:latin typeface="Calibri" pitchFamily="34" charset="0"/>
+                <a:ea typeface="Calibri" pitchFamily="34" charset="-122"/>
+                <a:cs typeface="Calibri" pitchFamily="34" charset="-120"/>
+              </a:rPr>
+              <a:t>E2E</a:t>
+            </a:r>
+            <a:endParaRPr lang="en-US" sz="1050" dirty="0"/>
+          </a:p>
+        </p:txBody>
+      </p:sp>
+      <p:pic>
+        <p:nvPicPr>
+          <p:cNvPr id="20" name="Image 3" descr="icons/arrow-right-indigo.png">    </p:cNvPr>
+          <p:cNvPicPr>
+            <a:picLocks noChangeAspect="1"/>
+          </p:cNvPicPr>
+          <p:nvPr/>
+        </p:nvPicPr>
+        <p:blipFill>
+          <a:blip r:embed="rId4"/>
+          <a:stretch>
+            <a:fillRect/>
+          </a:stretch>
+        </p:blipFill>
+        <p:spPr>
+          <a:xfrm>
+            <a:off x="7242048" y="2121408"/>
+            <a:ext cx="182880" cy="182880"/>
+          </a:xfrm>
+          <a:prstGeom prst="rect">
+            <a:avLst/>
+          </a:prstGeom>
+        </p:spPr>
+      </p:pic>
+      <p:sp>
+        <p:nvSpPr>
+          <p:cNvPr id="21" name="Shape 15"/>
+          <p:cNvSpPr/>
+          <p:nvPr/>
+        </p:nvSpPr>
+        <p:spPr>
+          <a:xfrm>
+            <a:off x="7452360" y="2011680"/>
+            <a:ext cx="1051560" cy="411480"/>
+          </a:xfrm>
+          <a:prstGeom prst="roundRect">
+            <a:avLst>
+              <a:gd name="adj" fmla="val 17778"/>
+            </a:avLst>
+          </a:prstGeom>
+          <a:solidFill>
+            <a:srgbClr val="EEF0FB"/>
+          </a:solidFill>
+          <a:ln w="12700">
+            <a:solidFill>
+              <a:srgbClr val="EEF0FB"/>
+            </a:solidFill>
+            <a:prstDash val="solid"/>
+          </a:ln>
+        </p:spPr>
+      </p:sp>
+      <p:sp>
+        <p:nvSpPr>
+          <p:cNvPr id="22" name="Text 16"/>
+          <p:cNvSpPr txBox="1"/>
+          <p:nvPr/>
+        </p:nvSpPr>
+        <p:spPr>
+          <a:xfrm>
+            <a:off x="7452360" y="2011680"/>
+            <a:ext cx="1051560" cy="411480"/>
+          </a:xfrm>
+          <a:prstGeom prst="rect">
+            <a:avLst/>
+          </a:prstGeom>
+          <a:noFill/>
+          <a:ln/>
+        </p:spPr>
+        <p:txBody>
+          <a:bodyPr wrap="square" lIns="0" tIns="0" rIns="0" bIns="0" rtlCol="0" anchor="ctr"/>
+          <a:lstStyle/>
+          <a:p>
+            <a:pPr algn="ctr" indent="0" marL="0">
+              <a:buNone/>
+            </a:pPr>
+            <a:r>
+              <a:rPr lang="en-US" sz="1050" b="1" dirty="0">
+                <a:solidFill>
+                  <a:srgbClr val="2D39B9"/>
+                </a:solidFill>
+                <a:latin typeface="Calibri" pitchFamily="34" charset="0"/>
+                <a:ea typeface="Calibri" pitchFamily="34" charset="-122"/>
+                <a:cs typeface="Calibri" pitchFamily="34" charset="-120"/>
+              </a:rPr>
+              <a:t>GitHub Pages</a:t>
+            </a:r>
+            <a:endParaRPr lang="en-US" sz="1050" dirty="0"/>
+          </a:p>
+        </p:txBody>
+      </p:sp>
+      <p:sp>
+        <p:nvSpPr>
+          <p:cNvPr id="23" name="Text 17"/>
+          <p:cNvSpPr txBox="1"/>
+          <p:nvPr/>
+        </p:nvSpPr>
+        <p:spPr>
+          <a:xfrm>
+            <a:off x="4892040" y="2651760"/>
+            <a:ext cx="3611880" cy="1828800"/>
+          </a:xfrm>
+          <a:prstGeom prst="rect">
+            <a:avLst/>
+          </a:prstGeom>
+          <a:noFill/>
+          <a:ln/>
+        </p:spPr>
+        <p:txBody>
+          <a:bodyPr wrap="square" lIns="0" tIns="0" rIns="0" bIns="0" rtlCol="0" anchor="t"/>
+          <a:lstStyle/>
+          <a:p>
+            <a:pPr marL="177800" indent="-177800">
+              <a:spcAft>
+                <a:spcPts val="500"/>
+              </a:spcAft>
+              <a:buSzPct val="100000"/>
+              <a:buChar char="•"/>
+            </a:pPr>
+            <a:r>
+              <a:rPr lang="en-US" sz="1100" dirty="0">
+                <a:solidFill>
+                  <a:srgbClr val="1B1F3B"/>
+                </a:solidFill>
+                <a:latin typeface="Calibri" pitchFamily="34" charset="0"/>
+                <a:ea typeface="Calibri" pitchFamily="34" charset="-122"/>
+                <a:cs typeface="Calibri" pitchFamily="34" charset="-120"/>
+              </a:rPr>
+              <a:t>Cada alteração passa por 212 testes, 16 passos ponta a ponta e pela compilação antes de ser publicada</a:t>
+            </a:r>
+            <a:endParaRPr lang="en-US" sz="1100" dirty="0"/>
+          </a:p>
+          <a:p>
+            <a:pPr marL="177800" indent="-177800">
+              <a:buSzPct val="100000"/>
+              <a:buChar char="•"/>
+            </a:pPr>
+            <a:r>
+              <a:rPr lang="en-US" sz="1100" dirty="0">
+                <a:solidFill>
+                  <a:srgbClr val="1B1F3B"/>
+                </a:solidFill>
+                <a:latin typeface="Calibri" pitchFamily="34" charset="0"/>
+                <a:ea typeface="Calibri" pitchFamily="34" charset="-122"/>
+                <a:cs typeface="Calibri" pitchFamily="34" charset="-120"/>
+              </a:rPr>
+              <a:t>Aplicação: </a:t>
+            </a:r>
+            <a:pPr indent="0" marL="0">
+              <a:spcAft>
+                <a:spcPts val="500"/>
+              </a:spcAft>
+              <a:buNone/>
+            </a:pPr>
+            <a:r>
+              <a:rPr lang="en-US" sz="1100" b="1" dirty="0">
+                <a:solidFill>
+                  <a:srgbClr val="1B1F3B"/>
+                </a:solidFill>
+                <a:latin typeface="Calibri" pitchFamily="34" charset="0"/>
+                <a:ea typeface="Calibri" pitchFamily="34" charset="-122"/>
+                <a:cs typeface="Calibri" pitchFamily="34" charset="-120"/>
+              </a:rPr>
+              <a:t>nelsonsous.github.io/balcao-sucessoes</a:t>
+            </a:r>
+            <a:endParaRPr lang="en-US" sz="1100" dirty="0"/>
+          </a:p>
+          <a:p>
+            <a:pPr marL="177800" indent="-177800">
+              <a:buSzPct val="100000"/>
+              <a:buChar char="•"/>
+            </a:pPr>
+            <a:r>
+              <a:rPr lang="en-US" sz="1100" dirty="0">
+                <a:solidFill>
+                  <a:srgbClr val="1B1F3B"/>
+                </a:solidFill>
+                <a:latin typeface="Calibri" pitchFamily="34" charset="0"/>
+                <a:ea typeface="Calibri" pitchFamily="34" charset="-122"/>
+                <a:cs typeface="Calibri" pitchFamily="34" charset="-120"/>
+              </a:rPr>
+              <a:t>Código-fonte: </a:t>
+            </a:r>
+            <a:pPr indent="0" marL="0">
+              <a:spcAft>
+                <a:spcPts val="500"/>
+              </a:spcAft>
+              <a:buNone/>
+            </a:pPr>
+            <a:r>
+              <a:rPr lang="en-US" sz="1100" b="1" dirty="0">
+                <a:solidFill>
+                  <a:srgbClr val="1B1F3B"/>
+                </a:solidFill>
+                <a:latin typeface="Calibri" pitchFamily="34" charset="0"/>
+                <a:ea typeface="Calibri" pitchFamily="34" charset="-122"/>
+                <a:cs typeface="Calibri" pitchFamily="34" charset="-120"/>
+              </a:rPr>
+              <a:t>github.com/nelsonsous/balcao-sucessoes</a:t>
+            </a:r>
+            <a:endParaRPr lang="en-US" sz="1100" dirty="0"/>
+          </a:p>
+          <a:p>
+            <a:pPr marL="177800" indent="-177800">
+              <a:spcAft>
+                <a:spcPts val="500"/>
+              </a:spcAft>
+              <a:buSzPct val="100000"/>
+              <a:buChar char="•"/>
+            </a:pPr>
+            <a:r>
+              <a:rPr lang="en-US" sz="1100" dirty="0">
+                <a:solidFill>
+                  <a:srgbClr val="1B1F3B"/>
+                </a:solidFill>
+                <a:latin typeface="Calibri" pitchFamily="34" charset="0"/>
+                <a:ea typeface="Calibri" pitchFamily="34" charset="-122"/>
+                <a:cs typeface="Calibri" pitchFamily="34" charset="-120"/>
+              </a:rPr>
+              <a:t>Atualizações entregues à aplicação instalada com aviso «Nova versão disponível»</a:t>
+            </a:r>
+            <a:endParaRPr lang="en-US" sz="1100" dirty="0"/>
+          </a:p>
+        </p:txBody>
+      </p:sp>
+    </p:spTree>
+  </p:cSld>
+  <p:clrMapOvr>
+    <a:masterClrMapping/>
+  </p:clrMapOvr>
+</p:sld>
+</file>
+
+<file path=ppt/slides/slide27.xml><?xml version="1.0" encoding="utf-8"?>
+<p:sld xmlns:a="http://schemas.openxmlformats.org/drawingml/2006/main" xmlns:r="http://schemas.openxmlformats.org/officeDocument/2006/relationships" xmlns:p="http://schemas.openxmlformats.org/presentationml/2006/main">
+  <p:cSld name="Slide 27">
+    <p:bg>
+      <p:bgPr>
+        <a:solidFill>
+          <a:srgbClr val="FFFFFF"/>
+        </a:solidFill>
+      </p:bgPr>
+    </p:bg>
+    <p:spTree>
+      <p:nvGrpSpPr>
+        <p:cNvPr id="1" name=""/>
+        <p:cNvGrpSpPr/>
+        <p:nvPr/>
+      </p:nvGrpSpPr>
+      <p:grpSpPr>
+        <a:xfrm>
+          <a:off x="0" y="0"/>
+          <a:ext cx="0" cy="0"/>
+          <a:chOff x="0" y="0"/>
+          <a:chExt cx="0" cy="0"/>
+        </a:xfrm>
+      </p:grpSpPr>
+      <p:sp>
+        <p:nvSpPr>
+          <p:cNvPr id="2" name="Text 0"/>
+          <p:cNvSpPr txBox="1"/>
+          <p:nvPr/>
+        </p:nvSpPr>
+        <p:spPr>
+          <a:xfrm>
+            <a:off x="457200" y="128016"/>
+            <a:ext cx="8229600" cy="228600"/>
+          </a:xfrm>
+          <a:prstGeom prst="rect">
+            <a:avLst/>
+          </a:prstGeom>
+          <a:noFill/>
+          <a:ln/>
+        </p:spPr>
+        <p:txBody>
+          <a:bodyPr wrap="square" lIns="0" tIns="0" rIns="0" bIns="0" rtlCol="0" anchor="ctr"/>
+          <a:lstStyle/>
+          <a:p>
+            <a:pPr indent="0" marL="0">
+              <a:buNone/>
+            </a:pPr>
+            <a:r>
+              <a:rPr lang="en-US" sz="1000" b="1" spc="200" kern="0" dirty="0">
+                <a:solidFill>
+                  <a:srgbClr val="2D39B9"/>
+                </a:solidFill>
+                <a:latin typeface="Calibri" pitchFamily="34" charset="0"/>
+                <a:ea typeface="Calibri" pitchFamily="34" charset="-122"/>
+                <a:cs typeface="Calibri" pitchFamily="34" charset="-120"/>
+              </a:rPr>
+              <a:t>PERCURSO</a:t>
+            </a:r>
+            <a:endParaRPr lang="en-US" sz="1000" dirty="0"/>
+          </a:p>
+        </p:txBody>
+      </p:sp>
+      <p:sp>
+        <p:nvSpPr>
+          <p:cNvPr id="3" name="Text 1"/>
+          <p:cNvSpPr txBox="1"/>
+          <p:nvPr/>
+        </p:nvSpPr>
+        <p:spPr>
+          <a:xfrm>
+            <a:off x="457200" y="347472"/>
+            <a:ext cx="8229600" cy="548640"/>
+          </a:xfrm>
+          <a:prstGeom prst="rect">
+            <a:avLst/>
+          </a:prstGeom>
+          <a:noFill/>
+          <a:ln/>
+        </p:spPr>
+        <p:txBody>
+          <a:bodyPr wrap="square" lIns="0" tIns="0" rIns="0" bIns="0" rtlCol="0" anchor="ctr"/>
+          <a:lstStyle/>
+          <a:p>
+            <a:pPr indent="0" marL="0">
+              <a:buNone/>
+            </a:pPr>
+            <a:r>
+              <a:rPr lang="en-US" sz="2800" b="1" dirty="0">
+                <a:solidFill>
+                  <a:srgbClr val="1B1F3B"/>
+                </a:solidFill>
+                <a:latin typeface="Cambria" pitchFamily="34" charset="0"/>
+                <a:ea typeface="Cambria" pitchFamily="34" charset="-122"/>
+                <a:cs typeface="Cambria" pitchFamily="34" charset="-120"/>
+              </a:rPr>
+              <a:t>Vinte ciclos, todos entregues</a:t>
+            </a:r>
+            <a:endParaRPr lang="en-US" sz="2800" dirty="0"/>
+          </a:p>
+        </p:txBody>
+      </p:sp>
+      <p:sp>
+        <p:nvSpPr>
+          <p:cNvPr id="4" name="Text 2"/>
+          <p:cNvSpPr txBox="1"/>
+          <p:nvPr/>
+        </p:nvSpPr>
+        <p:spPr>
+          <a:xfrm>
+            <a:off x="457200" y="4773168"/>
+            <a:ext cx="3657600" cy="228600"/>
+          </a:xfrm>
+          <a:prstGeom prst="rect">
+            <a:avLst/>
+          </a:prstGeom>
+          <a:noFill/>
+          <a:ln/>
+        </p:spPr>
+        <p:txBody>
+          <a:bodyPr wrap="square" lIns="0" tIns="0" rIns="0" bIns="0" rtlCol="0" anchor="ctr"/>
+          <a:lstStyle/>
+          <a:p>
+            <a:pPr indent="0" marL="0">
+              <a:buNone/>
+            </a:pPr>
+            <a:r>
+              <a:rPr lang="en-US" sz="900" dirty="0">
+                <a:solidFill>
+                  <a:srgbClr val="5B6180"/>
+                </a:solidFill>
+                <a:latin typeface="Calibri" pitchFamily="34" charset="0"/>
+                <a:ea typeface="Calibri" pitchFamily="34" charset="-122"/>
+                <a:cs typeface="Calibri" pitchFamily="34" charset="-120"/>
+              </a:rPr>
+              <a:t>Balcão das Sucessões</a:t>
+            </a:r>
+            <a:endParaRPr lang="en-US" sz="900" dirty="0"/>
+          </a:p>
+        </p:txBody>
+      </p:sp>
+      <p:sp>
+        <p:nvSpPr>
+          <p:cNvPr id="5" name="Text 3"/>
+          <p:cNvSpPr txBox="1"/>
+          <p:nvPr/>
+        </p:nvSpPr>
+        <p:spPr>
+          <a:xfrm>
+            <a:off x="8138160" y="4773168"/>
+            <a:ext cx="548640" cy="228600"/>
+          </a:xfrm>
+          <a:prstGeom prst="rect">
+            <a:avLst/>
+          </a:prstGeom>
+          <a:noFill/>
+          <a:ln/>
+        </p:spPr>
+        <p:txBody>
+          <a:bodyPr wrap="square" lIns="0" tIns="0" rIns="0" bIns="0" rtlCol="0" anchor="ctr"/>
+          <a:lstStyle/>
+          <a:p>
+            <a:pPr algn="r" indent="0" marL="0">
+              <a:buNone/>
+            </a:pPr>
+            <a:r>
+              <a:rPr lang="en-US" sz="900" dirty="0">
+                <a:solidFill>
+                  <a:srgbClr val="5B6180"/>
+                </a:solidFill>
+                <a:latin typeface="Calibri" pitchFamily="34" charset="0"/>
+                <a:ea typeface="Calibri" pitchFamily="34" charset="-122"/>
+                <a:cs typeface="Calibri" pitchFamily="34" charset="-120"/>
+              </a:rPr>
+              <a:t>27</a:t>
+            </a:r>
+            <a:endParaRPr lang="en-US" sz="900" dirty="0"/>
+          </a:p>
+        </p:txBody>
+      </p:sp>
+      <p:sp>
+        <p:nvSpPr>
+          <p:cNvPr id="6" name="Shape 4"/>
+          <p:cNvSpPr/>
+          <p:nvPr/>
+        </p:nvSpPr>
+        <p:spPr>
+          <a:xfrm>
+            <a:off x="548640" y="1161288"/>
+            <a:ext cx="329184" cy="329184"/>
+          </a:xfrm>
+          <a:prstGeom prst="ellipse">
+            <a:avLst/>
+          </a:prstGeom>
+          <a:solidFill>
+            <a:srgbClr val="2D39B9"/>
+          </a:solidFill>
+          <a:ln w="9525">
+            <a:solidFill>
+              <a:srgbClr val="2D39B9"/>
+            </a:solidFill>
+            <a:prstDash val="solid"/>
+          </a:ln>
+        </p:spPr>
+      </p:sp>
+      <p:sp>
+        <p:nvSpPr>
+          <p:cNvPr id="7" name="Text 5"/>
+          <p:cNvSpPr txBox="1"/>
+          <p:nvPr/>
+        </p:nvSpPr>
+        <p:spPr>
+          <a:xfrm>
+            <a:off x="548640" y="1161288"/>
+            <a:ext cx="329184" cy="329184"/>
+          </a:xfrm>
+          <a:prstGeom prst="rect">
+            <a:avLst/>
+          </a:prstGeom>
+          <a:noFill/>
+          <a:ln/>
+        </p:spPr>
+        <p:txBody>
+          <a:bodyPr wrap="square" lIns="0" tIns="0" rIns="0" bIns="0" rtlCol="0" anchor="ctr"/>
+          <a:lstStyle/>
+          <a:p>
+            <a:pPr algn="ctr" indent="0" marL="0">
+              <a:buNone/>
+            </a:pPr>
+            <a:r>
+              <a:rPr lang="en-US" sz="900" b="1" dirty="0">
+                <a:solidFill>
+                  <a:srgbClr val="FFFFFF"/>
+                </a:solidFill>
+                <a:latin typeface="Calibri" pitchFamily="34" charset="0"/>
+                <a:ea typeface="Calibri" pitchFamily="34" charset="-122"/>
+                <a:cs typeface="Calibri" pitchFamily="34" charset="-120"/>
+              </a:rPr>
+              <a:t>1–4</a:t>
+            </a:r>
+            <a:endParaRPr lang="en-US" sz="900" dirty="0"/>
+          </a:p>
+        </p:txBody>
+      </p:sp>
+      <p:sp>
+        <p:nvSpPr>
+          <p:cNvPr id="8" name="Shape 6"/>
+          <p:cNvSpPr/>
+          <p:nvPr/>
+        </p:nvSpPr>
+        <p:spPr>
+          <a:xfrm>
+            <a:off x="713232" y="1490472"/>
+            <a:ext cx="0" cy="173736"/>
+          </a:xfrm>
+          <a:prstGeom prst="line">
+            <a:avLst/>
+          </a:prstGeom>
+          <a:noFill/>
+          <a:ln w="12700">
+            <a:solidFill>
+              <a:srgbClr val="D9DCE8"/>
+            </a:solidFill>
+            <a:prstDash val="solid"/>
+          </a:ln>
+        </p:spPr>
+      </p:sp>
+      <p:sp>
+        <p:nvSpPr>
+          <p:cNvPr id="9" name="Text 7"/>
+          <p:cNvSpPr txBox="1"/>
+          <p:nvPr/>
+        </p:nvSpPr>
+        <p:spPr>
+          <a:xfrm>
+            <a:off x="1097280" y="1170432"/>
+            <a:ext cx="7498080" cy="365760"/>
+          </a:xfrm>
+          <a:prstGeom prst="rect">
+            <a:avLst/>
+          </a:prstGeom>
+          <a:noFill/>
+          <a:ln/>
+        </p:spPr>
+        <p:txBody>
+          <a:bodyPr wrap="square" lIns="0" tIns="0" rIns="0" bIns="0" rtlCol="0" anchor="t"/>
+          <a:lstStyle/>
+          <a:p>
+            <a:pPr indent="0" marL="0">
+              <a:buNone/>
+            </a:pPr>
+            <a:r>
+              <a:rPr lang="en-US" sz="1250" b="1" dirty="0">
+                <a:solidFill>
+                  <a:srgbClr val="1B1F3B"/>
+                </a:solidFill>
+                <a:latin typeface="Calibri" pitchFamily="34" charset="0"/>
+                <a:ea typeface="Calibri" pitchFamily="34" charset="-122"/>
+                <a:cs typeface="Calibri" pitchFamily="34" charset="-120"/>
+              </a:rPr>
+              <a:t>Fundação · Agenda e prazos · Calculadora sucessória · Documentos e minutas</a:t>
+            </a:r>
+            <a:endParaRPr lang="en-US" sz="1250" dirty="0"/>
+          </a:p>
+        </p:txBody>
+      </p:sp>
+      <p:pic>
+        <p:nvPicPr>
+          <p:cNvPr id="10" name="Image 0" descr="icons/circle-check-indigo.png">    </p:cNvPr>
+          <p:cNvPicPr>
+            <a:picLocks noChangeAspect="1"/>
+          </p:cNvPicPr>
+          <p:nvPr/>
+        </p:nvPicPr>
+        <p:blipFill>
+          <a:blip r:embed="rId1"/>
+          <a:stretch>
+            <a:fillRect/>
+          </a:stretch>
+        </p:blipFill>
+        <p:spPr>
+          <a:xfrm>
+            <a:off x="8321040" y="1207008"/>
+            <a:ext cx="237744" cy="237744"/>
+          </a:xfrm>
+          <a:prstGeom prst="rect">
+            <a:avLst/>
+          </a:prstGeom>
+        </p:spPr>
+      </p:pic>
+      <p:sp>
+        <p:nvSpPr>
+          <p:cNvPr id="11" name="Shape 8"/>
+          <p:cNvSpPr/>
+          <p:nvPr/>
+        </p:nvSpPr>
+        <p:spPr>
+          <a:xfrm>
+            <a:off x="548640" y="1664208"/>
+            <a:ext cx="329184" cy="329184"/>
+          </a:xfrm>
+          <a:prstGeom prst="ellipse">
+            <a:avLst/>
+          </a:prstGeom>
+          <a:solidFill>
+            <a:srgbClr val="2D39B9"/>
+          </a:solidFill>
+          <a:ln w="9525">
+            <a:solidFill>
+              <a:srgbClr val="2D39B9"/>
+            </a:solidFill>
+            <a:prstDash val="solid"/>
+          </a:ln>
+        </p:spPr>
+      </p:sp>
+      <p:sp>
+        <p:nvSpPr>
+          <p:cNvPr id="12" name="Text 9"/>
+          <p:cNvSpPr txBox="1"/>
+          <p:nvPr/>
+        </p:nvSpPr>
+        <p:spPr>
+          <a:xfrm>
+            <a:off x="548640" y="1664208"/>
+            <a:ext cx="329184" cy="329184"/>
+          </a:xfrm>
+          <a:prstGeom prst="rect">
+            <a:avLst/>
+          </a:prstGeom>
+          <a:noFill/>
+          <a:ln/>
+        </p:spPr>
+        <p:txBody>
+          <a:bodyPr wrap="square" lIns="0" tIns="0" rIns="0" bIns="0" rtlCol="0" anchor="ctr"/>
+          <a:lstStyle/>
+          <a:p>
+            <a:pPr algn="ctr" indent="0" marL="0">
+              <a:buNone/>
+            </a:pPr>
+            <a:r>
+              <a:rPr lang="en-US" sz="900" b="1" dirty="0">
+                <a:solidFill>
+                  <a:srgbClr val="FFFFFF"/>
+                </a:solidFill>
+                <a:latin typeface="Calibri" pitchFamily="34" charset="0"/>
+                <a:ea typeface="Calibri" pitchFamily="34" charset="-122"/>
+                <a:cs typeface="Calibri" pitchFamily="34" charset="-120"/>
+              </a:rPr>
+              <a:t>5–7</a:t>
+            </a:r>
+            <a:endParaRPr lang="en-US" sz="900" dirty="0"/>
+          </a:p>
+        </p:txBody>
+      </p:sp>
+      <p:sp>
+        <p:nvSpPr>
+          <p:cNvPr id="13" name="Shape 10"/>
+          <p:cNvSpPr/>
+          <p:nvPr/>
+        </p:nvSpPr>
+        <p:spPr>
+          <a:xfrm>
+            <a:off x="713232" y="1993392"/>
+            <a:ext cx="0" cy="173736"/>
+          </a:xfrm>
+          <a:prstGeom prst="line">
+            <a:avLst/>
+          </a:prstGeom>
+          <a:noFill/>
+          <a:ln w="12700">
+            <a:solidFill>
+              <a:srgbClr val="D9DCE8"/>
+            </a:solidFill>
+            <a:prstDash val="solid"/>
+          </a:ln>
+        </p:spPr>
+      </p:sp>
+      <p:sp>
+        <p:nvSpPr>
+          <p:cNvPr id="14" name="Text 11"/>
+          <p:cNvSpPr txBox="1"/>
+          <p:nvPr/>
+        </p:nvSpPr>
+        <p:spPr>
+          <a:xfrm>
+            <a:off x="1097280" y="1673352"/>
+            <a:ext cx="7498080" cy="365760"/>
+          </a:xfrm>
+          <a:prstGeom prst="rect">
+            <a:avLst/>
+          </a:prstGeom>
+          <a:noFill/>
+          <a:ln/>
+        </p:spPr>
+        <p:txBody>
+          <a:bodyPr wrap="square" lIns="0" tIns="0" rIns="0" bIns="0" rtlCol="0" anchor="t"/>
+          <a:lstStyle/>
+          <a:p>
+            <a:pPr indent="0" marL="0">
+              <a:buNone/>
+            </a:pPr>
+            <a:r>
+              <a:rPr lang="en-US" sz="1250" b="1" dirty="0">
+                <a:solidFill>
+                  <a:srgbClr val="1B1F3B"/>
+                </a:solidFill>
+                <a:latin typeface="Calibri" pitchFamily="34" charset="0"/>
+                <a:ea typeface="Calibri" pitchFamily="34" charset="-122"/>
+                <a:cs typeface="Calibri" pitchFamily="34" charset="-120"/>
+              </a:rPr>
+              <a:t>Relatórios · Produtividade (paleta, Kanban, modelos) · Segurança (PIN, cópias cifradas, privacidade)</a:t>
+            </a:r>
+            <a:endParaRPr lang="en-US" sz="1250" dirty="0"/>
+          </a:p>
+        </p:txBody>
+      </p:sp>
+      <p:pic>
+        <p:nvPicPr>
+          <p:cNvPr id="15" name="Image 1" descr="icons/circle-check-indigo.png">    </p:cNvPr>
+          <p:cNvPicPr>
+            <a:picLocks noChangeAspect="1"/>
+          </p:cNvPicPr>
+          <p:nvPr/>
+        </p:nvPicPr>
+        <p:blipFill>
+          <a:blip r:embed="rId2"/>
+          <a:stretch>
+            <a:fillRect/>
+          </a:stretch>
+        </p:blipFill>
+        <p:spPr>
+          <a:xfrm>
+            <a:off x="8321040" y="1709928"/>
+            <a:ext cx="237744" cy="237744"/>
+          </a:xfrm>
+          <a:prstGeom prst="rect">
+            <a:avLst/>
+          </a:prstGeom>
+        </p:spPr>
+      </p:pic>
+      <p:sp>
+        <p:nvSpPr>
+          <p:cNvPr id="16" name="Shape 12"/>
+          <p:cNvSpPr/>
+          <p:nvPr/>
+        </p:nvSpPr>
+        <p:spPr>
+          <a:xfrm>
+            <a:off x="548640" y="2167128"/>
+            <a:ext cx="329184" cy="329184"/>
+          </a:xfrm>
+          <a:prstGeom prst="ellipse">
+            <a:avLst/>
+          </a:prstGeom>
+          <a:solidFill>
+            <a:srgbClr val="2D39B9"/>
+          </a:solidFill>
+          <a:ln w="9525">
+            <a:solidFill>
+              <a:srgbClr val="2D39B9"/>
+            </a:solidFill>
+            <a:prstDash val="solid"/>
+          </a:ln>
+        </p:spPr>
+      </p:sp>
+      <p:sp>
+        <p:nvSpPr>
+          <p:cNvPr id="17" name="Text 13"/>
+          <p:cNvSpPr txBox="1"/>
+          <p:nvPr/>
+        </p:nvSpPr>
+        <p:spPr>
+          <a:xfrm>
+            <a:off x="548640" y="2167128"/>
+            <a:ext cx="329184" cy="329184"/>
+          </a:xfrm>
+          <a:prstGeom prst="rect">
+            <a:avLst/>
+          </a:prstGeom>
+          <a:noFill/>
+          <a:ln/>
+        </p:spPr>
+        <p:txBody>
+          <a:bodyPr wrap="square" lIns="0" tIns="0" rIns="0" bIns="0" rtlCol="0" anchor="ctr"/>
+          <a:lstStyle/>
+          <a:p>
+            <a:pPr algn="ctr" indent="0" marL="0">
+              <a:buNone/>
+            </a:pPr>
+            <a:r>
+              <a:rPr lang="en-US" sz="900" b="1" dirty="0">
+                <a:solidFill>
+                  <a:srgbClr val="FFFFFF"/>
+                </a:solidFill>
+                <a:latin typeface="Calibri" pitchFamily="34" charset="0"/>
+                <a:ea typeface="Calibri" pitchFamily="34" charset="-122"/>
+                <a:cs typeface="Calibri" pitchFamily="34" charset="-120"/>
+              </a:rPr>
+              <a:t>8–10</a:t>
+            </a:r>
+            <a:endParaRPr lang="en-US" sz="900" dirty="0"/>
+          </a:p>
+        </p:txBody>
+      </p:sp>
+      <p:sp>
+        <p:nvSpPr>
+          <p:cNvPr id="18" name="Shape 14"/>
+          <p:cNvSpPr/>
+          <p:nvPr/>
+        </p:nvSpPr>
+        <p:spPr>
+          <a:xfrm>
+            <a:off x="713232" y="2496312"/>
+            <a:ext cx="0" cy="173736"/>
+          </a:xfrm>
+          <a:prstGeom prst="line">
+            <a:avLst/>
+          </a:prstGeom>
+          <a:noFill/>
+          <a:ln w="12700">
+            <a:solidFill>
+              <a:srgbClr val="D9DCE8"/>
+            </a:solidFill>
+            <a:prstDash val="solid"/>
+          </a:ln>
+        </p:spPr>
+      </p:sp>
+      <p:sp>
+        <p:nvSpPr>
+          <p:cNvPr id="19" name="Text 15"/>
+          <p:cNvSpPr txBox="1"/>
+          <p:nvPr/>
+        </p:nvSpPr>
+        <p:spPr>
+          <a:xfrm>
+            <a:off x="1097280" y="2176272"/>
+            <a:ext cx="7498080" cy="365760"/>
+          </a:xfrm>
+          <a:prstGeom prst="rect">
+            <a:avLst/>
+          </a:prstGeom>
+          <a:noFill/>
+          <a:ln/>
+        </p:spPr>
+        <p:txBody>
+          <a:bodyPr wrap="square" lIns="0" tIns="0" rIns="0" bIns="0" rtlCol="0" anchor="t"/>
+          <a:lstStyle/>
+          <a:p>
+            <a:pPr indent="0" marL="0">
+              <a:buNone/>
+            </a:pPr>
+            <a:r>
+              <a:rPr lang="en-US" sz="1250" b="1" dirty="0">
+                <a:solidFill>
+                  <a:srgbClr val="1B1F3B"/>
+                </a:solidFill>
+                <a:latin typeface="Calibri" pitchFamily="34" charset="0"/>
+                <a:ea typeface="Calibri" pitchFamily="34" charset="-122"/>
+                <a:cs typeface="Calibri" pitchFamily="34" charset="-120"/>
+              </a:rPr>
+              <a:t>Internacional (Reg. 650/2012, CSE, PT/FR/EN) · Qualidade (WCAG 2.2 AA, E2E) · Entrega (manual, apresentação)</a:t>
+            </a:r>
+            <a:endParaRPr lang="en-US" sz="1250" dirty="0"/>
+          </a:p>
+        </p:txBody>
+      </p:sp>
+      <p:pic>
+        <p:nvPicPr>
+          <p:cNvPr id="20" name="Image 2" descr="icons/circle-check-indigo.png">    </p:cNvPr>
+          <p:cNvPicPr>
+            <a:picLocks noChangeAspect="1"/>
+          </p:cNvPicPr>
+          <p:nvPr/>
+        </p:nvPicPr>
+        <p:blipFill>
+          <a:blip r:embed="rId3"/>
+          <a:stretch>
+            <a:fillRect/>
+          </a:stretch>
+        </p:blipFill>
+        <p:spPr>
+          <a:xfrm>
+            <a:off x="8321040" y="2212848"/>
+            <a:ext cx="237744" cy="237744"/>
+          </a:xfrm>
+          <a:prstGeom prst="rect">
+            <a:avLst/>
+          </a:prstGeom>
+        </p:spPr>
+      </p:pic>
+      <p:sp>
+        <p:nvSpPr>
+          <p:cNvPr id="21" name="Shape 16"/>
+          <p:cNvSpPr/>
+          <p:nvPr/>
+        </p:nvSpPr>
+        <p:spPr>
+          <a:xfrm>
+            <a:off x="548640" y="2670048"/>
+            <a:ext cx="329184" cy="329184"/>
+          </a:xfrm>
+          <a:prstGeom prst="ellipse">
+            <a:avLst/>
+          </a:prstGeom>
+          <a:solidFill>
+            <a:srgbClr val="2D39B9"/>
+          </a:solidFill>
+          <a:ln w="9525">
+            <a:solidFill>
+              <a:srgbClr val="2D39B9"/>
+            </a:solidFill>
+            <a:prstDash val="solid"/>
+          </a:ln>
+        </p:spPr>
+      </p:sp>
+      <p:sp>
+        <p:nvSpPr>
+          <p:cNvPr id="22" name="Text 17"/>
+          <p:cNvSpPr txBox="1"/>
+          <p:nvPr/>
+        </p:nvSpPr>
+        <p:spPr>
+          <a:xfrm>
+            <a:off x="548640" y="2670048"/>
+            <a:ext cx="329184" cy="329184"/>
+          </a:xfrm>
+          <a:prstGeom prst="rect">
+            <a:avLst/>
+          </a:prstGeom>
+          <a:noFill/>
+          <a:ln/>
+        </p:spPr>
+        <p:txBody>
+          <a:bodyPr wrap="square" lIns="0" tIns="0" rIns="0" bIns="0" rtlCol="0" anchor="ctr"/>
+          <a:lstStyle/>
+          <a:p>
+            <a:pPr algn="ctr" indent="0" marL="0">
+              <a:buNone/>
+            </a:pPr>
+            <a:r>
+              <a:rPr lang="en-US" sz="900" b="1" dirty="0">
+                <a:solidFill>
+                  <a:srgbClr val="FFFFFF"/>
+                </a:solidFill>
+                <a:latin typeface="Calibri" pitchFamily="34" charset="0"/>
+                <a:ea typeface="Calibri" pitchFamily="34" charset="-122"/>
+                <a:cs typeface="Calibri" pitchFamily="34" charset="-120"/>
+              </a:rPr>
+              <a:t>11–13</a:t>
+            </a:r>
+            <a:endParaRPr lang="en-US" sz="900" dirty="0"/>
+          </a:p>
+        </p:txBody>
+      </p:sp>
+      <p:sp>
+        <p:nvSpPr>
+          <p:cNvPr id="23" name="Shape 18"/>
+          <p:cNvSpPr/>
+          <p:nvPr/>
+        </p:nvSpPr>
+        <p:spPr>
+          <a:xfrm>
+            <a:off x="713232" y="2999232"/>
+            <a:ext cx="0" cy="173736"/>
+          </a:xfrm>
+          <a:prstGeom prst="line">
+            <a:avLst/>
+          </a:prstGeom>
+          <a:noFill/>
+          <a:ln w="12700">
+            <a:solidFill>
+              <a:srgbClr val="D9DCE8"/>
+            </a:solidFill>
+            <a:prstDash val="solid"/>
+          </a:ln>
+        </p:spPr>
+      </p:sp>
+      <p:sp>
+        <p:nvSpPr>
+          <p:cNvPr id="24" name="Text 19"/>
+          <p:cNvSpPr txBox="1"/>
+          <p:nvPr/>
+        </p:nvSpPr>
+        <p:spPr>
+          <a:xfrm>
+            <a:off x="1097280" y="2679192"/>
+            <a:ext cx="7498080" cy="365760"/>
+          </a:xfrm>
+          <a:prstGeom prst="rect">
+            <a:avLst/>
+          </a:prstGeom>
+          <a:noFill/>
+          <a:ln/>
+        </p:spPr>
+        <p:txBody>
+          <a:bodyPr wrap="square" lIns="0" tIns="0" rIns="0" bIns="0" rtlCol="0" anchor="t"/>
+          <a:lstStyle/>
+          <a:p>
+            <a:pPr indent="0" marL="0">
+              <a:buNone/>
+            </a:pPr>
+            <a:r>
+              <a:rPr lang="en-US" sz="1250" b="1" dirty="0">
+                <a:solidFill>
+                  <a:srgbClr val="1B1F3B"/>
+                </a:solidFill>
+                <a:latin typeface="Calibri" pitchFamily="34" charset="0"/>
+                <a:ea typeface="Calibri" pitchFamily="34" charset="-122"/>
+                <a:cs typeface="Calibri" pitchFamily="34" charset="-120"/>
+              </a:rPr>
+              <a:t>Testes e invariantes · Motor jurídico (27 perguntas, 59 regras, 80 tarefas) · Calculadora de prazos</a:t>
+            </a:r>
+            <a:endParaRPr lang="en-US" sz="1250" dirty="0"/>
+          </a:p>
+        </p:txBody>
+      </p:sp>
+      <p:pic>
+        <p:nvPicPr>
+          <p:cNvPr id="25" name="Image 3" descr="icons/circle-check-indigo.png">    </p:cNvPr>
+          <p:cNvPicPr>
+            <a:picLocks noChangeAspect="1"/>
+          </p:cNvPicPr>
+          <p:nvPr/>
+        </p:nvPicPr>
+        <p:blipFill>
+          <a:blip r:embed="rId4"/>
+          <a:stretch>
+            <a:fillRect/>
+          </a:stretch>
+        </p:blipFill>
+        <p:spPr>
+          <a:xfrm>
+            <a:off x="8321040" y="2715768"/>
+            <a:ext cx="237744" cy="237744"/>
+          </a:xfrm>
+          <a:prstGeom prst="rect">
+            <a:avLst/>
+          </a:prstGeom>
+        </p:spPr>
+      </p:pic>
+      <p:sp>
+        <p:nvSpPr>
+          <p:cNvPr id="26" name="Shape 20"/>
+          <p:cNvSpPr/>
+          <p:nvPr/>
+        </p:nvSpPr>
+        <p:spPr>
+          <a:xfrm>
+            <a:off x="548640" y="3172968"/>
+            <a:ext cx="329184" cy="329184"/>
+          </a:xfrm>
+          <a:prstGeom prst="ellipse">
+            <a:avLst/>
+          </a:prstGeom>
+          <a:solidFill>
+            <a:srgbClr val="2D39B9"/>
+          </a:solidFill>
+          <a:ln w="9525">
+            <a:solidFill>
+              <a:srgbClr val="2D39B9"/>
+            </a:solidFill>
+            <a:prstDash val="solid"/>
+          </a:ln>
+        </p:spPr>
+      </p:sp>
+      <p:sp>
+        <p:nvSpPr>
+          <p:cNvPr id="27" name="Text 21"/>
+          <p:cNvSpPr txBox="1"/>
+          <p:nvPr/>
+        </p:nvSpPr>
+        <p:spPr>
+          <a:xfrm>
+            <a:off x="548640" y="3172968"/>
+            <a:ext cx="329184" cy="329184"/>
+          </a:xfrm>
+          <a:prstGeom prst="rect">
+            <a:avLst/>
+          </a:prstGeom>
+          <a:noFill/>
+          <a:ln/>
+        </p:spPr>
+        <p:txBody>
+          <a:bodyPr wrap="square" lIns="0" tIns="0" rIns="0" bIns="0" rtlCol="0" anchor="ctr"/>
+          <a:lstStyle/>
+          <a:p>
+            <a:pPr algn="ctr" indent="0" marL="0">
+              <a:buNone/>
+            </a:pPr>
+            <a:r>
+              <a:rPr lang="en-US" sz="900" b="1" dirty="0">
+                <a:solidFill>
+                  <a:srgbClr val="FFFFFF"/>
+                </a:solidFill>
+                <a:latin typeface="Calibri" pitchFamily="34" charset="0"/>
+                <a:ea typeface="Calibri" pitchFamily="34" charset="-122"/>
+                <a:cs typeface="Calibri" pitchFamily="34" charset="-120"/>
+              </a:rPr>
+              <a:t>14–16</a:t>
+            </a:r>
+            <a:endParaRPr lang="en-US" sz="900" dirty="0"/>
+          </a:p>
+        </p:txBody>
+      </p:sp>
+      <p:sp>
+        <p:nvSpPr>
+          <p:cNvPr id="28" name="Shape 22"/>
+          <p:cNvSpPr/>
+          <p:nvPr/>
+        </p:nvSpPr>
+        <p:spPr>
+          <a:xfrm>
+            <a:off x="713232" y="3502152"/>
+            <a:ext cx="0" cy="173736"/>
+          </a:xfrm>
+          <a:prstGeom prst="line">
+            <a:avLst/>
+          </a:prstGeom>
+          <a:noFill/>
+          <a:ln w="12700">
+            <a:solidFill>
+              <a:srgbClr val="D9DCE8"/>
+            </a:solidFill>
+            <a:prstDash val="solid"/>
+          </a:ln>
+        </p:spPr>
+      </p:sp>
+      <p:sp>
+        <p:nvSpPr>
+          <p:cNvPr id="29" name="Text 23"/>
+          <p:cNvSpPr txBox="1"/>
+          <p:nvPr/>
+        </p:nvSpPr>
+        <p:spPr>
+          <a:xfrm>
+            <a:off x="1097280" y="3182112"/>
+            <a:ext cx="7498080" cy="365760"/>
+          </a:xfrm>
+          <a:prstGeom prst="rect">
+            <a:avLst/>
+          </a:prstGeom>
+          <a:noFill/>
+          <a:ln/>
+        </p:spPr>
+        <p:txBody>
+          <a:bodyPr wrap="square" lIns="0" tIns="0" rIns="0" bIns="0" rtlCol="0" anchor="t"/>
+          <a:lstStyle/>
+          <a:p>
+            <a:pPr indent="0" marL="0">
+              <a:buNone/>
+            </a:pPr>
+            <a:r>
+              <a:rPr lang="en-US" sz="1250" b="1" dirty="0">
+                <a:solidFill>
+                  <a:srgbClr val="1B1F3B"/>
+                </a:solidFill>
+                <a:latin typeface="Calibri" pitchFamily="34" charset="0"/>
+                <a:ea typeface="Calibri" pitchFamily="34" charset="-122"/>
+                <a:cs typeface="Calibri" pitchFamily="34" charset="-120"/>
+              </a:rPr>
+              <a:t>Partilha entre colegas · Cópias automáticas e Recebidos · Anular e reciclagem</a:t>
+            </a:r>
+            <a:endParaRPr lang="en-US" sz="1250" dirty="0"/>
+          </a:p>
+        </p:txBody>
+      </p:sp>
+      <p:pic>
+        <p:nvPicPr>
+          <p:cNvPr id="30" name="Image 4" descr="icons/circle-check-indigo.png">    </p:cNvPr>
+          <p:cNvPicPr>
+            <a:picLocks noChangeAspect="1"/>
+          </p:cNvPicPr>
+          <p:nvPr/>
+        </p:nvPicPr>
+        <p:blipFill>
+          <a:blip r:embed="rId5"/>
+          <a:stretch>
+            <a:fillRect/>
+          </a:stretch>
+        </p:blipFill>
+        <p:spPr>
+          <a:xfrm>
+            <a:off x="8321040" y="3218688"/>
+            <a:ext cx="237744" cy="237744"/>
+          </a:xfrm>
+          <a:prstGeom prst="rect">
+            <a:avLst/>
+          </a:prstGeom>
+        </p:spPr>
+      </p:pic>
+      <p:sp>
+        <p:nvSpPr>
+          <p:cNvPr id="31" name="Shape 24"/>
+          <p:cNvSpPr/>
+          <p:nvPr/>
+        </p:nvSpPr>
+        <p:spPr>
+          <a:xfrm>
+            <a:off x="548640" y="3675888"/>
+            <a:ext cx="329184" cy="329184"/>
+          </a:xfrm>
+          <a:prstGeom prst="ellipse">
+            <a:avLst/>
+          </a:prstGeom>
+          <a:solidFill>
+            <a:srgbClr val="2D39B9"/>
+          </a:solidFill>
+          <a:ln w="9525">
+            <a:solidFill>
+              <a:srgbClr val="2D39B9"/>
+            </a:solidFill>
+            <a:prstDash val="solid"/>
+          </a:ln>
+        </p:spPr>
+      </p:sp>
+      <p:sp>
+        <p:nvSpPr>
+          <p:cNvPr id="32" name="Text 25"/>
+          <p:cNvSpPr txBox="1"/>
+          <p:nvPr/>
+        </p:nvSpPr>
+        <p:spPr>
+          <a:xfrm>
+            <a:off x="548640" y="3675888"/>
+            <a:ext cx="329184" cy="329184"/>
+          </a:xfrm>
+          <a:prstGeom prst="rect">
+            <a:avLst/>
+          </a:prstGeom>
+          <a:noFill/>
+          <a:ln/>
+        </p:spPr>
+        <p:txBody>
+          <a:bodyPr wrap="square" lIns="0" tIns="0" rIns="0" bIns="0" rtlCol="0" anchor="ctr"/>
+          <a:lstStyle/>
+          <a:p>
+            <a:pPr algn="ctr" indent="0" marL="0">
+              <a:buNone/>
+            </a:pPr>
+            <a:r>
+              <a:rPr lang="en-US" sz="900" b="1" dirty="0">
+                <a:solidFill>
+                  <a:srgbClr val="FFFFFF"/>
+                </a:solidFill>
+                <a:latin typeface="Calibri" pitchFamily="34" charset="0"/>
+                <a:ea typeface="Calibri" pitchFamily="34" charset="-122"/>
+                <a:cs typeface="Calibri" pitchFamily="34" charset="-120"/>
+              </a:rPr>
+              <a:t>17–19</a:t>
+            </a:r>
+            <a:endParaRPr lang="en-US" sz="900" dirty="0"/>
+          </a:p>
+        </p:txBody>
+      </p:sp>
+      <p:sp>
+        <p:nvSpPr>
+          <p:cNvPr id="33" name="Shape 26"/>
+          <p:cNvSpPr/>
+          <p:nvPr/>
+        </p:nvSpPr>
+        <p:spPr>
+          <a:xfrm>
+            <a:off x="713232" y="4005072"/>
+            <a:ext cx="0" cy="173736"/>
+          </a:xfrm>
+          <a:prstGeom prst="line">
+            <a:avLst/>
+          </a:prstGeom>
+          <a:noFill/>
+          <a:ln w="12700">
+            <a:solidFill>
+              <a:srgbClr val="D9DCE8"/>
+            </a:solidFill>
+            <a:prstDash val="solid"/>
+          </a:ln>
+        </p:spPr>
+      </p:sp>
+      <p:sp>
+        <p:nvSpPr>
+          <p:cNvPr id="34" name="Text 27"/>
+          <p:cNvSpPr txBox="1"/>
+          <p:nvPr/>
+        </p:nvSpPr>
+        <p:spPr>
+          <a:xfrm>
+            <a:off x="1097280" y="3685032"/>
+            <a:ext cx="7498080" cy="365760"/>
+          </a:xfrm>
+          <a:prstGeom prst="rect">
+            <a:avLst/>
+          </a:prstGeom>
+          <a:noFill/>
+          <a:ln/>
+        </p:spPr>
+        <p:txBody>
+          <a:bodyPr wrap="square" lIns="0" tIns="0" rIns="0" bIns="0" rtlCol="0" anchor="t"/>
+          <a:lstStyle/>
+          <a:p>
+            <a:pPr indent="0" marL="0">
+              <a:buNone/>
+            </a:pPr>
+            <a:r>
+              <a:rPr lang="en-US" sz="1250" b="1" dirty="0">
+                <a:solidFill>
+                  <a:srgbClr val="1B1F3B"/>
+                </a:solidFill>
+                <a:latin typeface="Calibri" pitchFamily="34" charset="0"/>
+                <a:ea typeface="Calibri" pitchFamily="34" charset="-122"/>
+                <a:cs typeface="Calibri" pitchFamily="34" charset="-120"/>
+              </a:rPr>
+              <a:t>Análise da equipa · Pesquisa e vistas guardadas · Documentos avançados</a:t>
+            </a:r>
+            <a:endParaRPr lang="en-US" sz="1250" dirty="0"/>
+          </a:p>
+        </p:txBody>
+      </p:sp>
+      <p:pic>
+        <p:nvPicPr>
+          <p:cNvPr id="35" name="Image 5" descr="icons/circle-check-indigo.png">    </p:cNvPr>
+          <p:cNvPicPr>
+            <a:picLocks noChangeAspect="1"/>
+          </p:cNvPicPr>
+          <p:nvPr/>
+        </p:nvPicPr>
+        <p:blipFill>
+          <a:blip r:embed="rId6"/>
+          <a:stretch>
+            <a:fillRect/>
+          </a:stretch>
+        </p:blipFill>
+        <p:spPr>
+          <a:xfrm>
+            <a:off x="8321040" y="3721608"/>
+            <a:ext cx="237744" cy="237744"/>
+          </a:xfrm>
+          <a:prstGeom prst="rect">
+            <a:avLst/>
+          </a:prstGeom>
+        </p:spPr>
+      </p:pic>
+      <p:sp>
+        <p:nvSpPr>
+          <p:cNvPr id="36" name="Shape 28"/>
+          <p:cNvSpPr/>
+          <p:nvPr/>
+        </p:nvSpPr>
+        <p:spPr>
+          <a:xfrm>
+            <a:off x="548640" y="4178808"/>
+            <a:ext cx="329184" cy="329184"/>
+          </a:xfrm>
+          <a:prstGeom prst="ellipse">
+            <a:avLst/>
+          </a:prstGeom>
+          <a:solidFill>
+            <a:srgbClr val="2D39B9"/>
+          </a:solidFill>
+          <a:ln w="9525">
+            <a:solidFill>
+              <a:srgbClr val="2D39B9"/>
+            </a:solidFill>
+            <a:prstDash val="solid"/>
+          </a:ln>
+        </p:spPr>
+      </p:sp>
+      <p:sp>
+        <p:nvSpPr>
+          <p:cNvPr id="37" name="Text 29"/>
+          <p:cNvSpPr txBox="1"/>
+          <p:nvPr/>
+        </p:nvSpPr>
+        <p:spPr>
+          <a:xfrm>
+            <a:off x="548640" y="4178808"/>
+            <a:ext cx="329184" cy="329184"/>
+          </a:xfrm>
+          <a:prstGeom prst="rect">
+            <a:avLst/>
+          </a:prstGeom>
+          <a:noFill/>
+          <a:ln/>
+        </p:spPr>
+        <p:txBody>
+          <a:bodyPr wrap="square" lIns="0" tIns="0" rIns="0" bIns="0" rtlCol="0" anchor="ctr"/>
+          <a:lstStyle/>
+          <a:p>
+            <a:pPr algn="ctr" indent="0" marL="0">
+              <a:buNone/>
+            </a:pPr>
+            <a:r>
+              <a:rPr lang="en-US" sz="900" b="1" dirty="0">
+                <a:solidFill>
+                  <a:srgbClr val="FFFFFF"/>
+                </a:solidFill>
+                <a:latin typeface="Calibri" pitchFamily="34" charset="0"/>
+                <a:ea typeface="Calibri" pitchFamily="34" charset="-122"/>
+                <a:cs typeface="Calibri" pitchFamily="34" charset="-120"/>
+              </a:rPr>
+              <a:t>20</a:t>
+            </a:r>
+            <a:endParaRPr lang="en-US" sz="900" dirty="0"/>
+          </a:p>
+        </p:txBody>
+      </p:sp>
+      <p:sp>
+        <p:nvSpPr>
+          <p:cNvPr id="38" name="Text 30"/>
+          <p:cNvSpPr txBox="1"/>
+          <p:nvPr/>
+        </p:nvSpPr>
+        <p:spPr>
+          <a:xfrm>
+            <a:off x="1097280" y="4187952"/>
+            <a:ext cx="7498080" cy="365760"/>
+          </a:xfrm>
+          <a:prstGeom prst="rect">
+            <a:avLst/>
+          </a:prstGeom>
+          <a:noFill/>
+          <a:ln/>
+        </p:spPr>
+        <p:txBody>
+          <a:bodyPr wrap="square" lIns="0" tIns="0" rIns="0" bIns="0" rtlCol="0" anchor="t"/>
+          <a:lstStyle/>
+          <a:p>
+            <a:pPr indent="0" marL="0">
+              <a:buNone/>
+            </a:pPr>
+            <a:r>
+              <a:rPr lang="en-US" sz="1250" b="1" dirty="0">
+                <a:solidFill>
+                  <a:srgbClr val="1B1F3B"/>
+                </a:solidFill>
+                <a:latin typeface="Calibri" pitchFamily="34" charset="0"/>
+                <a:ea typeface="Calibri" pitchFamily="34" charset="-122"/>
+                <a:cs typeface="Calibri" pitchFamily="34" charset="-120"/>
+              </a:rPr>
+              <a:t>Consolidação: auditoria de acessibilidade, 212 testes, manual e apresentação — versão 2.1</a:t>
+            </a:r>
+            <a:endParaRPr lang="en-US" sz="1250" dirty="0"/>
+          </a:p>
+        </p:txBody>
+      </p:sp>
+      <p:pic>
+        <p:nvPicPr>
+          <p:cNvPr id="39" name="Image 6" descr="icons/circle-check-indigo.png">    </p:cNvPr>
+          <p:cNvPicPr>
+            <a:picLocks noChangeAspect="1"/>
+          </p:cNvPicPr>
+          <p:nvPr/>
+        </p:nvPicPr>
+        <p:blipFill>
+          <a:blip r:embed="rId7"/>
+          <a:stretch>
+            <a:fillRect/>
+          </a:stretch>
+        </p:blipFill>
+        <p:spPr>
+          <a:xfrm>
+            <a:off x="8321040" y="4224528"/>
+            <a:ext cx="237744" cy="237744"/>
+          </a:xfrm>
+          <a:prstGeom prst="rect">
+            <a:avLst/>
+          </a:prstGeom>
+        </p:spPr>
+      </p:pic>
+    </p:spTree>
+  </p:cSld>
+  <p:clrMapOvr>
+    <a:masterClrMapping/>
+  </p:clrMapOvr>
+</p:sld>
+</file>
+
+<file path=ppt/slides/slide28.xml><?xml version="1.0" encoding="utf-8"?>
+<p:sld xmlns:a="http://schemas.openxmlformats.org/drawingml/2006/main" xmlns:r="http://schemas.openxmlformats.org/officeDocument/2006/relationships" xmlns:p="http://schemas.openxmlformats.org/presentationml/2006/main">
+  <p:cSld name="Slide 28">
+    <p:bg>
+      <p:bgPr>
+        <a:solidFill>
+          <a:srgbClr val="FFFFFF"/>
+        </a:solidFill>
+      </p:bgPr>
+    </p:bg>
+    <p:spTree>
+      <p:nvGrpSpPr>
+        <p:cNvPr id="1" name=""/>
+        <p:cNvGrpSpPr/>
+        <p:nvPr/>
+      </p:nvGrpSpPr>
+      <p:grpSpPr>
+        <a:xfrm>
+          <a:off x="0" y="0"/>
+          <a:ext cx="0" cy="0"/>
+          <a:chOff x="0" y="0"/>
+          <a:chExt cx="0" cy="0"/>
+        </a:xfrm>
+      </p:grpSpPr>
+      <p:sp>
+        <p:nvSpPr>
+          <p:cNvPr id="2" name="Text 0"/>
+          <p:cNvSpPr txBox="1"/>
+          <p:nvPr/>
+        </p:nvSpPr>
+        <p:spPr>
+          <a:xfrm>
+            <a:off x="457200" y="128016"/>
+            <a:ext cx="8229600" cy="228600"/>
+          </a:xfrm>
+          <a:prstGeom prst="rect">
+            <a:avLst/>
+          </a:prstGeom>
+          <a:noFill/>
+          <a:ln/>
+        </p:spPr>
+        <p:txBody>
+          <a:bodyPr wrap="square" lIns="0" tIns="0" rIns="0" bIns="0" rtlCol="0" anchor="ctr"/>
+          <a:lstStyle/>
+          <a:p>
+            <a:pPr indent="0" marL="0">
+              <a:buNone/>
+            </a:pPr>
+            <a:r>
+              <a:rPr lang="en-US" sz="1000" b="1" spc="200" kern="0" dirty="0">
+                <a:solidFill>
+                  <a:srgbClr val="2D39B9"/>
+                </a:solidFill>
+                <a:latin typeface="Calibri" pitchFamily="34" charset="0"/>
+                <a:ea typeface="Calibri" pitchFamily="34" charset="-122"/>
+                <a:cs typeface="Calibri" pitchFamily="34" charset="-120"/>
+              </a:rPr>
+              <a:t>COMO COMEÇAR</a:t>
+            </a:r>
+            <a:endParaRPr lang="en-US" sz="1000" dirty="0"/>
+          </a:p>
+        </p:txBody>
+      </p:sp>
+      <p:sp>
+        <p:nvSpPr>
+          <p:cNvPr id="3" name="Text 1"/>
+          <p:cNvSpPr txBox="1"/>
+          <p:nvPr/>
+        </p:nvSpPr>
+        <p:spPr>
+          <a:xfrm>
+            <a:off x="457200" y="347472"/>
+            <a:ext cx="8229600" cy="548640"/>
+          </a:xfrm>
+          <a:prstGeom prst="rect">
+            <a:avLst/>
+          </a:prstGeom>
+          <a:noFill/>
+          <a:ln/>
+        </p:spPr>
+        <p:txBody>
+          <a:bodyPr wrap="square" lIns="0" tIns="0" rIns="0" bIns="0" rtlCol="0" anchor="ctr"/>
+          <a:lstStyle/>
+          <a:p>
+            <a:pPr indent="0" marL="0">
+              <a:buNone/>
+            </a:pPr>
+            <a:r>
+              <a:rPr lang="en-US" sz="2800" b="1" dirty="0">
+                <a:solidFill>
+                  <a:srgbClr val="1B1F3B"/>
+                </a:solidFill>
+                <a:latin typeface="Cambria" pitchFamily="34" charset="0"/>
+                <a:ea typeface="Cambria" pitchFamily="34" charset="-122"/>
+                <a:cs typeface="Cambria" pitchFamily="34" charset="-120"/>
+              </a:rPr>
+              <a:t>Três passos e cinco minutos</a:t>
+            </a:r>
+            <a:endParaRPr lang="en-US" sz="2800" dirty="0"/>
+          </a:p>
+        </p:txBody>
+      </p:sp>
+      <p:sp>
+        <p:nvSpPr>
+          <p:cNvPr id="4" name="Text 2"/>
+          <p:cNvSpPr txBox="1"/>
+          <p:nvPr/>
+        </p:nvSpPr>
+        <p:spPr>
+          <a:xfrm>
+            <a:off x="457200" y="4773168"/>
+            <a:ext cx="3657600" cy="228600"/>
+          </a:xfrm>
+          <a:prstGeom prst="rect">
+            <a:avLst/>
+          </a:prstGeom>
+          <a:noFill/>
+          <a:ln/>
+        </p:spPr>
+        <p:txBody>
+          <a:bodyPr wrap="square" lIns="0" tIns="0" rIns="0" bIns="0" rtlCol="0" anchor="ctr"/>
+          <a:lstStyle/>
+          <a:p>
+            <a:pPr indent="0" marL="0">
+              <a:buNone/>
+            </a:pPr>
+            <a:r>
+              <a:rPr lang="en-US" sz="900" dirty="0">
+                <a:solidFill>
+                  <a:srgbClr val="5B6180"/>
+                </a:solidFill>
+                <a:latin typeface="Calibri" pitchFamily="34" charset="0"/>
+                <a:ea typeface="Calibri" pitchFamily="34" charset="-122"/>
+                <a:cs typeface="Calibri" pitchFamily="34" charset="-120"/>
+              </a:rPr>
+              <a:t>Balcão das Sucessões</a:t>
+            </a:r>
+            <a:endParaRPr lang="en-US" sz="900" dirty="0"/>
+          </a:p>
+        </p:txBody>
+      </p:sp>
+      <p:sp>
+        <p:nvSpPr>
+          <p:cNvPr id="5" name="Text 3"/>
+          <p:cNvSpPr txBox="1"/>
+          <p:nvPr/>
+        </p:nvSpPr>
+        <p:spPr>
+          <a:xfrm>
+            <a:off x="8138160" y="4773168"/>
+            <a:ext cx="548640" cy="228600"/>
+          </a:xfrm>
+          <a:prstGeom prst="rect">
+            <a:avLst/>
+          </a:prstGeom>
+          <a:noFill/>
+          <a:ln/>
+        </p:spPr>
+        <p:txBody>
+          <a:bodyPr wrap="square" lIns="0" tIns="0" rIns="0" bIns="0" rtlCol="0" anchor="ctr"/>
+          <a:lstStyle/>
+          <a:p>
+            <a:pPr algn="r" indent="0" marL="0">
+              <a:buNone/>
+            </a:pPr>
+            <a:r>
+              <a:rPr lang="en-US" sz="900" dirty="0">
+                <a:solidFill>
+                  <a:srgbClr val="5B6180"/>
+                </a:solidFill>
+                <a:latin typeface="Calibri" pitchFamily="34" charset="0"/>
+                <a:ea typeface="Calibri" pitchFamily="34" charset="-122"/>
+                <a:cs typeface="Calibri" pitchFamily="34" charset="-120"/>
+              </a:rPr>
+              <a:t>28</a:t>
+            </a:r>
+            <a:endParaRPr lang="en-US" sz="900" dirty="0"/>
+          </a:p>
+        </p:txBody>
+      </p:sp>
+      <p:sp>
+        <p:nvSpPr>
+          <p:cNvPr id="6" name="Shape 4"/>
+          <p:cNvSpPr/>
+          <p:nvPr/>
+        </p:nvSpPr>
+        <p:spPr>
+          <a:xfrm>
+            <a:off x="457200" y="1188720"/>
+            <a:ext cx="2651760" cy="2377440"/>
+          </a:xfrm>
+          <a:prstGeom prst="roundRect">
+            <a:avLst>
+              <a:gd name="adj" fmla="val 3077"/>
+            </a:avLst>
+          </a:prstGeom>
+          <a:solidFill>
+            <a:srgbClr val="F7F8FC"/>
+          </a:solidFill>
+          <a:ln w="9525">
+            <a:solidFill>
+              <a:srgbClr val="D9DCE8"/>
+            </a:solidFill>
+            <a:prstDash val="solid"/>
+          </a:ln>
+        </p:spPr>
+      </p:sp>
+      <p:sp>
+        <p:nvSpPr>
+          <p:cNvPr id="7" name="Shape 5"/>
+          <p:cNvSpPr/>
+          <p:nvPr/>
+        </p:nvSpPr>
+        <p:spPr>
+          <a:xfrm>
+            <a:off x="685800" y="1417320"/>
+            <a:ext cx="548640" cy="548640"/>
+          </a:xfrm>
+          <a:prstGeom prst="ellipse">
+            <a:avLst/>
+          </a:prstGeom>
+          <a:solidFill>
+            <a:srgbClr val="2D39B9"/>
+          </a:solidFill>
+          <a:ln w="12700">
+            <a:solidFill>
+              <a:srgbClr val="2D39B9"/>
+            </a:solidFill>
+            <a:prstDash val="solid"/>
+          </a:ln>
+        </p:spPr>
+      </p:sp>
+      <p:pic>
+        <p:nvPicPr>
+          <p:cNvPr id="8" name="Image 0" descr="icons/globe-white.png">    </p:cNvPr>
+          <p:cNvPicPr>
+            <a:picLocks noChangeAspect="1"/>
+          </p:cNvPicPr>
+          <p:nvPr/>
+        </p:nvPicPr>
+        <p:blipFill>
+          <a:blip r:embed="rId1"/>
+          <a:stretch>
+            <a:fillRect/>
+          </a:stretch>
+        </p:blipFill>
+        <p:spPr>
+          <a:xfrm>
+            <a:off x="817474" y="1548994"/>
+            <a:ext cx="285293" cy="285293"/>
+          </a:xfrm>
+          <a:prstGeom prst="rect">
+            <a:avLst/>
+          </a:prstGeom>
+        </p:spPr>
+      </p:pic>
+      <p:sp>
+        <p:nvSpPr>
+          <p:cNvPr id="9" name="Text 6"/>
+          <p:cNvSpPr txBox="1"/>
+          <p:nvPr/>
+        </p:nvSpPr>
+        <p:spPr>
+          <a:xfrm>
+            <a:off x="2468880" y="1325880"/>
+            <a:ext cx="457200" cy="548640"/>
+          </a:xfrm>
+          <a:prstGeom prst="rect">
+            <a:avLst/>
+          </a:prstGeom>
+          <a:noFill/>
+          <a:ln/>
+        </p:spPr>
+        <p:txBody>
+          <a:bodyPr wrap="square" lIns="0" tIns="0" rIns="0" bIns="0" rtlCol="0" anchor="ctr"/>
+          <a:lstStyle/>
+          <a:p>
+            <a:pPr algn="r" indent="0" marL="0">
+              <a:buNone/>
+            </a:pPr>
+            <a:r>
+              <a:rPr lang="en-US" sz="3000" b="1" dirty="0">
+                <a:solidFill>
+                  <a:srgbClr val="EEF0FB"/>
+                </a:solidFill>
+                <a:latin typeface="Cambria" pitchFamily="34" charset="0"/>
+                <a:ea typeface="Cambria" pitchFamily="34" charset="-122"/>
+                <a:cs typeface="Cambria" pitchFamily="34" charset="-120"/>
+              </a:rPr>
+              <a:t>1</a:t>
+            </a:r>
+            <a:endParaRPr lang="en-US" sz="3000" dirty="0"/>
+          </a:p>
+        </p:txBody>
+      </p:sp>
+      <p:sp>
+        <p:nvSpPr>
+          <p:cNvPr id="10" name="Text 7"/>
+          <p:cNvSpPr txBox="1"/>
+          <p:nvPr/>
+        </p:nvSpPr>
+        <p:spPr>
+          <a:xfrm>
+            <a:off x="685800" y="2103120"/>
+            <a:ext cx="2194560" cy="365760"/>
+          </a:xfrm>
+          <a:prstGeom prst="rect">
+            <a:avLst/>
+          </a:prstGeom>
+          <a:noFill/>
+          <a:ln/>
+        </p:spPr>
+        <p:txBody>
+          <a:bodyPr wrap="square" lIns="0" tIns="0" rIns="0" bIns="0" rtlCol="0" anchor="t"/>
+          <a:lstStyle/>
+          <a:p>
+            <a:pPr indent="0" marL="0">
+              <a:buNone/>
+            </a:pPr>
+            <a:r>
+              <a:rPr lang="en-US" sz="1600" b="1" dirty="0">
+                <a:solidFill>
+                  <a:srgbClr val="1B1F3B"/>
+                </a:solidFill>
+                <a:latin typeface="Calibri" pitchFamily="34" charset="0"/>
+                <a:ea typeface="Calibri" pitchFamily="34" charset="-122"/>
+                <a:cs typeface="Calibri" pitchFamily="34" charset="-120"/>
+              </a:rPr>
+              <a:t>Abrir</a:t>
+            </a:r>
+            <a:endParaRPr lang="en-US" sz="1600" dirty="0"/>
+          </a:p>
+        </p:txBody>
+      </p:sp>
+      <p:sp>
+        <p:nvSpPr>
+          <p:cNvPr id="11" name="Text 8"/>
+          <p:cNvSpPr txBox="1"/>
+          <p:nvPr/>
+        </p:nvSpPr>
+        <p:spPr>
+          <a:xfrm>
+            <a:off x="685800" y="2514600"/>
+            <a:ext cx="2194560" cy="1005840"/>
+          </a:xfrm>
+          <a:prstGeom prst="rect">
+            <a:avLst/>
+          </a:prstGeom>
+          <a:noFill/>
+          <a:ln/>
+        </p:spPr>
+        <p:txBody>
+          <a:bodyPr wrap="square" lIns="0" tIns="0" rIns="0" bIns="0" rtlCol="0" anchor="t"/>
+          <a:lstStyle/>
+          <a:p>
+            <a:pPr indent="0" marL="0">
+              <a:buNone/>
+            </a:pPr>
+            <a:r>
+              <a:rPr lang="en-US" sz="1100" dirty="0">
+                <a:solidFill>
+                  <a:srgbClr val="5B6180"/>
+                </a:solidFill>
+                <a:latin typeface="Calibri" pitchFamily="34" charset="0"/>
+                <a:ea typeface="Calibri" pitchFamily="34" charset="-122"/>
+                <a:cs typeface="Calibri" pitchFamily="34" charset="-120"/>
+              </a:rPr>
+              <a:t>Aceda a nelsonsous.github.io/balcao-sucessoes em qualquer navegador atual.</a:t>
+            </a:r>
+            <a:endParaRPr lang="en-US" sz="1100" dirty="0"/>
+          </a:p>
+        </p:txBody>
+      </p:sp>
+      <p:sp>
+        <p:nvSpPr>
+          <p:cNvPr id="12" name="Shape 9"/>
+          <p:cNvSpPr/>
+          <p:nvPr/>
+        </p:nvSpPr>
+        <p:spPr>
+          <a:xfrm>
+            <a:off x="3291840" y="1188720"/>
+            <a:ext cx="2651760" cy="2377440"/>
+          </a:xfrm>
+          <a:prstGeom prst="roundRect">
+            <a:avLst>
+              <a:gd name="adj" fmla="val 3077"/>
+            </a:avLst>
+          </a:prstGeom>
+          <a:solidFill>
+            <a:srgbClr val="F7F8FC"/>
+          </a:solidFill>
+          <a:ln w="9525">
+            <a:solidFill>
+              <a:srgbClr val="D9DCE8"/>
+            </a:solidFill>
+            <a:prstDash val="solid"/>
+          </a:ln>
+        </p:spPr>
+      </p:sp>
+      <p:sp>
+        <p:nvSpPr>
+          <p:cNvPr id="13" name="Shape 10"/>
+          <p:cNvSpPr/>
+          <p:nvPr/>
+        </p:nvSpPr>
+        <p:spPr>
+          <a:xfrm>
+            <a:off x="3520440" y="1417320"/>
+            <a:ext cx="548640" cy="548640"/>
+          </a:xfrm>
+          <a:prstGeom prst="ellipse">
+            <a:avLst/>
+          </a:prstGeom>
+          <a:solidFill>
+            <a:srgbClr val="2D39B9"/>
+          </a:solidFill>
+          <a:ln w="12700">
+            <a:solidFill>
+              <a:srgbClr val="2D39B9"/>
+            </a:solidFill>
+            <a:prstDash val="solid"/>
+          </a:ln>
+        </p:spPr>
+      </p:sp>
+      <p:pic>
+        <p:nvPicPr>
+          <p:cNvPr id="14" name="Image 1" descr="icons/download-white.png">    </p:cNvPr>
+          <p:cNvPicPr>
+            <a:picLocks noChangeAspect="1"/>
+          </p:cNvPicPr>
+          <p:nvPr/>
+        </p:nvPicPr>
+        <p:blipFill>
+          <a:blip r:embed="rId2"/>
+          <a:stretch>
+            <a:fillRect/>
+          </a:stretch>
+        </p:blipFill>
+        <p:spPr>
+          <a:xfrm>
+            <a:off x="3652114" y="1548994"/>
+            <a:ext cx="285293" cy="285293"/>
+          </a:xfrm>
+          <a:prstGeom prst="rect">
+            <a:avLst/>
+          </a:prstGeom>
+        </p:spPr>
+      </p:pic>
+      <p:sp>
+        <p:nvSpPr>
+          <p:cNvPr id="15" name="Text 11"/>
+          <p:cNvSpPr txBox="1"/>
+          <p:nvPr/>
+        </p:nvSpPr>
+        <p:spPr>
+          <a:xfrm>
+            <a:off x="5303520" y="1325880"/>
+            <a:ext cx="457200" cy="548640"/>
+          </a:xfrm>
+          <a:prstGeom prst="rect">
+            <a:avLst/>
+          </a:prstGeom>
+          <a:noFill/>
+          <a:ln/>
+        </p:spPr>
+        <p:txBody>
+          <a:bodyPr wrap="square" lIns="0" tIns="0" rIns="0" bIns="0" rtlCol="0" anchor="ctr"/>
+          <a:lstStyle/>
+          <a:p>
+            <a:pPr algn="r" indent="0" marL="0">
+              <a:buNone/>
+            </a:pPr>
+            <a:r>
+              <a:rPr lang="en-US" sz="3000" b="1" dirty="0">
+                <a:solidFill>
+                  <a:srgbClr val="EEF0FB"/>
+                </a:solidFill>
+                <a:latin typeface="Cambria" pitchFamily="34" charset="0"/>
+                <a:ea typeface="Cambria" pitchFamily="34" charset="-122"/>
+                <a:cs typeface="Cambria" pitchFamily="34" charset="-120"/>
+              </a:rPr>
+              <a:t>2</a:t>
+            </a:r>
+            <a:endParaRPr lang="en-US" sz="3000" dirty="0"/>
+          </a:p>
+        </p:txBody>
+      </p:sp>
+      <p:sp>
+        <p:nvSpPr>
+          <p:cNvPr id="16" name="Text 12"/>
+          <p:cNvSpPr txBox="1"/>
+          <p:nvPr/>
+        </p:nvSpPr>
+        <p:spPr>
+          <a:xfrm>
+            <a:off x="3520440" y="2103120"/>
+            <a:ext cx="2194560" cy="365760"/>
+          </a:xfrm>
+          <a:prstGeom prst="rect">
+            <a:avLst/>
+          </a:prstGeom>
+          <a:noFill/>
+          <a:ln/>
+        </p:spPr>
+        <p:txBody>
+          <a:bodyPr wrap="square" lIns="0" tIns="0" rIns="0" bIns="0" rtlCol="0" anchor="t"/>
+          <a:lstStyle/>
+          <a:p>
+            <a:pPr indent="0" marL="0">
+              <a:buNone/>
+            </a:pPr>
+            <a:r>
+              <a:rPr lang="en-US" sz="1600" b="1" dirty="0">
+                <a:solidFill>
+                  <a:srgbClr val="1B1F3B"/>
+                </a:solidFill>
+                <a:latin typeface="Calibri" pitchFamily="34" charset="0"/>
+                <a:ea typeface="Calibri" pitchFamily="34" charset="-122"/>
+                <a:cs typeface="Calibri" pitchFamily="34" charset="-120"/>
+              </a:rPr>
+              <a:t>Instalar</a:t>
+            </a:r>
+            <a:endParaRPr lang="en-US" sz="1600" dirty="0"/>
+          </a:p>
+        </p:txBody>
+      </p:sp>
+      <p:sp>
+        <p:nvSpPr>
+          <p:cNvPr id="17" name="Text 13"/>
+          <p:cNvSpPr txBox="1"/>
+          <p:nvPr/>
+        </p:nvSpPr>
+        <p:spPr>
+          <a:xfrm>
+            <a:off x="3520440" y="2514600"/>
+            <a:ext cx="2194560" cy="1005840"/>
+          </a:xfrm>
+          <a:prstGeom prst="rect">
+            <a:avLst/>
+          </a:prstGeom>
+          <a:noFill/>
+          <a:ln/>
+        </p:spPr>
+        <p:txBody>
+          <a:bodyPr wrap="square" lIns="0" tIns="0" rIns="0" bIns="0" rtlCol="0" anchor="t"/>
+          <a:lstStyle/>
+          <a:p>
+            <a:pPr indent="0" marL="0">
+              <a:buNone/>
+            </a:pPr>
+            <a:r>
+              <a:rPr lang="en-US" sz="1100" dirty="0">
+                <a:solidFill>
+                  <a:srgbClr val="5B6180"/>
+                </a:solidFill>
+                <a:latin typeface="Calibri" pitchFamily="34" charset="0"/>
+                <a:ea typeface="Calibri" pitchFamily="34" charset="-122"/>
+                <a:cs typeface="Calibri" pitchFamily="34" charset="-120"/>
+              </a:rPr>
+              <a:t>Clique em «Instalar» (computador/Android) ou, no iPhone/iPad, menu ≡ ou Partilhar → Adicionar ao ecrã principal.</a:t>
+            </a:r>
+            <a:endParaRPr lang="en-US" sz="1100" dirty="0"/>
+          </a:p>
+        </p:txBody>
+      </p:sp>
+      <p:sp>
+        <p:nvSpPr>
+          <p:cNvPr id="18" name="Shape 14"/>
+          <p:cNvSpPr/>
+          <p:nvPr/>
+        </p:nvSpPr>
+        <p:spPr>
+          <a:xfrm>
+            <a:off x="6126480" y="1188720"/>
+            <a:ext cx="2651760" cy="2377440"/>
+          </a:xfrm>
+          <a:prstGeom prst="roundRect">
+            <a:avLst>
+              <a:gd name="adj" fmla="val 3077"/>
+            </a:avLst>
+          </a:prstGeom>
+          <a:solidFill>
+            <a:srgbClr val="F7F8FC"/>
+          </a:solidFill>
+          <a:ln w="9525">
+            <a:solidFill>
+              <a:srgbClr val="D9DCE8"/>
+            </a:solidFill>
+            <a:prstDash val="solid"/>
+          </a:ln>
+        </p:spPr>
+      </p:sp>
+      <p:sp>
+        <p:nvSpPr>
+          <p:cNvPr id="19" name="Shape 15"/>
+          <p:cNvSpPr/>
+          <p:nvPr/>
+        </p:nvSpPr>
+        <p:spPr>
+          <a:xfrm>
+            <a:off x="6355080" y="1417320"/>
+            <a:ext cx="548640" cy="548640"/>
+          </a:xfrm>
+          <a:prstGeom prst="ellipse">
+            <a:avLst/>
+          </a:prstGeom>
+          <a:solidFill>
+            <a:srgbClr val="2D39B9"/>
+          </a:solidFill>
+          <a:ln w="12700">
+            <a:solidFill>
+              <a:srgbClr val="2D39B9"/>
+            </a:solidFill>
+            <a:prstDash val="solid"/>
+          </a:ln>
+        </p:spPr>
+      </p:sp>
+      <p:pic>
+        <p:nvPicPr>
+          <p:cNvPr id="20" name="Image 2" descr="icons/sparkles-white.png">    </p:cNvPr>
+          <p:cNvPicPr>
+            <a:picLocks noChangeAspect="1"/>
+          </p:cNvPicPr>
+          <p:nvPr/>
+        </p:nvPicPr>
+        <p:blipFill>
+          <a:blip r:embed="rId3"/>
+          <a:stretch>
+            <a:fillRect/>
+          </a:stretch>
+        </p:blipFill>
+        <p:spPr>
+          <a:xfrm>
+            <a:off x="6486754" y="1548994"/>
+            <a:ext cx="285293" cy="285293"/>
+          </a:xfrm>
+          <a:prstGeom prst="rect">
+            <a:avLst/>
+          </a:prstGeom>
+        </p:spPr>
+      </p:pic>
+      <p:sp>
+        <p:nvSpPr>
+          <p:cNvPr id="21" name="Text 16"/>
+          <p:cNvSpPr txBox="1"/>
+          <p:nvPr/>
+        </p:nvSpPr>
+        <p:spPr>
+          <a:xfrm>
+            <a:off x="8138160" y="1325880"/>
+            <a:ext cx="457200" cy="548640"/>
+          </a:xfrm>
+          <a:prstGeom prst="rect">
+            <a:avLst/>
+          </a:prstGeom>
+          <a:noFill/>
+          <a:ln/>
+        </p:spPr>
+        <p:txBody>
+          <a:bodyPr wrap="square" lIns="0" tIns="0" rIns="0" bIns="0" rtlCol="0" anchor="ctr"/>
+          <a:lstStyle/>
+          <a:p>
+            <a:pPr algn="r" indent="0" marL="0">
+              <a:buNone/>
+            </a:pPr>
+            <a:r>
+              <a:rPr lang="en-US" sz="3000" b="1" dirty="0">
+                <a:solidFill>
+                  <a:srgbClr val="EEF0FB"/>
+                </a:solidFill>
+                <a:latin typeface="Cambria" pitchFamily="34" charset="0"/>
+                <a:ea typeface="Cambria" pitchFamily="34" charset="-122"/>
+                <a:cs typeface="Cambria" pitchFamily="34" charset="-120"/>
+              </a:rPr>
+              <a:t>3</a:t>
+            </a:r>
+            <a:endParaRPr lang="en-US" sz="3000" dirty="0"/>
+          </a:p>
+        </p:txBody>
+      </p:sp>
+      <p:sp>
+        <p:nvSpPr>
+          <p:cNvPr id="22" name="Text 17"/>
+          <p:cNvSpPr txBox="1"/>
+          <p:nvPr/>
+        </p:nvSpPr>
+        <p:spPr>
+          <a:xfrm>
+            <a:off x="6355080" y="2103120"/>
+            <a:ext cx="2194560" cy="365760"/>
+          </a:xfrm>
+          <a:prstGeom prst="rect">
+            <a:avLst/>
+          </a:prstGeom>
+          <a:noFill/>
+          <a:ln/>
+        </p:spPr>
+        <p:txBody>
+          <a:bodyPr wrap="square" lIns="0" tIns="0" rIns="0" bIns="0" rtlCol="0" anchor="t"/>
+          <a:lstStyle/>
+          <a:p>
+            <a:pPr indent="0" marL="0">
+              <a:buNone/>
+            </a:pPr>
+            <a:r>
+              <a:rPr lang="en-US" sz="1600" b="1" dirty="0">
+                <a:solidFill>
+                  <a:srgbClr val="1B1F3B"/>
+                </a:solidFill>
+                <a:latin typeface="Calibri" pitchFamily="34" charset="0"/>
+                <a:ea typeface="Calibri" pitchFamily="34" charset="-122"/>
+                <a:cs typeface="Calibri" pitchFamily="34" charset="-120"/>
+              </a:rPr>
+              <a:t>Explorar</a:t>
+            </a:r>
+            <a:endParaRPr lang="en-US" sz="1600" dirty="0"/>
+          </a:p>
+        </p:txBody>
+      </p:sp>
+      <p:sp>
+        <p:nvSpPr>
+          <p:cNvPr id="23" name="Text 18"/>
+          <p:cNvSpPr txBox="1"/>
+          <p:nvPr/>
+        </p:nvSpPr>
+        <p:spPr>
+          <a:xfrm>
+            <a:off x="6355080" y="2514600"/>
+            <a:ext cx="2194560" cy="1005840"/>
+          </a:xfrm>
+          <a:prstGeom prst="rect">
+            <a:avLst/>
+          </a:prstGeom>
+          <a:noFill/>
+          <a:ln/>
+        </p:spPr>
+        <p:txBody>
+          <a:bodyPr wrap="square" lIns="0" tIns="0" rIns="0" bIns="0" rtlCol="0" anchor="t"/>
+          <a:lstStyle/>
+          <a:p>
+            <a:pPr indent="0" marL="0">
+              <a:buNone/>
+            </a:pPr>
+            <a:r>
+              <a:rPr lang="en-US" sz="1100" dirty="0">
+                <a:solidFill>
+                  <a:srgbClr val="5B6180"/>
+                </a:solidFill>
+                <a:latin typeface="Calibri" pitchFamily="34" charset="0"/>
+                <a:ea typeface="Calibri" pitchFamily="34" charset="-122"/>
+                <a:cs typeface="Calibri" pitchFamily="34" charset="-120"/>
+              </a:rPr>
+              <a:t>Escolha «Explorar com dados fictícios» e percorra um dossier de demonstração; remova-os quando quiser.</a:t>
+            </a:r>
+            <a:endParaRPr lang="en-US" sz="1100" dirty="0"/>
+          </a:p>
+        </p:txBody>
+      </p:sp>
+      <p:sp>
+        <p:nvSpPr>
+          <p:cNvPr id="24" name="Shape 19"/>
+          <p:cNvSpPr/>
+          <p:nvPr/>
+        </p:nvSpPr>
+        <p:spPr>
+          <a:xfrm>
+            <a:off x="457200" y="3794760"/>
+            <a:ext cx="8229600" cy="685800"/>
+          </a:xfrm>
+          <a:prstGeom prst="roundRect">
+            <a:avLst>
+              <a:gd name="adj" fmla="val 10667"/>
+            </a:avLst>
+          </a:prstGeom>
+          <a:solidFill>
+            <a:srgbClr val="EEF0FB"/>
+          </a:solidFill>
+          <a:ln w="9525">
+            <a:solidFill>
+              <a:srgbClr val="EEF0FB"/>
+            </a:solidFill>
+            <a:prstDash val="solid"/>
+          </a:ln>
+        </p:spPr>
+      </p:sp>
+      <p:sp>
+        <p:nvSpPr>
+          <p:cNvPr id="25" name="Shape 20"/>
+          <p:cNvSpPr/>
+          <p:nvPr/>
+        </p:nvSpPr>
+        <p:spPr>
+          <a:xfrm>
+            <a:off x="640080" y="3904488"/>
+            <a:ext cx="457200" cy="457200"/>
+          </a:xfrm>
+          <a:prstGeom prst="ellipse">
+            <a:avLst/>
+          </a:prstGeom>
+          <a:solidFill>
+            <a:srgbClr val="2D39B9"/>
+          </a:solidFill>
+          <a:ln w="12700">
+            <a:solidFill>
+              <a:srgbClr val="2D39B9"/>
+            </a:solidFill>
+            <a:prstDash val="solid"/>
+          </a:ln>
+        </p:spPr>
+      </p:sp>
+      <p:pic>
+        <p:nvPicPr>
+          <p:cNvPr id="26" name="Image 3" descr="icons/book-open-white.png">    </p:cNvPr>
+          <p:cNvPicPr>
+            <a:picLocks noChangeAspect="1"/>
+          </p:cNvPicPr>
+          <p:nvPr/>
+        </p:nvPicPr>
+        <p:blipFill>
+          <a:blip r:embed="rId4"/>
+          <a:stretch>
+            <a:fillRect/>
+          </a:stretch>
+        </p:blipFill>
+        <p:spPr>
+          <a:xfrm>
+            <a:off x="749808" y="4014216"/>
+            <a:ext cx="237744" cy="237744"/>
+          </a:xfrm>
+          <a:prstGeom prst="rect">
+            <a:avLst/>
+          </a:prstGeom>
+        </p:spPr>
+      </p:pic>
+      <p:sp>
+        <p:nvSpPr>
+          <p:cNvPr id="27" name="Text 21"/>
+          <p:cNvSpPr txBox="1"/>
+          <p:nvPr/>
+        </p:nvSpPr>
+        <p:spPr>
+          <a:xfrm>
+            <a:off x="1234440" y="3931920"/>
+            <a:ext cx="7315200" cy="502920"/>
+          </a:xfrm>
+          <a:prstGeom prst="rect">
+            <a:avLst/>
+          </a:prstGeom>
+          <a:noFill/>
+          <a:ln/>
+        </p:spPr>
+        <p:txBody>
+          <a:bodyPr wrap="square" lIns="0" tIns="0" rIns="0" bIns="0" rtlCol="0" anchor="t"/>
+          <a:lstStyle/>
+          <a:p>
+            <a:pPr indent="0" marL="0">
+              <a:buNone/>
+            </a:pPr>
+            <a:r>
+              <a:rPr lang="en-US" sz="1100" dirty="0">
+                <a:solidFill>
+                  <a:srgbClr val="1B1F3B"/>
+                </a:solidFill>
+                <a:latin typeface="Calibri" pitchFamily="34" charset="0"/>
+                <a:ea typeface="Calibri" pitchFamily="34" charset="-122"/>
+                <a:cs typeface="Calibri" pitchFamily="34" charset="-120"/>
+              </a:rPr>
+              <a:t>Manual do utilizador (Word e PDF, 27 capítulos e 7 anexos) e resumo executivo — na pasta docs/ do projeto: github.com/nelsonsous/balcao-sucessoes.</a:t>
+            </a:r>
+            <a:endParaRPr lang="en-US" sz="1100" dirty="0"/>
+          </a:p>
+        </p:txBody>
+      </p:sp>
+    </p:spTree>
+  </p:cSld>
+  <p:clrMapOvr>
+    <a:masterClrMapping/>
+  </p:clrMapOvr>
+</p:sld>
+</file>
+
+<file path=ppt/slides/slide29.xml><?xml version="1.0" encoding="utf-8"?>
+<p:sld xmlns:a="http://schemas.openxmlformats.org/drawingml/2006/main" xmlns:r="http://schemas.openxmlformats.org/officeDocument/2006/relationships" xmlns:p="http://schemas.openxmlformats.org/presentationml/2006/main">
+  <p:cSld name="Slide 29">
     <p:bg>
       <p:bgPr>
         <a:solidFill>
@@ -13359,7 +15796,7 @@
                 <a:ea typeface="Calibri" pitchFamily="34" charset="-122"/>
                 <a:cs typeface="Calibri" pitchFamily="34" charset="-120"/>
               </a:rPr>
-              <a:t>Um questionário de 24 perguntas descreve a sucessão. Não há checklists genéricas: cada dossier tem só as tarefas que lhe dizem respeito.</a:t>
+              <a:t>Um questionário de 27 perguntas descreve a sucessão. Não há checklists genéricas: cada dossier tem só as tarefas que lhe dizem respeito.</a:t>
             </a:r>
             <a:endParaRPr lang="en-US" sz="1100" dirty="0"/>
           </a:p>
@@ -13513,7 +15950,7 @@
                 <a:ea typeface="Calibri" pitchFamily="34" charset="-122"/>
                 <a:cs typeface="Calibri" pitchFamily="34" charset="-120"/>
               </a:rPr>
-              <a:t>Pergunta → condição → tarefa → semáforo. 55 regras geram até 72 tarefas com orientações, documentos, referências legais e prazos.</a:t>
+              <a:t>Pergunta → condição → tarefa → semáforo. 59 regras geram até 80 tarefas com orientações, documentos, referências legais e prazos.</a:t>
             </a:r>
             <a:endParaRPr lang="en-US" sz="1100" dirty="0"/>
           </a:p>
@@ -14124,7 +16561,7 @@
                 <a:ea typeface="Cambria" pitchFamily="34" charset="-122"/>
                 <a:cs typeface="Cambria" pitchFamily="34" charset="-120"/>
               </a:rPr>
-              <a:t>24</a:t>
+              <a:t>27</a:t>
             </a:r>
             <a:endParaRPr lang="en-US" sz="3200" dirty="0"/>
           </a:p>
@@ -14341,7 +16778,7 @@
                 <a:ea typeface="Cambria" pitchFamily="34" charset="-122"/>
                 <a:cs typeface="Cambria" pitchFamily="34" charset="-120"/>
               </a:rPr>
-              <a:t>55</a:t>
+              <a:t>59</a:t>
             </a:r>
             <a:endParaRPr lang="en-US" sz="3200" dirty="0"/>
           </a:p>
@@ -14558,7 +16995,7 @@
                 <a:ea typeface="Cambria" pitchFamily="34" charset="-122"/>
                 <a:cs typeface="Cambria" pitchFamily="34" charset="-120"/>
               </a:rPr>
-              <a:t>72</a:t>
+              <a:t>80</a:t>
             </a:r>
             <a:endParaRPr lang="en-US" sz="3200" dirty="0"/>
           </a:p>
